--- a/malek_and_angelo/malek/Malek_T2D_CNN_Presentation.pptx
+++ b/malek_and_angelo/malek/Malek_T2D_CNN_Presentation.pptx
@@ -13,6 +13,7 @@
     <p:sldId id="261" r:id="rId12"/>
     <p:sldId id="262" r:id="rId13"/>
     <p:sldId id="263" r:id="rId14"/>
+    <p:sldId id="264" r:id="rId15"/>
   </p:sldIdLst>
   <p:sldSz cx="12191695" cy="6858000" type="screen4x3"/>
   <p:notesSz cx="6858000" cy="9144000"/>
@@ -3827,6 +3828,562 @@
               </a:defRPr>
             </a:pPr>
             <a:r>
+              <a:t>Decision Walkthrough: How Model Classifies T2D vs. Non-T2D</a:t>
+            </a:r>
+          </a:p>
+        </p:txBody>
+      </p:sp>
+      <p:sp>
+        <p:nvSpPr>
+          <p:cNvPr id="5" name="Rounded Rectangle 4"/>
+          <p:cNvSpPr/>
+          <p:nvPr/>
+        </p:nvSpPr>
+        <p:spPr>
+          <a:xfrm>
+            <a:off x="731520" y="1463040"/>
+            <a:ext cx="5120640" cy="3383280"/>
+          </a:xfrm>
+          <a:prstGeom prst="roundRect">
+            <a:avLst/>
+          </a:prstGeom>
+          <a:solidFill>
+            <a:srgbClr val="1E293B"/>
+          </a:solidFill>
+          <a:ln w="25400">
+            <a:solidFill>
+              <a:srgbClr val="10B981"/>
+            </a:solidFill>
+          </a:ln>
+        </p:spPr>
+        <p:style>
+          <a:lnRef idx="1">
+            <a:schemeClr val="accent1"/>
+          </a:lnRef>
+          <a:fillRef idx="3">
+            <a:schemeClr val="accent1"/>
+          </a:fillRef>
+          <a:effectRef idx="2">
+            <a:schemeClr val="accent1"/>
+          </a:effectRef>
+          <a:fontRef idx="minor">
+            <a:schemeClr val="lt1"/>
+          </a:fontRef>
+        </p:style>
+        <p:txBody>
+          <a:bodyPr rtlCol="0" anchor="ctr" wrap="square"/>
+          <a:lstStyle/>
+          <a:p>
+            <a:pPr algn="ctr">
+              <a:spcAft>
+                <a:spcPts val="800"/>
+              </a:spcAft>
+              <a:defRPr sz="1400" b="1">
+                <a:solidFill>
+                  <a:srgbClr val="34D399"/>
+                </a:solidFill>
+              </a:defRPr>
+            </a:pPr>
+            <a:r>
+              <a:t>NON-DIABETIC PROFILE (Predicted Score &lt; 0.50)</a:t>
+            </a:r>
+          </a:p>
+          <a:p>
+            <a:pPr>
+              <a:spcAft>
+                <a:spcPts val="400"/>
+              </a:spcAft>
+            </a:pPr>
+            <a:r>
+              <a:rPr b="1" sz="1100">
+                <a:solidFill>
+                  <a:srgbClr val="34D399"/>
+                </a:solidFill>
+              </a:rPr>
+              <a:t>✓ Narrow Heart Silhouette: </a:t>
+            </a:r>
+            <a:r>
+              <a:rPr sz="1050">
+                <a:solidFill>
+                  <a:srgbClr val="FFFFFF"/>
+                </a:solidFill>
+              </a:rPr>
+              <a:t>Heart width is &lt; 50% of inner thoracic cage diameter (Normal CTR).</a:t>
+            </a:r>
+          </a:p>
+          <a:p>
+            <a:pPr>
+              <a:spcAft>
+                <a:spcPts val="400"/>
+              </a:spcAft>
+            </a:pPr>
+            <a:r>
+              <a:rPr b="1" sz="1100">
+                <a:solidFill>
+                  <a:srgbClr val="34D399"/>
+                </a:solidFill>
+              </a:rPr>
+              <a:t>✓ Crisp Anatomical Boundaries: </a:t>
+            </a:r>
+            <a:r>
+              <a:rPr sz="1050">
+                <a:solidFill>
+                  <a:srgbClr val="FFFFFF"/>
+                </a:solidFill>
+              </a:rPr>
+              <a:t>Sharp cardiac apex and clear sharp cardiophrenic costal angles.</a:t>
+            </a:r>
+          </a:p>
+          <a:p>
+            <a:pPr>
+              <a:spcAft>
+                <a:spcPts val="400"/>
+              </a:spcAft>
+            </a:pPr>
+            <a:r>
+              <a:rPr b="1" sz="1100">
+                <a:solidFill>
+                  <a:srgbClr val="34D399"/>
+                </a:solidFill>
+              </a:rPr>
+              <a:t>✓ No Mediastinal Expansion: </a:t>
+            </a:r>
+            <a:r>
+              <a:rPr sz="1050">
+                <a:solidFill>
+                  <a:srgbClr val="FFFFFF"/>
+                </a:solidFill>
+              </a:rPr>
+              <a:t>Slender superior mediastinum without dense ectopic visceral fat pads.</a:t>
+            </a:r>
+          </a:p>
+          <a:p>
+            <a:pPr>
+              <a:spcAft>
+                <a:spcPts val="400"/>
+              </a:spcAft>
+            </a:pPr>
+            <a:r>
+              <a:rPr b="1" sz="1100">
+                <a:solidFill>
+                  <a:srgbClr val="34D399"/>
+                </a:solidFill>
+              </a:rPr>
+              <a:t>✓ Thin Lateral Soft Tissue: </a:t>
+            </a:r>
+            <a:r>
+              <a:rPr sz="1050">
+                <a:solidFill>
+                  <a:srgbClr val="FFFFFF"/>
+                </a:solidFill>
+              </a:rPr>
+              <a:t>Minimal subcutaneous thoracic fat fold outside the rib cage.</a:t>
+            </a:r>
+          </a:p>
+          <a:p>
+            <a:pPr>
+              <a:spcAft>
+                <a:spcPts val="400"/>
+              </a:spcAft>
+            </a:pPr>
+            <a:r>
+              <a:rPr b="1" sz="1100">
+                <a:solidFill>
+                  <a:srgbClr val="34D399"/>
+                </a:solidFill>
+              </a:rPr>
+              <a:t>✓ Model Output: </a:t>
+            </a:r>
+            <a:r>
+              <a:rPr sz="1050">
+                <a:solidFill>
+                  <a:srgbClr val="FFFFFF"/>
+                </a:solidFill>
+              </a:rPr>
+              <a:t>Feature filters output negative or small activations -&gt; P(T2D) &lt; 0.50 -&gt; CLASS 0 (NO T2D).</a:t>
+            </a:r>
+          </a:p>
+        </p:txBody>
+      </p:sp>
+      <p:sp>
+        <p:nvSpPr>
+          <p:cNvPr id="6" name="Rounded Rectangle 5"/>
+          <p:cNvSpPr/>
+          <p:nvPr/>
+        </p:nvSpPr>
+        <p:spPr>
+          <a:xfrm>
+            <a:off x="6217920" y="1463040"/>
+            <a:ext cx="5212080" cy="3383280"/>
+          </a:xfrm>
+          <a:prstGeom prst="roundRect">
+            <a:avLst/>
+          </a:prstGeom>
+          <a:solidFill>
+            <a:srgbClr val="1E293B"/>
+          </a:solidFill>
+          <a:ln w="25400">
+            <a:solidFill>
+              <a:srgbClr val="FB923C"/>
+            </a:solidFill>
+          </a:ln>
+        </p:spPr>
+        <p:style>
+          <a:lnRef idx="1">
+            <a:schemeClr val="accent1"/>
+          </a:lnRef>
+          <a:fillRef idx="3">
+            <a:schemeClr val="accent1"/>
+          </a:fillRef>
+          <a:effectRef idx="2">
+            <a:schemeClr val="accent1"/>
+          </a:effectRef>
+          <a:fontRef idx="minor">
+            <a:schemeClr val="lt1"/>
+          </a:fontRef>
+        </p:style>
+        <p:txBody>
+          <a:bodyPr rtlCol="0" anchor="ctr" wrap="square"/>
+          <a:lstStyle/>
+          <a:p>
+            <a:pPr algn="ctr">
+              <a:spcAft>
+                <a:spcPts val="800"/>
+              </a:spcAft>
+              <a:defRPr sz="1400" b="1">
+                <a:solidFill>
+                  <a:srgbClr val="FB923C"/>
+                </a:solidFill>
+              </a:defRPr>
+            </a:pPr>
+            <a:r>
+              <a:t>DIABETIC RISK PROFILE (Predicted Score &gt;= 0.50)</a:t>
+            </a:r>
+          </a:p>
+          <a:p>
+            <a:pPr>
+              <a:spcAft>
+                <a:spcPts val="400"/>
+              </a:spcAft>
+            </a:pPr>
+            <a:r>
+              <a:rPr b="1" sz="1100">
+                <a:solidFill>
+                  <a:srgbClr val="FB923C"/>
+                </a:solidFill>
+              </a:rPr>
+              <a:t>⚠ Widened Cardiac Silhouette: </a:t>
+            </a:r>
+            <a:r>
+              <a:rPr sz="1050">
+                <a:solidFill>
+                  <a:srgbClr val="FFFFFF"/>
+                </a:solidFill>
+              </a:rPr>
+              <a:t>Heart width &gt;= 50% of inner chest (Cardiomegaly from cardiomyopathy/hypertension).</a:t>
+            </a:r>
+          </a:p>
+          <a:p>
+            <a:pPr>
+              <a:spcAft>
+                <a:spcPts val="400"/>
+              </a:spcAft>
+            </a:pPr>
+            <a:r>
+              <a:rPr b="1" sz="1100">
+                <a:solidFill>
+                  <a:srgbClr val="FB923C"/>
+                </a:solidFill>
+              </a:rPr>
+              <a:t>⚠ Blunted Diaphragm Angles: </a:t>
+            </a:r>
+            <a:r>
+              <a:rPr sz="1050">
+                <a:solidFill>
+                  <a:srgbClr val="FFFFFF"/>
+                </a:solidFill>
+              </a:rPr>
+              <a:t>Pericardial and retrosternal adipose pads fill the cardiophrenic angles.</a:t>
+            </a:r>
+          </a:p>
+          <a:p>
+            <a:pPr>
+              <a:spcAft>
+                <a:spcPts val="400"/>
+              </a:spcAft>
+            </a:pPr>
+            <a:r>
+              <a:rPr b="1" sz="1100">
+                <a:solidFill>
+                  <a:srgbClr val="FB923C"/>
+                </a:solidFill>
+              </a:rPr>
+              <a:t>⚠ Widened Mediastinal Shadow: </a:t>
+            </a:r>
+            <a:r>
+              <a:rPr sz="1050">
+                <a:solidFill>
+                  <a:srgbClr val="FFFFFF"/>
+                </a:solidFill>
+              </a:rPr>
+              <a:t>Ectopic vascular pedicle fat broadening central thoracic shadow.</a:t>
+            </a:r>
+          </a:p>
+          <a:p>
+            <a:pPr>
+              <a:spcAft>
+                <a:spcPts val="400"/>
+              </a:spcAft>
+            </a:pPr>
+            <a:r>
+              <a:rPr b="1" sz="1100">
+                <a:solidFill>
+                  <a:srgbClr val="FB923C"/>
+                </a:solidFill>
+              </a:rPr>
+              <a:t>⚠ Thick Lateral Adiposity: </a:t>
+            </a:r>
+            <a:r>
+              <a:rPr sz="1050">
+                <a:solidFill>
+                  <a:srgbClr val="FFFFFF"/>
+                </a:solidFill>
+              </a:rPr>
+              <a:t>Noticeable soft tissue shadows flanking ribs (high BMI phenotype).</a:t>
+            </a:r>
+          </a:p>
+          <a:p>
+            <a:pPr>
+              <a:spcAft>
+                <a:spcPts val="400"/>
+              </a:spcAft>
+            </a:pPr>
+            <a:r>
+              <a:rPr b="1" sz="1100">
+                <a:solidFill>
+                  <a:srgbClr val="FB923C"/>
+                </a:solidFill>
+              </a:rPr>
+              <a:t>⚠ Model Output: </a:t>
+            </a:r>
+            <a:r>
+              <a:rPr sz="1050">
+                <a:solidFill>
+                  <a:srgbClr val="FFFFFF"/>
+                </a:solidFill>
+              </a:rPr>
+              <a:t>Deep channels fire strongly -&gt; Logit_T2D dominates -&gt; P(T2D) &gt;= 0.50 -&gt; CLASS 1 (FLAGGED T2D).</a:t>
+            </a:r>
+          </a:p>
+        </p:txBody>
+      </p:sp>
+      <p:sp>
+        <p:nvSpPr>
+          <p:cNvPr id="7" name="Rounded Rectangle 6"/>
+          <p:cNvSpPr/>
+          <p:nvPr/>
+        </p:nvSpPr>
+        <p:spPr>
+          <a:xfrm>
+            <a:off x="731520" y="4983480"/>
+            <a:ext cx="10698480" cy="1371600"/>
+          </a:xfrm>
+          <a:prstGeom prst="roundRect">
+            <a:avLst/>
+          </a:prstGeom>
+          <a:solidFill>
+            <a:srgbClr val="1E293B"/>
+          </a:solidFill>
+          <a:ln>
+            <a:solidFill>
+              <a:srgbClr val="334155"/>
+            </a:solidFill>
+          </a:ln>
+        </p:spPr>
+        <p:style>
+          <a:lnRef idx="1">
+            <a:schemeClr val="accent1"/>
+          </a:lnRef>
+          <a:fillRef idx="3">
+            <a:schemeClr val="accent1"/>
+          </a:fillRef>
+          <a:effectRef idx="2">
+            <a:schemeClr val="accent1"/>
+          </a:effectRef>
+          <a:fontRef idx="minor">
+            <a:schemeClr val="lt1"/>
+          </a:fontRef>
+        </p:style>
+        <p:txBody>
+          <a:bodyPr rtlCol="0" anchor="ctr" wrap="square"/>
+          <a:lstStyle/>
+          <a:p>
+            <a:pPr algn="ctr">
+              <a:spcAft>
+                <a:spcPts val="300"/>
+              </a:spcAft>
+              <a:defRPr sz="1150" b="1">
+                <a:solidFill>
+                  <a:srgbClr val="38BDF8"/>
+                </a:solidFill>
+              </a:defRPr>
+            </a:pPr>
+            <a:r>
+              <a:t>THE MATHEMATICAL SCORING PIPELINE (FROM PIXELS TO DECISION)</a:t>
+            </a:r>
+          </a:p>
+          <a:p>
+            <a:pPr>
+              <a:defRPr sz="1050">
+                <a:solidFill>
+                  <a:srgbClr val="FFFFFF"/>
+                </a:solidFill>
+              </a:defRPr>
+            </a:pPr>
+            <a:r>
+              <a:t>1. (112x112 CXR) -&gt; 4 Conv Blocks compress image into 128 anatomical feature maps.</a:t>
+            </a:r>
+            <a:br/>
+            <a:r>
+              <a:t>2. Global Average Pooling condenses maps into 128 numbers (reflecting CTR &amp; fat pad magnitude).</a:t>
+            </a:r>
+            <a:br/>
+            <a:r>
+              <a:t>3. Dense Head: Logit = W * features + b  -&gt;  Softmax converts to calibrated probability P(T2D) between 0.0% and 100%.</a:t>
+            </a:r>
+            <a:br/>
+            <a:r>
+              <a:t>4. Clinical Threshold Rule: If P(T2D) &gt;= 0.50, patient is flagged as 'Diabetic Risk (1)' -&gt; Triggers HbA1c lab order.</a:t>
+            </a:r>
+          </a:p>
+        </p:txBody>
+      </p:sp>
+    </p:spTree>
+  </p:cSld>
+  <p:clrMapOvr>
+    <a:masterClrMapping/>
+  </p:clrMapOvr>
+</p:sld>
+</file>
+
+<file path=ppt/slides/slide4.xml><?xml version="1.0" encoding="utf-8"?>
+<p:sld xmlns:a="http://schemas.openxmlformats.org/drawingml/2006/main" xmlns:p="http://schemas.openxmlformats.org/presentationml/2006/main" xmlns:r="http://schemas.openxmlformats.org/officeDocument/2006/relationships">
+  <p:cSld>
+    <p:spTree>
+      <p:nvGrpSpPr>
+        <p:cNvPr id="1" name=""/>
+        <p:cNvGrpSpPr/>
+        <p:nvPr/>
+      </p:nvGrpSpPr>
+      <p:grpSpPr/>
+      <p:sp>
+        <p:nvSpPr>
+          <p:cNvPr id="2" name="Rectangle 1"/>
+          <p:cNvSpPr/>
+          <p:nvPr/>
+        </p:nvSpPr>
+        <p:spPr>
+          <a:xfrm>
+            <a:off x="0" y="0"/>
+            <a:ext cx="12191695" cy="6858000"/>
+          </a:xfrm>
+          <a:prstGeom prst="rect">
+            <a:avLst/>
+          </a:prstGeom>
+          <a:solidFill>
+            <a:srgbClr val="0F172A"/>
+          </a:solidFill>
+          <a:ln>
+            <a:noFill/>
+          </a:ln>
+        </p:spPr>
+        <p:style>
+          <a:lnRef idx="1">
+            <a:schemeClr val="accent1"/>
+          </a:lnRef>
+          <a:fillRef idx="3">
+            <a:schemeClr val="accent1"/>
+          </a:fillRef>
+          <a:effectRef idx="2">
+            <a:schemeClr val="accent1"/>
+          </a:effectRef>
+          <a:fontRef idx="minor">
+            <a:schemeClr val="lt1"/>
+          </a:fontRef>
+        </p:style>
+        <p:txBody>
+          <a:bodyPr rtlCol="0" anchor="ctr"/>
+          <a:lstStyle/>
+          <a:p>
+            <a:pPr algn="ctr"/>
+          </a:p>
+        </p:txBody>
+      </p:sp>
+      <p:sp>
+        <p:nvSpPr>
+          <p:cNvPr id="3" name="TextBox 2"/>
+          <p:cNvSpPr txBox="1"/>
+          <p:nvPr/>
+        </p:nvSpPr>
+        <p:spPr>
+          <a:xfrm>
+            <a:off x="731520" y="365760"/>
+            <a:ext cx="10698480" cy="320040"/>
+          </a:xfrm>
+          <a:prstGeom prst="rect">
+            <a:avLst/>
+          </a:prstGeom>
+          <a:noFill/>
+        </p:spPr>
+        <p:txBody>
+          <a:bodyPr wrap="square">
+            <a:spAutoFit/>
+          </a:bodyPr>
+          <a:lstStyle/>
+          <a:p>
+            <a:pPr>
+              <a:defRPr sz="1100" b="1">
+                <a:solidFill>
+                  <a:srgbClr val="38BDF8"/>
+                </a:solidFill>
+              </a:defRPr>
+            </a:pPr>
+            <a:r>
+              <a:t>CS 396 — ARTIFICIAL INTELLIGENCE IN HEALTHCARE</a:t>
+            </a:r>
+          </a:p>
+        </p:txBody>
+      </p:sp>
+      <p:sp>
+        <p:nvSpPr>
+          <p:cNvPr id="4" name="TextBox 3"/>
+          <p:cNvSpPr txBox="1"/>
+          <p:nvPr/>
+        </p:nvSpPr>
+        <p:spPr>
+          <a:xfrm>
+            <a:off x="731520" y="685800"/>
+            <a:ext cx="10698480" cy="640080"/>
+          </a:xfrm>
+          <a:prstGeom prst="rect">
+            <a:avLst/>
+          </a:prstGeom>
+          <a:noFill/>
+        </p:spPr>
+        <p:txBody>
+          <a:bodyPr wrap="square">
+            <a:spAutoFit/>
+          </a:bodyPr>
+          <a:lstStyle/>
+          <a:p>
+            <a:pPr>
+              <a:defRPr sz="2600" b="1">
+                <a:solidFill>
+                  <a:srgbClr val="FFFFFF"/>
+                </a:solidFill>
+              </a:defRPr>
+            </a:pPr>
+            <a:r>
               <a:t>Model Engineering: CustomScratchCXRNet (~75k Params)</a:t>
             </a:r>
           </a:p>
@@ -4230,7 +4787,7 @@
 </p:sld>
 </file>
 
-<file path=ppt/slides/slide4.xml><?xml version="1.0" encoding="utf-8"?>
+<file path=ppt/slides/slide5.xml><?xml version="1.0" encoding="utf-8"?>
 <p:sld xmlns:a="http://schemas.openxmlformats.org/drawingml/2006/main" xmlns:p="http://schemas.openxmlformats.org/presentationml/2006/main" xmlns:r="http://schemas.openxmlformats.org/officeDocument/2006/relationships">
   <p:cSld>
     <p:spTree>
@@ -5654,7 +6211,7 @@
 </p:sld>
 </file>
 
-<file path=ppt/slides/slide5.xml><?xml version="1.0" encoding="utf-8"?>
+<file path=ppt/slides/slide6.xml><?xml version="1.0" encoding="utf-8"?>
 <p:sld xmlns:a="http://schemas.openxmlformats.org/drawingml/2006/main" xmlns:p="http://schemas.openxmlformats.org/presentationml/2006/main" xmlns:r="http://schemas.openxmlformats.org/officeDocument/2006/relationships">
   <p:cSld>
     <p:spTree>
@@ -6106,7 +6663,7 @@
 </p:sld>
 </file>
 
-<file path=ppt/slides/slide6.xml><?xml version="1.0" encoding="utf-8"?>
+<file path=ppt/slides/slide7.xml><?xml version="1.0" encoding="utf-8"?>
 <p:sld xmlns:a="http://schemas.openxmlformats.org/drawingml/2006/main" xmlns:p="http://schemas.openxmlformats.org/presentationml/2006/main" xmlns:r="http://schemas.openxmlformats.org/officeDocument/2006/relationships">
   <p:cSld>
     <p:spTree>
@@ -6224,7 +6781,7 @@
               </a:defRPr>
             </a:pPr>
             <a:r>
-              <a:t>Comprehensive Comparison: Vision vs. Pretrained vs. Clinical Metadata</a:t>
+              <a:t>Multimodal Fusion Results: From Pure CXR to 0.9068 AUROC</a:t>
             </a:r>
           </a:p>
         </p:txBody>
@@ -6238,7 +6795,7 @@
           <p:nvPr/>
         </p:nvGraphicFramePr>
         <p:xfrm>
-          <a:off x="731520" y="1463040"/>
+          <a:off x="731520" y="1371600"/>
           <a:ext cx="10698480" cy="2926080"/>
         </p:xfrm>
         <a:graphic>
@@ -6248,27 +6805,28 @@
                 <a:tableStyleId>{5C22544A-7EE6-4342-B048-85BDC9FD1C3A}</a:tableStyleId>
               </a:tblPr>
               <a:tblGrid>
-                <a:gridCol w="2926080"/>
-                <a:gridCol w="1828800"/>
-                <a:gridCol w="1828800"/>
+                <a:gridCol w="2651760"/>
+                <a:gridCol w="1920240"/>
+                <a:gridCol w="1188720"/>
+                <a:gridCol w="1280160"/>
+                <a:gridCol w="1645920"/>
                 <a:gridCol w="2011680"/>
-                <a:gridCol w="2103120"/>
               </a:tblGrid>
-              <a:tr h="585216">
+              <a:tr h="487680">
                 <a:tc>
                   <a:txBody>
                     <a:bodyPr/>
                     <a:lstStyle/>
                     <a:p>
                       <a:pPr>
-                        <a:defRPr sz="1150" b="1">
+                        <a:defRPr sz="1100" b="1">
                           <a:solidFill>
                             <a:srgbClr val="38BDF8"/>
                           </a:solidFill>
                         </a:defRPr>
                       </a:pPr>
                       <a:r>
-                        <a:t>Model / Modality</a:t>
+                        <a:t>Pipeline / Model</a:t>
                       </a:r>
                     </a:p>
                   </a:txBody>
@@ -6284,14 +6842,14 @@
                     <a:lstStyle/>
                     <a:p>
                       <a:pPr>
-                        <a:defRPr sz="1150" b="1">
+                        <a:defRPr sz="1100" b="1">
                           <a:solidFill>
                             <a:srgbClr val="38BDF8"/>
                           </a:solidFill>
                         </a:defRPr>
                       </a:pPr>
                       <a:r>
-                        <a:t>Input Data</a:t>
+                        <a:t>Input Modalities</a:t>
                       </a:r>
                     </a:p>
                   </a:txBody>
@@ -6307,7 +6865,7 @@
                     <a:lstStyle/>
                     <a:p>
                       <a:pPr>
-                        <a:defRPr sz="1150" b="1">
+                        <a:defRPr sz="1100" b="1">
                           <a:solidFill>
                             <a:srgbClr val="38BDF8"/>
                           </a:solidFill>
@@ -6330,7 +6888,7 @@
                     <a:lstStyle/>
                     <a:p>
                       <a:pPr>
-                        <a:defRPr sz="1150" b="1">
+                        <a:defRPr sz="1100" b="1">
                           <a:solidFill>
                             <a:srgbClr val="38BDF8"/>
                           </a:solidFill>
@@ -6353,14 +6911,37 @@
                     <a:lstStyle/>
                     <a:p>
                       <a:pPr>
-                        <a:defRPr sz="1150" b="1">
+                        <a:defRPr sz="1100" b="1">
                           <a:solidFill>
                             <a:srgbClr val="38BDF8"/>
                           </a:solidFill>
                         </a:defRPr>
                       </a:pPr>
                       <a:r>
-                        <a:t>Key Observation</a:t>
+                        <a:t>TP / TN / FP / FN</a:t>
+                      </a:r>
+                    </a:p>
+                  </a:txBody>
+                  <a:tcPr>
+                    <a:solidFill>
+                      <a:srgbClr val="28354C"/>
+                    </a:solidFill>
+                  </a:tcPr>
+                </a:tc>
+                <a:tc>
+                  <a:txBody>
+                    <a:bodyPr/>
+                    <a:lstStyle/>
+                    <a:p>
+                      <a:pPr>
+                        <a:defRPr sz="1100" b="1">
+                          <a:solidFill>
+                            <a:srgbClr val="38BDF8"/>
+                          </a:solidFill>
+                        </a:defRPr>
+                      </a:pPr>
+                      <a:r>
+                        <a:t>Key Clinical Impact</a:t>
                       </a:r>
                     </a:p>
                   </a:txBody>
@@ -6371,21 +6952,21 @@
                   </a:tcPr>
                 </a:tc>
               </a:tr>
-              <a:tr h="585216">
+              <a:tr h="487680">
                 <a:tc>
                   <a:txBody>
                     <a:bodyPr/>
                     <a:lstStyle/>
                     <a:p>
                       <a:pPr>
-                        <a:defRPr sz="1100" b="1">
+                        <a:defRPr sz="1000">
                           <a:solidFill>
                             <a:srgbClr val="FFFFFF"/>
                           </a:solidFill>
                         </a:defRPr>
                       </a:pPr>
                       <a:r>
-                        <a:t>Malek Custom CNN (Scratch)</a:t>
+                        <a:t>1. Pure CXR Vision (Scratch)</a:t>
                       </a:r>
                     </a:p>
                   </a:txBody>
@@ -6401,14 +6982,14 @@
                     <a:lstStyle/>
                     <a:p>
                       <a:pPr>
-                        <a:defRPr sz="1100">
+                        <a:defRPr sz="1000">
                           <a:solidFill>
                             <a:srgbClr val="FFFFFF"/>
                           </a:solidFill>
                         </a:defRPr>
                       </a:pPr>
                       <a:r>
-                        <a:t>Raw CXR Pixels</a:t>
+                        <a:t>CXR Grayscale Pixels</a:t>
                       </a:r>
                     </a:p>
                   </a:txBody>
@@ -6424,9 +7005,9 @@
                     <a:lstStyle/>
                     <a:p>
                       <a:pPr>
-                        <a:defRPr sz="1100">
+                        <a:defRPr sz="1000">
                           <a:solidFill>
-                            <a:srgbClr val="34D399"/>
+                            <a:srgbClr val="FFFFFF"/>
                           </a:solidFill>
                         </a:defRPr>
                       </a:pPr>
@@ -6447,7 +7028,7 @@
                     <a:lstStyle/>
                     <a:p>
                       <a:pPr>
-                        <a:defRPr sz="1100">
+                        <a:defRPr sz="1000">
                           <a:solidFill>
                             <a:srgbClr val="FFFFFF"/>
                           </a:solidFill>
@@ -6470,14 +7051,37 @@
                     <a:lstStyle/>
                     <a:p>
                       <a:pPr>
-                        <a:defRPr sz="1100">
+                        <a:defRPr sz="1000">
                           <a:solidFill>
                             <a:srgbClr val="FFFFFF"/>
                           </a:solidFill>
                         </a:defRPr>
                       </a:pPr>
                       <a:r>
-                        <a:t>Learns task-specific CTR &amp; fat markers</a:t>
+                        <a:t>191 / 382 / 260 / 116</a:t>
+                      </a:r>
+                    </a:p>
+                  </a:txBody>
+                  <a:tcPr>
+                    <a:solidFill>
+                      <a:srgbClr val="1E293B"/>
+                    </a:solidFill>
+                  </a:tcPr>
+                </a:tc>
+                <a:tc>
+                  <a:txBody>
+                    <a:bodyPr/>
+                    <a:lstStyle/>
+                    <a:p>
+                      <a:pPr>
+                        <a:defRPr sz="1000">
+                          <a:solidFill>
+                            <a:srgbClr val="FFFFFF"/>
+                          </a:solidFill>
+                        </a:defRPr>
+                      </a:pPr>
+                      <a:r>
+                        <a:t>Cardiomegaly &amp; fat signal alone</a:t>
                       </a:r>
                     </a:p>
                   </a:txBody>
@@ -6488,21 +7092,21 @@
                   </a:tcPr>
                 </a:tc>
               </a:tr>
-              <a:tr h="585216">
+              <a:tr h="487680">
                 <a:tc>
                   <a:txBody>
                     <a:bodyPr/>
                     <a:lstStyle/>
                     <a:p>
                       <a:pPr>
-                        <a:defRPr sz="1100" b="1">
+                        <a:defRPr sz="1000">
                           <a:solidFill>
                             <a:srgbClr val="FFFFFF"/>
                           </a:solidFill>
                         </a:defRPr>
                       </a:pPr>
                       <a:r>
-                        <a:t>Frozen RAD-DINO (Foundation)</a:t>
+                        <a:t>2. Frozen RAD-DINO (ViT)</a:t>
                       </a:r>
                     </a:p>
                   </a:txBody>
@@ -6518,7 +7122,7 @@
                     <a:lstStyle/>
                     <a:p>
                       <a:pPr>
-                        <a:defRPr sz="1100">
+                        <a:defRPr sz="1000">
                           <a:solidFill>
                             <a:srgbClr val="FFFFFF"/>
                           </a:solidFill>
@@ -6541,7 +7145,7 @@
                     <a:lstStyle/>
                     <a:p>
                       <a:pPr>
-                        <a:defRPr sz="1100">
+                        <a:defRPr sz="1000">
                           <a:solidFill>
                             <a:srgbClr val="FFFFFF"/>
                           </a:solidFill>
@@ -6564,7 +7168,7 @@
                     <a:lstStyle/>
                     <a:p>
                       <a:pPr>
-                        <a:defRPr sz="1100">
+                        <a:defRPr sz="1000">
                           <a:solidFill>
                             <a:srgbClr val="FFFFFF"/>
                           </a:solidFill>
@@ -6587,14 +7191,37 @@
                     <a:lstStyle/>
                     <a:p>
                       <a:pPr>
-                        <a:defRPr sz="1100">
+                        <a:defRPr sz="1000" b="1">
+                          <a:solidFill>
+                            <a:srgbClr val="FB923C"/>
+                          </a:solidFill>
+                        </a:defRPr>
+                      </a:pPr>
+                      <a:r>
+                        <a:t>170 / 365 / 277 / 137</a:t>
+                      </a:r>
+                    </a:p>
+                  </a:txBody>
+                  <a:tcPr>
+                    <a:solidFill>
+                      <a:srgbClr val="18212F"/>
+                    </a:solidFill>
+                  </a:tcPr>
+                </a:tc>
+                <a:tc>
+                  <a:txBody>
+                    <a:bodyPr/>
+                    <a:lstStyle/>
+                    <a:p>
+                      <a:pPr>
+                        <a:defRPr sz="1000">
                           <a:solidFill>
                             <a:srgbClr val="FFFFFF"/>
                           </a:solidFill>
                         </a:defRPr>
                       </a:pPr>
                       <a:r>
-                        <a:t>Overlooks global thoracic ratios</a:t>
+                        <a:t>General embeddings miss CTR geometry</a:t>
                       </a:r>
                     </a:p>
                   </a:txBody>
@@ -6605,21 +7232,21 @@
                   </a:tcPr>
                 </a:tc>
               </a:tr>
-              <a:tr h="585216">
+              <a:tr h="487680">
                 <a:tc>
                   <a:txBody>
                     <a:bodyPr/>
                     <a:lstStyle/>
                     <a:p>
                       <a:pPr>
-                        <a:defRPr sz="1100" b="1">
+                        <a:defRPr sz="1000">
                           <a:solidFill>
                             <a:srgbClr val="FFFFFF"/>
                           </a:solidFill>
                         </a:defRPr>
                       </a:pPr>
                       <a:r>
-                        <a:t>Clinical Metadata (Incl. SDI)</a:t>
+                        <a:t>3. Clinical Alone (Linear LR)</a:t>
                       </a:r>
                     </a:p>
                   </a:txBody>
@@ -6635,14 +7262,14 @@
                     <a:lstStyle/>
                     <a:p>
                       <a:pPr>
-                        <a:defRPr sz="1100">
+                        <a:defRPr sz="1000">
                           <a:solidFill>
                             <a:srgbClr val="FFFFFF"/>
                           </a:solidFill>
                         </a:defRPr>
                       </a:pPr>
                       <a:r>
-                        <a:t>Demographics + SDI</a:t>
+                        <a:t>Age, Sex, BMI, SDI</a:t>
                       </a:r>
                     </a:p>
                   </a:txBody>
@@ -6658,14 +7285,14 @@
                     <a:lstStyle/>
                     <a:p>
                       <a:pPr>
-                        <a:defRPr sz="1100">
+                        <a:defRPr sz="1000">
                           <a:solidFill>
                             <a:srgbClr val="FFFFFF"/>
                           </a:solidFill>
                         </a:defRPr>
                       </a:pPr>
                       <a:r>
-                        <a:t>0.6955</a:t>
+                        <a:t>0.6931</a:t>
                       </a:r>
                     </a:p>
                   </a:txBody>
@@ -6681,14 +7308,14 @@
                     <a:lstStyle/>
                     <a:p>
                       <a:pPr>
-                        <a:defRPr sz="1100">
+                        <a:defRPr sz="1000">
                           <a:solidFill>
                             <a:srgbClr val="FFFFFF"/>
                           </a:solidFill>
                         </a:defRPr>
                       </a:pPr>
                       <a:r>
-                        <a:t>64.10%</a:t>
+                        <a:t>63.01%</a:t>
                       </a:r>
                     </a:p>
                   </a:txBody>
@@ -6704,14 +7331,37 @@
                     <a:lstStyle/>
                     <a:p>
                       <a:pPr>
-                        <a:defRPr sz="1100">
+                        <a:defRPr sz="1000">
                           <a:solidFill>
                             <a:srgbClr val="FFFFFF"/>
                           </a:solidFill>
                         </a:defRPr>
                       </a:pPr>
                       <a:r>
-                        <a:t>Captures age, gender &amp; socioeconomic risk</a:t>
+                        <a:t>185 / 413 / 229 / 122</a:t>
+                      </a:r>
+                    </a:p>
+                  </a:txBody>
+                  <a:tcPr>
+                    <a:solidFill>
+                      <a:srgbClr val="1E293B"/>
+                    </a:solidFill>
+                  </a:tcPr>
+                </a:tc>
+                <a:tc>
+                  <a:txBody>
+                    <a:bodyPr/>
+                    <a:lstStyle/>
+                    <a:p>
+                      <a:pPr>
+                        <a:defRPr sz="1000">
+                          <a:solidFill>
+                            <a:srgbClr val="FFFFFF"/>
+                          </a:solidFill>
+                        </a:defRPr>
+                      </a:pPr>
+                      <a:r>
+                        <a:t>Demographic &amp; socioeconomic risk baseline</a:t>
                       </a:r>
                     </a:p>
                   </a:txBody>
@@ -6722,21 +7372,21 @@
                   </a:tcPr>
                 </a:tc>
               </a:tr>
-              <a:tr h="585216">
+              <a:tr h="487680">
                 <a:tc>
                   <a:txBody>
                     <a:bodyPr/>
                     <a:lstStyle/>
                     <a:p>
                       <a:pPr>
-                        <a:defRPr sz="1100" b="1">
+                        <a:defRPr sz="1000">
                           <a:solidFill>
                             <a:srgbClr val="FFFFFF"/>
                           </a:solidFill>
                         </a:defRPr>
                       </a:pPr>
                       <a:r>
-                        <a:t>Combined Multimodal (Vision+Meta)</a:t>
+                        <a:t>4. Multimodal Fusion (Linear)</a:t>
                       </a:r>
                     </a:p>
                   </a:txBody>
@@ -6752,14 +7402,14 @@
                     <a:lstStyle/>
                     <a:p>
                       <a:pPr>
-                        <a:defRPr sz="1100">
+                        <a:defRPr sz="1000">
                           <a:solidFill>
                             <a:srgbClr val="FFFFFF"/>
                           </a:solidFill>
                         </a:defRPr>
                       </a:pPr>
                       <a:r>
-                        <a:t>CXR + Demographics</a:t>
+                        <a:t>CXR Score + Clinical</a:t>
                       </a:r>
                     </a:p>
                   </a:txBody>
@@ -6775,14 +7425,14 @@
                     <a:lstStyle/>
                     <a:p>
                       <a:pPr>
-                        <a:defRPr sz="1100">
+                        <a:defRPr sz="1000">
                           <a:solidFill>
                             <a:srgbClr val="FFFFFF"/>
                           </a:solidFill>
                         </a:defRPr>
                       </a:pPr>
                       <a:r>
-                        <a:t>~0.72 - 0.74</a:t>
+                        <a:t>0.7128</a:t>
                       </a:r>
                     </a:p>
                   </a:txBody>
@@ -6798,14 +7448,14 @@
                     <a:lstStyle/>
                     <a:p>
                       <a:pPr>
-                        <a:defRPr sz="1100">
+                        <a:defRPr sz="1000">
                           <a:solidFill>
                             <a:srgbClr val="FFFFFF"/>
                           </a:solidFill>
                         </a:defRPr>
                       </a:pPr>
                       <a:r>
-                        <a:t>~68 - 70%</a:t>
+                        <a:t>66.28%</a:t>
                       </a:r>
                     </a:p>
                   </a:txBody>
@@ -6821,14 +7471,37 @@
                     <a:lstStyle/>
                     <a:p>
                       <a:pPr>
-                        <a:defRPr sz="1100">
+                        <a:defRPr sz="1000">
                           <a:solidFill>
                             <a:srgbClr val="FFFFFF"/>
                           </a:solidFill>
                         </a:defRPr>
                       </a:pPr>
                       <a:r>
-                        <a:t>Optimal opportunistic detection synergy</a:t>
+                        <a:t>205 / 424 / 218 / 102</a:t>
+                      </a:r>
+                    </a:p>
+                  </a:txBody>
+                  <a:tcPr>
+                    <a:solidFill>
+                      <a:srgbClr val="18212F"/>
+                    </a:solidFill>
+                  </a:tcPr>
+                </a:tc>
+                <a:tc>
+                  <a:txBody>
+                    <a:bodyPr/>
+                    <a:lstStyle/>
+                    <a:p>
+                      <a:pPr>
+                        <a:defRPr sz="1000">
+                          <a:solidFill>
+                            <a:srgbClr val="FFFFFF"/>
+                          </a:solidFill>
+                        </a:defRPr>
+                      </a:pPr>
+                      <a:r>
+                        <a:t>+1.97% AUC lift over clinical alone</a:t>
                       </a:r>
                     </a:p>
                   </a:txBody>
@@ -6839,6 +7512,146 @@
                   </a:tcPr>
                 </a:tc>
               </a:tr>
+              <a:tr h="487680">
+                <a:tc>
+                  <a:txBody>
+                    <a:bodyPr/>
+                    <a:lstStyle/>
+                    <a:p>
+                      <a:pPr>
+                        <a:defRPr sz="1000" b="1">
+                          <a:solidFill>
+                            <a:srgbClr val="34D399"/>
+                          </a:solidFill>
+                        </a:defRPr>
+                      </a:pPr>
+                      <a:r>
+                        <a:t>5. Multimodal (Gradient Boosting)</a:t>
+                      </a:r>
+                    </a:p>
+                  </a:txBody>
+                  <a:tcPr>
+                    <a:solidFill>
+                      <a:srgbClr val="1E293B"/>
+                    </a:solidFill>
+                  </a:tcPr>
+                </a:tc>
+                <a:tc>
+                  <a:txBody>
+                    <a:bodyPr/>
+                    <a:lstStyle/>
+                    <a:p>
+                      <a:pPr>
+                        <a:defRPr sz="1000">
+                          <a:solidFill>
+                            <a:srgbClr val="FFFFFF"/>
+                          </a:solidFill>
+                        </a:defRPr>
+                      </a:pPr>
+                      <a:r>
+                        <a:t>CXR Score + Clinical</a:t>
+                      </a:r>
+                    </a:p>
+                  </a:txBody>
+                  <a:tcPr>
+                    <a:solidFill>
+                      <a:srgbClr val="1E293B"/>
+                    </a:solidFill>
+                  </a:tcPr>
+                </a:tc>
+                <a:tc>
+                  <a:txBody>
+                    <a:bodyPr/>
+                    <a:lstStyle/>
+                    <a:p>
+                      <a:pPr>
+                        <a:defRPr sz="1000" b="1">
+                          <a:solidFill>
+                            <a:srgbClr val="34D399"/>
+                          </a:solidFill>
+                        </a:defRPr>
+                      </a:pPr>
+                      <a:r>
+                        <a:t>0.9068</a:t>
+                      </a:r>
+                    </a:p>
+                  </a:txBody>
+                  <a:tcPr>
+                    <a:solidFill>
+                      <a:srgbClr val="1E293B"/>
+                    </a:solidFill>
+                  </a:tcPr>
+                </a:tc>
+                <a:tc>
+                  <a:txBody>
+                    <a:bodyPr/>
+                    <a:lstStyle/>
+                    <a:p>
+                      <a:pPr>
+                        <a:defRPr sz="1000">
+                          <a:solidFill>
+                            <a:srgbClr val="FFFFFF"/>
+                          </a:solidFill>
+                        </a:defRPr>
+                      </a:pPr>
+                      <a:r>
+                        <a:t>83.25%</a:t>
+                      </a:r>
+                    </a:p>
+                  </a:txBody>
+                  <a:tcPr>
+                    <a:solidFill>
+                      <a:srgbClr val="1E293B"/>
+                    </a:solidFill>
+                  </a:tcPr>
+                </a:tc>
+                <a:tc>
+                  <a:txBody>
+                    <a:bodyPr/>
+                    <a:lstStyle/>
+                    <a:p>
+                      <a:pPr>
+                        <a:defRPr sz="1000" b="1">
+                          <a:solidFill>
+                            <a:srgbClr val="FB923C"/>
+                          </a:solidFill>
+                        </a:defRPr>
+                      </a:pPr>
+                      <a:r>
+                        <a:t>213 / 577 / 65 / 94</a:t>
+                      </a:r>
+                    </a:p>
+                  </a:txBody>
+                  <a:tcPr>
+                    <a:solidFill>
+                      <a:srgbClr val="1E293B"/>
+                    </a:solidFill>
+                  </a:tcPr>
+                </a:tc>
+                <a:tc>
+                  <a:txBody>
+                    <a:bodyPr/>
+                    <a:lstStyle/>
+                    <a:p>
+                      <a:pPr>
+                        <a:defRPr sz="1000">
+                          <a:solidFill>
+                            <a:srgbClr val="FFFFFF"/>
+                          </a:solidFill>
+                        </a:defRPr>
+                      </a:pPr>
+                      <a:r>
+                        <a:t>★ Peak AUROC; 75% drop in false positives!</a:t>
+                      </a:r>
+                    </a:p>
+                  </a:txBody>
+                  <a:tcPr>
+                    <a:solidFill>
+                      <a:srgbClr val="1E293B"/>
+                    </a:solidFill>
+                  </a:tcPr>
+                </a:tc>
+              </a:tr>
             </a:tbl>
           </a:graphicData>
         </a:graphic>
@@ -6851,8 +7664,8 @@
         </p:nvSpPr>
         <p:spPr>
           <a:xfrm>
-            <a:off x="731520" y="4663440"/>
-            <a:ext cx="10698480" cy="1645920"/>
+            <a:off x="731520" y="4480560"/>
+            <a:ext cx="10698480" cy="2011680"/>
           </a:xfrm>
           <a:prstGeom prst="roundRect">
             <a:avLst/>
@@ -6895,19 +7708,99 @@
               </a:defRPr>
             </a:pPr>
             <a:r>
-              <a:t>THE MULTIMODAL OPPORTUNITY</a:t>
+              <a:t>MULTIMODAL LATE FUSION BREAKTHROUGH &amp; FEATURE IMPORTANCE</a:t>
             </a:r>
           </a:p>
           <a:p>
             <a:pPr>
-              <a:defRPr sz="1150">
+              <a:spcAft>
+                <a:spcPts val="300"/>
+              </a:spcAft>
+            </a:pPr>
+            <a:r>
+              <a:rPr b="1" sz="1050">
+                <a:solidFill>
+                  <a:srgbClr val="FB923C"/>
+                </a:solidFill>
+              </a:rPr>
+              <a:t>• X-Ray as Continuous Biomarker: </a:t>
+            </a:r>
+            <a:r>
+              <a:rPr sz="1050">
                 <a:solidFill>
                   <a:srgbClr val="FFFFFF"/>
                 </a:solidFill>
-              </a:defRPr>
-            </a:pPr>
-            <a:r>
-              <a:t>Raw chest X-rays provide independent morphological signal (cardiomegaly, thoracic fat) that is orthogonal to demographic metadata (age, SDI score). Combining our from-scratch CNN image features with clinical EHR variables establishes a complete non-invasive opportunistic screening pipeline.</a:t>
+              </a:rPr>
+              <a:t>Stage 1 converts raw CXR into an independent numerical risk probability (predicted_prob). Stage 2 fuses this scalar with Age, Sex, BMI, and SDI.</a:t>
+            </a:r>
+          </a:p>
+          <a:p>
+            <a:pPr>
+              <a:spcAft>
+                <a:spcPts val="300"/>
+              </a:spcAft>
+            </a:pPr>
+            <a:r>
+              <a:rPr b="1" sz="1050">
+                <a:solidFill>
+                  <a:srgbClr val="34D399"/>
+                </a:solidFill>
+              </a:rPr>
+              <a:t>• AUC Surge (+0.2667 Jump): </a:t>
+            </a:r>
+            <a:r>
+              <a:rPr sz="1050">
+                <a:solidFill>
+                  <a:srgbClr val="FFFFFF"/>
+                </a:solidFill>
+              </a:rPr>
+              <a:t>Gradient Boosting fuses non-linear interactions, leaping from 0.6401 (CXR alone) and 0.6931 (Clinical alone) to a remarkable 0.9068 AUROC (AUPRC: 0.8196).</a:t>
+            </a:r>
+          </a:p>
+          <a:p>
+            <a:pPr>
+              <a:spcAft>
+                <a:spcPts val="300"/>
+              </a:spcAft>
+            </a:pPr>
+            <a:r>
+              <a:rPr b="1" sz="1050">
+                <a:solidFill>
+                  <a:srgbClr val="FB923C"/>
+                </a:solidFill>
+              </a:rPr>
+              <a:t>• False Alarm Elimination: </a:t>
+            </a:r>
+            <a:r>
+              <a:rPr sz="1050">
+                <a:solidFill>
+                  <a:srgbClr val="FFFFFF"/>
+                </a:solidFill>
+              </a:rPr>
+              <a:t>False positives plummet by 75% (from 260 in CXR alone down to 65), elevating Specificity to 89.88% and Precision to 76.62%.</a:t>
+            </a:r>
+          </a:p>
+          <a:p>
+            <a:pPr>
+              <a:spcAft>
+                <a:spcPts val="300"/>
+              </a:spcAft>
+            </a:pPr>
+            <a:r>
+              <a:rPr b="1" sz="1050">
+                <a:solidFill>
+                  <a:srgbClr val="FB923C"/>
+                </a:solidFill>
+              </a:rPr>
+              <a:t>• Feature Importance: </a:t>
+            </a:r>
+            <a:r>
+              <a:rPr sz="1050">
+                <a:solidFill>
+                  <a:srgbClr val="FFFFFF"/>
+                </a:solidFill>
+              </a:rPr>
+              <a:t>Age (51.6%), BMI (30.5%), CXR Numerical Score (9.2%), Sex (3.1%), SDI (1.9%). Chest X-ray contributes an orthogonal, statistically independent anatomical biomarker.</a:t>
             </a:r>
           </a:p>
         </p:txBody>
@@ -6920,7 +7813,7 @@
 </p:sld>
 </file>
 
-<file path=ppt/slides/slide7.xml><?xml version="1.0" encoding="utf-8"?>
+<file path=ppt/slides/slide8.xml><?xml version="1.0" encoding="utf-8"?>
 <p:sld xmlns:a="http://schemas.openxmlformats.org/drawingml/2006/main" xmlns:p="http://schemas.openxmlformats.org/presentationml/2006/main" xmlns:r="http://schemas.openxmlformats.org/officeDocument/2006/relationships">
   <p:cSld>
     <p:spTree>
@@ -7105,20 +7998,20 @@
               </a:spcAft>
             </a:pPr>
             <a:r>
-              <a:rPr b="1" sz="1150">
+              <a:rPr b="1" sz="1100">
                 <a:solidFill>
                   <a:srgbClr val="34D399"/>
                 </a:solidFill>
               </a:rPr>
-              <a:t>► predict_t2d_image.py: </a:t>
-            </a:r>
-            <a:r>
-              <a:rPr sz="1100">
+              <a:t>► train_multimodal_fusion.py: </a:t>
+            </a:r>
+            <a:r>
+              <a:rPr sz="1050">
                 <a:solidFill>
                   <a:srgbClr val="FFFFFF"/>
                 </a:solidFill>
               </a:rPr>
-              <a:t>Single-image and batch screener. Outputs binary flag (0=No, 1=T2D Risk), predicted probability, and risk tier (LOW, MODERATE, HIGH).</a:t>
+              <a:t>Two-stage fusion engine: converts CXRs to continuous risk scalar, then trains Gradient Boosting on clinical features.</a:t>
             </a:r>
           </a:p>
           <a:p>
@@ -7128,20 +8021,20 @@
               </a:spcAft>
             </a:pPr>
             <a:r>
-              <a:rPr b="1" sz="1150">
+              <a:rPr b="1" sz="1100">
                 <a:solidFill>
                   <a:srgbClr val="34D399"/>
                 </a:solidFill>
               </a:rPr>
-              <a:t>► predict_t2d_metadata.py: </a:t>
-            </a:r>
-            <a:r>
-              <a:rPr sz="1100">
+              <a:t>► predict_t2d_image.py: </a:t>
+            </a:r>
+            <a:r>
+              <a:rPr sz="1050">
                 <a:solidFill>
                   <a:srgbClr val="FFFFFF"/>
                 </a:solidFill>
               </a:rPr>
-              <a:t>Demographic and SDI metadata screener supporting full clinical tables with missing value imputation.</a:t>
+              <a:t>Single-image and batch CXR screener: outputs binary flag, continuous probability, and CTR risk tier.</a:t>
             </a:r>
           </a:p>
           <a:p>
@@ -7151,7 +8044,7 @@
               </a:spcAft>
             </a:pPr>
             <a:r>
-              <a:rPr b="1" sz="1150">
+              <a:rPr b="1" sz="1100">
                 <a:solidFill>
                   <a:srgbClr val="34D399"/>
                 </a:solidFill>
@@ -7159,12 +8052,12 @@
               <a:t>► train_from_scratch_dual.py: </a:t>
             </a:r>
             <a:r>
-              <a:rPr sz="1100">
+              <a:rPr sz="1050">
                 <a:solidFill>
                   <a:srgbClr val="FFFFFF"/>
                 </a:solidFill>
               </a:rPr>
-              <a:t>Full dual-cohort pipeline with StratifiedGroupKFold, memory caching, and automated OOF CSV export.</a:t>
+              <a:t>Full dual-cohort CNN pipeline with StratifiedGroupKFold, memory caching, and automated OOF CSV export.</a:t>
             </a:r>
           </a:p>
           <a:p>
@@ -7174,7 +8067,7 @@
               </a:spcAft>
             </a:pPr>
             <a:r>
-              <a:rPr b="1" sz="1150">
+              <a:rPr b="1" sz="1100">
                 <a:solidFill>
                   <a:srgbClr val="34D399"/>
                 </a:solidFill>
@@ -7182,7 +8075,7 @@
               <a:t>► classify_view_rad_dino.py: </a:t>
             </a:r>
             <a:r>
-              <a:rPr sz="1100">
+              <a:rPr sz="1050">
                 <a:solidFill>
                   <a:srgbClr val="FFFFFF"/>
                 </a:solidFill>
@@ -7254,20 +8147,20 @@
               </a:spcAft>
             </a:pPr>
             <a:r>
-              <a:rPr b="1" sz="1150">
+              <a:rPr b="1" sz="1100">
                 <a:solidFill>
                   <a:srgbClr val="FB923C"/>
                 </a:solidFill>
               </a:rPr>
-              <a:t>✓ oof_all_cxrs.csv: </a:t>
-            </a:r>
-            <a:r>
-              <a:rPr sz="1100">
+              <a:t>✓ oof_multimodal.csv: </a:t>
+            </a:r>
+            <a:r>
+              <a:rPr sz="1050">
                 <a:solidFill>
                   <a:srgbClr val="FFFFFF"/>
                 </a:solidFill>
               </a:rPr>
-              <a:t>949 individual patient out-of-fold predictions with image name, patient ID, actual label, probability, and assigned fold.</a:t>
+              <a:t>949 patient records with CXR risk score, multimodal predicted probability, and binary classification.</a:t>
             </a:r>
           </a:p>
           <a:p>
@@ -7277,20 +8170,20 @@
               </a:spcAft>
             </a:pPr>
             <a:r>
-              <a:rPr b="1" sz="1150">
+              <a:rPr b="1" sz="1100">
                 <a:solidFill>
                   <a:srgbClr val="FB923C"/>
                 </a:solidFill>
               </a:rPr>
-              <a:t>✓ oof_no_hazy.csv: </a:t>
-            </a:r>
-            <a:r>
-              <a:rPr sz="1100">
+              <a:t>✓ multimodal_benchmark_comparison.csv: </a:t>
+            </a:r>
+            <a:r>
+              <a:rPr sz="1050">
                 <a:solidFill>
                   <a:srgbClr val="FFFFFF"/>
                 </a:solidFill>
               </a:rPr>
-              <a:t>938 out-of-fold predictions excluding the 11 blurry images for benchmark reproducibility.</a:t>
+              <a:t>Complete 5-pipeline benchmark table (Pure CXR, Clinical alone, Linear, Gradient Boosting, Ensemble).</a:t>
             </a:r>
           </a:p>
           <a:p>
@@ -7300,20 +8193,20 @@
               </a:spcAft>
             </a:pPr>
             <a:r>
-              <a:rPr b="1" sz="1150">
+              <a:rPr b="1" sz="1100">
                 <a:solidFill>
                   <a:srgbClr val="FB923C"/>
                 </a:solidFill>
               </a:rPr>
-              <a:t>✓ scratch_models_comparison.csv: </a:t>
-            </a:r>
-            <a:r>
-              <a:rPr sz="1100">
+              <a:t>✓ train_test_split.csv &amp; test_set.csv: </a:t>
+            </a:r>
+            <a:r>
+              <a:rPr sz="1050">
                 <a:solidFill>
                   <a:srgbClr val="FFFFFF"/>
                 </a:solidFill>
               </a:rPr>
-              <a:t>Side-by-side AUROC, AUPRC, Accuracy, Recall, and Specificity benchmark table.</a:t>
+              <a:t>Strict 80/20 train-test splits (Folds 1-4 train N=760, Fold 5 test N=189) with 0 patient leakage.</a:t>
             </a:r>
           </a:p>
           <a:p>
@@ -7323,20 +8216,20 @@
               </a:spcAft>
             </a:pPr>
             <a:r>
-              <a:rPr b="1" sz="1150">
+              <a:rPr b="1" sz="1100">
                 <a:solidFill>
                   <a:srgbClr val="FB923C"/>
                 </a:solidFill>
               </a:rPr>
-              <a:t>✓ report.md: </a:t>
-            </a:r>
-            <a:r>
-              <a:rPr sz="1100">
+              <a:t>✓ oof_all_cxrs.csv &amp; oof_no_hazy.csv: </a:t>
+            </a:r>
+            <a:r>
+              <a:rPr sz="1050">
                 <a:solidFill>
                   <a:srgbClr val="FFFFFF"/>
                 </a:solidFill>
               </a:rPr>
-              <a:t>Comprehensive written report detailing methodology, hyperparameter choices, and clinical interpretations.</a:t>
+              <a:t>Raw image CNN out-of-fold predictions across All CXRs (N=949) vs No Hazy (N=938).</a:t>
             </a:r>
           </a:p>
           <a:p>
@@ -7346,7 +8239,7 @@
               </a:spcAft>
             </a:pPr>
             <a:r>
-              <a:rPr b="1" sz="1150">
+              <a:rPr b="1" sz="1100">
                 <a:solidFill>
                   <a:srgbClr val="FB923C"/>
                 </a:solidFill>
@@ -7354,12 +8247,12 @@
               <a:t>✓ HIPAA Compliant: </a:t>
             </a:r>
             <a:r>
-              <a:rPr sz="1100">
+              <a:rPr sz="1050">
                 <a:solidFill>
                   <a:srgbClr val="FFFFFF"/>
                 </a:solidFill>
               </a:rPr>
-              <a:t>Zero raw patient identifiers or DICOM binaries stored in git.</a:t>
+              <a:t>Zero raw patient radiographs or DICOM binaries stored in git.</a:t>
             </a:r>
           </a:p>
         </p:txBody>
@@ -7372,7 +8265,7 @@
 </p:sld>
 </file>
 
-<file path=ppt/slides/slide8.xml><?xml version="1.0" encoding="utf-8"?>
+<file path=ppt/slides/slide9.xml><?xml version="1.0" encoding="utf-8"?>
 <p:sld xmlns:a="http://schemas.openxmlformats.org/drawingml/2006/main" xmlns:p="http://schemas.openxmlformats.org/presentationml/2006/main" xmlns:r="http://schemas.openxmlformats.org/officeDocument/2006/relationships">
   <p:cSld>
     <p:spTree>

--- a/malek_and_angelo/malek/Malek_T2D_CNN_Presentation.pptx
+++ b/malek_and_angelo/malek/Malek_T2D_CNN_Presentation.pptx
@@ -14,6 +14,7 @@
     <p:sldId id="262" r:id="rId13"/>
     <p:sldId id="263" r:id="rId14"/>
     <p:sldId id="264" r:id="rId15"/>
+    <p:sldId id="265" r:id="rId16"/>
   </p:sldIdLst>
   <p:sldSz cx="12191695" cy="6858000" type="screen4x3"/>
   <p:notesSz cx="6858000" cy="9144000"/>
@@ -3281,6 +3282,309 @@
 </p:sld>
 </file>
 
+<file path=ppt/slides/slide10.xml><?xml version="1.0" encoding="utf-8"?>
+<p:sld xmlns:a="http://schemas.openxmlformats.org/drawingml/2006/main" xmlns:p="http://schemas.openxmlformats.org/presentationml/2006/main" xmlns:r="http://schemas.openxmlformats.org/officeDocument/2006/relationships">
+  <p:cSld>
+    <p:spTree>
+      <p:nvGrpSpPr>
+        <p:cNvPr id="1" name=""/>
+        <p:cNvGrpSpPr/>
+        <p:nvPr/>
+      </p:nvGrpSpPr>
+      <p:grpSpPr/>
+      <p:sp>
+        <p:nvSpPr>
+          <p:cNvPr id="2" name="Rectangle 1"/>
+          <p:cNvSpPr/>
+          <p:nvPr/>
+        </p:nvSpPr>
+        <p:spPr>
+          <a:xfrm>
+            <a:off x="0" y="0"/>
+            <a:ext cx="12191695" cy="6858000"/>
+          </a:xfrm>
+          <a:prstGeom prst="rect">
+            <a:avLst/>
+          </a:prstGeom>
+          <a:solidFill>
+            <a:srgbClr val="0F172A"/>
+          </a:solidFill>
+          <a:ln>
+            <a:noFill/>
+          </a:ln>
+        </p:spPr>
+        <p:style>
+          <a:lnRef idx="1">
+            <a:schemeClr val="accent1"/>
+          </a:lnRef>
+          <a:fillRef idx="3">
+            <a:schemeClr val="accent1"/>
+          </a:fillRef>
+          <a:effectRef idx="2">
+            <a:schemeClr val="accent1"/>
+          </a:effectRef>
+          <a:fontRef idx="minor">
+            <a:schemeClr val="lt1"/>
+          </a:fontRef>
+        </p:style>
+        <p:txBody>
+          <a:bodyPr rtlCol="0" anchor="ctr"/>
+          <a:lstStyle/>
+          <a:p>
+            <a:pPr algn="ctr"/>
+          </a:p>
+        </p:txBody>
+      </p:sp>
+      <p:sp>
+        <p:nvSpPr>
+          <p:cNvPr id="3" name="TextBox 2"/>
+          <p:cNvSpPr txBox="1"/>
+          <p:nvPr/>
+        </p:nvSpPr>
+        <p:spPr>
+          <a:xfrm>
+            <a:off x="731520" y="365760"/>
+            <a:ext cx="10698480" cy="320040"/>
+          </a:xfrm>
+          <a:prstGeom prst="rect">
+            <a:avLst/>
+          </a:prstGeom>
+          <a:noFill/>
+        </p:spPr>
+        <p:txBody>
+          <a:bodyPr wrap="square">
+            <a:spAutoFit/>
+          </a:bodyPr>
+          <a:lstStyle/>
+          <a:p>
+            <a:pPr>
+              <a:defRPr sz="1100" b="1">
+                <a:solidFill>
+                  <a:srgbClr val="38BDF8"/>
+                </a:solidFill>
+              </a:defRPr>
+            </a:pPr>
+            <a:r>
+              <a:t>CS 396 — ARTIFICIAL INTELLIGENCE IN HEALTHCARE</a:t>
+            </a:r>
+          </a:p>
+        </p:txBody>
+      </p:sp>
+      <p:sp>
+        <p:nvSpPr>
+          <p:cNvPr id="4" name="TextBox 3"/>
+          <p:cNvSpPr txBox="1"/>
+          <p:nvPr/>
+        </p:nvSpPr>
+        <p:spPr>
+          <a:xfrm>
+            <a:off x="731520" y="685800"/>
+            <a:ext cx="10698480" cy="640080"/>
+          </a:xfrm>
+          <a:prstGeom prst="rect">
+            <a:avLst/>
+          </a:prstGeom>
+          <a:noFill/>
+        </p:spPr>
+        <p:txBody>
+          <a:bodyPr wrap="square">
+            <a:spAutoFit/>
+          </a:bodyPr>
+          <a:lstStyle/>
+          <a:p>
+            <a:pPr>
+              <a:defRPr sz="2600" b="1">
+                <a:solidFill>
+                  <a:srgbClr val="FFFFFF"/>
+                </a:solidFill>
+              </a:defRPr>
+            </a:pPr>
+            <a:r>
+              <a:t>Key Takeaways &amp; Presentation Summary</a:t>
+            </a:r>
+          </a:p>
+        </p:txBody>
+      </p:sp>
+      <p:sp>
+        <p:nvSpPr>
+          <p:cNvPr id="5" name="Rounded Rectangle 4"/>
+          <p:cNvSpPr/>
+          <p:nvPr/>
+        </p:nvSpPr>
+        <p:spPr>
+          <a:xfrm>
+            <a:off x="731520" y="1463040"/>
+            <a:ext cx="10698480" cy="4754880"/>
+          </a:xfrm>
+          <a:prstGeom prst="roundRect">
+            <a:avLst/>
+          </a:prstGeom>
+          <a:solidFill>
+            <a:srgbClr val="1E293B"/>
+          </a:solidFill>
+          <a:ln>
+            <a:solidFill>
+              <a:srgbClr val="334155"/>
+            </a:solidFill>
+          </a:ln>
+        </p:spPr>
+        <p:style>
+          <a:lnRef idx="1">
+            <a:schemeClr val="accent1"/>
+          </a:lnRef>
+          <a:fillRef idx="3">
+            <a:schemeClr val="accent1"/>
+          </a:fillRef>
+          <a:effectRef idx="2">
+            <a:schemeClr val="accent1"/>
+          </a:effectRef>
+          <a:fontRef idx="minor">
+            <a:schemeClr val="lt1"/>
+          </a:fontRef>
+        </p:style>
+        <p:txBody>
+          <a:bodyPr rtlCol="0" anchor="ctr" wrap="square"/>
+          <a:lstStyle/>
+          <a:p>
+            <a:pPr algn="ctr">
+              <a:spcAft>
+                <a:spcPts val="1200"/>
+              </a:spcAft>
+              <a:defRPr sz="1800" b="1">
+                <a:solidFill>
+                  <a:srgbClr val="38BDF8"/>
+                </a:solidFill>
+              </a:defRPr>
+            </a:pPr>
+            <a:r>
+              <a:t>Summary for CS 396 Presentation (Thursday Oct 22nd)</a:t>
+            </a:r>
+          </a:p>
+          <a:p>
+            <a:pPr>
+              <a:spcAft>
+                <a:spcPts val="1000"/>
+              </a:spcAft>
+            </a:pPr>
+            <a:r>
+              <a:rPr b="1" sz="1200">
+                <a:solidFill>
+                  <a:srgbClr val="34D399"/>
+                </a:solidFill>
+              </a:rPr>
+              <a:t>★ Two-Stage Pipeline Success: </a:t>
+            </a:r>
+            <a:r>
+              <a:rPr sz="1150">
+                <a:solidFill>
+                  <a:srgbClr val="FFFFFF"/>
+                </a:solidFill>
+              </a:rPr>
+              <a:t>Converting chest radiographs into a continuous thoracic biomarker (CTR &amp; fat pads) and fusing with clinical covariates achieved an outstanding 0.9068 AUROC (AUPRC: 0.8196).</a:t>
+            </a:r>
+          </a:p>
+          <a:p>
+            <a:pPr>
+              <a:spcAft>
+                <a:spcPts val="1000"/>
+              </a:spcAft>
+            </a:pPr>
+            <a:r>
+              <a:rPr b="1" sz="1200">
+                <a:solidFill>
+                  <a:srgbClr val="34D399"/>
+                </a:solidFill>
+              </a:rPr>
+              <a:t>★ Optimized Screener (τ = 0.40): </a:t>
+            </a:r>
+            <a:r>
+              <a:rPr sz="1150">
+                <a:solidFill>
+                  <a:srgbClr val="FFFFFF"/>
+                </a:solidFill>
+              </a:rPr>
+              <a:t>Operating at threshold τ = 0.40 catches 80.78% of undiagnosed diabetics (Sensitivity) while preserving 83.49% specificity, cutting missed cases by 37.2%.</a:t>
+            </a:r>
+          </a:p>
+          <a:p>
+            <a:pPr>
+              <a:spcAft>
+                <a:spcPts val="1000"/>
+              </a:spcAft>
+            </a:pPr>
+            <a:r>
+              <a:rPr b="1" sz="1200">
+                <a:solidFill>
+                  <a:srgbClr val="34D399"/>
+                </a:solidFill>
+              </a:rPr>
+              <a:t>★ Scratch Beat Pretrained RAD-DINO: </a:t>
+            </a:r>
+            <a:r>
+              <a:rPr sz="1150">
+                <a:solidFill>
+                  <a:srgbClr val="FFFFFF"/>
+                </a:solidFill>
+              </a:rPr>
+              <a:t>Specialized supervised convolution outscored general contrastive vision transformers (0.6401 vs 0.5734 AUROC), showing that task-targeted training on medical targets captures critical organ geometry.</a:t>
+            </a:r>
+          </a:p>
+          <a:p>
+            <a:pPr>
+              <a:spcAft>
+                <a:spcPts val="1000"/>
+              </a:spcAft>
+            </a:pPr>
+            <a:r>
+              <a:rPr b="1" sz="1200">
+                <a:solidFill>
+                  <a:srgbClr val="34D399"/>
+                </a:solidFill>
+              </a:rPr>
+              <a:t>★ Data Diversity Beats Aggressive Filtering: </a:t>
+            </a:r>
+            <a:r>
+              <a:rPr sz="1150">
+                <a:solidFill>
+                  <a:srgbClr val="FFFFFF"/>
+                </a:solidFill>
+              </a:rPr>
+              <a:t>Excluding 11 hazy radiographs degraded sensitivity by 7.5% and AUROC by 0.022. Preserving natural clinical image variations enhances generalization in patient cohorts.</a:t>
+            </a:r>
+          </a:p>
+          <a:p>
+            <a:pPr>
+              <a:spcAft>
+                <a:spcPts val="1000"/>
+              </a:spcAft>
+            </a:pPr>
+            <a:r>
+              <a:rPr b="1" sz="1200">
+                <a:solidFill>
+                  <a:srgbClr val="34D399"/>
+                </a:solidFill>
+              </a:rPr>
+              <a:t>★ Clinical Impact: </a:t>
+            </a:r>
+            <a:r>
+              <a:rPr sz="1150">
+                <a:solidFill>
+                  <a:srgbClr val="FFFFFF"/>
+                </a:solidFill>
+              </a:rPr>
+              <a:t>Over 80% of diabetic patients can be flagged during unrelated routine chest X-rays (e.g. pre-op, cough, trauma), creating a zero-cost safety net to prompt definitive HbA1c diagnostic testing.</a:t>
+            </a:r>
+          </a:p>
+        </p:txBody>
+      </p:sp>
+    </p:spTree>
+  </p:cSld>
+  <p:clrMapOvr>
+    <a:masterClrMapping/>
+  </p:clrMapOvr>
+</p:sld>
+</file>
+
 <file path=ppt/slides/slide2.xml><?xml version="1.0" encoding="utf-8"?>
 <p:sld xmlns:a="http://schemas.openxmlformats.org/drawingml/2006/main" xmlns:p="http://schemas.openxmlformats.org/presentationml/2006/main" xmlns:r="http://schemas.openxmlformats.org/officeDocument/2006/relationships">
   <p:cSld>
@@ -7931,6 +8235,1576 @@
               </a:defRPr>
             </a:pPr>
             <a:r>
+              <a:t>Clinical Operating Point: Threshold Optimization (τ = 0.40)</a:t>
+            </a:r>
+          </a:p>
+        </p:txBody>
+      </p:sp>
+      <p:sp>
+        <p:nvSpPr>
+          <p:cNvPr id="5" name="Rounded Rectangle 4"/>
+          <p:cNvSpPr/>
+          <p:nvPr/>
+        </p:nvSpPr>
+        <p:spPr>
+          <a:xfrm>
+            <a:off x="731520" y="1371600"/>
+            <a:ext cx="2542032" cy="1463040"/>
+          </a:xfrm>
+          <a:prstGeom prst="roundRect">
+            <a:avLst/>
+          </a:prstGeom>
+          <a:solidFill>
+            <a:srgbClr val="1E293B"/>
+          </a:solidFill>
+          <a:ln>
+            <a:solidFill>
+              <a:srgbClr val="334155"/>
+            </a:solidFill>
+          </a:ln>
+        </p:spPr>
+        <p:style>
+          <a:lnRef idx="1">
+            <a:schemeClr val="accent1"/>
+          </a:lnRef>
+          <a:fillRef idx="3">
+            <a:schemeClr val="accent1"/>
+          </a:fillRef>
+          <a:effectRef idx="2">
+            <a:schemeClr val="accent1"/>
+          </a:effectRef>
+          <a:fontRef idx="minor">
+            <a:schemeClr val="lt1"/>
+          </a:fontRef>
+        </p:style>
+        <p:txBody>
+          <a:bodyPr rtlCol="0" anchor="ctr" wrap="square"/>
+          <a:lstStyle/>
+          <a:p>
+            <a:pPr algn="ctr">
+              <a:defRPr sz="1050" b="1">
+                <a:solidFill>
+                  <a:srgbClr val="34D399"/>
+                </a:solidFill>
+              </a:defRPr>
+            </a:pPr>
+            <a:r>
+              <a:t>RECALL (SENSITIVITY)</a:t>
+            </a:r>
+          </a:p>
+          <a:p>
+            <a:pPr>
+              <a:defRPr sz="2600" b="1">
+                <a:solidFill>
+                  <a:srgbClr val="FFFFFF"/>
+                </a:solidFill>
+              </a:defRPr>
+            </a:pPr>
+            <a:r>
+              <a:t>80.78%</a:t>
+            </a:r>
+          </a:p>
+          <a:p>
+            <a:pPr>
+              <a:defRPr sz="950">
+                <a:solidFill>
+                  <a:srgbClr val="94A3B8"/>
+                </a:solidFill>
+              </a:defRPr>
+            </a:pPr>
+            <a:r>
+              <a:t>248 / 307 Diabetics Caught</a:t>
+            </a:r>
+            <a:br/>
+            <a:r>
+              <a:t>(Cuts missed cases by 37.2%)</a:t>
+            </a:r>
+          </a:p>
+        </p:txBody>
+      </p:sp>
+      <p:sp>
+        <p:nvSpPr>
+          <p:cNvPr id="6" name="Rounded Rectangle 5"/>
+          <p:cNvSpPr/>
+          <p:nvPr/>
+        </p:nvSpPr>
+        <p:spPr>
+          <a:xfrm>
+            <a:off x="3456432" y="1371600"/>
+            <a:ext cx="2542032" cy="1463040"/>
+          </a:xfrm>
+          <a:prstGeom prst="roundRect">
+            <a:avLst/>
+          </a:prstGeom>
+          <a:solidFill>
+            <a:srgbClr val="1E293B"/>
+          </a:solidFill>
+          <a:ln>
+            <a:solidFill>
+              <a:srgbClr val="334155"/>
+            </a:solidFill>
+          </a:ln>
+        </p:spPr>
+        <p:style>
+          <a:lnRef idx="1">
+            <a:schemeClr val="accent1"/>
+          </a:lnRef>
+          <a:fillRef idx="3">
+            <a:schemeClr val="accent1"/>
+          </a:fillRef>
+          <a:effectRef idx="2">
+            <a:schemeClr val="accent1"/>
+          </a:effectRef>
+          <a:fontRef idx="minor">
+            <a:schemeClr val="lt1"/>
+          </a:fontRef>
+        </p:style>
+        <p:txBody>
+          <a:bodyPr rtlCol="0" anchor="ctr" wrap="square"/>
+          <a:lstStyle/>
+          <a:p>
+            <a:pPr algn="ctr">
+              <a:defRPr sz="1050" b="1">
+                <a:solidFill>
+                  <a:srgbClr val="38BDF8"/>
+                </a:solidFill>
+              </a:defRPr>
+            </a:pPr>
+            <a:r>
+              <a:t>SPECIFICITY (TNR)</a:t>
+            </a:r>
+          </a:p>
+          <a:p>
+            <a:pPr>
+              <a:defRPr sz="2600" b="1">
+                <a:solidFill>
+                  <a:srgbClr val="FFFFFF"/>
+                </a:solidFill>
+              </a:defRPr>
+            </a:pPr>
+            <a:r>
+              <a:t>83.49%</a:t>
+            </a:r>
+          </a:p>
+          <a:p>
+            <a:pPr>
+              <a:defRPr sz="950">
+                <a:solidFill>
+                  <a:srgbClr val="94A3B8"/>
+                </a:solidFill>
+              </a:defRPr>
+            </a:pPr>
+            <a:r>
+              <a:t>536 / 642 Normals Cleared</a:t>
+            </a:r>
+            <a:br/>
+            <a:r>
+              <a:t>(Prevents over-testing)</a:t>
+            </a:r>
+          </a:p>
+        </p:txBody>
+      </p:sp>
+      <p:sp>
+        <p:nvSpPr>
+          <p:cNvPr id="7" name="Rounded Rectangle 6"/>
+          <p:cNvSpPr/>
+          <p:nvPr/>
+        </p:nvSpPr>
+        <p:spPr>
+          <a:xfrm>
+            <a:off x="6181344" y="1371600"/>
+            <a:ext cx="2542032" cy="1463040"/>
+          </a:xfrm>
+          <a:prstGeom prst="roundRect">
+            <a:avLst/>
+          </a:prstGeom>
+          <a:solidFill>
+            <a:srgbClr val="1E293B"/>
+          </a:solidFill>
+          <a:ln>
+            <a:solidFill>
+              <a:srgbClr val="334155"/>
+            </a:solidFill>
+          </a:ln>
+        </p:spPr>
+        <p:style>
+          <a:lnRef idx="1">
+            <a:schemeClr val="accent1"/>
+          </a:lnRef>
+          <a:fillRef idx="3">
+            <a:schemeClr val="accent1"/>
+          </a:fillRef>
+          <a:effectRef idx="2">
+            <a:schemeClr val="accent1"/>
+          </a:effectRef>
+          <a:fontRef idx="minor">
+            <a:schemeClr val="lt1"/>
+          </a:fontRef>
+        </p:style>
+        <p:txBody>
+          <a:bodyPr rtlCol="0" anchor="ctr" wrap="square"/>
+          <a:lstStyle/>
+          <a:p>
+            <a:pPr algn="ctr">
+              <a:defRPr sz="1050" b="1">
+                <a:solidFill>
+                  <a:srgbClr val="FB923C"/>
+                </a:solidFill>
+              </a:defRPr>
+            </a:pPr>
+            <a:r>
+              <a:t>FALSE POSITIVES</a:t>
+            </a:r>
+          </a:p>
+          <a:p>
+            <a:pPr>
+              <a:defRPr sz="2600" b="1">
+                <a:solidFill>
+                  <a:srgbClr val="FFFFFF"/>
+                </a:solidFill>
+              </a:defRPr>
+            </a:pPr>
+            <a:r>
+              <a:t>106</a:t>
+            </a:r>
+          </a:p>
+          <a:p>
+            <a:pPr>
+              <a:defRPr sz="950">
+                <a:solidFill>
+                  <a:srgbClr val="94A3B8"/>
+                </a:solidFill>
+              </a:defRPr>
+            </a:pPr>
+            <a:r>
+              <a:t>vs. 260 in Pure CXR</a:t>
+            </a:r>
+            <a:br/>
+            <a:r>
+              <a:t>(2.4× fewer false alarms)</a:t>
+            </a:r>
+          </a:p>
+        </p:txBody>
+      </p:sp>
+      <p:sp>
+        <p:nvSpPr>
+          <p:cNvPr id="8" name="Rounded Rectangle 7"/>
+          <p:cNvSpPr/>
+          <p:nvPr/>
+        </p:nvSpPr>
+        <p:spPr>
+          <a:xfrm>
+            <a:off x="8906256" y="1371600"/>
+            <a:ext cx="2542032" cy="1463040"/>
+          </a:xfrm>
+          <a:prstGeom prst="roundRect">
+            <a:avLst/>
+          </a:prstGeom>
+          <a:solidFill>
+            <a:srgbClr val="1E293B"/>
+          </a:solidFill>
+          <a:ln>
+            <a:solidFill>
+              <a:srgbClr val="334155"/>
+            </a:solidFill>
+          </a:ln>
+        </p:spPr>
+        <p:style>
+          <a:lnRef idx="1">
+            <a:schemeClr val="accent1"/>
+          </a:lnRef>
+          <a:fillRef idx="3">
+            <a:schemeClr val="accent1"/>
+          </a:fillRef>
+          <a:effectRef idx="2">
+            <a:schemeClr val="accent1"/>
+          </a:effectRef>
+          <a:fontRef idx="minor">
+            <a:schemeClr val="lt1"/>
+          </a:fontRef>
+        </p:style>
+        <p:txBody>
+          <a:bodyPr rtlCol="0" anchor="ctr" wrap="square"/>
+          <a:lstStyle/>
+          <a:p>
+            <a:pPr algn="ctr">
+              <a:defRPr sz="1050" b="1">
+                <a:solidFill>
+                  <a:srgbClr val="34D399"/>
+                </a:solidFill>
+              </a:defRPr>
+            </a:pPr>
+            <a:r>
+              <a:t>PEAK F1-SCORE</a:t>
+            </a:r>
+          </a:p>
+          <a:p>
+            <a:pPr>
+              <a:defRPr sz="2600" b="1">
+                <a:solidFill>
+                  <a:srgbClr val="FFFFFF"/>
+                </a:solidFill>
+              </a:defRPr>
+            </a:pPr>
+            <a:r>
+              <a:t>0.7504</a:t>
+            </a:r>
+          </a:p>
+          <a:p>
+            <a:pPr>
+              <a:defRPr sz="950">
+                <a:solidFill>
+                  <a:srgbClr val="94A3B8"/>
+                </a:solidFill>
+              </a:defRPr>
+            </a:pPr>
+            <a:r>
+              <a:t>Optimal Precision-Recall</a:t>
+            </a:r>
+            <a:br/>
+            <a:r>
+              <a:t>Harmonic Balance</a:t>
+            </a:r>
+          </a:p>
+        </p:txBody>
+      </p:sp>
+      <p:graphicFrame>
+        <p:nvGraphicFramePr>
+          <p:cNvPr id="9" name="Table 8"/>
+          <p:cNvGraphicFramePr>
+            <a:graphicFrameLocks noGrp="1"/>
+          </p:cNvGraphicFramePr>
+          <p:nvPr/>
+        </p:nvGraphicFramePr>
+        <p:xfrm>
+          <a:off x="731520" y="2971800"/>
+          <a:ext cx="6217920" cy="3474720"/>
+        </p:xfrm>
+        <a:graphic>
+          <a:graphicData uri="http://schemas.openxmlformats.org/drawingml/2006/table">
+            <a:tbl>
+              <a:tblPr firstRow="1" bandRow="1">
+                <a:tableStyleId>{5C22544A-7EE6-4342-B048-85BDC9FD1C3A}</a:tableStyleId>
+              </a:tblPr>
+              <a:tblGrid>
+                <a:gridCol w="914400"/>
+                <a:gridCol w="640080"/>
+                <a:gridCol w="640080"/>
+                <a:gridCol w="640080"/>
+                <a:gridCol w="640080"/>
+                <a:gridCol w="914400"/>
+                <a:gridCol w="914400"/>
+                <a:gridCol w="914400"/>
+              </a:tblGrid>
+              <a:tr h="694944">
+                <a:tc>
+                  <a:txBody>
+                    <a:bodyPr/>
+                    <a:lstStyle/>
+                    <a:p>
+                      <a:pPr>
+                        <a:defRPr sz="1000" b="1">
+                          <a:solidFill>
+                            <a:srgbClr val="38BDF8"/>
+                          </a:solidFill>
+                        </a:defRPr>
+                      </a:pPr>
+                      <a:r>
+                        <a:t>Threshold</a:t>
+                      </a:r>
+                    </a:p>
+                  </a:txBody>
+                  <a:tcPr>
+                    <a:solidFill>
+                      <a:srgbClr val="28354C"/>
+                    </a:solidFill>
+                  </a:tcPr>
+                </a:tc>
+                <a:tc>
+                  <a:txBody>
+                    <a:bodyPr/>
+                    <a:lstStyle/>
+                    <a:p>
+                      <a:pPr>
+                        <a:defRPr sz="1000" b="1">
+                          <a:solidFill>
+                            <a:srgbClr val="38BDF8"/>
+                          </a:solidFill>
+                        </a:defRPr>
+                      </a:pPr>
+                      <a:r>
+                        <a:t>TP</a:t>
+                      </a:r>
+                    </a:p>
+                  </a:txBody>
+                  <a:tcPr>
+                    <a:solidFill>
+                      <a:srgbClr val="28354C"/>
+                    </a:solidFill>
+                  </a:tcPr>
+                </a:tc>
+                <a:tc>
+                  <a:txBody>
+                    <a:bodyPr/>
+                    <a:lstStyle/>
+                    <a:p>
+                      <a:pPr>
+                        <a:defRPr sz="1000" b="1">
+                          <a:solidFill>
+                            <a:srgbClr val="38BDF8"/>
+                          </a:solidFill>
+                        </a:defRPr>
+                      </a:pPr>
+                      <a:r>
+                        <a:t>FP</a:t>
+                      </a:r>
+                    </a:p>
+                  </a:txBody>
+                  <a:tcPr>
+                    <a:solidFill>
+                      <a:srgbClr val="28354C"/>
+                    </a:solidFill>
+                  </a:tcPr>
+                </a:tc>
+                <a:tc>
+                  <a:txBody>
+                    <a:bodyPr/>
+                    <a:lstStyle/>
+                    <a:p>
+                      <a:pPr>
+                        <a:defRPr sz="1000" b="1">
+                          <a:solidFill>
+                            <a:srgbClr val="38BDF8"/>
+                          </a:solidFill>
+                        </a:defRPr>
+                      </a:pPr>
+                      <a:r>
+                        <a:t>TN</a:t>
+                      </a:r>
+                    </a:p>
+                  </a:txBody>
+                  <a:tcPr>
+                    <a:solidFill>
+                      <a:srgbClr val="28354C"/>
+                    </a:solidFill>
+                  </a:tcPr>
+                </a:tc>
+                <a:tc>
+                  <a:txBody>
+                    <a:bodyPr/>
+                    <a:lstStyle/>
+                    <a:p>
+                      <a:pPr>
+                        <a:defRPr sz="1000" b="1">
+                          <a:solidFill>
+                            <a:srgbClr val="38BDF8"/>
+                          </a:solidFill>
+                        </a:defRPr>
+                      </a:pPr>
+                      <a:r>
+                        <a:t>FN</a:t>
+                      </a:r>
+                    </a:p>
+                  </a:txBody>
+                  <a:tcPr>
+                    <a:solidFill>
+                      <a:srgbClr val="28354C"/>
+                    </a:solidFill>
+                  </a:tcPr>
+                </a:tc>
+                <a:tc>
+                  <a:txBody>
+                    <a:bodyPr/>
+                    <a:lstStyle/>
+                    <a:p>
+                      <a:pPr>
+                        <a:defRPr sz="1000" b="1">
+                          <a:solidFill>
+                            <a:srgbClr val="38BDF8"/>
+                          </a:solidFill>
+                        </a:defRPr>
+                      </a:pPr>
+                      <a:r>
+                        <a:t>Recall</a:t>
+                      </a:r>
+                    </a:p>
+                  </a:txBody>
+                  <a:tcPr>
+                    <a:solidFill>
+                      <a:srgbClr val="28354C"/>
+                    </a:solidFill>
+                  </a:tcPr>
+                </a:tc>
+                <a:tc>
+                  <a:txBody>
+                    <a:bodyPr/>
+                    <a:lstStyle/>
+                    <a:p>
+                      <a:pPr>
+                        <a:defRPr sz="1000" b="1">
+                          <a:solidFill>
+                            <a:srgbClr val="38BDF8"/>
+                          </a:solidFill>
+                        </a:defRPr>
+                      </a:pPr>
+                      <a:r>
+                        <a:t>Specificity</a:t>
+                      </a:r>
+                    </a:p>
+                  </a:txBody>
+                  <a:tcPr>
+                    <a:solidFill>
+                      <a:srgbClr val="28354C"/>
+                    </a:solidFill>
+                  </a:tcPr>
+                </a:tc>
+                <a:tc>
+                  <a:txBody>
+                    <a:bodyPr/>
+                    <a:lstStyle/>
+                    <a:p>
+                      <a:pPr>
+                        <a:defRPr sz="1000" b="1">
+                          <a:solidFill>
+                            <a:srgbClr val="38BDF8"/>
+                          </a:solidFill>
+                        </a:defRPr>
+                      </a:pPr>
+                      <a:r>
+                        <a:t>Precision</a:t>
+                      </a:r>
+                    </a:p>
+                  </a:txBody>
+                  <a:tcPr>
+                    <a:solidFill>
+                      <a:srgbClr val="28354C"/>
+                    </a:solidFill>
+                  </a:tcPr>
+                </a:tc>
+              </a:tr>
+              <a:tr h="694944">
+                <a:tc>
+                  <a:txBody>
+                    <a:bodyPr/>
+                    <a:lstStyle/>
+                    <a:p>
+                      <a:pPr>
+                        <a:defRPr sz="950">
+                          <a:solidFill>
+                            <a:srgbClr val="FFFFFF"/>
+                          </a:solidFill>
+                        </a:defRPr>
+                      </a:pPr>
+                      <a:r>
+                        <a:t>0.50 (Default)</a:t>
+                      </a:r>
+                    </a:p>
+                  </a:txBody>
+                  <a:tcPr>
+                    <a:solidFill>
+                      <a:srgbClr val="1E293B"/>
+                    </a:solidFill>
+                  </a:tcPr>
+                </a:tc>
+                <a:tc>
+                  <a:txBody>
+                    <a:bodyPr/>
+                    <a:lstStyle/>
+                    <a:p>
+                      <a:pPr>
+                        <a:defRPr sz="950">
+                          <a:solidFill>
+                            <a:srgbClr val="FFFFFF"/>
+                          </a:solidFill>
+                        </a:defRPr>
+                      </a:pPr>
+                      <a:r>
+                        <a:t>213</a:t>
+                      </a:r>
+                    </a:p>
+                  </a:txBody>
+                  <a:tcPr>
+                    <a:solidFill>
+                      <a:srgbClr val="1E293B"/>
+                    </a:solidFill>
+                  </a:tcPr>
+                </a:tc>
+                <a:tc>
+                  <a:txBody>
+                    <a:bodyPr/>
+                    <a:lstStyle/>
+                    <a:p>
+                      <a:pPr>
+                        <a:defRPr sz="950">
+                          <a:solidFill>
+                            <a:srgbClr val="FFFFFF"/>
+                          </a:solidFill>
+                        </a:defRPr>
+                      </a:pPr>
+                      <a:r>
+                        <a:t>65</a:t>
+                      </a:r>
+                    </a:p>
+                  </a:txBody>
+                  <a:tcPr>
+                    <a:solidFill>
+                      <a:srgbClr val="1E293B"/>
+                    </a:solidFill>
+                  </a:tcPr>
+                </a:tc>
+                <a:tc>
+                  <a:txBody>
+                    <a:bodyPr/>
+                    <a:lstStyle/>
+                    <a:p>
+                      <a:pPr>
+                        <a:defRPr sz="950">
+                          <a:solidFill>
+                            <a:srgbClr val="FFFFFF"/>
+                          </a:solidFill>
+                        </a:defRPr>
+                      </a:pPr>
+                      <a:r>
+                        <a:t>577</a:t>
+                      </a:r>
+                    </a:p>
+                  </a:txBody>
+                  <a:tcPr>
+                    <a:solidFill>
+                      <a:srgbClr val="1E293B"/>
+                    </a:solidFill>
+                  </a:tcPr>
+                </a:tc>
+                <a:tc>
+                  <a:txBody>
+                    <a:bodyPr/>
+                    <a:lstStyle/>
+                    <a:p>
+                      <a:pPr>
+                        <a:defRPr sz="950">
+                          <a:solidFill>
+                            <a:srgbClr val="FFFFFF"/>
+                          </a:solidFill>
+                        </a:defRPr>
+                      </a:pPr>
+                      <a:r>
+                        <a:t>94</a:t>
+                      </a:r>
+                    </a:p>
+                  </a:txBody>
+                  <a:tcPr>
+                    <a:solidFill>
+                      <a:srgbClr val="1E293B"/>
+                    </a:solidFill>
+                  </a:tcPr>
+                </a:tc>
+                <a:tc>
+                  <a:txBody>
+                    <a:bodyPr/>
+                    <a:lstStyle/>
+                    <a:p>
+                      <a:pPr>
+                        <a:defRPr sz="950">
+                          <a:solidFill>
+                            <a:srgbClr val="FFFFFF"/>
+                          </a:solidFill>
+                        </a:defRPr>
+                      </a:pPr>
+                      <a:r>
+                        <a:t>69.38%</a:t>
+                      </a:r>
+                    </a:p>
+                  </a:txBody>
+                  <a:tcPr>
+                    <a:solidFill>
+                      <a:srgbClr val="1E293B"/>
+                    </a:solidFill>
+                  </a:tcPr>
+                </a:tc>
+                <a:tc>
+                  <a:txBody>
+                    <a:bodyPr/>
+                    <a:lstStyle/>
+                    <a:p>
+                      <a:pPr>
+                        <a:defRPr sz="950">
+                          <a:solidFill>
+                            <a:srgbClr val="FFFFFF"/>
+                          </a:solidFill>
+                        </a:defRPr>
+                      </a:pPr>
+                      <a:r>
+                        <a:t>89.88%</a:t>
+                      </a:r>
+                    </a:p>
+                  </a:txBody>
+                  <a:tcPr>
+                    <a:solidFill>
+                      <a:srgbClr val="1E293B"/>
+                    </a:solidFill>
+                  </a:tcPr>
+                </a:tc>
+                <a:tc>
+                  <a:txBody>
+                    <a:bodyPr/>
+                    <a:lstStyle/>
+                    <a:p>
+                      <a:pPr>
+                        <a:defRPr sz="950">
+                          <a:solidFill>
+                            <a:srgbClr val="FFFFFF"/>
+                          </a:solidFill>
+                        </a:defRPr>
+                      </a:pPr>
+                      <a:r>
+                        <a:t>76.62%</a:t>
+                      </a:r>
+                    </a:p>
+                  </a:txBody>
+                  <a:tcPr>
+                    <a:solidFill>
+                      <a:srgbClr val="1E293B"/>
+                    </a:solidFill>
+                  </a:tcPr>
+                </a:tc>
+              </a:tr>
+              <a:tr h="694944">
+                <a:tc>
+                  <a:txBody>
+                    <a:bodyPr/>
+                    <a:lstStyle/>
+                    <a:p>
+                      <a:pPr>
+                        <a:defRPr sz="950" b="1">
+                          <a:solidFill>
+                            <a:srgbClr val="34D399"/>
+                          </a:solidFill>
+                        </a:defRPr>
+                      </a:pPr>
+                      <a:r>
+                        <a:t>0.40 (Optimal)</a:t>
+                      </a:r>
+                    </a:p>
+                  </a:txBody>
+                  <a:tcPr>
+                    <a:solidFill>
+                      <a:srgbClr val="25344B"/>
+                    </a:solidFill>
+                  </a:tcPr>
+                </a:tc>
+                <a:tc>
+                  <a:txBody>
+                    <a:bodyPr/>
+                    <a:lstStyle/>
+                    <a:p>
+                      <a:pPr>
+                        <a:defRPr sz="950" b="1">
+                          <a:solidFill>
+                            <a:srgbClr val="FFFFFF"/>
+                          </a:solidFill>
+                        </a:defRPr>
+                      </a:pPr>
+                      <a:r>
+                        <a:t>248</a:t>
+                      </a:r>
+                    </a:p>
+                  </a:txBody>
+                  <a:tcPr>
+                    <a:solidFill>
+                      <a:srgbClr val="25344B"/>
+                    </a:solidFill>
+                  </a:tcPr>
+                </a:tc>
+                <a:tc>
+                  <a:txBody>
+                    <a:bodyPr/>
+                    <a:lstStyle/>
+                    <a:p>
+                      <a:pPr>
+                        <a:defRPr sz="950" b="1">
+                          <a:solidFill>
+                            <a:srgbClr val="FB923C"/>
+                          </a:solidFill>
+                        </a:defRPr>
+                      </a:pPr>
+                      <a:r>
+                        <a:t>106</a:t>
+                      </a:r>
+                    </a:p>
+                  </a:txBody>
+                  <a:tcPr>
+                    <a:solidFill>
+                      <a:srgbClr val="25344B"/>
+                    </a:solidFill>
+                  </a:tcPr>
+                </a:tc>
+                <a:tc>
+                  <a:txBody>
+                    <a:bodyPr/>
+                    <a:lstStyle/>
+                    <a:p>
+                      <a:pPr>
+                        <a:defRPr sz="950" b="1">
+                          <a:solidFill>
+                            <a:srgbClr val="FFFFFF"/>
+                          </a:solidFill>
+                        </a:defRPr>
+                      </a:pPr>
+                      <a:r>
+                        <a:t>536</a:t>
+                      </a:r>
+                    </a:p>
+                  </a:txBody>
+                  <a:tcPr>
+                    <a:solidFill>
+                      <a:srgbClr val="25344B"/>
+                    </a:solidFill>
+                  </a:tcPr>
+                </a:tc>
+                <a:tc>
+                  <a:txBody>
+                    <a:bodyPr/>
+                    <a:lstStyle/>
+                    <a:p>
+                      <a:pPr>
+                        <a:defRPr sz="950" b="1">
+                          <a:solidFill>
+                            <a:srgbClr val="FFFFFF"/>
+                          </a:solidFill>
+                        </a:defRPr>
+                      </a:pPr>
+                      <a:r>
+                        <a:t>59</a:t>
+                      </a:r>
+                    </a:p>
+                  </a:txBody>
+                  <a:tcPr>
+                    <a:solidFill>
+                      <a:srgbClr val="25344B"/>
+                    </a:solidFill>
+                  </a:tcPr>
+                </a:tc>
+                <a:tc>
+                  <a:txBody>
+                    <a:bodyPr/>
+                    <a:lstStyle/>
+                    <a:p>
+                      <a:pPr>
+                        <a:defRPr sz="950" b="1">
+                          <a:solidFill>
+                            <a:srgbClr val="34D399"/>
+                          </a:solidFill>
+                        </a:defRPr>
+                      </a:pPr>
+                      <a:r>
+                        <a:t>80.78%</a:t>
+                      </a:r>
+                    </a:p>
+                  </a:txBody>
+                  <a:tcPr>
+                    <a:solidFill>
+                      <a:srgbClr val="25344B"/>
+                    </a:solidFill>
+                  </a:tcPr>
+                </a:tc>
+                <a:tc>
+                  <a:txBody>
+                    <a:bodyPr/>
+                    <a:lstStyle/>
+                    <a:p>
+                      <a:pPr>
+                        <a:defRPr sz="950" b="1">
+                          <a:solidFill>
+                            <a:srgbClr val="FFFFFF"/>
+                          </a:solidFill>
+                        </a:defRPr>
+                      </a:pPr>
+                      <a:r>
+                        <a:t>83.49%</a:t>
+                      </a:r>
+                    </a:p>
+                  </a:txBody>
+                  <a:tcPr>
+                    <a:solidFill>
+                      <a:srgbClr val="25344B"/>
+                    </a:solidFill>
+                  </a:tcPr>
+                </a:tc>
+                <a:tc>
+                  <a:txBody>
+                    <a:bodyPr/>
+                    <a:lstStyle/>
+                    <a:p>
+                      <a:pPr>
+                        <a:defRPr sz="950" b="1">
+                          <a:solidFill>
+                            <a:srgbClr val="FFFFFF"/>
+                          </a:solidFill>
+                        </a:defRPr>
+                      </a:pPr>
+                      <a:r>
+                        <a:t>70.06%</a:t>
+                      </a:r>
+                    </a:p>
+                  </a:txBody>
+                  <a:tcPr>
+                    <a:solidFill>
+                      <a:srgbClr val="25344B"/>
+                    </a:solidFill>
+                  </a:tcPr>
+                </a:tc>
+              </a:tr>
+              <a:tr h="694944">
+                <a:tc>
+                  <a:txBody>
+                    <a:bodyPr/>
+                    <a:lstStyle/>
+                    <a:p>
+                      <a:pPr>
+                        <a:defRPr sz="950">
+                          <a:solidFill>
+                            <a:srgbClr val="FFFFFF"/>
+                          </a:solidFill>
+                        </a:defRPr>
+                      </a:pPr>
+                      <a:r>
+                        <a:t>0.35 (Aggressive)</a:t>
+                      </a:r>
+                    </a:p>
+                  </a:txBody>
+                  <a:tcPr>
+                    <a:solidFill>
+                      <a:srgbClr val="1E293B"/>
+                    </a:solidFill>
+                  </a:tcPr>
+                </a:tc>
+                <a:tc>
+                  <a:txBody>
+                    <a:bodyPr/>
+                    <a:lstStyle/>
+                    <a:p>
+                      <a:pPr>
+                        <a:defRPr sz="950">
+                          <a:solidFill>
+                            <a:srgbClr val="FFFFFF"/>
+                          </a:solidFill>
+                        </a:defRPr>
+                      </a:pPr>
+                      <a:r>
+                        <a:t>259</a:t>
+                      </a:r>
+                    </a:p>
+                  </a:txBody>
+                  <a:tcPr>
+                    <a:solidFill>
+                      <a:srgbClr val="1E293B"/>
+                    </a:solidFill>
+                  </a:tcPr>
+                </a:tc>
+                <a:tc>
+                  <a:txBody>
+                    <a:bodyPr/>
+                    <a:lstStyle/>
+                    <a:p>
+                      <a:pPr>
+                        <a:defRPr sz="950">
+                          <a:solidFill>
+                            <a:srgbClr val="FFFFFF"/>
+                          </a:solidFill>
+                        </a:defRPr>
+                      </a:pPr>
+                      <a:r>
+                        <a:t>133</a:t>
+                      </a:r>
+                    </a:p>
+                  </a:txBody>
+                  <a:tcPr>
+                    <a:solidFill>
+                      <a:srgbClr val="1E293B"/>
+                    </a:solidFill>
+                  </a:tcPr>
+                </a:tc>
+                <a:tc>
+                  <a:txBody>
+                    <a:bodyPr/>
+                    <a:lstStyle/>
+                    <a:p>
+                      <a:pPr>
+                        <a:defRPr sz="950">
+                          <a:solidFill>
+                            <a:srgbClr val="FFFFFF"/>
+                          </a:solidFill>
+                        </a:defRPr>
+                      </a:pPr>
+                      <a:r>
+                        <a:t>509</a:t>
+                      </a:r>
+                    </a:p>
+                  </a:txBody>
+                  <a:tcPr>
+                    <a:solidFill>
+                      <a:srgbClr val="1E293B"/>
+                    </a:solidFill>
+                  </a:tcPr>
+                </a:tc>
+                <a:tc>
+                  <a:txBody>
+                    <a:bodyPr/>
+                    <a:lstStyle/>
+                    <a:p>
+                      <a:pPr>
+                        <a:defRPr sz="950">
+                          <a:solidFill>
+                            <a:srgbClr val="FFFFFF"/>
+                          </a:solidFill>
+                        </a:defRPr>
+                      </a:pPr>
+                      <a:r>
+                        <a:t>48</a:t>
+                      </a:r>
+                    </a:p>
+                  </a:txBody>
+                  <a:tcPr>
+                    <a:solidFill>
+                      <a:srgbClr val="1E293B"/>
+                    </a:solidFill>
+                  </a:tcPr>
+                </a:tc>
+                <a:tc>
+                  <a:txBody>
+                    <a:bodyPr/>
+                    <a:lstStyle/>
+                    <a:p>
+                      <a:pPr>
+                        <a:defRPr sz="950">
+                          <a:solidFill>
+                            <a:srgbClr val="FFFFFF"/>
+                          </a:solidFill>
+                        </a:defRPr>
+                      </a:pPr>
+                      <a:r>
+                        <a:t>84.36%</a:t>
+                      </a:r>
+                    </a:p>
+                  </a:txBody>
+                  <a:tcPr>
+                    <a:solidFill>
+                      <a:srgbClr val="1E293B"/>
+                    </a:solidFill>
+                  </a:tcPr>
+                </a:tc>
+                <a:tc>
+                  <a:txBody>
+                    <a:bodyPr/>
+                    <a:lstStyle/>
+                    <a:p>
+                      <a:pPr>
+                        <a:defRPr sz="950">
+                          <a:solidFill>
+                            <a:srgbClr val="FFFFFF"/>
+                          </a:solidFill>
+                        </a:defRPr>
+                      </a:pPr>
+                      <a:r>
+                        <a:t>79.28%</a:t>
+                      </a:r>
+                    </a:p>
+                  </a:txBody>
+                  <a:tcPr>
+                    <a:solidFill>
+                      <a:srgbClr val="1E293B"/>
+                    </a:solidFill>
+                  </a:tcPr>
+                </a:tc>
+                <a:tc>
+                  <a:txBody>
+                    <a:bodyPr/>
+                    <a:lstStyle/>
+                    <a:p>
+                      <a:pPr>
+                        <a:defRPr sz="950">
+                          <a:solidFill>
+                            <a:srgbClr val="FFFFFF"/>
+                          </a:solidFill>
+                        </a:defRPr>
+                      </a:pPr>
+                      <a:r>
+                        <a:t>66.07%</a:t>
+                      </a:r>
+                    </a:p>
+                  </a:txBody>
+                  <a:tcPr>
+                    <a:solidFill>
+                      <a:srgbClr val="1E293B"/>
+                    </a:solidFill>
+                  </a:tcPr>
+                </a:tc>
+              </a:tr>
+              <a:tr h="694944">
+                <a:tc>
+                  <a:txBody>
+                    <a:bodyPr/>
+                    <a:lstStyle/>
+                    <a:p>
+                      <a:pPr>
+                        <a:defRPr sz="950">
+                          <a:solidFill>
+                            <a:srgbClr val="FFFFFF"/>
+                          </a:solidFill>
+                        </a:defRPr>
+                      </a:pPr>
+                      <a:r>
+                        <a:t>0.30 (High Catch)</a:t>
+                      </a:r>
+                    </a:p>
+                  </a:txBody>
+                  <a:tcPr>
+                    <a:solidFill>
+                      <a:srgbClr val="18212F"/>
+                    </a:solidFill>
+                  </a:tcPr>
+                </a:tc>
+                <a:tc>
+                  <a:txBody>
+                    <a:bodyPr/>
+                    <a:lstStyle/>
+                    <a:p>
+                      <a:pPr>
+                        <a:defRPr sz="950">
+                          <a:solidFill>
+                            <a:srgbClr val="FFFFFF"/>
+                          </a:solidFill>
+                        </a:defRPr>
+                      </a:pPr>
+                      <a:r>
+                        <a:t>273</a:t>
+                      </a:r>
+                    </a:p>
+                  </a:txBody>
+                  <a:tcPr>
+                    <a:solidFill>
+                      <a:srgbClr val="18212F"/>
+                    </a:solidFill>
+                  </a:tcPr>
+                </a:tc>
+                <a:tc>
+                  <a:txBody>
+                    <a:bodyPr/>
+                    <a:lstStyle/>
+                    <a:p>
+                      <a:pPr>
+                        <a:defRPr sz="950">
+                          <a:solidFill>
+                            <a:srgbClr val="FFFFFF"/>
+                          </a:solidFill>
+                        </a:defRPr>
+                      </a:pPr>
+                      <a:r>
+                        <a:t>159</a:t>
+                      </a:r>
+                    </a:p>
+                  </a:txBody>
+                  <a:tcPr>
+                    <a:solidFill>
+                      <a:srgbClr val="18212F"/>
+                    </a:solidFill>
+                  </a:tcPr>
+                </a:tc>
+                <a:tc>
+                  <a:txBody>
+                    <a:bodyPr/>
+                    <a:lstStyle/>
+                    <a:p>
+                      <a:pPr>
+                        <a:defRPr sz="950">
+                          <a:solidFill>
+                            <a:srgbClr val="FFFFFF"/>
+                          </a:solidFill>
+                        </a:defRPr>
+                      </a:pPr>
+                      <a:r>
+                        <a:t>483</a:t>
+                      </a:r>
+                    </a:p>
+                  </a:txBody>
+                  <a:tcPr>
+                    <a:solidFill>
+                      <a:srgbClr val="18212F"/>
+                    </a:solidFill>
+                  </a:tcPr>
+                </a:tc>
+                <a:tc>
+                  <a:txBody>
+                    <a:bodyPr/>
+                    <a:lstStyle/>
+                    <a:p>
+                      <a:pPr>
+                        <a:defRPr sz="950">
+                          <a:solidFill>
+                            <a:srgbClr val="FFFFFF"/>
+                          </a:solidFill>
+                        </a:defRPr>
+                      </a:pPr>
+                      <a:r>
+                        <a:t>34</a:t>
+                      </a:r>
+                    </a:p>
+                  </a:txBody>
+                  <a:tcPr>
+                    <a:solidFill>
+                      <a:srgbClr val="18212F"/>
+                    </a:solidFill>
+                  </a:tcPr>
+                </a:tc>
+                <a:tc>
+                  <a:txBody>
+                    <a:bodyPr/>
+                    <a:lstStyle/>
+                    <a:p>
+                      <a:pPr>
+                        <a:defRPr sz="950">
+                          <a:solidFill>
+                            <a:srgbClr val="FFFFFF"/>
+                          </a:solidFill>
+                        </a:defRPr>
+                      </a:pPr>
+                      <a:r>
+                        <a:t>88.93%</a:t>
+                      </a:r>
+                    </a:p>
+                  </a:txBody>
+                  <a:tcPr>
+                    <a:solidFill>
+                      <a:srgbClr val="18212F"/>
+                    </a:solidFill>
+                  </a:tcPr>
+                </a:tc>
+                <a:tc>
+                  <a:txBody>
+                    <a:bodyPr/>
+                    <a:lstStyle/>
+                    <a:p>
+                      <a:pPr>
+                        <a:defRPr sz="950">
+                          <a:solidFill>
+                            <a:srgbClr val="FFFFFF"/>
+                          </a:solidFill>
+                        </a:defRPr>
+                      </a:pPr>
+                      <a:r>
+                        <a:t>75.23%</a:t>
+                      </a:r>
+                    </a:p>
+                  </a:txBody>
+                  <a:tcPr>
+                    <a:solidFill>
+                      <a:srgbClr val="18212F"/>
+                    </a:solidFill>
+                  </a:tcPr>
+                </a:tc>
+                <a:tc>
+                  <a:txBody>
+                    <a:bodyPr/>
+                    <a:lstStyle/>
+                    <a:p>
+                      <a:pPr>
+                        <a:defRPr sz="950">
+                          <a:solidFill>
+                            <a:srgbClr val="FFFFFF"/>
+                          </a:solidFill>
+                        </a:defRPr>
+                      </a:pPr>
+                      <a:r>
+                        <a:t>63.19%</a:t>
+                      </a:r>
+                    </a:p>
+                  </a:txBody>
+                  <a:tcPr>
+                    <a:solidFill>
+                      <a:srgbClr val="18212F"/>
+                    </a:solidFill>
+                  </a:tcPr>
+                </a:tc>
+              </a:tr>
+            </a:tbl>
+          </a:graphicData>
+        </a:graphic>
+      </p:graphicFrame>
+      <p:sp>
+        <p:nvSpPr>
+          <p:cNvPr id="10" name="Rounded Rectangle 9"/>
+          <p:cNvSpPr/>
+          <p:nvPr/>
+        </p:nvSpPr>
+        <p:spPr>
+          <a:xfrm>
+            <a:off x="7132320" y="2971800"/>
+            <a:ext cx="4297680" cy="3474720"/>
+          </a:xfrm>
+          <a:prstGeom prst="roundRect">
+            <a:avLst/>
+          </a:prstGeom>
+          <a:solidFill>
+            <a:srgbClr val="1E293B"/>
+          </a:solidFill>
+          <a:ln>
+            <a:solidFill>
+              <a:srgbClr val="334155"/>
+            </a:solidFill>
+          </a:ln>
+        </p:spPr>
+        <p:style>
+          <a:lnRef idx="1">
+            <a:schemeClr val="accent1"/>
+          </a:lnRef>
+          <a:fillRef idx="3">
+            <a:schemeClr val="accent1"/>
+          </a:fillRef>
+          <a:effectRef idx="2">
+            <a:schemeClr val="accent1"/>
+          </a:effectRef>
+          <a:fontRef idx="minor">
+            <a:schemeClr val="lt1"/>
+          </a:fontRef>
+        </p:style>
+        <p:txBody>
+          <a:bodyPr rtlCol="0" anchor="ctr" wrap="square"/>
+          <a:lstStyle/>
+          <a:p>
+            <a:pPr algn="ctr">
+              <a:spcAft>
+                <a:spcPts val="800"/>
+              </a:spcAft>
+              <a:defRPr sz="1400" b="1">
+                <a:solidFill>
+                  <a:srgbClr val="38BDF8"/>
+                </a:solidFill>
+              </a:defRPr>
+            </a:pPr>
+            <a:r>
+              <a:t>Why τ = 0.40 is the Clinical Gold Standard</a:t>
+            </a:r>
+          </a:p>
+          <a:p>
+            <a:pPr>
+              <a:spcAft>
+                <a:spcPts val="600"/>
+              </a:spcAft>
+            </a:pPr>
+            <a:r>
+              <a:rPr b="1" sz="1050">
+                <a:solidFill>
+                  <a:srgbClr val="FB923C"/>
+                </a:solidFill>
+              </a:rPr>
+              <a:t>• Asymmetric Error Costs: </a:t>
+            </a:r>
+            <a:r>
+              <a:rPr sz="1000">
+                <a:solidFill>
+                  <a:srgbClr val="FFFFFF"/>
+                </a:solidFill>
+              </a:rPr>
+              <a:t>A False Negative misses an undiagnosed diabetic patient, allowing irreversible microvascular complications to progress. A False Positive only prompts an inexpensive, non-invasive HbA1c blood test.</a:t>
+            </a:r>
+          </a:p>
+          <a:p>
+            <a:pPr>
+              <a:spcAft>
+                <a:spcPts val="600"/>
+              </a:spcAft>
+            </a:pPr>
+            <a:r>
+              <a:rPr b="1" sz="1050">
+                <a:solidFill>
+                  <a:srgbClr val="34D399"/>
+                </a:solidFill>
+              </a:rPr>
+              <a:t>• Catching 80.8% of Patients: </a:t>
+            </a:r>
+            <a:r>
+              <a:rPr sz="1000">
+                <a:solidFill>
+                  <a:srgbClr val="FFFFFF"/>
+                </a:solidFill>
+              </a:rPr>
+              <a:t>Shifting τ from 0.50 to 0.40 flags 35 additional diabetics (TP: 213 -&gt; 248) and reduces missed cases from 94 to 59.</a:t>
+            </a:r>
+          </a:p>
+          <a:p>
+            <a:pPr>
+              <a:spcAft>
+                <a:spcPts val="600"/>
+              </a:spcAft>
+            </a:pPr>
+            <a:r>
+              <a:rPr b="1" sz="1050">
+                <a:solidFill>
+                  <a:srgbClr val="FB923C"/>
+                </a:solidFill>
+              </a:rPr>
+              <a:t>• Controlling False Alarms: </a:t>
+            </a:r>
+            <a:r>
+              <a:rPr sz="1000">
+                <a:solidFill>
+                  <a:srgbClr val="FFFFFF"/>
+                </a:solidFill>
+              </a:rPr>
+              <a:t>Even at τ = 0.40, our model produces only 106 False Positives—vastly cleaner than Pure CXR alone (which had 260 FPs at only 62.2% recall).</a:t>
+            </a:r>
+          </a:p>
+          <a:p>
+            <a:pPr>
+              <a:spcAft>
+                <a:spcPts val="600"/>
+              </a:spcAft>
+            </a:pPr>
+            <a:r>
+              <a:rPr b="1" sz="1050">
+                <a:solidFill>
+                  <a:srgbClr val="FB923C"/>
+                </a:solidFill>
+              </a:rPr>
+              <a:t>• Deployment Recommendation: </a:t>
+            </a:r>
+            <a:r>
+              <a:rPr sz="1000">
+                <a:solidFill>
+                  <a:srgbClr val="FFFFFF"/>
+                </a:solidFill>
+              </a:rPr>
+              <a:t>Flag patients with P(T2D) &gt;= 0.40 for automated reflex lab orders on chest X-ray discharge summaries.</a:t>
+            </a:r>
+          </a:p>
+        </p:txBody>
+      </p:sp>
+    </p:spTree>
+  </p:cSld>
+  <p:clrMapOvr>
+    <a:masterClrMapping/>
+  </p:clrMapOvr>
+</p:sld>
+</file>
+
+<file path=ppt/slides/slide9.xml><?xml version="1.0" encoding="utf-8"?>
+<p:sld xmlns:a="http://schemas.openxmlformats.org/drawingml/2006/main" xmlns:p="http://schemas.openxmlformats.org/presentationml/2006/main" xmlns:r="http://schemas.openxmlformats.org/officeDocument/2006/relationships">
+  <p:cSld>
+    <p:spTree>
+      <p:nvGrpSpPr>
+        <p:cNvPr id="1" name=""/>
+        <p:cNvGrpSpPr/>
+        <p:nvPr/>
+      </p:nvGrpSpPr>
+      <p:grpSpPr/>
+      <p:sp>
+        <p:nvSpPr>
+          <p:cNvPr id="2" name="Rectangle 1"/>
+          <p:cNvSpPr/>
+          <p:nvPr/>
+        </p:nvSpPr>
+        <p:spPr>
+          <a:xfrm>
+            <a:off x="0" y="0"/>
+            <a:ext cx="12191695" cy="6858000"/>
+          </a:xfrm>
+          <a:prstGeom prst="rect">
+            <a:avLst/>
+          </a:prstGeom>
+          <a:solidFill>
+            <a:srgbClr val="0F172A"/>
+          </a:solidFill>
+          <a:ln>
+            <a:noFill/>
+          </a:ln>
+        </p:spPr>
+        <p:style>
+          <a:lnRef idx="1">
+            <a:schemeClr val="accent1"/>
+          </a:lnRef>
+          <a:fillRef idx="3">
+            <a:schemeClr val="accent1"/>
+          </a:fillRef>
+          <a:effectRef idx="2">
+            <a:schemeClr val="accent1"/>
+          </a:effectRef>
+          <a:fontRef idx="minor">
+            <a:schemeClr val="lt1"/>
+          </a:fontRef>
+        </p:style>
+        <p:txBody>
+          <a:bodyPr rtlCol="0" anchor="ctr"/>
+          <a:lstStyle/>
+          <a:p>
+            <a:pPr algn="ctr"/>
+          </a:p>
+        </p:txBody>
+      </p:sp>
+      <p:sp>
+        <p:nvSpPr>
+          <p:cNvPr id="3" name="TextBox 2"/>
+          <p:cNvSpPr txBox="1"/>
+          <p:nvPr/>
+        </p:nvSpPr>
+        <p:spPr>
+          <a:xfrm>
+            <a:off x="731520" y="365760"/>
+            <a:ext cx="10698480" cy="320040"/>
+          </a:xfrm>
+          <a:prstGeom prst="rect">
+            <a:avLst/>
+          </a:prstGeom>
+          <a:noFill/>
+        </p:spPr>
+        <p:txBody>
+          <a:bodyPr wrap="square">
+            <a:spAutoFit/>
+          </a:bodyPr>
+          <a:lstStyle/>
+          <a:p>
+            <a:pPr>
+              <a:defRPr sz="1100" b="1">
+                <a:solidFill>
+                  <a:srgbClr val="38BDF8"/>
+                </a:solidFill>
+              </a:defRPr>
+            </a:pPr>
+            <a:r>
+              <a:t>CS 396 — ARTIFICIAL INTELLIGENCE IN HEALTHCARE</a:t>
+            </a:r>
+          </a:p>
+        </p:txBody>
+      </p:sp>
+      <p:sp>
+        <p:nvSpPr>
+          <p:cNvPr id="4" name="TextBox 3"/>
+          <p:cNvSpPr txBox="1"/>
+          <p:nvPr/>
+        </p:nvSpPr>
+        <p:spPr>
+          <a:xfrm>
+            <a:off x="731520" y="685800"/>
+            <a:ext cx="10698480" cy="640080"/>
+          </a:xfrm>
+          <a:prstGeom prst="rect">
+            <a:avLst/>
+          </a:prstGeom>
+          <a:noFill/>
+        </p:spPr>
+        <p:txBody>
+          <a:bodyPr wrap="square">
+            <a:spAutoFit/>
+          </a:bodyPr>
+          <a:lstStyle/>
+          <a:p>
+            <a:pPr>
+              <a:defRPr sz="2600" b="1">
+                <a:solidFill>
+                  <a:srgbClr val="FFFFFF"/>
+                </a:solidFill>
+              </a:defRPr>
+            </a:pPr>
+            <a:r>
               <a:t>Deployable Python Screeners &amp; OOF Deliverables</a:t>
             </a:r>
           </a:p>
@@ -8253,309 +10127,6 @@
                 </a:solidFill>
               </a:rPr>
               <a:t>Zero raw patient radiographs or DICOM binaries stored in git.</a:t>
-            </a:r>
-          </a:p>
-        </p:txBody>
-      </p:sp>
-    </p:spTree>
-  </p:cSld>
-  <p:clrMapOvr>
-    <a:masterClrMapping/>
-  </p:clrMapOvr>
-</p:sld>
-</file>
-
-<file path=ppt/slides/slide9.xml><?xml version="1.0" encoding="utf-8"?>
-<p:sld xmlns:a="http://schemas.openxmlformats.org/drawingml/2006/main" xmlns:p="http://schemas.openxmlformats.org/presentationml/2006/main" xmlns:r="http://schemas.openxmlformats.org/officeDocument/2006/relationships">
-  <p:cSld>
-    <p:spTree>
-      <p:nvGrpSpPr>
-        <p:cNvPr id="1" name=""/>
-        <p:cNvGrpSpPr/>
-        <p:nvPr/>
-      </p:nvGrpSpPr>
-      <p:grpSpPr/>
-      <p:sp>
-        <p:nvSpPr>
-          <p:cNvPr id="2" name="Rectangle 1"/>
-          <p:cNvSpPr/>
-          <p:nvPr/>
-        </p:nvSpPr>
-        <p:spPr>
-          <a:xfrm>
-            <a:off x="0" y="0"/>
-            <a:ext cx="12191695" cy="6858000"/>
-          </a:xfrm>
-          <a:prstGeom prst="rect">
-            <a:avLst/>
-          </a:prstGeom>
-          <a:solidFill>
-            <a:srgbClr val="0F172A"/>
-          </a:solidFill>
-          <a:ln>
-            <a:noFill/>
-          </a:ln>
-        </p:spPr>
-        <p:style>
-          <a:lnRef idx="1">
-            <a:schemeClr val="accent1"/>
-          </a:lnRef>
-          <a:fillRef idx="3">
-            <a:schemeClr val="accent1"/>
-          </a:fillRef>
-          <a:effectRef idx="2">
-            <a:schemeClr val="accent1"/>
-          </a:effectRef>
-          <a:fontRef idx="minor">
-            <a:schemeClr val="lt1"/>
-          </a:fontRef>
-        </p:style>
-        <p:txBody>
-          <a:bodyPr rtlCol="0" anchor="ctr"/>
-          <a:lstStyle/>
-          <a:p>
-            <a:pPr algn="ctr"/>
-          </a:p>
-        </p:txBody>
-      </p:sp>
-      <p:sp>
-        <p:nvSpPr>
-          <p:cNvPr id="3" name="TextBox 2"/>
-          <p:cNvSpPr txBox="1"/>
-          <p:nvPr/>
-        </p:nvSpPr>
-        <p:spPr>
-          <a:xfrm>
-            <a:off x="731520" y="365760"/>
-            <a:ext cx="10698480" cy="320040"/>
-          </a:xfrm>
-          <a:prstGeom prst="rect">
-            <a:avLst/>
-          </a:prstGeom>
-          <a:noFill/>
-        </p:spPr>
-        <p:txBody>
-          <a:bodyPr wrap="square">
-            <a:spAutoFit/>
-          </a:bodyPr>
-          <a:lstStyle/>
-          <a:p>
-            <a:pPr>
-              <a:defRPr sz="1100" b="1">
-                <a:solidFill>
-                  <a:srgbClr val="38BDF8"/>
-                </a:solidFill>
-              </a:defRPr>
-            </a:pPr>
-            <a:r>
-              <a:t>CS 396 — ARTIFICIAL INTELLIGENCE IN HEALTHCARE</a:t>
-            </a:r>
-          </a:p>
-        </p:txBody>
-      </p:sp>
-      <p:sp>
-        <p:nvSpPr>
-          <p:cNvPr id="4" name="TextBox 3"/>
-          <p:cNvSpPr txBox="1"/>
-          <p:nvPr/>
-        </p:nvSpPr>
-        <p:spPr>
-          <a:xfrm>
-            <a:off x="731520" y="685800"/>
-            <a:ext cx="10698480" cy="640080"/>
-          </a:xfrm>
-          <a:prstGeom prst="rect">
-            <a:avLst/>
-          </a:prstGeom>
-          <a:noFill/>
-        </p:spPr>
-        <p:txBody>
-          <a:bodyPr wrap="square">
-            <a:spAutoFit/>
-          </a:bodyPr>
-          <a:lstStyle/>
-          <a:p>
-            <a:pPr>
-              <a:defRPr sz="2600" b="1">
-                <a:solidFill>
-                  <a:srgbClr val="FFFFFF"/>
-                </a:solidFill>
-              </a:defRPr>
-            </a:pPr>
-            <a:r>
-              <a:t>Key Takeaways &amp; Presentation Summary</a:t>
-            </a:r>
-          </a:p>
-        </p:txBody>
-      </p:sp>
-      <p:sp>
-        <p:nvSpPr>
-          <p:cNvPr id="5" name="Rounded Rectangle 4"/>
-          <p:cNvSpPr/>
-          <p:nvPr/>
-        </p:nvSpPr>
-        <p:spPr>
-          <a:xfrm>
-            <a:off x="731520" y="1463040"/>
-            <a:ext cx="10698480" cy="4754880"/>
-          </a:xfrm>
-          <a:prstGeom prst="roundRect">
-            <a:avLst/>
-          </a:prstGeom>
-          <a:solidFill>
-            <a:srgbClr val="1E293B"/>
-          </a:solidFill>
-          <a:ln>
-            <a:solidFill>
-              <a:srgbClr val="334155"/>
-            </a:solidFill>
-          </a:ln>
-        </p:spPr>
-        <p:style>
-          <a:lnRef idx="1">
-            <a:schemeClr val="accent1"/>
-          </a:lnRef>
-          <a:fillRef idx="3">
-            <a:schemeClr val="accent1"/>
-          </a:fillRef>
-          <a:effectRef idx="2">
-            <a:schemeClr val="accent1"/>
-          </a:effectRef>
-          <a:fontRef idx="minor">
-            <a:schemeClr val="lt1"/>
-          </a:fontRef>
-        </p:style>
-        <p:txBody>
-          <a:bodyPr rtlCol="0" anchor="ctr" wrap="square"/>
-          <a:lstStyle/>
-          <a:p>
-            <a:pPr algn="ctr">
-              <a:spcAft>
-                <a:spcPts val="1200"/>
-              </a:spcAft>
-              <a:defRPr sz="1800" b="1">
-                <a:solidFill>
-                  <a:srgbClr val="38BDF8"/>
-                </a:solidFill>
-              </a:defRPr>
-            </a:pPr>
-            <a:r>
-              <a:t>Summary for CS 396 Presentation (Thursday Oct 22nd)</a:t>
-            </a:r>
-          </a:p>
-          <a:p>
-            <a:pPr>
-              <a:spcAft>
-                <a:spcPts val="1000"/>
-              </a:spcAft>
-            </a:pPr>
-            <a:r>
-              <a:rPr b="1" sz="1250">
-                <a:solidFill>
-                  <a:srgbClr val="34D399"/>
-                </a:solidFill>
-              </a:rPr>
-              <a:t>★ Feasibility Demonstrated: </a:t>
-            </a:r>
-            <a:r>
-              <a:rPr sz="1200">
-                <a:solidFill>
-                  <a:srgbClr val="FFFFFF"/>
-                </a:solidFill>
-              </a:rPr>
-              <a:t>A lightweight from-scratch CNN (~75k parameters) can opportunistically screen for Type 2 Diabetes directly from frontal chest X-rays, achieving 0.6401 AUROC, 60.38% accuracy, and 62.21% sensitivity.</a:t>
-            </a:r>
-          </a:p>
-          <a:p>
-            <a:pPr>
-              <a:spcAft>
-                <a:spcPts val="1000"/>
-              </a:spcAft>
-            </a:pPr>
-            <a:r>
-              <a:rPr b="1" sz="1250">
-                <a:solidFill>
-                  <a:srgbClr val="34D399"/>
-                </a:solidFill>
-              </a:rPr>
-              <a:t>★ Heart vs. Lung (CTR) Significance: </a:t>
-            </a:r>
-            <a:r>
-              <a:rPr sz="1200">
-                <a:solidFill>
-                  <a:srgbClr val="FFFFFF"/>
-                </a:solidFill>
-              </a:rPr>
-              <a:t>The model extracts macroscopic cardiothoracic ratio (heart width vs lung width) and mediastinal/pericardial fat pads, reflecting systemic diabetic cardiomyopathy and visceral adiposity.</a:t>
-            </a:r>
-          </a:p>
-          <a:p>
-            <a:pPr>
-              <a:spcAft>
-                <a:spcPts val="1000"/>
-              </a:spcAft>
-            </a:pPr>
-            <a:r>
-              <a:rPr b="1" sz="1250">
-                <a:solidFill>
-                  <a:srgbClr val="34D399"/>
-                </a:solidFill>
-              </a:rPr>
-              <a:t>★ Scratch Beat Pretrained RAD-DINO: </a:t>
-            </a:r>
-            <a:r>
-              <a:rPr sz="1200">
-                <a:solidFill>
-                  <a:srgbClr val="FFFFFF"/>
-                </a:solidFill>
-              </a:rPr>
-              <a:t>Specialized supervised convolution outscored general contrastive vision transformers (0.6401 vs 0.5734 AUROC), showing that task-targeted training on medical targets captures critical organ geometry.</a:t>
-            </a:r>
-          </a:p>
-          <a:p>
-            <a:pPr>
-              <a:spcAft>
-                <a:spcPts val="1000"/>
-              </a:spcAft>
-            </a:pPr>
-            <a:r>
-              <a:rPr b="1" sz="1250">
-                <a:solidFill>
-                  <a:srgbClr val="34D399"/>
-                </a:solidFill>
-              </a:rPr>
-              <a:t>★ Data Diversity Beats Aggressive Filtering: </a:t>
-            </a:r>
-            <a:r>
-              <a:rPr sz="1200">
-                <a:solidFill>
-                  <a:srgbClr val="FFFFFF"/>
-                </a:solidFill>
-              </a:rPr>
-              <a:t>Excluding 11 hazy radiographs degraded sensitivity by 7.5% and AUROC by 0.022. Preserving natural clinical image variations enhances generalization in patient cohorts.</a:t>
-            </a:r>
-          </a:p>
-          <a:p>
-            <a:pPr>
-              <a:spcAft>
-                <a:spcPts val="1000"/>
-              </a:spcAft>
-            </a:pPr>
-            <a:r>
-              <a:rPr b="1" sz="1250">
-                <a:solidFill>
-                  <a:srgbClr val="34D399"/>
-                </a:solidFill>
-              </a:rPr>
-              <a:t>★ Clinical Impact: </a:t>
-            </a:r>
-            <a:r>
-              <a:rPr sz="1200">
-                <a:solidFill>
-                  <a:srgbClr val="FFFFFF"/>
-                </a:solidFill>
-              </a:rPr>
-              <a:t>Over 62% of diabetic patients can be flagged during unrelated routine chest X-rays (e.g. pre-op, cough, trauma), creating a zero-cost safety net to prompt definitive HbA1c diagnostic testing.</a:t>
             </a:r>
           </a:p>
         </p:txBody>

--- a/malek_and_angelo/malek/Malek_T2D_CNN_Presentation.pptx
+++ b/malek_and_angelo/malek/Malek_T2D_CNN_Presentation.pptx
@@ -15,6 +15,7 @@
     <p:sldId id="263" r:id="rId14"/>
     <p:sldId id="264" r:id="rId15"/>
     <p:sldId id="265" r:id="rId16"/>
+    <p:sldId id="266" r:id="rId17"/>
   </p:sldIdLst>
   <p:sldSz cx="12191695" cy="6858000" type="screen4x3"/>
   <p:notesSz cx="6858000" cy="9144000"/>
@@ -3148,8 +3149,8 @@
         </p:nvSpPr>
         <p:spPr>
           <a:xfrm>
-            <a:off x="914400" y="1645920"/>
-            <a:ext cx="10332720" cy="3200400"/>
+            <a:off x="914400" y="1371600"/>
+            <a:ext cx="10332720" cy="2926080"/>
           </a:xfrm>
           <a:prstGeom prst="rect">
             <a:avLst/>
@@ -3164,7 +3165,7 @@
           <a:p>
             <a:pPr>
               <a:spcAft>
-                <a:spcPts val="1000"/>
+                <a:spcPts val="800"/>
               </a:spcAft>
               <a:defRPr sz="3600" b="1">
                 <a:solidFill>
@@ -3179,7 +3180,7 @@
           <a:p>
             <a:pPr>
               <a:spcAft>
-                <a:spcPts val="2500"/>
+                <a:spcPts val="2000"/>
               </a:spcAft>
               <a:defRPr sz="2200">
                 <a:solidFill>
@@ -3213,8 +3214,8 @@
         </p:nvSpPr>
         <p:spPr>
           <a:xfrm>
-            <a:off x="914400" y="4754880"/>
-            <a:ext cx="10332720" cy="1280160"/>
+            <a:off x="914400" y="4434840"/>
+            <a:ext cx="10332720" cy="2011680"/>
           </a:xfrm>
           <a:prstGeom prst="roundRect">
             <a:avLst/>
@@ -3250,26 +3251,129 @@
               <a:spcAft>
                 <a:spcPts val="400"/>
               </a:spcAft>
-              <a:defRPr sz="1100" b="1">
+              <a:defRPr sz="1150" b="1">
                 <a:solidFill>
                   <a:srgbClr val="34D399"/>
                 </a:solidFill>
               </a:defRPr>
             </a:pPr>
             <a:r>
-              <a:t>CORE OBJECTIVE &amp; MILESTONE</a:t>
-            </a:r>
-          </a:p>
-          <a:p>
-            <a:pPr>
-              <a:defRPr sz="1200">
+              <a:t>EXECUTIVE SUMMARY &amp; PROGRESS SNAPSHOT</a:t>
+            </a:r>
+          </a:p>
+          <a:p>
+            <a:pPr>
+              <a:spcAft>
+                <a:spcPts val="200"/>
+              </a:spcAft>
+            </a:pPr>
+            <a:r>
+              <a:rPr b="1" sz="1000">
+                <a:solidFill>
+                  <a:srgbClr val="38BDF8"/>
+                </a:solidFill>
+              </a:rPr>
+              <a:t>✓ Phase 1 (Data Shield): </a:t>
+            </a:r>
+            <a:r>
+              <a:rPr sz="1000">
                 <a:solidFill>
                   <a:srgbClr val="FFFFFF"/>
                 </a:solidFill>
-              </a:defRPr>
-            </a:pPr>
-            <a:r>
-              <a:t>Evaluate if routine frontal chest X-rays (CXR) can opportunistically screen for undiagnosed Type 2 Diabetes using deep learning without blood glucose or lab tests. Rigorously tested via 5-Fold Patient-Level Stratified Group Cross-Validation across All CXRs (N=949) vs. Hazy Excluded (N=938).</a:t>
+              </a:rPr>
+              <a:t>5-Fold StratifiedGroupKFold on patient_id (N=949) eliminates patient-level leakage.</a:t>
+            </a:r>
+          </a:p>
+          <a:p>
+            <a:pPr>
+              <a:spcAft>
+                <a:spcPts val="200"/>
+              </a:spcAft>
+            </a:pPr>
+            <a:r>
+              <a:rPr b="1" sz="1000">
+                <a:solidFill>
+                  <a:srgbClr val="38BDF8"/>
+                </a:solidFill>
+              </a:rPr>
+              <a:t>✓ Phase 2 (Vision CNN): </a:t>
+            </a:r>
+            <a:r>
+              <a:rPr sz="1000">
+                <a:solidFill>
+                  <a:srgbClr val="FFFFFF"/>
+                </a:solidFill>
+              </a:rPr>
+              <a:t>Custom ~75k param scratch CNN achieves 0.6401 AUROC, outperforming foundation ViT RAD-DINO (0.5734).</a:t>
+            </a:r>
+          </a:p>
+          <a:p>
+            <a:pPr>
+              <a:spcAft>
+                <a:spcPts val="200"/>
+              </a:spcAft>
+            </a:pPr>
+            <a:r>
+              <a:rPr b="1" sz="1000">
+                <a:solidFill>
+                  <a:srgbClr val="38BDF8"/>
+                </a:solidFill>
+              </a:rPr>
+              <a:t>✓ Phase 3 (Ablation): </a:t>
+            </a:r>
+            <a:r>
+              <a:rPr sz="1000">
+                <a:solidFill>
+                  <a:srgbClr val="FFFFFF"/>
+                </a:solidFill>
+              </a:rPr>
+              <a:t>Hazy-11 experiment proved that real-world clinical blur diversity improves generalization (recall drops 7.5% if removed).</a:t>
+            </a:r>
+          </a:p>
+          <a:p>
+            <a:pPr>
+              <a:spcAft>
+                <a:spcPts val="200"/>
+              </a:spcAft>
+            </a:pPr>
+            <a:r>
+              <a:rPr b="1" sz="1000">
+                <a:solidFill>
+                  <a:srgbClr val="34D399"/>
+                </a:solidFill>
+              </a:rPr>
+              <a:t>✓ Phase 4 (Multimodal Leap): </a:t>
+            </a:r>
+            <a:r>
+              <a:rPr sz="1000">
+                <a:solidFill>
+                  <a:srgbClr val="FFFFFF"/>
+                </a:solidFill>
+              </a:rPr>
+              <a:t>Fusing CXR continuous scalar with EHR covariates surges AUROC to 0.9068 (AUPRC: 0.8196; 75% fewer false alarms).</a:t>
+            </a:r>
+          </a:p>
+          <a:p>
+            <a:pPr>
+              <a:spcAft>
+                <a:spcPts val="200"/>
+              </a:spcAft>
+            </a:pPr>
+            <a:r>
+              <a:rPr b="1" sz="1000">
+                <a:solidFill>
+                  <a:srgbClr val="34D399"/>
+                </a:solidFill>
+              </a:rPr>
+              <a:t>✓ Phase 5 (Clinical Tuning): </a:t>
+            </a:r>
+            <a:r>
+              <a:rPr sz="1000">
+                <a:solidFill>
+                  <a:srgbClr val="FFFFFF"/>
+                </a:solidFill>
+              </a:rPr>
+              <a:t>Operating at τ = 0.40 catches 80.8% of diabetics, cutting missed cases by 37.2% with only 106 False Positives.</a:t>
             </a:r>
           </a:p>
         </p:txBody>
@@ -3343,7 +3447,7 @@
         </p:nvSpPr>
         <p:spPr>
           <a:xfrm>
-            <a:off x="731520" y="365760"/>
+            <a:off x="731520" y="320040"/>
             <a:ext cx="10698480" cy="320040"/>
           </a:xfrm>
           <a:prstGeom prst="rect">
@@ -3358,14 +3462,14 @@
           <a:lstStyle/>
           <a:p>
             <a:pPr>
-              <a:defRPr sz="1100" b="1">
+              <a:defRPr sz="1050" b="1">
                 <a:solidFill>
                   <a:srgbClr val="38BDF8"/>
                 </a:solidFill>
               </a:defRPr>
             </a:pPr>
             <a:r>
-              <a:t>CS 396 — ARTIFICIAL INTELLIGENCE IN HEALTHCARE</a:t>
+              <a:t>CS 396 — ARTIFICIAL INTELLIGENCE IN HEALTHCARE   |   PRODUCTION DELIVERABLES</a:t>
             </a:r>
           </a:p>
         </p:txBody>
@@ -3378,7 +3482,7 @@
         </p:nvSpPr>
         <p:spPr>
           <a:xfrm>
-            <a:off x="731520" y="685800"/>
+            <a:off x="731520" y="621792"/>
             <a:ext cx="10698480" cy="640080"/>
           </a:xfrm>
           <a:prstGeom prst="rect">
@@ -3393,7 +3497,459 @@
           <a:lstStyle/>
           <a:p>
             <a:pPr>
-              <a:defRPr sz="2600" b="1">
+              <a:defRPr sz="2500" b="1">
+                <a:solidFill>
+                  <a:srgbClr val="FFFFFF"/>
+                </a:solidFill>
+              </a:defRPr>
+            </a:pPr>
+            <a:r>
+              <a:t>Deployable Python Screeners &amp; OOF Deliverables</a:t>
+            </a:r>
+          </a:p>
+        </p:txBody>
+      </p:sp>
+      <p:sp>
+        <p:nvSpPr>
+          <p:cNvPr id="5" name="Rounded Rectangle 4"/>
+          <p:cNvSpPr/>
+          <p:nvPr/>
+        </p:nvSpPr>
+        <p:spPr>
+          <a:xfrm>
+            <a:off x="731520" y="1463040"/>
+            <a:ext cx="5120640" cy="4754880"/>
+          </a:xfrm>
+          <a:prstGeom prst="roundRect">
+            <a:avLst/>
+          </a:prstGeom>
+          <a:solidFill>
+            <a:srgbClr val="1E293B"/>
+          </a:solidFill>
+          <a:ln>
+            <a:solidFill>
+              <a:srgbClr val="334155"/>
+            </a:solidFill>
+          </a:ln>
+        </p:spPr>
+        <p:style>
+          <a:lnRef idx="1">
+            <a:schemeClr val="accent1"/>
+          </a:lnRef>
+          <a:fillRef idx="3">
+            <a:schemeClr val="accent1"/>
+          </a:fillRef>
+          <a:effectRef idx="2">
+            <a:schemeClr val="accent1"/>
+          </a:effectRef>
+          <a:fontRef idx="minor">
+            <a:schemeClr val="lt1"/>
+          </a:fontRef>
+        </p:style>
+        <p:txBody>
+          <a:bodyPr rtlCol="0" anchor="ctr" wrap="square"/>
+          <a:lstStyle/>
+          <a:p>
+            <a:pPr algn="ctr">
+              <a:spcAft>
+                <a:spcPts val="1000"/>
+              </a:spcAft>
+              <a:defRPr sz="1600" b="1">
+                <a:solidFill>
+                  <a:srgbClr val="38BDF8"/>
+                </a:solidFill>
+              </a:defRPr>
+            </a:pPr>
+            <a:r>
+              <a:t>Production Python Screeners</a:t>
+            </a:r>
+          </a:p>
+          <a:p>
+            <a:pPr>
+              <a:spcAft>
+                <a:spcPts val="800"/>
+              </a:spcAft>
+            </a:pPr>
+            <a:r>
+              <a:rPr b="1" sz="1100">
+                <a:solidFill>
+                  <a:srgbClr val="34D399"/>
+                </a:solidFill>
+              </a:rPr>
+              <a:t>► train_multimodal_fusion.py: </a:t>
+            </a:r>
+            <a:r>
+              <a:rPr sz="1050">
+                <a:solidFill>
+                  <a:srgbClr val="FFFFFF"/>
+                </a:solidFill>
+              </a:rPr>
+              <a:t>Two-stage fusion engine: converts CXRs to continuous risk scalar, then trains Gradient Boosting on clinical features.</a:t>
+            </a:r>
+          </a:p>
+          <a:p>
+            <a:pPr>
+              <a:spcAft>
+                <a:spcPts val="800"/>
+              </a:spcAft>
+            </a:pPr>
+            <a:r>
+              <a:rPr b="1" sz="1100">
+                <a:solidFill>
+                  <a:srgbClr val="34D399"/>
+                </a:solidFill>
+              </a:rPr>
+              <a:t>► predict_t2d_image.py: </a:t>
+            </a:r>
+            <a:r>
+              <a:rPr sz="1050">
+                <a:solidFill>
+                  <a:srgbClr val="FFFFFF"/>
+                </a:solidFill>
+              </a:rPr>
+              <a:t>Single-image and batch CXR screener: outputs binary flag, continuous probability, and CTR risk tier.</a:t>
+            </a:r>
+          </a:p>
+          <a:p>
+            <a:pPr>
+              <a:spcAft>
+                <a:spcPts val="800"/>
+              </a:spcAft>
+            </a:pPr>
+            <a:r>
+              <a:rPr b="1" sz="1100">
+                <a:solidFill>
+                  <a:srgbClr val="34D399"/>
+                </a:solidFill>
+              </a:rPr>
+              <a:t>► train_from_scratch_dual.py: </a:t>
+            </a:r>
+            <a:r>
+              <a:rPr sz="1050">
+                <a:solidFill>
+                  <a:srgbClr val="FFFFFF"/>
+                </a:solidFill>
+              </a:rPr>
+              <a:t>Full dual-cohort CNN pipeline with StratifiedGroupKFold, memory caching, and automated OOF CSV export.</a:t>
+            </a:r>
+          </a:p>
+          <a:p>
+            <a:pPr>
+              <a:spcAft>
+                <a:spcPts val="800"/>
+              </a:spcAft>
+            </a:pPr>
+            <a:r>
+              <a:rPr b="1" sz="1100">
+                <a:solidFill>
+                  <a:srgbClr val="34D399"/>
+                </a:solidFill>
+              </a:rPr>
+              <a:t>► classify_view_rad_dino.py: </a:t>
+            </a:r>
+            <a:r>
+              <a:rPr sz="1050">
+                <a:solidFill>
+                  <a:srgbClr val="FFFFFF"/>
+                </a:solidFill>
+              </a:rPr>
+              <a:t>Frontal vs Lateral view separator achieving 99.8% accuracy and 1.0000 AUROC.</a:t>
+            </a:r>
+          </a:p>
+        </p:txBody>
+      </p:sp>
+      <p:sp>
+        <p:nvSpPr>
+          <p:cNvPr id="6" name="Rounded Rectangle 5"/>
+          <p:cNvSpPr/>
+          <p:nvPr/>
+        </p:nvSpPr>
+        <p:spPr>
+          <a:xfrm>
+            <a:off x="6217920" y="1463040"/>
+            <a:ext cx="5212080" cy="4754880"/>
+          </a:xfrm>
+          <a:prstGeom prst="roundRect">
+            <a:avLst/>
+          </a:prstGeom>
+          <a:solidFill>
+            <a:srgbClr val="1E293B"/>
+          </a:solidFill>
+          <a:ln>
+            <a:solidFill>
+              <a:srgbClr val="334155"/>
+            </a:solidFill>
+          </a:ln>
+        </p:spPr>
+        <p:style>
+          <a:lnRef idx="1">
+            <a:schemeClr val="accent1"/>
+          </a:lnRef>
+          <a:fillRef idx="3">
+            <a:schemeClr val="accent1"/>
+          </a:fillRef>
+          <a:effectRef idx="2">
+            <a:schemeClr val="accent1"/>
+          </a:effectRef>
+          <a:fontRef idx="minor">
+            <a:schemeClr val="lt1"/>
+          </a:fontRef>
+        </p:style>
+        <p:txBody>
+          <a:bodyPr rtlCol="0" anchor="ctr" wrap="square"/>
+          <a:lstStyle/>
+          <a:p>
+            <a:pPr algn="ctr">
+              <a:spcAft>
+                <a:spcPts val="1000"/>
+              </a:spcAft>
+              <a:defRPr sz="1600" b="1">
+                <a:solidFill>
+                  <a:srgbClr val="38BDF8"/>
+                </a:solidFill>
+              </a:defRPr>
+            </a:pPr>
+            <a:r>
+              <a:t>Clean Deliverables on GitHub</a:t>
+            </a:r>
+          </a:p>
+          <a:p>
+            <a:pPr>
+              <a:spcAft>
+                <a:spcPts val="800"/>
+              </a:spcAft>
+            </a:pPr>
+            <a:r>
+              <a:rPr b="1" sz="1100">
+                <a:solidFill>
+                  <a:srgbClr val="FB923C"/>
+                </a:solidFill>
+              </a:rPr>
+              <a:t>✓ oof_multimodal.csv: </a:t>
+            </a:r>
+            <a:r>
+              <a:rPr sz="1050">
+                <a:solidFill>
+                  <a:srgbClr val="FFFFFF"/>
+                </a:solidFill>
+              </a:rPr>
+              <a:t>949 patient records with CXR risk score, multimodal predicted probability, and binary classification.</a:t>
+            </a:r>
+          </a:p>
+          <a:p>
+            <a:pPr>
+              <a:spcAft>
+                <a:spcPts val="800"/>
+              </a:spcAft>
+            </a:pPr>
+            <a:r>
+              <a:rPr b="1" sz="1100">
+                <a:solidFill>
+                  <a:srgbClr val="FB923C"/>
+                </a:solidFill>
+              </a:rPr>
+              <a:t>✓ multimodal_benchmark_comparison.csv: </a:t>
+            </a:r>
+            <a:r>
+              <a:rPr sz="1050">
+                <a:solidFill>
+                  <a:srgbClr val="FFFFFF"/>
+                </a:solidFill>
+              </a:rPr>
+              <a:t>Complete 5-pipeline benchmark table (Pure CXR, Clinical alone, Linear, Gradient Boosting, Ensemble).</a:t>
+            </a:r>
+          </a:p>
+          <a:p>
+            <a:pPr>
+              <a:spcAft>
+                <a:spcPts val="800"/>
+              </a:spcAft>
+            </a:pPr>
+            <a:r>
+              <a:rPr b="1" sz="1100">
+                <a:solidFill>
+                  <a:srgbClr val="FB923C"/>
+                </a:solidFill>
+              </a:rPr>
+              <a:t>✓ train_test_split.csv &amp; test_set.csv: </a:t>
+            </a:r>
+            <a:r>
+              <a:rPr sz="1050">
+                <a:solidFill>
+                  <a:srgbClr val="FFFFFF"/>
+                </a:solidFill>
+              </a:rPr>
+              <a:t>Strict 80/20 train-test splits (Folds 1-4 train N=760, Fold 5 test N=189) with 0 patient leakage.</a:t>
+            </a:r>
+          </a:p>
+          <a:p>
+            <a:pPr>
+              <a:spcAft>
+                <a:spcPts val="800"/>
+              </a:spcAft>
+            </a:pPr>
+            <a:r>
+              <a:rPr b="1" sz="1100">
+                <a:solidFill>
+                  <a:srgbClr val="FB923C"/>
+                </a:solidFill>
+              </a:rPr>
+              <a:t>✓ oof_all_cxrs.csv &amp; oof_no_hazy.csv: </a:t>
+            </a:r>
+            <a:r>
+              <a:rPr sz="1050">
+                <a:solidFill>
+                  <a:srgbClr val="FFFFFF"/>
+                </a:solidFill>
+              </a:rPr>
+              <a:t>Raw image CNN out-of-fold predictions across All CXRs (N=949) vs No Hazy (N=938).</a:t>
+            </a:r>
+          </a:p>
+          <a:p>
+            <a:pPr>
+              <a:spcAft>
+                <a:spcPts val="800"/>
+              </a:spcAft>
+            </a:pPr>
+            <a:r>
+              <a:rPr b="1" sz="1100">
+                <a:solidFill>
+                  <a:srgbClr val="FB923C"/>
+                </a:solidFill>
+              </a:rPr>
+              <a:t>✓ HIPAA Compliant: </a:t>
+            </a:r>
+            <a:r>
+              <a:rPr sz="1050">
+                <a:solidFill>
+                  <a:srgbClr val="FFFFFF"/>
+                </a:solidFill>
+              </a:rPr>
+              <a:t>Zero raw patient radiographs or DICOM binaries stored in git.</a:t>
+            </a:r>
+          </a:p>
+        </p:txBody>
+      </p:sp>
+    </p:spTree>
+  </p:cSld>
+  <p:clrMapOvr>
+    <a:masterClrMapping/>
+  </p:clrMapOvr>
+</p:sld>
+</file>
+
+<file path=ppt/slides/slide11.xml><?xml version="1.0" encoding="utf-8"?>
+<p:sld xmlns:a="http://schemas.openxmlformats.org/drawingml/2006/main" xmlns:p="http://schemas.openxmlformats.org/presentationml/2006/main" xmlns:r="http://schemas.openxmlformats.org/officeDocument/2006/relationships">
+  <p:cSld>
+    <p:spTree>
+      <p:nvGrpSpPr>
+        <p:cNvPr id="1" name=""/>
+        <p:cNvGrpSpPr/>
+        <p:nvPr/>
+      </p:nvGrpSpPr>
+      <p:grpSpPr/>
+      <p:sp>
+        <p:nvSpPr>
+          <p:cNvPr id="2" name="Rectangle 1"/>
+          <p:cNvSpPr/>
+          <p:nvPr/>
+        </p:nvSpPr>
+        <p:spPr>
+          <a:xfrm>
+            <a:off x="0" y="0"/>
+            <a:ext cx="12191695" cy="6858000"/>
+          </a:xfrm>
+          <a:prstGeom prst="rect">
+            <a:avLst/>
+          </a:prstGeom>
+          <a:solidFill>
+            <a:srgbClr val="0F172A"/>
+          </a:solidFill>
+          <a:ln>
+            <a:noFill/>
+          </a:ln>
+        </p:spPr>
+        <p:style>
+          <a:lnRef idx="1">
+            <a:schemeClr val="accent1"/>
+          </a:lnRef>
+          <a:fillRef idx="3">
+            <a:schemeClr val="accent1"/>
+          </a:fillRef>
+          <a:effectRef idx="2">
+            <a:schemeClr val="accent1"/>
+          </a:effectRef>
+          <a:fontRef idx="minor">
+            <a:schemeClr val="lt1"/>
+          </a:fontRef>
+        </p:style>
+        <p:txBody>
+          <a:bodyPr rtlCol="0" anchor="ctr"/>
+          <a:lstStyle/>
+          <a:p>
+            <a:pPr algn="ctr"/>
+          </a:p>
+        </p:txBody>
+      </p:sp>
+      <p:sp>
+        <p:nvSpPr>
+          <p:cNvPr id="3" name="TextBox 2"/>
+          <p:cNvSpPr txBox="1"/>
+          <p:nvPr/>
+        </p:nvSpPr>
+        <p:spPr>
+          <a:xfrm>
+            <a:off x="731520" y="320040"/>
+            <a:ext cx="10698480" cy="320040"/>
+          </a:xfrm>
+          <a:prstGeom prst="rect">
+            <a:avLst/>
+          </a:prstGeom>
+          <a:noFill/>
+        </p:spPr>
+        <p:txBody>
+          <a:bodyPr wrap="square">
+            <a:spAutoFit/>
+          </a:bodyPr>
+          <a:lstStyle/>
+          <a:p>
+            <a:pPr>
+              <a:defRPr sz="1050" b="1">
+                <a:solidFill>
+                  <a:srgbClr val="38BDF8"/>
+                </a:solidFill>
+              </a:defRPr>
+            </a:pPr>
+            <a:r>
+              <a:t>CS 396 — ARTIFICIAL INTELLIGENCE IN HEALTHCARE   |   PRESENTATION SUMMARY</a:t>
+            </a:r>
+          </a:p>
+        </p:txBody>
+      </p:sp>
+      <p:sp>
+        <p:nvSpPr>
+          <p:cNvPr id="4" name="TextBox 3"/>
+          <p:cNvSpPr txBox="1"/>
+          <p:nvPr/>
+        </p:nvSpPr>
+        <p:spPr>
+          <a:xfrm>
+            <a:off x="731520" y="621792"/>
+            <a:ext cx="10698480" cy="640080"/>
+          </a:xfrm>
+          <a:prstGeom prst="rect">
+            <a:avLst/>
+          </a:prstGeom>
+          <a:noFill/>
+        </p:spPr>
+        <p:txBody>
+          <a:bodyPr wrap="square">
+            <a:spAutoFit/>
+          </a:bodyPr>
+          <a:lstStyle/>
+          <a:p>
+            <a:pPr>
+              <a:defRPr sz="2500" b="1">
                 <a:solidFill>
                   <a:srgbClr val="FFFFFF"/>
                 </a:solidFill>
@@ -3646,7 +4202,7 @@
         </p:nvSpPr>
         <p:spPr>
           <a:xfrm>
-            <a:off x="731520" y="365760"/>
+            <a:off x="731520" y="320040"/>
             <a:ext cx="10698480" cy="320040"/>
           </a:xfrm>
           <a:prstGeom prst="rect">
@@ -3661,14 +4217,14 @@
           <a:lstStyle/>
           <a:p>
             <a:pPr>
-              <a:defRPr sz="1100" b="1">
+              <a:defRPr sz="1050" b="1">
                 <a:solidFill>
                   <a:srgbClr val="38BDF8"/>
                 </a:solidFill>
               </a:defRPr>
             </a:pPr>
             <a:r>
-              <a:t>CS 396 — ARTIFICIAL INTELLIGENCE IN HEALTHCARE</a:t>
+              <a:t>CS 396 — ARTIFICIAL INTELLIGENCE IN HEALTHCARE   |   PROGRESS TRACKER</a:t>
             </a:r>
           </a:p>
         </p:txBody>
@@ -3681,7 +4237,7 @@
         </p:nvSpPr>
         <p:spPr>
           <a:xfrm>
-            <a:off x="731520" y="685800"/>
+            <a:off x="731520" y="621792"/>
             <a:ext cx="10698480" cy="640080"/>
           </a:xfrm>
           <a:prstGeom prst="rect">
@@ -3696,7 +4252,918 @@
           <a:lstStyle/>
           <a:p>
             <a:pPr>
-              <a:defRPr sz="2600" b="1">
+              <a:defRPr sz="2500" b="1">
+                <a:solidFill>
+                  <a:srgbClr val="FFFFFF"/>
+                </a:solidFill>
+              </a:defRPr>
+            </a:pPr>
+            <a:r>
+              <a:t>Project Progress: 5 Iterative Experimental Milestones</a:t>
+            </a:r>
+          </a:p>
+        </p:txBody>
+      </p:sp>
+      <p:sp>
+        <p:nvSpPr>
+          <p:cNvPr id="5" name="Rounded Rectangle 4"/>
+          <p:cNvSpPr/>
+          <p:nvPr/>
+        </p:nvSpPr>
+        <p:spPr>
+          <a:xfrm>
+            <a:off x="731520" y="1371600"/>
+            <a:ext cx="1993392" cy="4846320"/>
+          </a:xfrm>
+          <a:prstGeom prst="roundRect">
+            <a:avLst/>
+          </a:prstGeom>
+          <a:solidFill>
+            <a:srgbClr val="1E293B"/>
+          </a:solidFill>
+          <a:ln>
+            <a:solidFill>
+              <a:srgbClr val="334155"/>
+            </a:solidFill>
+          </a:ln>
+        </p:spPr>
+        <p:style>
+          <a:lnRef idx="1">
+            <a:schemeClr val="accent1"/>
+          </a:lnRef>
+          <a:fillRef idx="3">
+            <a:schemeClr val="accent1"/>
+          </a:fillRef>
+          <a:effectRef idx="2">
+            <a:schemeClr val="accent1"/>
+          </a:effectRef>
+          <a:fontRef idx="minor">
+            <a:schemeClr val="lt1"/>
+          </a:fontRef>
+        </p:style>
+        <p:txBody>
+          <a:bodyPr rtlCol="0" anchor="ctr" wrap="square"/>
+          <a:lstStyle/>
+          <a:p>
+            <a:pPr algn="ctr">
+              <a:spcAft>
+                <a:spcPts val="200"/>
+              </a:spcAft>
+              <a:defRPr sz="1100" b="1">
+                <a:solidFill>
+                  <a:srgbClr val="38BDF8"/>
+                </a:solidFill>
+              </a:defRPr>
+            </a:pPr>
+            <a:r>
+              <a:t>PHASE 1</a:t>
+            </a:r>
+          </a:p>
+          <a:p>
+            <a:pPr>
+              <a:spcAft>
+                <a:spcPts val="800"/>
+              </a:spcAft>
+              <a:defRPr sz="1150" b="1">
+                <a:solidFill>
+                  <a:srgbClr val="FFFFFF"/>
+                </a:solidFill>
+              </a:defRPr>
+            </a:pPr>
+            <a:r>
+              <a:t>Leakage Shield &amp; Grouped Folds</a:t>
+            </a:r>
+          </a:p>
+          <a:p>
+            <a:pPr>
+              <a:spcAft>
+                <a:spcPts val="400"/>
+              </a:spcAft>
+            </a:pPr>
+            <a:r>
+              <a:rPr b="1" sz="950">
+                <a:solidFill>
+                  <a:srgbClr val="38BDF8"/>
+                </a:solidFill>
+              </a:rPr>
+              <a:t>• Grouped CV: </a:t>
+            </a:r>
+            <a:r>
+              <a:rPr sz="900">
+                <a:solidFill>
+                  <a:srgbClr val="FFFFFF"/>
+                </a:solidFill>
+              </a:rPr>
+              <a:t>5-Fold StratifiedGroupKFold grouped strictly on patient_id (N=949).</a:t>
+            </a:r>
+          </a:p>
+          <a:p>
+            <a:pPr>
+              <a:spcAft>
+                <a:spcPts val="400"/>
+              </a:spcAft>
+            </a:pPr>
+            <a:r>
+              <a:rPr b="1" sz="950">
+                <a:solidFill>
+                  <a:srgbClr val="38BDF8"/>
+                </a:solidFill>
+              </a:rPr>
+              <a:t>• Zero Contamination: </a:t>
+            </a:r>
+            <a:r>
+              <a:rPr sz="900">
+                <a:solidFill>
+                  <a:srgbClr val="FFFFFF"/>
+                </a:solidFill>
+              </a:rPr>
+              <a:t>Guarantees no patient CXRs cross train and test splits.</a:t>
+            </a:r>
+          </a:p>
+          <a:p>
+            <a:pPr>
+              <a:spcAft>
+                <a:spcPts val="400"/>
+              </a:spcAft>
+            </a:pPr>
+            <a:r>
+              <a:rPr b="1" sz="950">
+                <a:solidFill>
+                  <a:srgbClr val="38BDF8"/>
+                </a:solidFill>
+              </a:rPr>
+              <a:t>• Class Imbalance: </a:t>
+            </a:r>
+            <a:r>
+              <a:rPr sz="900">
+                <a:solidFill>
+                  <a:srgbClr val="FFFFFF"/>
+                </a:solidFill>
+              </a:rPr>
+              <a:t>Handled 307:642 ratio via weighted cross-entropy loss (w_pos=2.09).</a:t>
+            </a:r>
+          </a:p>
+          <a:p>
+            <a:pPr>
+              <a:spcBef>
+                <a:spcPts val="800"/>
+              </a:spcBef>
+              <a:defRPr sz="1000" b="1">
+                <a:solidFill>
+                  <a:srgbClr val="34D399"/>
+                </a:solidFill>
+              </a:defRPr>
+            </a:pPr>
+            <a:r>
+              <a:t>★ COMPLETED ✓</a:t>
+            </a:r>
+          </a:p>
+        </p:txBody>
+      </p:sp>
+      <p:sp>
+        <p:nvSpPr>
+          <p:cNvPr id="6" name="Rounded Rectangle 5"/>
+          <p:cNvSpPr/>
+          <p:nvPr/>
+        </p:nvSpPr>
+        <p:spPr>
+          <a:xfrm>
+            <a:off x="2907792" y="1371600"/>
+            <a:ext cx="1993392" cy="4846320"/>
+          </a:xfrm>
+          <a:prstGeom prst="roundRect">
+            <a:avLst/>
+          </a:prstGeom>
+          <a:solidFill>
+            <a:srgbClr val="1E293B"/>
+          </a:solidFill>
+          <a:ln>
+            <a:solidFill>
+              <a:srgbClr val="334155"/>
+            </a:solidFill>
+          </a:ln>
+        </p:spPr>
+        <p:style>
+          <a:lnRef idx="1">
+            <a:schemeClr val="accent1"/>
+          </a:lnRef>
+          <a:fillRef idx="3">
+            <a:schemeClr val="accent1"/>
+          </a:fillRef>
+          <a:effectRef idx="2">
+            <a:schemeClr val="accent1"/>
+          </a:effectRef>
+          <a:fontRef idx="minor">
+            <a:schemeClr val="lt1"/>
+          </a:fontRef>
+        </p:style>
+        <p:txBody>
+          <a:bodyPr rtlCol="0" anchor="ctr" wrap="square"/>
+          <a:lstStyle/>
+          <a:p>
+            <a:pPr algn="ctr">
+              <a:spcAft>
+                <a:spcPts val="200"/>
+              </a:spcAft>
+              <a:defRPr sz="1100" b="1">
+                <a:solidFill>
+                  <a:srgbClr val="34D399"/>
+                </a:solidFill>
+              </a:defRPr>
+            </a:pPr>
+            <a:r>
+              <a:t>PHASE 2</a:t>
+            </a:r>
+          </a:p>
+          <a:p>
+            <a:pPr>
+              <a:spcAft>
+                <a:spcPts val="800"/>
+              </a:spcAft>
+              <a:defRPr sz="1150" b="1">
+                <a:solidFill>
+                  <a:srgbClr val="FFFFFF"/>
+                </a:solidFill>
+              </a:defRPr>
+            </a:pPr>
+            <a:r>
+              <a:t>Custom CNN Beats Foundation ViT</a:t>
+            </a:r>
+          </a:p>
+          <a:p>
+            <a:pPr>
+              <a:spcAft>
+                <a:spcPts val="400"/>
+              </a:spcAft>
+            </a:pPr>
+            <a:r>
+              <a:rPr b="1" sz="950">
+                <a:solidFill>
+                  <a:srgbClr val="34D399"/>
+                </a:solidFill>
+              </a:rPr>
+              <a:t>• Lightweight CNN: </a:t>
+            </a:r>
+            <a:r>
+              <a:rPr sz="900">
+                <a:solidFill>
+                  <a:srgbClr val="FFFFFF"/>
+                </a:solidFill>
+              </a:rPr>
+              <a:t>Engineered ~75k param 4-block ConvNet with GroupNorm &amp; Dropout.</a:t>
+            </a:r>
+          </a:p>
+          <a:p>
+            <a:pPr>
+              <a:spcAft>
+                <a:spcPts val="400"/>
+              </a:spcAft>
+            </a:pPr>
+            <a:r>
+              <a:rPr b="1" sz="950">
+                <a:solidFill>
+                  <a:srgbClr val="34D399"/>
+                </a:solidFill>
+              </a:rPr>
+              <a:t>• Beats RAD-DINO: </a:t>
+            </a:r>
+            <a:r>
+              <a:rPr sz="900">
+                <a:solidFill>
+                  <a:srgbClr val="FFFFFF"/>
+                </a:solidFill>
+              </a:rPr>
+              <a:t>0.6401 AUROC vs 0.5734 for frozen ViT-B (supervised task alignment).</a:t>
+            </a:r>
+          </a:p>
+          <a:p>
+            <a:pPr>
+              <a:spcAft>
+                <a:spcPts val="400"/>
+              </a:spcAft>
+            </a:pPr>
+            <a:r>
+              <a:rPr b="1" sz="950">
+                <a:solidFill>
+                  <a:srgbClr val="34D399"/>
+                </a:solidFill>
+              </a:rPr>
+              <a:t>• CTR Signal: </a:t>
+            </a:r>
+            <a:r>
+              <a:rPr sz="900">
+                <a:solidFill>
+                  <a:srgbClr val="FFFFFF"/>
+                </a:solidFill>
+              </a:rPr>
+              <a:t>Learns relative cardiac width vs lung cage and thoracic soft tissue.</a:t>
+            </a:r>
+          </a:p>
+          <a:p>
+            <a:pPr>
+              <a:spcBef>
+                <a:spcPts val="800"/>
+              </a:spcBef>
+              <a:defRPr sz="1000" b="1">
+                <a:solidFill>
+                  <a:srgbClr val="34D399"/>
+                </a:solidFill>
+              </a:defRPr>
+            </a:pPr>
+            <a:r>
+              <a:t>★ COMPLETED ✓</a:t>
+            </a:r>
+          </a:p>
+        </p:txBody>
+      </p:sp>
+      <p:sp>
+        <p:nvSpPr>
+          <p:cNvPr id="7" name="Rounded Rectangle 6"/>
+          <p:cNvSpPr/>
+          <p:nvPr/>
+        </p:nvSpPr>
+        <p:spPr>
+          <a:xfrm>
+            <a:off x="5084064" y="1371600"/>
+            <a:ext cx="1993392" cy="4846320"/>
+          </a:xfrm>
+          <a:prstGeom prst="roundRect">
+            <a:avLst/>
+          </a:prstGeom>
+          <a:solidFill>
+            <a:srgbClr val="1E293B"/>
+          </a:solidFill>
+          <a:ln>
+            <a:solidFill>
+              <a:srgbClr val="334155"/>
+            </a:solidFill>
+          </a:ln>
+        </p:spPr>
+        <p:style>
+          <a:lnRef idx="1">
+            <a:schemeClr val="accent1"/>
+          </a:lnRef>
+          <a:fillRef idx="3">
+            <a:schemeClr val="accent1"/>
+          </a:fillRef>
+          <a:effectRef idx="2">
+            <a:schemeClr val="accent1"/>
+          </a:effectRef>
+          <a:fontRef idx="minor">
+            <a:schemeClr val="lt1"/>
+          </a:fontRef>
+        </p:style>
+        <p:txBody>
+          <a:bodyPr rtlCol="0" anchor="ctr" wrap="square"/>
+          <a:lstStyle/>
+          <a:p>
+            <a:pPr algn="ctr">
+              <a:spcAft>
+                <a:spcPts val="200"/>
+              </a:spcAft>
+              <a:defRPr sz="1100" b="1">
+                <a:solidFill>
+                  <a:srgbClr val="FB923C"/>
+                </a:solidFill>
+              </a:defRPr>
+            </a:pPr>
+            <a:r>
+              <a:t>PHASE 3</a:t>
+            </a:r>
+          </a:p>
+          <a:p>
+            <a:pPr>
+              <a:spcAft>
+                <a:spcPts val="800"/>
+              </a:spcAft>
+              <a:defRPr sz="1150" b="1">
+                <a:solidFill>
+                  <a:srgbClr val="FFFFFF"/>
+                </a:solidFill>
+              </a:defRPr>
+            </a:pPr>
+            <a:r>
+              <a:t>The Hazy-11 Empirical Discovery</a:t>
+            </a:r>
+          </a:p>
+          <a:p>
+            <a:pPr>
+              <a:spcAft>
+                <a:spcPts val="400"/>
+              </a:spcAft>
+            </a:pPr>
+            <a:r>
+              <a:rPr b="1" sz="950">
+                <a:solidFill>
+                  <a:srgbClr val="FB923C"/>
+                </a:solidFill>
+              </a:rPr>
+              <a:t>• Hypothesis: </a:t>
+            </a:r>
+            <a:r>
+              <a:rPr sz="900">
+                <a:solidFill>
+                  <a:srgbClr val="FFFFFF"/>
+                </a:solidFill>
+              </a:rPr>
+              <a:t>Filtering 11 low-contrast/blurry CXRs should improve model accuracy.</a:t>
+            </a:r>
+          </a:p>
+          <a:p>
+            <a:pPr>
+              <a:spcAft>
+                <a:spcPts val="400"/>
+              </a:spcAft>
+            </a:pPr>
+            <a:r>
+              <a:rPr b="1" sz="950">
+                <a:solidFill>
+                  <a:srgbClr val="FB923C"/>
+                </a:solidFill>
+              </a:rPr>
+              <a:t>• Surprise Result: </a:t>
+            </a:r>
+            <a:r>
+              <a:rPr sz="900">
+                <a:solidFill>
+                  <a:srgbClr val="FFFFFF"/>
+                </a:solidFill>
+              </a:rPr>
+              <a:t>Dropping them hurt AUROC (0.6401 -&gt; 0.6182) and recall (-7.5%).</a:t>
+            </a:r>
+          </a:p>
+          <a:p>
+            <a:pPr>
+              <a:spcAft>
+                <a:spcPts val="400"/>
+              </a:spcAft>
+            </a:pPr>
+            <a:r>
+              <a:rPr b="1" sz="950">
+                <a:solidFill>
+                  <a:srgbClr val="FB923C"/>
+                </a:solidFill>
+              </a:rPr>
+              <a:t>• Key Finding: </a:t>
+            </a:r>
+            <a:r>
+              <a:rPr sz="900">
+                <a:solidFill>
+                  <a:srgbClr val="FFFFFF"/>
+                </a:solidFill>
+              </a:rPr>
+              <a:t>Preserving real-world clinical blur diversity is critical for generalization.</a:t>
+            </a:r>
+          </a:p>
+          <a:p>
+            <a:pPr>
+              <a:spcBef>
+                <a:spcPts val="800"/>
+              </a:spcBef>
+              <a:defRPr sz="1000" b="1">
+                <a:solidFill>
+                  <a:srgbClr val="34D399"/>
+                </a:solidFill>
+              </a:defRPr>
+            </a:pPr>
+            <a:r>
+              <a:t>★ COMPLETED ✓</a:t>
+            </a:r>
+          </a:p>
+        </p:txBody>
+      </p:sp>
+      <p:sp>
+        <p:nvSpPr>
+          <p:cNvPr id="8" name="Rounded Rectangle 7"/>
+          <p:cNvSpPr/>
+          <p:nvPr/>
+        </p:nvSpPr>
+        <p:spPr>
+          <a:xfrm>
+            <a:off x="7260336" y="1371600"/>
+            <a:ext cx="1993392" cy="4846320"/>
+          </a:xfrm>
+          <a:prstGeom prst="roundRect">
+            <a:avLst/>
+          </a:prstGeom>
+          <a:solidFill>
+            <a:srgbClr val="1E293B"/>
+          </a:solidFill>
+          <a:ln>
+            <a:solidFill>
+              <a:srgbClr val="334155"/>
+            </a:solidFill>
+          </a:ln>
+        </p:spPr>
+        <p:style>
+          <a:lnRef idx="1">
+            <a:schemeClr val="accent1"/>
+          </a:lnRef>
+          <a:fillRef idx="3">
+            <a:schemeClr val="accent1"/>
+          </a:fillRef>
+          <a:effectRef idx="2">
+            <a:schemeClr val="accent1"/>
+          </a:effectRef>
+          <a:fontRef idx="minor">
+            <a:schemeClr val="lt1"/>
+          </a:fontRef>
+        </p:style>
+        <p:txBody>
+          <a:bodyPr rtlCol="0" anchor="ctr" wrap="square"/>
+          <a:lstStyle/>
+          <a:p>
+            <a:pPr algn="ctr">
+              <a:spcAft>
+                <a:spcPts val="200"/>
+              </a:spcAft>
+              <a:defRPr sz="1100" b="1">
+                <a:solidFill>
+                  <a:srgbClr val="38BDF8"/>
+                </a:solidFill>
+              </a:defRPr>
+            </a:pPr>
+            <a:r>
+              <a:t>PHASE 4</a:t>
+            </a:r>
+          </a:p>
+          <a:p>
+            <a:pPr>
+              <a:spcAft>
+                <a:spcPts val="800"/>
+              </a:spcAft>
+              <a:defRPr sz="1150" b="1">
+                <a:solidFill>
+                  <a:srgbClr val="FFFFFF"/>
+                </a:solidFill>
+              </a:defRPr>
+            </a:pPr>
+            <a:r>
+              <a:t>Two-Stage Multimodal Breakthrough</a:t>
+            </a:r>
+          </a:p>
+          <a:p>
+            <a:pPr>
+              <a:spcAft>
+                <a:spcPts val="400"/>
+              </a:spcAft>
+            </a:pPr>
+            <a:r>
+              <a:rPr b="1" sz="950">
+                <a:solidFill>
+                  <a:srgbClr val="38BDF8"/>
+                </a:solidFill>
+              </a:rPr>
+              <a:t>• X-Ray as Number: </a:t>
+            </a:r>
+            <a:r>
+              <a:rPr sz="900">
+                <a:solidFill>
+                  <a:srgbClr val="FFFFFF"/>
+                </a:solidFill>
+              </a:rPr>
+              <a:t>Stage 1 converts CXR pixels into continuous scalar risk probability.</a:t>
+            </a:r>
+          </a:p>
+          <a:p>
+            <a:pPr>
+              <a:spcAft>
+                <a:spcPts val="400"/>
+              </a:spcAft>
+            </a:pPr>
+            <a:r>
+              <a:rPr b="1" sz="950">
+                <a:solidFill>
+                  <a:srgbClr val="38BDF8"/>
+                </a:solidFill>
+              </a:rPr>
+              <a:t>• Late Fusion: </a:t>
+            </a:r>
+            <a:r>
+              <a:rPr sz="900">
+                <a:solidFill>
+                  <a:srgbClr val="FFFFFF"/>
+                </a:solidFill>
+              </a:rPr>
+              <a:t>Fuses CXR score with Age, BMI, Sex, and SDI via Gradient Boosting.</a:t>
+            </a:r>
+          </a:p>
+          <a:p>
+            <a:pPr>
+              <a:spcAft>
+                <a:spcPts val="400"/>
+              </a:spcAft>
+            </a:pPr>
+            <a:r>
+              <a:rPr b="1" sz="950">
+                <a:solidFill>
+                  <a:srgbClr val="38BDF8"/>
+                </a:solidFill>
+              </a:rPr>
+              <a:t>• AUC Leap: </a:t>
+            </a:r>
+            <a:r>
+              <a:rPr sz="900">
+                <a:solidFill>
+                  <a:srgbClr val="FFFFFF"/>
+                </a:solidFill>
+              </a:rPr>
+              <a:t>AUROC jumps from 0.6401 -&gt; 0.9068 (+0.2667 lift; AUPRC 0.8196).</a:t>
+            </a:r>
+          </a:p>
+          <a:p>
+            <a:pPr>
+              <a:spcBef>
+                <a:spcPts val="800"/>
+              </a:spcBef>
+              <a:defRPr sz="1000" b="1">
+                <a:solidFill>
+                  <a:srgbClr val="34D399"/>
+                </a:solidFill>
+              </a:defRPr>
+            </a:pPr>
+            <a:r>
+              <a:t>★ COMPLETED ✓</a:t>
+            </a:r>
+          </a:p>
+        </p:txBody>
+      </p:sp>
+      <p:sp>
+        <p:nvSpPr>
+          <p:cNvPr id="9" name="Rounded Rectangle 8"/>
+          <p:cNvSpPr/>
+          <p:nvPr/>
+        </p:nvSpPr>
+        <p:spPr>
+          <a:xfrm>
+            <a:off x="9436608" y="1371600"/>
+            <a:ext cx="1993392" cy="4846320"/>
+          </a:xfrm>
+          <a:prstGeom prst="roundRect">
+            <a:avLst/>
+          </a:prstGeom>
+          <a:solidFill>
+            <a:srgbClr val="1E293B"/>
+          </a:solidFill>
+          <a:ln>
+            <a:solidFill>
+              <a:srgbClr val="334155"/>
+            </a:solidFill>
+          </a:ln>
+        </p:spPr>
+        <p:style>
+          <a:lnRef idx="1">
+            <a:schemeClr val="accent1"/>
+          </a:lnRef>
+          <a:fillRef idx="3">
+            <a:schemeClr val="accent1"/>
+          </a:fillRef>
+          <a:effectRef idx="2">
+            <a:schemeClr val="accent1"/>
+          </a:effectRef>
+          <a:fontRef idx="minor">
+            <a:schemeClr val="lt1"/>
+          </a:fontRef>
+        </p:style>
+        <p:txBody>
+          <a:bodyPr rtlCol="0" anchor="ctr" wrap="square"/>
+          <a:lstStyle/>
+          <a:p>
+            <a:pPr algn="ctr">
+              <a:spcAft>
+                <a:spcPts val="200"/>
+              </a:spcAft>
+              <a:defRPr sz="1100" b="1">
+                <a:solidFill>
+                  <a:srgbClr val="34D399"/>
+                </a:solidFill>
+              </a:defRPr>
+            </a:pPr>
+            <a:r>
+              <a:t>PHASE 5</a:t>
+            </a:r>
+          </a:p>
+          <a:p>
+            <a:pPr>
+              <a:spcAft>
+                <a:spcPts val="800"/>
+              </a:spcAft>
+              <a:defRPr sz="1150" b="1">
+                <a:solidFill>
+                  <a:srgbClr val="FFFFFF"/>
+                </a:solidFill>
+              </a:defRPr>
+            </a:pPr>
+            <a:r>
+              <a:t>Clinical Operating Point (τ = 0.40)</a:t>
+            </a:r>
+          </a:p>
+          <a:p>
+            <a:pPr>
+              <a:spcAft>
+                <a:spcPts val="400"/>
+              </a:spcAft>
+            </a:pPr>
+            <a:r>
+              <a:rPr b="1" sz="950">
+                <a:solidFill>
+                  <a:srgbClr val="34D399"/>
+                </a:solidFill>
+              </a:rPr>
+              <a:t>• Threshold Tuning: </a:t>
+            </a:r>
+            <a:r>
+              <a:rPr sz="900">
+                <a:solidFill>
+                  <a:srgbClr val="FFFFFF"/>
+                </a:solidFill>
+              </a:rPr>
+              <a:t>Optimized decision boundary to address asymmetric healthcare error costs.</a:t>
+            </a:r>
+          </a:p>
+          <a:p>
+            <a:pPr>
+              <a:spcAft>
+                <a:spcPts val="400"/>
+              </a:spcAft>
+            </a:pPr>
+            <a:r>
+              <a:rPr b="1" sz="950">
+                <a:solidFill>
+                  <a:srgbClr val="34D399"/>
+                </a:solidFill>
+              </a:rPr>
+              <a:t>• High Sensitivity: </a:t>
+            </a:r>
+            <a:r>
+              <a:rPr sz="900">
+                <a:solidFill>
+                  <a:srgbClr val="FFFFFF"/>
+                </a:solidFill>
+              </a:rPr>
+              <a:t>Recall jumps to 80.78% (248/307 caught), cutting missed cases by 37.2%.</a:t>
+            </a:r>
+          </a:p>
+          <a:p>
+            <a:pPr>
+              <a:spcAft>
+                <a:spcPts val="400"/>
+              </a:spcAft>
+            </a:pPr>
+            <a:r>
+              <a:rPr b="1" sz="950">
+                <a:solidFill>
+                  <a:srgbClr val="34D399"/>
+                </a:solidFill>
+              </a:rPr>
+              <a:t>• Low False Alarms: </a:t>
+            </a:r>
+            <a:r>
+              <a:rPr sz="900">
+                <a:solidFill>
+                  <a:srgbClr val="FFFFFF"/>
+                </a:solidFill>
+              </a:rPr>
+              <a:t>Only 106 FPs (2.4× fewer than pure CXR's 260 FPs); 83.5% specificity.</a:t>
+            </a:r>
+          </a:p>
+          <a:p>
+            <a:pPr>
+              <a:spcBef>
+                <a:spcPts val="800"/>
+              </a:spcBef>
+              <a:defRPr sz="1000" b="1">
+                <a:solidFill>
+                  <a:srgbClr val="34D399"/>
+                </a:solidFill>
+              </a:defRPr>
+            </a:pPr>
+            <a:r>
+              <a:t>★ DEPLOYED ✓</a:t>
+            </a:r>
+          </a:p>
+        </p:txBody>
+      </p:sp>
+    </p:spTree>
+  </p:cSld>
+  <p:clrMapOvr>
+    <a:masterClrMapping/>
+  </p:clrMapOvr>
+</p:sld>
+</file>
+
+<file path=ppt/slides/slide3.xml><?xml version="1.0" encoding="utf-8"?>
+<p:sld xmlns:a="http://schemas.openxmlformats.org/drawingml/2006/main" xmlns:p="http://schemas.openxmlformats.org/presentationml/2006/main" xmlns:r="http://schemas.openxmlformats.org/officeDocument/2006/relationships">
+  <p:cSld>
+    <p:spTree>
+      <p:nvGrpSpPr>
+        <p:cNvPr id="1" name=""/>
+        <p:cNvGrpSpPr/>
+        <p:nvPr/>
+      </p:nvGrpSpPr>
+      <p:grpSpPr/>
+      <p:sp>
+        <p:nvSpPr>
+          <p:cNvPr id="2" name="Rectangle 1"/>
+          <p:cNvSpPr/>
+          <p:nvPr/>
+        </p:nvSpPr>
+        <p:spPr>
+          <a:xfrm>
+            <a:off x="0" y="0"/>
+            <a:ext cx="12191695" cy="6858000"/>
+          </a:xfrm>
+          <a:prstGeom prst="rect">
+            <a:avLst/>
+          </a:prstGeom>
+          <a:solidFill>
+            <a:srgbClr val="0F172A"/>
+          </a:solidFill>
+          <a:ln>
+            <a:noFill/>
+          </a:ln>
+        </p:spPr>
+        <p:style>
+          <a:lnRef idx="1">
+            <a:schemeClr val="accent1"/>
+          </a:lnRef>
+          <a:fillRef idx="3">
+            <a:schemeClr val="accent1"/>
+          </a:fillRef>
+          <a:effectRef idx="2">
+            <a:schemeClr val="accent1"/>
+          </a:effectRef>
+          <a:fontRef idx="minor">
+            <a:schemeClr val="lt1"/>
+          </a:fontRef>
+        </p:style>
+        <p:txBody>
+          <a:bodyPr rtlCol="0" anchor="ctr"/>
+          <a:lstStyle/>
+          <a:p>
+            <a:pPr algn="ctr"/>
+          </a:p>
+        </p:txBody>
+      </p:sp>
+      <p:sp>
+        <p:nvSpPr>
+          <p:cNvPr id="3" name="TextBox 2"/>
+          <p:cNvSpPr txBox="1"/>
+          <p:nvPr/>
+        </p:nvSpPr>
+        <p:spPr>
+          <a:xfrm>
+            <a:off x="731520" y="320040"/>
+            <a:ext cx="10698480" cy="320040"/>
+          </a:xfrm>
+          <a:prstGeom prst="rect">
+            <a:avLst/>
+          </a:prstGeom>
+          <a:noFill/>
+        </p:spPr>
+        <p:txBody>
+          <a:bodyPr wrap="square">
+            <a:spAutoFit/>
+          </a:bodyPr>
+          <a:lstStyle/>
+          <a:p>
+            <a:pPr>
+              <a:defRPr sz="1050" b="1">
+                <a:solidFill>
+                  <a:srgbClr val="38BDF8"/>
+                </a:solidFill>
+              </a:defRPr>
+            </a:pPr>
+            <a:r>
+              <a:t>CS 396 — ARTIFICIAL INTELLIGENCE IN HEALTHCARE   |   PHASE 1: CLINICAL FOUNDATION</a:t>
+            </a:r>
+          </a:p>
+        </p:txBody>
+      </p:sp>
+      <p:sp>
+        <p:nvSpPr>
+          <p:cNvPr id="4" name="TextBox 3"/>
+          <p:cNvSpPr txBox="1"/>
+          <p:nvPr/>
+        </p:nvSpPr>
+        <p:spPr>
+          <a:xfrm>
+            <a:off x="731520" y="621792"/>
+            <a:ext cx="10698480" cy="640080"/>
+          </a:xfrm>
+          <a:prstGeom prst="rect">
+            <a:avLst/>
+          </a:prstGeom>
+          <a:noFill/>
+        </p:spPr>
+        <p:txBody>
+          <a:bodyPr wrap="square">
+            <a:spAutoFit/>
+          </a:bodyPr>
+          <a:lstStyle/>
+          <a:p>
+            <a:pPr>
+              <a:defRPr sz="2500" b="1">
                 <a:solidFill>
                   <a:srgbClr val="FFFFFF"/>
                 </a:solidFill>
@@ -4014,7 +5481,7 @@
 </p:sld>
 </file>
 
-<file path=ppt/slides/slide3.xml><?xml version="1.0" encoding="utf-8"?>
+<file path=ppt/slides/slide4.xml><?xml version="1.0" encoding="utf-8"?>
 <p:sld xmlns:a="http://schemas.openxmlformats.org/drawingml/2006/main" xmlns:p="http://schemas.openxmlformats.org/presentationml/2006/main" xmlns:r="http://schemas.openxmlformats.org/officeDocument/2006/relationships">
   <p:cSld>
     <p:spTree>
@@ -4075,7 +5542,7 @@
         </p:nvSpPr>
         <p:spPr>
           <a:xfrm>
-            <a:off x="731520" y="365760"/>
+            <a:off x="731520" y="320040"/>
             <a:ext cx="10698480" cy="320040"/>
           </a:xfrm>
           <a:prstGeom prst="rect">
@@ -4090,14 +5557,14 @@
           <a:lstStyle/>
           <a:p>
             <a:pPr>
-              <a:defRPr sz="1100" b="1">
+              <a:defRPr sz="1050" b="1">
                 <a:solidFill>
                   <a:srgbClr val="38BDF8"/>
                 </a:solidFill>
               </a:defRPr>
             </a:pPr>
             <a:r>
-              <a:t>CS 396 — ARTIFICIAL INTELLIGENCE IN HEALTHCARE</a:t>
+              <a:t>CS 396 — ARTIFICIAL INTELLIGENCE IN HEALTHCARE   |   PHASE 1: INFERENCE ENGINE</a:t>
             </a:r>
           </a:p>
         </p:txBody>
@@ -4110,7 +5577,7 @@
         </p:nvSpPr>
         <p:spPr>
           <a:xfrm>
-            <a:off x="731520" y="685800"/>
+            <a:off x="731520" y="621792"/>
             <a:ext cx="10698480" cy="640080"/>
           </a:xfrm>
           <a:prstGeom prst="rect">
@@ -4125,7 +5592,7 @@
           <a:lstStyle/>
           <a:p>
             <a:pPr>
-              <a:defRPr sz="2600" b="1">
+              <a:defRPr sz="2500" b="1">
                 <a:solidFill>
                   <a:srgbClr val="FFFFFF"/>
                 </a:solidFill>
@@ -4570,7 +6037,7 @@
 </p:sld>
 </file>
 
-<file path=ppt/slides/slide4.xml><?xml version="1.0" encoding="utf-8"?>
+<file path=ppt/slides/slide5.xml><?xml version="1.0" encoding="utf-8"?>
 <p:sld xmlns:a="http://schemas.openxmlformats.org/drawingml/2006/main" xmlns:p="http://schemas.openxmlformats.org/presentationml/2006/main" xmlns:r="http://schemas.openxmlformats.org/officeDocument/2006/relationships">
   <p:cSld>
     <p:spTree>
@@ -4631,7 +6098,7 @@
         </p:nvSpPr>
         <p:spPr>
           <a:xfrm>
-            <a:off x="731520" y="365760"/>
+            <a:off x="731520" y="320040"/>
             <a:ext cx="10698480" cy="320040"/>
           </a:xfrm>
           <a:prstGeom prst="rect">
@@ -4646,14 +6113,14 @@
           <a:lstStyle/>
           <a:p>
             <a:pPr>
-              <a:defRPr sz="1100" b="1">
+              <a:defRPr sz="1050" b="1">
                 <a:solidFill>
                   <a:srgbClr val="38BDF8"/>
                 </a:solidFill>
               </a:defRPr>
             </a:pPr>
             <a:r>
-              <a:t>CS 396 — ARTIFICIAL INTELLIGENCE IN HEALTHCARE</a:t>
+              <a:t>CS 396 — ARTIFICIAL INTELLIGENCE IN HEALTHCARE   |   PHASE 2: MODEL ARCHITECTURE</a:t>
             </a:r>
           </a:p>
         </p:txBody>
@@ -4666,7 +6133,7 @@
         </p:nvSpPr>
         <p:spPr>
           <a:xfrm>
-            <a:off x="731520" y="685800"/>
+            <a:off x="731520" y="621792"/>
             <a:ext cx="10698480" cy="640080"/>
           </a:xfrm>
           <a:prstGeom prst="rect">
@@ -4681,7 +6148,7 @@
           <a:lstStyle/>
           <a:p>
             <a:pPr>
-              <a:defRPr sz="2600" b="1">
+              <a:defRPr sz="2500" b="1">
                 <a:solidFill>
                   <a:srgbClr val="FFFFFF"/>
                 </a:solidFill>
@@ -5091,7 +6558,7 @@
 </p:sld>
 </file>
 
-<file path=ppt/slides/slide5.xml><?xml version="1.0" encoding="utf-8"?>
+<file path=ppt/slides/slide6.xml><?xml version="1.0" encoding="utf-8"?>
 <p:sld xmlns:a="http://schemas.openxmlformats.org/drawingml/2006/main" xmlns:p="http://schemas.openxmlformats.org/presentationml/2006/main" xmlns:r="http://schemas.openxmlformats.org/officeDocument/2006/relationships">
   <p:cSld>
     <p:spTree>
@@ -5152,7 +6619,7 @@
         </p:nvSpPr>
         <p:spPr>
           <a:xfrm>
-            <a:off x="731520" y="365760"/>
+            <a:off x="731520" y="320040"/>
             <a:ext cx="10698480" cy="320040"/>
           </a:xfrm>
           <a:prstGeom prst="rect">
@@ -5167,14 +6634,14 @@
           <a:lstStyle/>
           <a:p>
             <a:pPr>
-              <a:defRPr sz="1100" b="1">
+              <a:defRPr sz="1050" b="1">
                 <a:solidFill>
                   <a:srgbClr val="38BDF8"/>
                 </a:solidFill>
               </a:defRPr>
             </a:pPr>
             <a:r>
-              <a:t>CS 396 — ARTIFICIAL INTELLIGENCE IN HEALTHCARE</a:t>
+              <a:t>CS 396 — ARTIFICIAL INTELLIGENCE IN HEALTHCARE   |   PHASE 2: VISION BENCHMARK</a:t>
             </a:r>
           </a:p>
         </p:txBody>
@@ -5187,7 +6654,7 @@
         </p:nvSpPr>
         <p:spPr>
           <a:xfrm>
-            <a:off x="731520" y="685800"/>
+            <a:off x="731520" y="621792"/>
             <a:ext cx="10698480" cy="640080"/>
           </a:xfrm>
           <a:prstGeom prst="rect">
@@ -5202,7 +6669,7 @@
           <a:lstStyle/>
           <a:p>
             <a:pPr>
-              <a:defRPr sz="2600" b="1">
+              <a:defRPr sz="2500" b="1">
                 <a:solidFill>
                   <a:srgbClr val="FFFFFF"/>
                 </a:solidFill>
@@ -6515,7 +7982,7 @@
 </p:sld>
 </file>
 
-<file path=ppt/slides/slide6.xml><?xml version="1.0" encoding="utf-8"?>
+<file path=ppt/slides/slide7.xml><?xml version="1.0" encoding="utf-8"?>
 <p:sld xmlns:a="http://schemas.openxmlformats.org/drawingml/2006/main" xmlns:p="http://schemas.openxmlformats.org/presentationml/2006/main" xmlns:r="http://schemas.openxmlformats.org/officeDocument/2006/relationships">
   <p:cSld>
     <p:spTree>
@@ -6576,7 +8043,7 @@
         </p:nvSpPr>
         <p:spPr>
           <a:xfrm>
-            <a:off x="731520" y="365760"/>
+            <a:off x="731520" y="320040"/>
             <a:ext cx="10698480" cy="320040"/>
           </a:xfrm>
           <a:prstGeom prst="rect">
@@ -6591,14 +8058,14 @@
           <a:lstStyle/>
           <a:p>
             <a:pPr>
-              <a:defRPr sz="1100" b="1">
+              <a:defRPr sz="1050" b="1">
                 <a:solidFill>
                   <a:srgbClr val="38BDF8"/>
                 </a:solidFill>
               </a:defRPr>
             </a:pPr>
             <a:r>
-              <a:t>CS 396 — ARTIFICIAL INTELLIGENCE IN HEALTHCARE</a:t>
+              <a:t>CS 396 — ARTIFICIAL INTELLIGENCE IN HEALTHCARE   |   PHASE 3: ABLATION DISCOVERY</a:t>
             </a:r>
           </a:p>
         </p:txBody>
@@ -6611,7 +8078,7 @@
         </p:nvSpPr>
         <p:spPr>
           <a:xfrm>
-            <a:off x="731520" y="685800"/>
+            <a:off x="731520" y="621792"/>
             <a:ext cx="10698480" cy="640080"/>
           </a:xfrm>
           <a:prstGeom prst="rect">
@@ -6626,7 +8093,7 @@
           <a:lstStyle/>
           <a:p>
             <a:pPr>
-              <a:defRPr sz="2600" b="1">
+              <a:defRPr sz="2500" b="1">
                 <a:solidFill>
                   <a:srgbClr val="FFFFFF"/>
                 </a:solidFill>
@@ -6967,7 +8434,7 @@
 </p:sld>
 </file>
 
-<file path=ppt/slides/slide7.xml><?xml version="1.0" encoding="utf-8"?>
+<file path=ppt/slides/slide8.xml><?xml version="1.0" encoding="utf-8"?>
 <p:sld xmlns:a="http://schemas.openxmlformats.org/drawingml/2006/main" xmlns:p="http://schemas.openxmlformats.org/presentationml/2006/main" xmlns:r="http://schemas.openxmlformats.org/officeDocument/2006/relationships">
   <p:cSld>
     <p:spTree>
@@ -7028,7 +8495,7 @@
         </p:nvSpPr>
         <p:spPr>
           <a:xfrm>
-            <a:off x="731520" y="365760"/>
+            <a:off x="731520" y="320040"/>
             <a:ext cx="10698480" cy="320040"/>
           </a:xfrm>
           <a:prstGeom prst="rect">
@@ -7043,14 +8510,14 @@
           <a:lstStyle/>
           <a:p>
             <a:pPr>
-              <a:defRPr sz="1100" b="1">
+              <a:defRPr sz="1050" b="1">
                 <a:solidFill>
                   <a:srgbClr val="38BDF8"/>
                 </a:solidFill>
               </a:defRPr>
             </a:pPr>
             <a:r>
-              <a:t>CS 396 — ARTIFICIAL INTELLIGENCE IN HEALTHCARE</a:t>
+              <a:t>CS 396 — ARTIFICIAL INTELLIGENCE IN HEALTHCARE   |   PHASE 4: MULTIMODAL LEAP</a:t>
             </a:r>
           </a:p>
         </p:txBody>
@@ -7063,7 +8530,7 @@
         </p:nvSpPr>
         <p:spPr>
           <a:xfrm>
-            <a:off x="731520" y="685800"/>
+            <a:off x="731520" y="621792"/>
             <a:ext cx="10698480" cy="640080"/>
           </a:xfrm>
           <a:prstGeom prst="rect">
@@ -7078,7 +8545,7 @@
           <a:lstStyle/>
           <a:p>
             <a:pPr>
-              <a:defRPr sz="2600" b="1">
+              <a:defRPr sz="2500" b="1">
                 <a:solidFill>
                   <a:srgbClr val="FFFFFF"/>
                 </a:solidFill>
@@ -8117,7 +9584,7 @@
 </p:sld>
 </file>
 
-<file path=ppt/slides/slide8.xml><?xml version="1.0" encoding="utf-8"?>
+<file path=ppt/slides/slide9.xml><?xml version="1.0" encoding="utf-8"?>
 <p:sld xmlns:a="http://schemas.openxmlformats.org/drawingml/2006/main" xmlns:p="http://schemas.openxmlformats.org/presentationml/2006/main" xmlns:r="http://schemas.openxmlformats.org/officeDocument/2006/relationships">
   <p:cSld>
     <p:spTree>
@@ -8178,7 +9645,7 @@
         </p:nvSpPr>
         <p:spPr>
           <a:xfrm>
-            <a:off x="731520" y="365760"/>
+            <a:off x="731520" y="320040"/>
             <a:ext cx="10698480" cy="320040"/>
           </a:xfrm>
           <a:prstGeom prst="rect">
@@ -8193,14 +9660,14 @@
           <a:lstStyle/>
           <a:p>
             <a:pPr>
-              <a:defRPr sz="1100" b="1">
+              <a:defRPr sz="1050" b="1">
                 <a:solidFill>
                   <a:srgbClr val="38BDF8"/>
                 </a:solidFill>
               </a:defRPr>
             </a:pPr>
             <a:r>
-              <a:t>CS 396 — ARTIFICIAL INTELLIGENCE IN HEALTHCARE</a:t>
+              <a:t>CS 396 — ARTIFICIAL INTELLIGENCE IN HEALTHCARE   |   PHASE 5: CLINICAL DEPLOYMENT</a:t>
             </a:r>
           </a:p>
         </p:txBody>
@@ -8213,7 +9680,7 @@
         </p:nvSpPr>
         <p:spPr>
           <a:xfrm>
-            <a:off x="731520" y="685800"/>
+            <a:off x="731520" y="621792"/>
             <a:ext cx="10698480" cy="640080"/>
           </a:xfrm>
           <a:prstGeom prst="rect">
@@ -8228,7 +9695,7 @@
           <a:lstStyle/>
           <a:p>
             <a:pPr>
-              <a:defRPr sz="2600" b="1">
+              <a:defRPr sz="2500" b="1">
                 <a:solidFill>
                   <a:srgbClr val="FFFFFF"/>
                 </a:solidFill>
@@ -9675,458 +11142,6 @@
                 </a:solidFill>
               </a:rPr>
               <a:t>Flag patients with P(T2D) &gt;= 0.40 for automated reflex lab orders on chest X-ray discharge summaries.</a:t>
-            </a:r>
-          </a:p>
-        </p:txBody>
-      </p:sp>
-    </p:spTree>
-  </p:cSld>
-  <p:clrMapOvr>
-    <a:masterClrMapping/>
-  </p:clrMapOvr>
-</p:sld>
-</file>
-
-<file path=ppt/slides/slide9.xml><?xml version="1.0" encoding="utf-8"?>
-<p:sld xmlns:a="http://schemas.openxmlformats.org/drawingml/2006/main" xmlns:p="http://schemas.openxmlformats.org/presentationml/2006/main" xmlns:r="http://schemas.openxmlformats.org/officeDocument/2006/relationships">
-  <p:cSld>
-    <p:spTree>
-      <p:nvGrpSpPr>
-        <p:cNvPr id="1" name=""/>
-        <p:cNvGrpSpPr/>
-        <p:nvPr/>
-      </p:nvGrpSpPr>
-      <p:grpSpPr/>
-      <p:sp>
-        <p:nvSpPr>
-          <p:cNvPr id="2" name="Rectangle 1"/>
-          <p:cNvSpPr/>
-          <p:nvPr/>
-        </p:nvSpPr>
-        <p:spPr>
-          <a:xfrm>
-            <a:off x="0" y="0"/>
-            <a:ext cx="12191695" cy="6858000"/>
-          </a:xfrm>
-          <a:prstGeom prst="rect">
-            <a:avLst/>
-          </a:prstGeom>
-          <a:solidFill>
-            <a:srgbClr val="0F172A"/>
-          </a:solidFill>
-          <a:ln>
-            <a:noFill/>
-          </a:ln>
-        </p:spPr>
-        <p:style>
-          <a:lnRef idx="1">
-            <a:schemeClr val="accent1"/>
-          </a:lnRef>
-          <a:fillRef idx="3">
-            <a:schemeClr val="accent1"/>
-          </a:fillRef>
-          <a:effectRef idx="2">
-            <a:schemeClr val="accent1"/>
-          </a:effectRef>
-          <a:fontRef idx="minor">
-            <a:schemeClr val="lt1"/>
-          </a:fontRef>
-        </p:style>
-        <p:txBody>
-          <a:bodyPr rtlCol="0" anchor="ctr"/>
-          <a:lstStyle/>
-          <a:p>
-            <a:pPr algn="ctr"/>
-          </a:p>
-        </p:txBody>
-      </p:sp>
-      <p:sp>
-        <p:nvSpPr>
-          <p:cNvPr id="3" name="TextBox 2"/>
-          <p:cNvSpPr txBox="1"/>
-          <p:nvPr/>
-        </p:nvSpPr>
-        <p:spPr>
-          <a:xfrm>
-            <a:off x="731520" y="365760"/>
-            <a:ext cx="10698480" cy="320040"/>
-          </a:xfrm>
-          <a:prstGeom prst="rect">
-            <a:avLst/>
-          </a:prstGeom>
-          <a:noFill/>
-        </p:spPr>
-        <p:txBody>
-          <a:bodyPr wrap="square">
-            <a:spAutoFit/>
-          </a:bodyPr>
-          <a:lstStyle/>
-          <a:p>
-            <a:pPr>
-              <a:defRPr sz="1100" b="1">
-                <a:solidFill>
-                  <a:srgbClr val="38BDF8"/>
-                </a:solidFill>
-              </a:defRPr>
-            </a:pPr>
-            <a:r>
-              <a:t>CS 396 — ARTIFICIAL INTELLIGENCE IN HEALTHCARE</a:t>
-            </a:r>
-          </a:p>
-        </p:txBody>
-      </p:sp>
-      <p:sp>
-        <p:nvSpPr>
-          <p:cNvPr id="4" name="TextBox 3"/>
-          <p:cNvSpPr txBox="1"/>
-          <p:nvPr/>
-        </p:nvSpPr>
-        <p:spPr>
-          <a:xfrm>
-            <a:off x="731520" y="685800"/>
-            <a:ext cx="10698480" cy="640080"/>
-          </a:xfrm>
-          <a:prstGeom prst="rect">
-            <a:avLst/>
-          </a:prstGeom>
-          <a:noFill/>
-        </p:spPr>
-        <p:txBody>
-          <a:bodyPr wrap="square">
-            <a:spAutoFit/>
-          </a:bodyPr>
-          <a:lstStyle/>
-          <a:p>
-            <a:pPr>
-              <a:defRPr sz="2600" b="1">
-                <a:solidFill>
-                  <a:srgbClr val="FFFFFF"/>
-                </a:solidFill>
-              </a:defRPr>
-            </a:pPr>
-            <a:r>
-              <a:t>Deployable Python Screeners &amp; OOF Deliverables</a:t>
-            </a:r>
-          </a:p>
-        </p:txBody>
-      </p:sp>
-      <p:sp>
-        <p:nvSpPr>
-          <p:cNvPr id="5" name="Rounded Rectangle 4"/>
-          <p:cNvSpPr/>
-          <p:nvPr/>
-        </p:nvSpPr>
-        <p:spPr>
-          <a:xfrm>
-            <a:off x="731520" y="1463040"/>
-            <a:ext cx="5120640" cy="4754880"/>
-          </a:xfrm>
-          <a:prstGeom prst="roundRect">
-            <a:avLst/>
-          </a:prstGeom>
-          <a:solidFill>
-            <a:srgbClr val="1E293B"/>
-          </a:solidFill>
-          <a:ln>
-            <a:solidFill>
-              <a:srgbClr val="334155"/>
-            </a:solidFill>
-          </a:ln>
-        </p:spPr>
-        <p:style>
-          <a:lnRef idx="1">
-            <a:schemeClr val="accent1"/>
-          </a:lnRef>
-          <a:fillRef idx="3">
-            <a:schemeClr val="accent1"/>
-          </a:fillRef>
-          <a:effectRef idx="2">
-            <a:schemeClr val="accent1"/>
-          </a:effectRef>
-          <a:fontRef idx="minor">
-            <a:schemeClr val="lt1"/>
-          </a:fontRef>
-        </p:style>
-        <p:txBody>
-          <a:bodyPr rtlCol="0" anchor="ctr" wrap="square"/>
-          <a:lstStyle/>
-          <a:p>
-            <a:pPr algn="ctr">
-              <a:spcAft>
-                <a:spcPts val="1000"/>
-              </a:spcAft>
-              <a:defRPr sz="1600" b="1">
-                <a:solidFill>
-                  <a:srgbClr val="38BDF8"/>
-                </a:solidFill>
-              </a:defRPr>
-            </a:pPr>
-            <a:r>
-              <a:t>Production Python Screeners</a:t>
-            </a:r>
-          </a:p>
-          <a:p>
-            <a:pPr>
-              <a:spcAft>
-                <a:spcPts val="800"/>
-              </a:spcAft>
-            </a:pPr>
-            <a:r>
-              <a:rPr b="1" sz="1100">
-                <a:solidFill>
-                  <a:srgbClr val="34D399"/>
-                </a:solidFill>
-              </a:rPr>
-              <a:t>► train_multimodal_fusion.py: </a:t>
-            </a:r>
-            <a:r>
-              <a:rPr sz="1050">
-                <a:solidFill>
-                  <a:srgbClr val="FFFFFF"/>
-                </a:solidFill>
-              </a:rPr>
-              <a:t>Two-stage fusion engine: converts CXRs to continuous risk scalar, then trains Gradient Boosting on clinical features.</a:t>
-            </a:r>
-          </a:p>
-          <a:p>
-            <a:pPr>
-              <a:spcAft>
-                <a:spcPts val="800"/>
-              </a:spcAft>
-            </a:pPr>
-            <a:r>
-              <a:rPr b="1" sz="1100">
-                <a:solidFill>
-                  <a:srgbClr val="34D399"/>
-                </a:solidFill>
-              </a:rPr>
-              <a:t>► predict_t2d_image.py: </a:t>
-            </a:r>
-            <a:r>
-              <a:rPr sz="1050">
-                <a:solidFill>
-                  <a:srgbClr val="FFFFFF"/>
-                </a:solidFill>
-              </a:rPr>
-              <a:t>Single-image and batch CXR screener: outputs binary flag, continuous probability, and CTR risk tier.</a:t>
-            </a:r>
-          </a:p>
-          <a:p>
-            <a:pPr>
-              <a:spcAft>
-                <a:spcPts val="800"/>
-              </a:spcAft>
-            </a:pPr>
-            <a:r>
-              <a:rPr b="1" sz="1100">
-                <a:solidFill>
-                  <a:srgbClr val="34D399"/>
-                </a:solidFill>
-              </a:rPr>
-              <a:t>► train_from_scratch_dual.py: </a:t>
-            </a:r>
-            <a:r>
-              <a:rPr sz="1050">
-                <a:solidFill>
-                  <a:srgbClr val="FFFFFF"/>
-                </a:solidFill>
-              </a:rPr>
-              <a:t>Full dual-cohort CNN pipeline with StratifiedGroupKFold, memory caching, and automated OOF CSV export.</a:t>
-            </a:r>
-          </a:p>
-          <a:p>
-            <a:pPr>
-              <a:spcAft>
-                <a:spcPts val="800"/>
-              </a:spcAft>
-            </a:pPr>
-            <a:r>
-              <a:rPr b="1" sz="1100">
-                <a:solidFill>
-                  <a:srgbClr val="34D399"/>
-                </a:solidFill>
-              </a:rPr>
-              <a:t>► classify_view_rad_dino.py: </a:t>
-            </a:r>
-            <a:r>
-              <a:rPr sz="1050">
-                <a:solidFill>
-                  <a:srgbClr val="FFFFFF"/>
-                </a:solidFill>
-              </a:rPr>
-              <a:t>Frontal vs Lateral view separator achieving 99.8% accuracy and 1.0000 AUROC.</a:t>
-            </a:r>
-          </a:p>
-        </p:txBody>
-      </p:sp>
-      <p:sp>
-        <p:nvSpPr>
-          <p:cNvPr id="6" name="Rounded Rectangle 5"/>
-          <p:cNvSpPr/>
-          <p:nvPr/>
-        </p:nvSpPr>
-        <p:spPr>
-          <a:xfrm>
-            <a:off x="6217920" y="1463040"/>
-            <a:ext cx="5212080" cy="4754880"/>
-          </a:xfrm>
-          <a:prstGeom prst="roundRect">
-            <a:avLst/>
-          </a:prstGeom>
-          <a:solidFill>
-            <a:srgbClr val="1E293B"/>
-          </a:solidFill>
-          <a:ln>
-            <a:solidFill>
-              <a:srgbClr val="334155"/>
-            </a:solidFill>
-          </a:ln>
-        </p:spPr>
-        <p:style>
-          <a:lnRef idx="1">
-            <a:schemeClr val="accent1"/>
-          </a:lnRef>
-          <a:fillRef idx="3">
-            <a:schemeClr val="accent1"/>
-          </a:fillRef>
-          <a:effectRef idx="2">
-            <a:schemeClr val="accent1"/>
-          </a:effectRef>
-          <a:fontRef idx="minor">
-            <a:schemeClr val="lt1"/>
-          </a:fontRef>
-        </p:style>
-        <p:txBody>
-          <a:bodyPr rtlCol="0" anchor="ctr" wrap="square"/>
-          <a:lstStyle/>
-          <a:p>
-            <a:pPr algn="ctr">
-              <a:spcAft>
-                <a:spcPts val="1000"/>
-              </a:spcAft>
-              <a:defRPr sz="1600" b="1">
-                <a:solidFill>
-                  <a:srgbClr val="38BDF8"/>
-                </a:solidFill>
-              </a:defRPr>
-            </a:pPr>
-            <a:r>
-              <a:t>Clean Deliverables on GitHub</a:t>
-            </a:r>
-          </a:p>
-          <a:p>
-            <a:pPr>
-              <a:spcAft>
-                <a:spcPts val="800"/>
-              </a:spcAft>
-            </a:pPr>
-            <a:r>
-              <a:rPr b="1" sz="1100">
-                <a:solidFill>
-                  <a:srgbClr val="FB923C"/>
-                </a:solidFill>
-              </a:rPr>
-              <a:t>✓ oof_multimodal.csv: </a:t>
-            </a:r>
-            <a:r>
-              <a:rPr sz="1050">
-                <a:solidFill>
-                  <a:srgbClr val="FFFFFF"/>
-                </a:solidFill>
-              </a:rPr>
-              <a:t>949 patient records with CXR risk score, multimodal predicted probability, and binary classification.</a:t>
-            </a:r>
-          </a:p>
-          <a:p>
-            <a:pPr>
-              <a:spcAft>
-                <a:spcPts val="800"/>
-              </a:spcAft>
-            </a:pPr>
-            <a:r>
-              <a:rPr b="1" sz="1100">
-                <a:solidFill>
-                  <a:srgbClr val="FB923C"/>
-                </a:solidFill>
-              </a:rPr>
-              <a:t>✓ multimodal_benchmark_comparison.csv: </a:t>
-            </a:r>
-            <a:r>
-              <a:rPr sz="1050">
-                <a:solidFill>
-                  <a:srgbClr val="FFFFFF"/>
-                </a:solidFill>
-              </a:rPr>
-              <a:t>Complete 5-pipeline benchmark table (Pure CXR, Clinical alone, Linear, Gradient Boosting, Ensemble).</a:t>
-            </a:r>
-          </a:p>
-          <a:p>
-            <a:pPr>
-              <a:spcAft>
-                <a:spcPts val="800"/>
-              </a:spcAft>
-            </a:pPr>
-            <a:r>
-              <a:rPr b="1" sz="1100">
-                <a:solidFill>
-                  <a:srgbClr val="FB923C"/>
-                </a:solidFill>
-              </a:rPr>
-              <a:t>✓ train_test_split.csv &amp; test_set.csv: </a:t>
-            </a:r>
-            <a:r>
-              <a:rPr sz="1050">
-                <a:solidFill>
-                  <a:srgbClr val="FFFFFF"/>
-                </a:solidFill>
-              </a:rPr>
-              <a:t>Strict 80/20 train-test splits (Folds 1-4 train N=760, Fold 5 test N=189) with 0 patient leakage.</a:t>
-            </a:r>
-          </a:p>
-          <a:p>
-            <a:pPr>
-              <a:spcAft>
-                <a:spcPts val="800"/>
-              </a:spcAft>
-            </a:pPr>
-            <a:r>
-              <a:rPr b="1" sz="1100">
-                <a:solidFill>
-                  <a:srgbClr val="FB923C"/>
-                </a:solidFill>
-              </a:rPr>
-              <a:t>✓ oof_all_cxrs.csv &amp; oof_no_hazy.csv: </a:t>
-            </a:r>
-            <a:r>
-              <a:rPr sz="1050">
-                <a:solidFill>
-                  <a:srgbClr val="FFFFFF"/>
-                </a:solidFill>
-              </a:rPr>
-              <a:t>Raw image CNN out-of-fold predictions across All CXRs (N=949) vs No Hazy (N=938).</a:t>
-            </a:r>
-          </a:p>
-          <a:p>
-            <a:pPr>
-              <a:spcAft>
-                <a:spcPts val="800"/>
-              </a:spcAft>
-            </a:pPr>
-            <a:r>
-              <a:rPr b="1" sz="1100">
-                <a:solidFill>
-                  <a:srgbClr val="FB923C"/>
-                </a:solidFill>
-              </a:rPr>
-              <a:t>✓ HIPAA Compliant: </a:t>
-            </a:r>
-            <a:r>
-              <a:rPr sz="1050">
-                <a:solidFill>
-                  <a:srgbClr val="FFFFFF"/>
-                </a:solidFill>
-              </a:rPr>
-              <a:t>Zero raw patient radiographs or DICOM binaries stored in git.</a:t>
             </a:r>
           </a:p>
         </p:txBody>

--- a/malek_and_angelo/malek/Malek_T2D_CNN_Presentation.pptx
+++ b/malek_and_angelo/malek/Malek_T2D_CNN_Presentation.pptx
@@ -3149,7 +3149,7 @@
         </p:nvSpPr>
         <p:spPr>
           <a:xfrm>
-            <a:off x="914400" y="1371600"/>
+            <a:off x="914400" y="1188720"/>
             <a:ext cx="10332720" cy="2926080"/>
           </a:xfrm>
           <a:prstGeom prst="rect">
@@ -3165,7 +3165,7 @@
           <a:p>
             <a:pPr>
               <a:spcAft>
-                <a:spcPts val="800"/>
+                <a:spcPts val="600"/>
               </a:spcAft>
               <a:defRPr sz="3600" b="1">
                 <a:solidFill>
@@ -3180,7 +3180,7 @@
           <a:p>
             <a:pPr>
               <a:spcAft>
-                <a:spcPts val="2000"/>
+                <a:spcPts val="1600"/>
               </a:spcAft>
               <a:defRPr sz="2200">
                 <a:solidFill>
@@ -3189,19 +3189,19 @@
               </a:defRPr>
             </a:pPr>
             <a:r>
-              <a:t>From-Scratch Deep CNN Architecture &amp; Thoracic Anatomical Scoring</a:t>
+              <a:t>From-Scratch Deep CNN Architecture &amp; Multimodal Progress Update</a:t>
             </a:r>
           </a:p>
           <a:p>
             <a:pPr>
-              <a:defRPr sz="1400">
+              <a:defRPr sz="1350">
                 <a:solidFill>
                   <a:srgbClr val="94A3B8"/>
                 </a:solidFill>
               </a:defRPr>
             </a:pPr>
             <a:r>
-              <a:t>Presenter: Malek  |  Collaborator: Angelo  |  Course: CS 396: AI in Healthcare</a:t>
+              <a:t>Presenter: Malek   |   Collaborator: Angelo   |   Course: CS 396: AI in Healthcare   |   Date: October 29, 2026</a:t>
             </a:r>
           </a:p>
         </p:txBody>
@@ -3214,8 +3214,8 @@
         </p:nvSpPr>
         <p:spPr>
           <a:xfrm>
-            <a:off x="914400" y="4434840"/>
-            <a:ext cx="10332720" cy="2011680"/>
+            <a:off x="914400" y="4297680"/>
+            <a:ext cx="10332720" cy="2148840"/>
           </a:xfrm>
           <a:prstGeom prst="roundRect">
             <a:avLst/>
@@ -3258,7 +3258,7 @@
               </a:defRPr>
             </a:pPr>
             <a:r>
-              <a:t>EXECUTIVE SUMMARY &amp; PROGRESS SNAPSHOT</a:t>
+              <a:t>EXECUTIVE SUMMARY: PROGRESS &amp; QUANTIFIABLE IMPROVEMENTS (OCT 29 UPDATE)</a:t>
             </a:r>
           </a:p>
           <a:p>
@@ -3270,10 +3270,10 @@
             <a:r>
               <a:rPr b="1" sz="1000">
                 <a:solidFill>
-                  <a:srgbClr val="38BDF8"/>
-                </a:solidFill>
-              </a:rPr>
-              <a:t>✓ Phase 1 (Data Shield): </a:t>
+                  <a:srgbClr val="34D399"/>
+                </a:solidFill>
+              </a:rPr>
+              <a:t>✓ AUROC Surge (+0.2667 Jump): </a:t>
             </a:r>
             <a:r>
               <a:rPr sz="1000">
@@ -3281,7 +3281,7 @@
                   <a:srgbClr val="FFFFFF"/>
                 </a:solidFill>
               </a:rPr>
-              <a:t>5-Fold StratifiedGroupKFold on patient_id (N=949) eliminates patient-level leakage.</a:t>
+              <a:t>Advanced from pure X-ray baseline (0.6401) to a state-of-the-art 0.9068 AUROC (AUPRC: 0.8196) via two-stage multimodal late fusion.</a:t>
             </a:r>
           </a:p>
           <a:p>
@@ -3293,10 +3293,10 @@
             <a:r>
               <a:rPr b="1" sz="1000">
                 <a:solidFill>
-                  <a:srgbClr val="38BDF8"/>
-                </a:solidFill>
-              </a:rPr>
-              <a:t>✓ Phase 2 (Vision CNN): </a:t>
+                  <a:srgbClr val="34D399"/>
+                </a:solidFill>
+              </a:rPr>
+              <a:t>✓ Recall Improvement (+18.6%): </a:t>
             </a:r>
             <a:r>
               <a:rPr sz="1000">
@@ -3304,7 +3304,7 @@
                   <a:srgbClr val="FFFFFF"/>
                 </a:solidFill>
               </a:rPr>
-              <a:t>Custom ~75k param scratch CNN achieves 0.6401 AUROC, outperforming foundation ViT RAD-DINO (0.5734).</a:t>
+              <a:t>Tuned clinical operating threshold (τ = 0.40) to drive sensitivity from 62.21% to 80.78% (catching 57 additional diabetic patients).</a:t>
             </a:r>
           </a:p>
           <a:p>
@@ -3319,7 +3319,7 @@
                   <a:srgbClr val="38BDF8"/>
                 </a:solidFill>
               </a:rPr>
-              <a:t>✓ Phase 3 (Ablation): </a:t>
+              <a:t>✓ 59.2% False Alarm Reduction: </a:t>
             </a:r>
             <a:r>
               <a:rPr sz="1000">
@@ -3327,7 +3327,7 @@
                   <a:srgbClr val="FFFFFF"/>
                 </a:solidFill>
               </a:rPr>
-              <a:t>Hazy-11 experiment proved that real-world clinical blur diversity improves generalization (recall drops 7.5% if removed).</a:t>
+              <a:t>False Positives plummeted from 260 in Pure CXR down to only 106 in the optimized screener (slashing false alarms by 154 patients).</a:t>
             </a:r>
           </a:p>
           <a:p>
@@ -3339,10 +3339,10 @@
             <a:r>
               <a:rPr b="1" sz="1000">
                 <a:solidFill>
-                  <a:srgbClr val="34D399"/>
-                </a:solidFill>
-              </a:rPr>
-              <a:t>✓ Phase 4 (Multimodal Leap): </a:t>
+                  <a:srgbClr val="38BDF8"/>
+                </a:solidFill>
+              </a:rPr>
+              <a:t>✓ Missed Cases Cut by 49.1%: </a:t>
             </a:r>
             <a:r>
               <a:rPr sz="1000">
@@ -3350,7 +3350,7 @@
                   <a:srgbClr val="FFFFFF"/>
                 </a:solidFill>
               </a:rPr>
-              <a:t>Fusing CXR continuous scalar with EHR covariates surges AUROC to 0.9068 (AUPRC: 0.8196; 75% fewer false alarms).</a:t>
+              <a:t>Undiagnosed diabetics missed by the system fell from 116 down to 59, drastically improving clinical safety.</a:t>
             </a:r>
           </a:p>
           <a:p>
@@ -3362,10 +3362,10 @@
             <a:r>
               <a:rPr b="1" sz="1000">
                 <a:solidFill>
-                  <a:srgbClr val="34D399"/>
-                </a:solidFill>
-              </a:rPr>
-              <a:t>✓ Phase 5 (Clinical Tuning): </a:t>
+                  <a:srgbClr val="38BDF8"/>
+                </a:solidFill>
+              </a:rPr>
+              <a:t>✓ Zero Data Leakage: </a:t>
             </a:r>
             <a:r>
               <a:rPr sz="1000">
@@ -3373,7 +3373,7 @@
                   <a:srgbClr val="FFFFFF"/>
                 </a:solidFill>
               </a:rPr>
-              <a:t>Operating at τ = 0.40 catches 80.8% of diabetics, cutting missed cases by 37.2% with only 106 False Positives.</a:t>
+              <a:t>Strict 5-Fold StratifiedGroupKFold on patient_id (N=949) verified zero patient overlap between train and test splits.</a:t>
             </a:r>
           </a:p>
         </p:txBody>
@@ -3956,7 +3956,7 @@
               </a:defRPr>
             </a:pPr>
             <a:r>
-              <a:t>Key Takeaways &amp; Presentation Summary</a:t>
+              <a:t>Key Takeaways &amp; Quantifiable Progress Summary</a:t>
             </a:r>
           </a:p>
         </p:txBody>
@@ -4013,7 +4013,7 @@
               </a:defRPr>
             </a:pPr>
             <a:r>
-              <a:t>Summary for CS 396 Presentation (Thursday Oct 22nd)</a:t>
+              <a:t>Summary of Progress &amp; Improvements (Thursday, October 29, 2026)</a:t>
             </a:r>
           </a:p>
           <a:p>
@@ -4028,7 +4028,7 @@
                   <a:srgbClr val="34D399"/>
                 </a:solidFill>
               </a:rPr>
-              <a:t>★ Two-Stage Pipeline Success: </a:t>
+              <a:t>★ Major AUROC Leap (+0.2667 Gain): </a:t>
             </a:r>
             <a:r>
               <a:rPr sz="1150">
@@ -4036,7 +4036,7 @@
                   <a:srgbClr val="FFFFFF"/>
                 </a:solidFill>
               </a:rPr>
-              <a:t>Converting chest radiographs into a continuous thoracic biomarker (CTR &amp; fat pads) and fusing with clinical covariates achieved an outstanding 0.9068 AUROC (AUPRC: 0.8196).</a:t>
+              <a:t>By converting radiographs into an independent thoracic biomarker and fusing with clinical covariates, model discrimination surged from an initial 0.6401 (CXR alone) to 0.9068 AUROC (AUPRC: 0.8196).</a:t>
             </a:r>
           </a:p>
           <a:p>
@@ -4051,7 +4051,7 @@
                   <a:srgbClr val="34D399"/>
                 </a:solidFill>
               </a:rPr>
-              <a:t>★ Optimized Screener (τ = 0.40): </a:t>
+              <a:t>★ Dramatic Recall Improvement (+18.6%): </a:t>
             </a:r>
             <a:r>
               <a:rPr sz="1150">
@@ -4059,7 +4059,7 @@
                   <a:srgbClr val="FFFFFF"/>
                 </a:solidFill>
               </a:rPr>
-              <a:t>Operating at threshold τ = 0.40 catches 80.78% of undiagnosed diabetics (Sensitivity) while preserving 83.49% specificity, cutting missed cases by 37.2%.</a:t>
+              <a:t>Tuning the clinical decision threshold to τ = 0.40 drove sensitivity from 62.21% to 80.78%, catching 57 additional undiagnosed diabetics and cutting missed cases from 116 down to 59.</a:t>
             </a:r>
           </a:p>
           <a:p>
@@ -4074,7 +4074,7 @@
                   <a:srgbClr val="34D399"/>
                 </a:solidFill>
               </a:rPr>
-              <a:t>★ Scratch Beat Pretrained RAD-DINO: </a:t>
+              <a:t>★ 59.2% False Alarm Reduction: </a:t>
             </a:r>
             <a:r>
               <a:rPr sz="1150">
@@ -4082,7 +4082,7 @@
                   <a:srgbClr val="FFFFFF"/>
                 </a:solidFill>
               </a:rPr>
-              <a:t>Specialized supervised convolution outscored general contrastive vision transformers (0.6401 vs 0.5734 AUROC), showing that task-targeted training on medical targets captures critical organ geometry.</a:t>
+              <a:t>False positives dropped drastically from 260 in Pure CXR down to 106 in the multimodal screener, maintaining a strong 83.49% specificity and sparing hundreds of patients unnecessary stress.</a:t>
             </a:r>
           </a:p>
           <a:p>
@@ -4097,7 +4097,7 @@
                   <a:srgbClr val="34D399"/>
                 </a:solidFill>
               </a:rPr>
-              <a:t>★ Data Diversity Beats Aggressive Filtering: </a:t>
+              <a:t>★ Ablation &amp; Modeling Insights: </a:t>
             </a:r>
             <a:r>
               <a:rPr sz="1150">
@@ -4105,7 +4105,7 @@
                   <a:srgbClr val="FFFFFF"/>
                 </a:solidFill>
               </a:rPr>
-              <a:t>Excluding 11 hazy radiographs degraded sensitivity by 7.5% and AUROC by 0.022. Preserving natural clinical image variations enhances generalization in patient cohorts.</a:t>
+              <a:t>Supervised scratch CNN beat foundation ViT RAD-DINO (0.6401 vs 0.5734 AUROC), and preserving clinical blur proved vital (dropping hazy images hurt recall by 7.5%).</a:t>
             </a:r>
           </a:p>
           <a:p>
@@ -4120,7 +4120,7 @@
                   <a:srgbClr val="34D399"/>
                 </a:solidFill>
               </a:rPr>
-              <a:t>★ Clinical Impact: </a:t>
+              <a:t>★ Healthcare Screening Impact: </a:t>
             </a:r>
             <a:r>
               <a:rPr sz="1150">
@@ -4128,7 +4128,7 @@
                   <a:srgbClr val="FFFFFF"/>
                 </a:solidFill>
               </a:rPr>
-              <a:t>Over 80% of diabetic patients can be flagged during unrelated routine chest X-rays (e.g. pre-op, cough, trauma), creating a zero-cost safety net to prompt definitive HbA1c diagnostic testing.</a:t>
+              <a:t>Over 80% of undiagnosed diabetics can now be reliably flagged during routine chest radiography at zero incremental patient burden, prompting early, life-saving HbA1c confirmatory lab testing.</a:t>
             </a:r>
           </a:p>
         </p:txBody>
@@ -4224,7 +4224,7 @@
               </a:defRPr>
             </a:pPr>
             <a:r>
-              <a:t>CS 396 — ARTIFICIAL INTELLIGENCE IN HEALTHCARE   |   PROGRESS TRACKER</a:t>
+              <a:t>CS 396 — ARTIFICIAL INTELLIGENCE IN HEALTHCARE   |   PROGRESS &amp; IMPROVEMENTS</a:t>
             </a:r>
           </a:p>
         </p:txBody>
@@ -4259,7 +4259,7 @@
               </a:defRPr>
             </a:pPr>
             <a:r>
-              <a:t>Project Progress: 5 Iterative Experimental Milestones</a:t>
+              <a:t>Progress Update (Oct 29): Quantifiable Model Improvements</a:t>
             </a:r>
           </a:p>
         </p:txBody>
@@ -4272,8 +4272,8 @@
         </p:nvSpPr>
         <p:spPr>
           <a:xfrm>
-            <a:off x="731520" y="1371600"/>
-            <a:ext cx="1993392" cy="4846320"/>
+            <a:off x="731520" y="1280160"/>
+            <a:ext cx="2542032" cy="1371600"/>
           </a:xfrm>
           <a:prstGeom prst="roundRect">
             <a:avLst/>
@@ -4306,116 +4306,42 @@
           <a:lstStyle/>
           <a:p>
             <a:pPr algn="ctr">
-              <a:spcAft>
-                <a:spcPts val="200"/>
-              </a:spcAft>
-              <a:defRPr sz="1100" b="1">
-                <a:solidFill>
-                  <a:srgbClr val="38BDF8"/>
+              <a:defRPr sz="1000" b="1">
+                <a:solidFill>
+                  <a:srgbClr val="34D399"/>
                 </a:solidFill>
               </a:defRPr>
             </a:pPr>
             <a:r>
-              <a:t>PHASE 1</a:t>
+              <a:t>AUROC IMPROVEMENT</a:t>
             </a:r>
           </a:p>
           <a:p>
             <a:pPr>
-              <a:spcAft>
-                <a:spcPts val="800"/>
-              </a:spcAft>
-              <a:defRPr sz="1150" b="1">
+              <a:defRPr sz="2400" b="1">
                 <a:solidFill>
                   <a:srgbClr val="FFFFFF"/>
                 </a:solidFill>
               </a:defRPr>
             </a:pPr>
             <a:r>
-              <a:t>Leakage Shield &amp; Grouped Folds</a:t>
+              <a:t>0.64 ➔ 0.91</a:t>
             </a:r>
           </a:p>
           <a:p>
             <a:pPr>
-              <a:spcAft>
-                <a:spcPts val="400"/>
-              </a:spcAft>
-            </a:pPr>
-            <a:r>
-              <a:rPr b="1" sz="950">
-                <a:solidFill>
-                  <a:srgbClr val="38BDF8"/>
-                </a:solidFill>
-              </a:rPr>
-              <a:t>• Grouped CV: </a:t>
-            </a:r>
-            <a:r>
-              <a:rPr sz="900">
-                <a:solidFill>
-                  <a:srgbClr val="FFFFFF"/>
-                </a:solidFill>
-              </a:rPr>
-              <a:t>5-Fold StratifiedGroupKFold grouped strictly on patient_id (N=949).</a:t>
-            </a:r>
-          </a:p>
-          <a:p>
-            <a:pPr>
-              <a:spcAft>
-                <a:spcPts val="400"/>
-              </a:spcAft>
-            </a:pPr>
-            <a:r>
-              <a:rPr b="1" sz="950">
-                <a:solidFill>
-                  <a:srgbClr val="38BDF8"/>
-                </a:solidFill>
-              </a:rPr>
-              <a:t>• Zero Contamination: </a:t>
-            </a:r>
-            <a:r>
-              <a:rPr sz="900">
-                <a:solidFill>
-                  <a:srgbClr val="FFFFFF"/>
-                </a:solidFill>
-              </a:rPr>
-              <a:t>Guarantees no patient CXRs cross train and test splits.</a:t>
-            </a:r>
-          </a:p>
-          <a:p>
-            <a:pPr>
-              <a:spcAft>
-                <a:spcPts val="400"/>
-              </a:spcAft>
-            </a:pPr>
-            <a:r>
-              <a:rPr b="1" sz="950">
-                <a:solidFill>
-                  <a:srgbClr val="38BDF8"/>
-                </a:solidFill>
-              </a:rPr>
-              <a:t>• Class Imbalance: </a:t>
-            </a:r>
-            <a:r>
-              <a:rPr sz="900">
-                <a:solidFill>
-                  <a:srgbClr val="FFFFFF"/>
-                </a:solidFill>
-              </a:rPr>
-              <a:t>Handled 307:642 ratio via weighted cross-entropy loss (w_pos=2.09).</a:t>
-            </a:r>
-          </a:p>
-          <a:p>
-            <a:pPr>
-              <a:spcBef>
-                <a:spcPts val="800"/>
-              </a:spcBef>
-              <a:defRPr sz="1000" b="1">
-                <a:solidFill>
-                  <a:srgbClr val="34D399"/>
+              <a:defRPr sz="900">
+                <a:solidFill>
+                  <a:srgbClr val="94A3B8"/>
                 </a:solidFill>
               </a:defRPr>
             </a:pPr>
             <a:r>
-              <a:t>★ COMPLETED ✓</a:t>
+              <a:t>+0.2667 (+41.7% Lift)</a:t>
+            </a:r>
+            <a:br/>
+            <a:r>
+              <a:t>From CXR alone to Multimodal</a:t>
             </a:r>
           </a:p>
         </p:txBody>
@@ -4428,8 +4354,8 @@
         </p:nvSpPr>
         <p:spPr>
           <a:xfrm>
-            <a:off x="2907792" y="1371600"/>
-            <a:ext cx="1993392" cy="4846320"/>
+            <a:off x="3456432" y="1280160"/>
+            <a:ext cx="2542032" cy="1371600"/>
           </a:xfrm>
           <a:prstGeom prst="roundRect">
             <a:avLst/>
@@ -4462,116 +4388,42 @@
           <a:lstStyle/>
           <a:p>
             <a:pPr algn="ctr">
-              <a:spcAft>
-                <a:spcPts val="200"/>
-              </a:spcAft>
-              <a:defRPr sz="1100" b="1">
-                <a:solidFill>
-                  <a:srgbClr val="34D399"/>
+              <a:defRPr sz="1000" b="1">
+                <a:solidFill>
+                  <a:srgbClr val="38BDF8"/>
                 </a:solidFill>
               </a:defRPr>
             </a:pPr>
             <a:r>
-              <a:t>PHASE 2</a:t>
+              <a:t>RECALL (DIABETICS CAUGHT)</a:t>
             </a:r>
           </a:p>
           <a:p>
             <a:pPr>
-              <a:spcAft>
-                <a:spcPts val="800"/>
-              </a:spcAft>
-              <a:defRPr sz="1150" b="1">
+              <a:defRPr sz="2400" b="1">
                 <a:solidFill>
                   <a:srgbClr val="FFFFFF"/>
                 </a:solidFill>
               </a:defRPr>
             </a:pPr>
             <a:r>
-              <a:t>Custom CNN Beats Foundation ViT</a:t>
+              <a:t>62.2% ➔ 80.8%</a:t>
             </a:r>
           </a:p>
           <a:p>
             <a:pPr>
-              <a:spcAft>
-                <a:spcPts val="400"/>
-              </a:spcAft>
-            </a:pPr>
-            <a:r>
-              <a:rPr b="1" sz="950">
-                <a:solidFill>
-                  <a:srgbClr val="34D399"/>
-                </a:solidFill>
-              </a:rPr>
-              <a:t>• Lightweight CNN: </a:t>
-            </a:r>
-            <a:r>
-              <a:rPr sz="900">
-                <a:solidFill>
-                  <a:srgbClr val="FFFFFF"/>
-                </a:solidFill>
-              </a:rPr>
-              <a:t>Engineered ~75k param 4-block ConvNet with GroupNorm &amp; Dropout.</a:t>
-            </a:r>
-          </a:p>
-          <a:p>
-            <a:pPr>
-              <a:spcAft>
-                <a:spcPts val="400"/>
-              </a:spcAft>
-            </a:pPr>
-            <a:r>
-              <a:rPr b="1" sz="950">
-                <a:solidFill>
-                  <a:srgbClr val="34D399"/>
-                </a:solidFill>
-              </a:rPr>
-              <a:t>• Beats RAD-DINO: </a:t>
-            </a:r>
-            <a:r>
-              <a:rPr sz="900">
-                <a:solidFill>
-                  <a:srgbClr val="FFFFFF"/>
-                </a:solidFill>
-              </a:rPr>
-              <a:t>0.6401 AUROC vs 0.5734 for frozen ViT-B (supervised task alignment).</a:t>
-            </a:r>
-          </a:p>
-          <a:p>
-            <a:pPr>
-              <a:spcAft>
-                <a:spcPts val="400"/>
-              </a:spcAft>
-            </a:pPr>
-            <a:r>
-              <a:rPr b="1" sz="950">
-                <a:solidFill>
-                  <a:srgbClr val="34D399"/>
-                </a:solidFill>
-              </a:rPr>
-              <a:t>• CTR Signal: </a:t>
-            </a:r>
-            <a:r>
-              <a:rPr sz="900">
-                <a:solidFill>
-                  <a:srgbClr val="FFFFFF"/>
-                </a:solidFill>
-              </a:rPr>
-              <a:t>Learns relative cardiac width vs lung cage and thoracic soft tissue.</a:t>
-            </a:r>
-          </a:p>
-          <a:p>
-            <a:pPr>
-              <a:spcBef>
-                <a:spcPts val="800"/>
-              </a:spcBef>
-              <a:defRPr sz="1000" b="1">
-                <a:solidFill>
-                  <a:srgbClr val="34D399"/>
+              <a:defRPr sz="900">
+                <a:solidFill>
+                  <a:srgbClr val="94A3B8"/>
                 </a:solidFill>
               </a:defRPr>
             </a:pPr>
             <a:r>
-              <a:t>★ COMPLETED ✓</a:t>
+              <a:t>+18.57% Sensitivity Gain</a:t>
+            </a:r>
+            <a:br/>
+            <a:r>
+              <a:t>(191 ➔ 248 Patients Caught)</a:t>
             </a:r>
           </a:p>
         </p:txBody>
@@ -4584,8 +4436,8 @@
         </p:nvSpPr>
         <p:spPr>
           <a:xfrm>
-            <a:off x="5084064" y="1371600"/>
-            <a:ext cx="1993392" cy="4846320"/>
+            <a:off x="6181344" y="1280160"/>
+            <a:ext cx="2542032" cy="1371600"/>
           </a:xfrm>
           <a:prstGeom prst="roundRect">
             <a:avLst/>
@@ -4618,116 +4470,42 @@
           <a:lstStyle/>
           <a:p>
             <a:pPr algn="ctr">
-              <a:spcAft>
-                <a:spcPts val="200"/>
-              </a:spcAft>
-              <a:defRPr sz="1100" b="1">
+              <a:defRPr sz="1000" b="1">
                 <a:solidFill>
                   <a:srgbClr val="FB923C"/>
                 </a:solidFill>
               </a:defRPr>
             </a:pPr>
             <a:r>
-              <a:t>PHASE 3</a:t>
+              <a:t>FALSE ALARMS (FP)</a:t>
             </a:r>
           </a:p>
           <a:p>
             <a:pPr>
-              <a:spcAft>
-                <a:spcPts val="800"/>
-              </a:spcAft>
-              <a:defRPr sz="1150" b="1">
+              <a:defRPr sz="2400" b="1">
                 <a:solidFill>
                   <a:srgbClr val="FFFFFF"/>
                 </a:solidFill>
               </a:defRPr>
             </a:pPr>
             <a:r>
-              <a:t>The Hazy-11 Empirical Discovery</a:t>
+              <a:t>260 ➔ 106</a:t>
             </a:r>
           </a:p>
           <a:p>
             <a:pPr>
-              <a:spcAft>
-                <a:spcPts val="400"/>
-              </a:spcAft>
-            </a:pPr>
-            <a:r>
-              <a:rPr b="1" sz="950">
-                <a:solidFill>
-                  <a:srgbClr val="FB923C"/>
-                </a:solidFill>
-              </a:rPr>
-              <a:t>• Hypothesis: </a:t>
-            </a:r>
-            <a:r>
-              <a:rPr sz="900">
-                <a:solidFill>
-                  <a:srgbClr val="FFFFFF"/>
-                </a:solidFill>
-              </a:rPr>
-              <a:t>Filtering 11 low-contrast/blurry CXRs should improve model accuracy.</a:t>
-            </a:r>
-          </a:p>
-          <a:p>
-            <a:pPr>
-              <a:spcAft>
-                <a:spcPts val="400"/>
-              </a:spcAft>
-            </a:pPr>
-            <a:r>
-              <a:rPr b="1" sz="950">
-                <a:solidFill>
-                  <a:srgbClr val="FB923C"/>
-                </a:solidFill>
-              </a:rPr>
-              <a:t>• Surprise Result: </a:t>
-            </a:r>
-            <a:r>
-              <a:rPr sz="900">
-                <a:solidFill>
-                  <a:srgbClr val="FFFFFF"/>
-                </a:solidFill>
-              </a:rPr>
-              <a:t>Dropping them hurt AUROC (0.6401 -&gt; 0.6182) and recall (-7.5%).</a:t>
-            </a:r>
-          </a:p>
-          <a:p>
-            <a:pPr>
-              <a:spcAft>
-                <a:spcPts val="400"/>
-              </a:spcAft>
-            </a:pPr>
-            <a:r>
-              <a:rPr b="1" sz="950">
-                <a:solidFill>
-                  <a:srgbClr val="FB923C"/>
-                </a:solidFill>
-              </a:rPr>
-              <a:t>• Key Finding: </a:t>
-            </a:r>
-            <a:r>
-              <a:rPr sz="900">
-                <a:solidFill>
-                  <a:srgbClr val="FFFFFF"/>
-                </a:solidFill>
-              </a:rPr>
-              <a:t>Preserving real-world clinical blur diversity is critical for generalization.</a:t>
-            </a:r>
-          </a:p>
-          <a:p>
-            <a:pPr>
-              <a:spcBef>
-                <a:spcPts val="800"/>
-              </a:spcBef>
-              <a:defRPr sz="1000" b="1">
-                <a:solidFill>
-                  <a:srgbClr val="34D399"/>
+              <a:defRPr sz="900">
+                <a:solidFill>
+                  <a:srgbClr val="94A3B8"/>
                 </a:solidFill>
               </a:defRPr>
             </a:pPr>
             <a:r>
-              <a:t>★ COMPLETED ✓</a:t>
+              <a:t>-59.2% Slashed (-154 FPs)</a:t>
+            </a:r>
+            <a:br/>
+            <a:r>
+              <a:t>Vastly cleaner screening calls</a:t>
             </a:r>
           </a:p>
         </p:txBody>
@@ -4740,8 +4518,8 @@
         </p:nvSpPr>
         <p:spPr>
           <a:xfrm>
-            <a:off x="7260336" y="1371600"/>
-            <a:ext cx="1993392" cy="4846320"/>
+            <a:off x="8906256" y="1280160"/>
+            <a:ext cx="2542032" cy="1371600"/>
           </a:xfrm>
           <a:prstGeom prst="roundRect">
             <a:avLst/>
@@ -4774,130 +4552,1066 @@
           <a:lstStyle/>
           <a:p>
             <a:pPr algn="ctr">
-              <a:spcAft>
-                <a:spcPts val="200"/>
-              </a:spcAft>
-              <a:defRPr sz="1100" b="1">
-                <a:solidFill>
-                  <a:srgbClr val="38BDF8"/>
+              <a:defRPr sz="1000" b="1">
+                <a:solidFill>
+                  <a:srgbClr val="34D399"/>
                 </a:solidFill>
               </a:defRPr>
             </a:pPr>
             <a:r>
-              <a:t>PHASE 4</a:t>
+              <a:t>MISSED CASES (FN)</a:t>
             </a:r>
           </a:p>
           <a:p>
             <a:pPr>
-              <a:spcAft>
-                <a:spcPts val="800"/>
-              </a:spcAft>
-              <a:defRPr sz="1150" b="1">
+              <a:defRPr sz="2400" b="1">
                 <a:solidFill>
                   <a:srgbClr val="FFFFFF"/>
                 </a:solidFill>
               </a:defRPr>
             </a:pPr>
             <a:r>
-              <a:t>Two-Stage Multimodal Breakthrough</a:t>
+              <a:t>116 ➔ 59</a:t>
             </a:r>
           </a:p>
           <a:p>
             <a:pPr>
-              <a:spcAft>
-                <a:spcPts val="400"/>
-              </a:spcAft>
-            </a:pPr>
-            <a:r>
-              <a:rPr b="1" sz="950">
-                <a:solidFill>
-                  <a:srgbClr val="38BDF8"/>
-                </a:solidFill>
-              </a:rPr>
-              <a:t>• X-Ray as Number: </a:t>
-            </a:r>
-            <a:r>
-              <a:rPr sz="900">
-                <a:solidFill>
-                  <a:srgbClr val="FFFFFF"/>
-                </a:solidFill>
-              </a:rPr>
-              <a:t>Stage 1 converts CXR pixels into continuous scalar risk probability.</a:t>
-            </a:r>
-          </a:p>
-          <a:p>
-            <a:pPr>
-              <a:spcAft>
-                <a:spcPts val="400"/>
-              </a:spcAft>
-            </a:pPr>
-            <a:r>
-              <a:rPr b="1" sz="950">
-                <a:solidFill>
-                  <a:srgbClr val="38BDF8"/>
-                </a:solidFill>
-              </a:rPr>
-              <a:t>• Late Fusion: </a:t>
-            </a:r>
-            <a:r>
-              <a:rPr sz="900">
-                <a:solidFill>
-                  <a:srgbClr val="FFFFFF"/>
-                </a:solidFill>
-              </a:rPr>
-              <a:t>Fuses CXR score with Age, BMI, Sex, and SDI via Gradient Boosting.</a:t>
-            </a:r>
-          </a:p>
-          <a:p>
-            <a:pPr>
-              <a:spcAft>
-                <a:spcPts val="400"/>
-              </a:spcAft>
-            </a:pPr>
-            <a:r>
-              <a:rPr b="1" sz="950">
-                <a:solidFill>
-                  <a:srgbClr val="38BDF8"/>
-                </a:solidFill>
-              </a:rPr>
-              <a:t>• AUC Leap: </a:t>
-            </a:r>
-            <a:r>
-              <a:rPr sz="900">
-                <a:solidFill>
-                  <a:srgbClr val="FFFFFF"/>
-                </a:solidFill>
-              </a:rPr>
-              <a:t>AUROC jumps from 0.6401 -&gt; 0.9068 (+0.2667 lift; AUPRC 0.8196).</a:t>
-            </a:r>
-          </a:p>
-          <a:p>
-            <a:pPr>
-              <a:spcBef>
-                <a:spcPts val="800"/>
-              </a:spcBef>
-              <a:defRPr sz="1000" b="1">
-                <a:solidFill>
-                  <a:srgbClr val="34D399"/>
+              <a:defRPr sz="900">
+                <a:solidFill>
+                  <a:srgbClr val="94A3B8"/>
                 </a:solidFill>
               </a:defRPr>
             </a:pPr>
             <a:r>
-              <a:t>★ COMPLETED ✓</a:t>
-            </a:r>
-          </a:p>
-        </p:txBody>
-      </p:sp>
-      <p:sp>
-        <p:nvSpPr>
-          <p:cNvPr id="9" name="Rounded Rectangle 8"/>
+              <a:t>-49.1% Cut in Half</a:t>
+            </a:r>
+            <a:br/>
+            <a:r>
+              <a:t>Minimizes untreated diabetes</a:t>
+            </a:r>
+          </a:p>
+        </p:txBody>
+      </p:sp>
+      <p:graphicFrame>
+        <p:nvGraphicFramePr>
+          <p:cNvPr id="9" name="Table 8"/>
+          <p:cNvGraphicFramePr>
+            <a:graphicFrameLocks noGrp="1"/>
+          </p:cNvGraphicFramePr>
+          <p:nvPr/>
+        </p:nvGraphicFramePr>
+        <p:xfrm>
+          <a:off x="731520" y="2788920"/>
+          <a:ext cx="10698480" cy="2377440"/>
+        </p:xfrm>
+        <a:graphic>
+          <a:graphicData uri="http://schemas.openxmlformats.org/drawingml/2006/table">
+            <a:tbl>
+              <a:tblPr firstRow="1" bandRow="1">
+                <a:tableStyleId>{5C22544A-7EE6-4342-B048-85BDC9FD1C3A}</a:tableStyleId>
+              </a:tblPr>
+              <a:tblGrid>
+                <a:gridCol w="1828800"/>
+                <a:gridCol w="2560320"/>
+                <a:gridCol w="1005840"/>
+                <a:gridCol w="1097280"/>
+                <a:gridCol w="1097280"/>
+                <a:gridCol w="3108960"/>
+              </a:tblGrid>
+              <a:tr h="339634">
+                <a:tc>
+                  <a:txBody>
+                    <a:bodyPr/>
+                    <a:lstStyle/>
+                    <a:p>
+                      <a:pPr>
+                        <a:defRPr sz="1000" b="1">
+                          <a:solidFill>
+                            <a:srgbClr val="38BDF8"/>
+                          </a:solidFill>
+                        </a:defRPr>
+                      </a:pPr>
+                      <a:r>
+                        <a:t>Stage / Iteration</a:t>
+                      </a:r>
+                    </a:p>
+                  </a:txBody>
+                  <a:tcPr>
+                    <a:solidFill>
+                      <a:srgbClr val="28354C"/>
+                    </a:solidFill>
+                  </a:tcPr>
+                </a:tc>
+                <a:tc>
+                  <a:txBody>
+                    <a:bodyPr/>
+                    <a:lstStyle/>
+                    <a:p>
+                      <a:pPr>
+                        <a:defRPr sz="1000" b="1">
+                          <a:solidFill>
+                            <a:srgbClr val="38BDF8"/>
+                          </a:solidFill>
+                        </a:defRPr>
+                      </a:pPr>
+                      <a:r>
+                        <a:t>Pipeline &amp; Inputs</a:t>
+                      </a:r>
+                    </a:p>
+                  </a:txBody>
+                  <a:tcPr>
+                    <a:solidFill>
+                      <a:srgbClr val="28354C"/>
+                    </a:solidFill>
+                  </a:tcPr>
+                </a:tc>
+                <a:tc>
+                  <a:txBody>
+                    <a:bodyPr/>
+                    <a:lstStyle/>
+                    <a:p>
+                      <a:pPr>
+                        <a:defRPr sz="1000" b="1">
+                          <a:solidFill>
+                            <a:srgbClr val="38BDF8"/>
+                          </a:solidFill>
+                        </a:defRPr>
+                      </a:pPr>
+                      <a:r>
+                        <a:t>AUROC</a:t>
+                      </a:r>
+                    </a:p>
+                  </a:txBody>
+                  <a:tcPr>
+                    <a:solidFill>
+                      <a:srgbClr val="28354C"/>
+                    </a:solidFill>
+                  </a:tcPr>
+                </a:tc>
+                <a:tc>
+                  <a:txBody>
+                    <a:bodyPr/>
+                    <a:lstStyle/>
+                    <a:p>
+                      <a:pPr>
+                        <a:defRPr sz="1000" b="1">
+                          <a:solidFill>
+                            <a:srgbClr val="38BDF8"/>
+                          </a:solidFill>
+                        </a:defRPr>
+                      </a:pPr>
+                      <a:r>
+                        <a:t>Recall</a:t>
+                      </a:r>
+                    </a:p>
+                  </a:txBody>
+                  <a:tcPr>
+                    <a:solidFill>
+                      <a:srgbClr val="28354C"/>
+                    </a:solidFill>
+                  </a:tcPr>
+                </a:tc>
+                <a:tc>
+                  <a:txBody>
+                    <a:bodyPr/>
+                    <a:lstStyle/>
+                    <a:p>
+                      <a:pPr>
+                        <a:defRPr sz="1000" b="1">
+                          <a:solidFill>
+                            <a:srgbClr val="38BDF8"/>
+                          </a:solidFill>
+                        </a:defRPr>
+                      </a:pPr>
+                      <a:r>
+                        <a:t>False Positives</a:t>
+                      </a:r>
+                    </a:p>
+                  </a:txBody>
+                  <a:tcPr>
+                    <a:solidFill>
+                      <a:srgbClr val="28354C"/>
+                    </a:solidFill>
+                  </a:tcPr>
+                </a:tc>
+                <a:tc>
+                  <a:txBody>
+                    <a:bodyPr/>
+                    <a:lstStyle/>
+                    <a:p>
+                      <a:pPr>
+                        <a:defRPr sz="1000" b="1">
+                          <a:solidFill>
+                            <a:srgbClr val="38BDF8"/>
+                          </a:solidFill>
+                        </a:defRPr>
+                      </a:pPr>
+                      <a:r>
+                        <a:t>Progress Milestone &amp; Finding</a:t>
+                      </a:r>
+                    </a:p>
+                  </a:txBody>
+                  <a:tcPr>
+                    <a:solidFill>
+                      <a:srgbClr val="28354C"/>
+                    </a:solidFill>
+                  </a:tcPr>
+                </a:tc>
+              </a:tr>
+              <a:tr h="339634">
+                <a:tc>
+                  <a:txBody>
+                    <a:bodyPr/>
+                    <a:lstStyle/>
+                    <a:p>
+                      <a:pPr>
+                        <a:defRPr sz="950">
+                          <a:solidFill>
+                            <a:srgbClr val="FFFFFF"/>
+                          </a:solidFill>
+                        </a:defRPr>
+                      </a:pPr>
+                      <a:r>
+                        <a:t>1. Pretrained ViT Baseline</a:t>
+                      </a:r>
+                    </a:p>
+                  </a:txBody>
+                  <a:tcPr>
+                    <a:solidFill>
+                      <a:srgbClr val="1E293B"/>
+                    </a:solidFill>
+                  </a:tcPr>
+                </a:tc>
+                <a:tc>
+                  <a:txBody>
+                    <a:bodyPr/>
+                    <a:lstStyle/>
+                    <a:p>
+                      <a:pPr>
+                        <a:defRPr sz="950">
+                          <a:solidFill>
+                            <a:srgbClr val="FFFFFF"/>
+                          </a:solidFill>
+                        </a:defRPr>
+                      </a:pPr>
+                      <a:r>
+                        <a:t>Frozen RAD-DINO (ViT-B Patches)</a:t>
+                      </a:r>
+                    </a:p>
+                  </a:txBody>
+                  <a:tcPr>
+                    <a:solidFill>
+                      <a:srgbClr val="1E293B"/>
+                    </a:solidFill>
+                  </a:tcPr>
+                </a:tc>
+                <a:tc>
+                  <a:txBody>
+                    <a:bodyPr/>
+                    <a:lstStyle/>
+                    <a:p>
+                      <a:pPr>
+                        <a:defRPr sz="950">
+                          <a:solidFill>
+                            <a:srgbClr val="FFFFFF"/>
+                          </a:solidFill>
+                        </a:defRPr>
+                      </a:pPr>
+                      <a:r>
+                        <a:t>0.5734</a:t>
+                      </a:r>
+                    </a:p>
+                  </a:txBody>
+                  <a:tcPr>
+                    <a:solidFill>
+                      <a:srgbClr val="1E293B"/>
+                    </a:solidFill>
+                  </a:tcPr>
+                </a:tc>
+                <a:tc>
+                  <a:txBody>
+                    <a:bodyPr/>
+                    <a:lstStyle/>
+                    <a:p>
+                      <a:pPr>
+                        <a:defRPr sz="950">
+                          <a:solidFill>
+                            <a:srgbClr val="FFFFFF"/>
+                          </a:solidFill>
+                        </a:defRPr>
+                      </a:pPr>
+                      <a:r>
+                        <a:t>55.37%</a:t>
+                      </a:r>
+                    </a:p>
+                  </a:txBody>
+                  <a:tcPr>
+                    <a:solidFill>
+                      <a:srgbClr val="1E293B"/>
+                    </a:solidFill>
+                  </a:tcPr>
+                </a:tc>
+                <a:tc>
+                  <a:txBody>
+                    <a:bodyPr/>
+                    <a:lstStyle/>
+                    <a:p>
+                      <a:pPr>
+                        <a:defRPr sz="950">
+                          <a:solidFill>
+                            <a:srgbClr val="FFFFFF"/>
+                          </a:solidFill>
+                        </a:defRPr>
+                      </a:pPr>
+                      <a:r>
+                        <a:t>277</a:t>
+                      </a:r>
+                    </a:p>
+                  </a:txBody>
+                  <a:tcPr>
+                    <a:solidFill>
+                      <a:srgbClr val="1E293B"/>
+                    </a:solidFill>
+                  </a:tcPr>
+                </a:tc>
+                <a:tc>
+                  <a:txBody>
+                    <a:bodyPr/>
+                    <a:lstStyle/>
+                    <a:p>
+                      <a:pPr>
+                        <a:defRPr sz="950">
+                          <a:solidFill>
+                            <a:srgbClr val="FFFFFF"/>
+                          </a:solidFill>
+                        </a:defRPr>
+                      </a:pPr>
+                      <a:r>
+                        <a:t>Baseline: General embeddings missed global CTR ratio</a:t>
+                      </a:r>
+                    </a:p>
+                  </a:txBody>
+                  <a:tcPr>
+                    <a:solidFill>
+                      <a:srgbClr val="1E293B"/>
+                    </a:solidFill>
+                  </a:tcPr>
+                </a:tc>
+              </a:tr>
+              <a:tr h="339634">
+                <a:tc>
+                  <a:txBody>
+                    <a:bodyPr/>
+                    <a:lstStyle/>
+                    <a:p>
+                      <a:pPr>
+                        <a:defRPr sz="950">
+                          <a:solidFill>
+                            <a:srgbClr val="FFFFFF"/>
+                          </a:solidFill>
+                        </a:defRPr>
+                      </a:pPr>
+                      <a:r>
+                        <a:t>2. Scratch CNN (Baseline)</a:t>
+                      </a:r>
+                    </a:p>
+                  </a:txBody>
+                  <a:tcPr>
+                    <a:solidFill>
+                      <a:srgbClr val="18212F"/>
+                    </a:solidFill>
+                  </a:tcPr>
+                </a:tc>
+                <a:tc>
+                  <a:txBody>
+                    <a:bodyPr/>
+                    <a:lstStyle/>
+                    <a:p>
+                      <a:pPr>
+                        <a:defRPr sz="950">
+                          <a:solidFill>
+                            <a:srgbClr val="FFFFFF"/>
+                          </a:solidFill>
+                        </a:defRPr>
+                      </a:pPr>
+                      <a:r>
+                        <a:t>Custom ~75k param CNN (All CXRs)</a:t>
+                      </a:r>
+                    </a:p>
+                  </a:txBody>
+                  <a:tcPr>
+                    <a:solidFill>
+                      <a:srgbClr val="18212F"/>
+                    </a:solidFill>
+                  </a:tcPr>
+                </a:tc>
+                <a:tc>
+                  <a:txBody>
+                    <a:bodyPr/>
+                    <a:lstStyle/>
+                    <a:p>
+                      <a:pPr>
+                        <a:defRPr sz="950">
+                          <a:solidFill>
+                            <a:srgbClr val="FFFFFF"/>
+                          </a:solidFill>
+                        </a:defRPr>
+                      </a:pPr>
+                      <a:r>
+                        <a:t>0.6401</a:t>
+                      </a:r>
+                    </a:p>
+                  </a:txBody>
+                  <a:tcPr>
+                    <a:solidFill>
+                      <a:srgbClr val="18212F"/>
+                    </a:solidFill>
+                  </a:tcPr>
+                </a:tc>
+                <a:tc>
+                  <a:txBody>
+                    <a:bodyPr/>
+                    <a:lstStyle/>
+                    <a:p>
+                      <a:pPr>
+                        <a:defRPr sz="950">
+                          <a:solidFill>
+                            <a:srgbClr val="FFFFFF"/>
+                          </a:solidFill>
+                        </a:defRPr>
+                      </a:pPr>
+                      <a:r>
+                        <a:t>62.21%</a:t>
+                      </a:r>
+                    </a:p>
+                  </a:txBody>
+                  <a:tcPr>
+                    <a:solidFill>
+                      <a:srgbClr val="18212F"/>
+                    </a:solidFill>
+                  </a:tcPr>
+                </a:tc>
+                <a:tc>
+                  <a:txBody>
+                    <a:bodyPr/>
+                    <a:lstStyle/>
+                    <a:p>
+                      <a:pPr>
+                        <a:defRPr sz="950">
+                          <a:solidFill>
+                            <a:srgbClr val="FFFFFF"/>
+                          </a:solidFill>
+                        </a:defRPr>
+                      </a:pPr>
+                      <a:r>
+                        <a:t>260</a:t>
+                      </a:r>
+                    </a:p>
+                  </a:txBody>
+                  <a:tcPr>
+                    <a:solidFill>
+                      <a:srgbClr val="18212F"/>
+                    </a:solidFill>
+                  </a:tcPr>
+                </a:tc>
+                <a:tc>
+                  <a:txBody>
+                    <a:bodyPr/>
+                    <a:lstStyle/>
+                    <a:p>
+                      <a:pPr>
+                        <a:defRPr sz="950">
+                          <a:solidFill>
+                            <a:srgbClr val="FFFFFF"/>
+                          </a:solidFill>
+                        </a:defRPr>
+                      </a:pPr>
+                      <a:r>
+                        <a:t>+0.0667 AUROC: Proved feasibility directly from pixels</a:t>
+                      </a:r>
+                    </a:p>
+                  </a:txBody>
+                  <a:tcPr>
+                    <a:solidFill>
+                      <a:srgbClr val="18212F"/>
+                    </a:solidFill>
+                  </a:tcPr>
+                </a:tc>
+              </a:tr>
+              <a:tr h="339634">
+                <a:tc>
+                  <a:txBody>
+                    <a:bodyPr/>
+                    <a:lstStyle/>
+                    <a:p>
+                      <a:pPr>
+                        <a:defRPr sz="950">
+                          <a:solidFill>
+                            <a:srgbClr val="FFFFFF"/>
+                          </a:solidFill>
+                        </a:defRPr>
+                      </a:pPr>
+                      <a:r>
+                        <a:t>3. Data Ablation Test</a:t>
+                      </a:r>
+                    </a:p>
+                  </a:txBody>
+                  <a:tcPr>
+                    <a:solidFill>
+                      <a:srgbClr val="1E293B"/>
+                    </a:solidFill>
+                  </a:tcPr>
+                </a:tc>
+                <a:tc>
+                  <a:txBody>
+                    <a:bodyPr/>
+                    <a:lstStyle/>
+                    <a:p>
+                      <a:pPr>
+                        <a:defRPr sz="950">
+                          <a:solidFill>
+                            <a:srgbClr val="FFFFFF"/>
+                          </a:solidFill>
+                        </a:defRPr>
+                      </a:pPr>
+                      <a:r>
+                        <a:t>Excluded 11 Blurry CXRs (No Hazy)</a:t>
+                      </a:r>
+                    </a:p>
+                  </a:txBody>
+                  <a:tcPr>
+                    <a:solidFill>
+                      <a:srgbClr val="1E293B"/>
+                    </a:solidFill>
+                  </a:tcPr>
+                </a:tc>
+                <a:tc>
+                  <a:txBody>
+                    <a:bodyPr/>
+                    <a:lstStyle/>
+                    <a:p>
+                      <a:pPr>
+                        <a:defRPr sz="950">
+                          <a:solidFill>
+                            <a:srgbClr val="FFFFFF"/>
+                          </a:solidFill>
+                        </a:defRPr>
+                      </a:pPr>
+                      <a:r>
+                        <a:t>0.6182</a:t>
+                      </a:r>
+                    </a:p>
+                  </a:txBody>
+                  <a:tcPr>
+                    <a:solidFill>
+                      <a:srgbClr val="1E293B"/>
+                    </a:solidFill>
+                  </a:tcPr>
+                </a:tc>
+                <a:tc>
+                  <a:txBody>
+                    <a:bodyPr/>
+                    <a:lstStyle/>
+                    <a:p>
+                      <a:pPr>
+                        <a:defRPr sz="950">
+                          <a:solidFill>
+                            <a:srgbClr val="FFFFFF"/>
+                          </a:solidFill>
+                        </a:defRPr>
+                      </a:pPr>
+                      <a:r>
+                        <a:t>54.72%</a:t>
+                      </a:r>
+                    </a:p>
+                  </a:txBody>
+                  <a:tcPr>
+                    <a:solidFill>
+                      <a:srgbClr val="1E293B"/>
+                    </a:solidFill>
+                  </a:tcPr>
+                </a:tc>
+                <a:tc>
+                  <a:txBody>
+                    <a:bodyPr/>
+                    <a:lstStyle/>
+                    <a:p>
+                      <a:pPr>
+                        <a:defRPr sz="950">
+                          <a:solidFill>
+                            <a:srgbClr val="FFFFFF"/>
+                          </a:solidFill>
+                        </a:defRPr>
+                      </a:pPr>
+                      <a:r>
+                        <a:t>244</a:t>
+                      </a:r>
+                    </a:p>
+                  </a:txBody>
+                  <a:tcPr>
+                    <a:solidFill>
+                      <a:srgbClr val="1E293B"/>
+                    </a:solidFill>
+                  </a:tcPr>
+                </a:tc>
+                <a:tc>
+                  <a:txBody>
+                    <a:bodyPr/>
+                    <a:lstStyle/>
+                    <a:p>
+                      <a:pPr>
+                        <a:defRPr sz="950">
+                          <a:solidFill>
+                            <a:srgbClr val="FFFFFF"/>
+                          </a:solidFill>
+                        </a:defRPr>
+                      </a:pPr>
+                      <a:r>
+                        <a:t>-7.49% Recall drop: Proved blur diversity is essential</a:t>
+                      </a:r>
+                    </a:p>
+                  </a:txBody>
+                  <a:tcPr>
+                    <a:solidFill>
+                      <a:srgbClr val="1E293B"/>
+                    </a:solidFill>
+                  </a:tcPr>
+                </a:tc>
+              </a:tr>
+              <a:tr h="339634">
+                <a:tc>
+                  <a:txBody>
+                    <a:bodyPr/>
+                    <a:lstStyle/>
+                    <a:p>
+                      <a:pPr>
+                        <a:defRPr sz="950">
+                          <a:solidFill>
+                            <a:srgbClr val="FFFFFF"/>
+                          </a:solidFill>
+                        </a:defRPr>
+                      </a:pPr>
+                      <a:r>
+                        <a:t>4. Clinical Tabular Alone</a:t>
+                      </a:r>
+                    </a:p>
+                  </a:txBody>
+                  <a:tcPr>
+                    <a:solidFill>
+                      <a:srgbClr val="18212F"/>
+                    </a:solidFill>
+                  </a:tcPr>
+                </a:tc>
+                <a:tc>
+                  <a:txBody>
+                    <a:bodyPr/>
+                    <a:lstStyle/>
+                    <a:p>
+                      <a:pPr>
+                        <a:defRPr sz="950">
+                          <a:solidFill>
+                            <a:srgbClr val="FFFFFF"/>
+                          </a:solidFill>
+                        </a:defRPr>
+                      </a:pPr>
+                      <a:r>
+                        <a:t>Age, Sex, BMI, SDI (Logistic Reg.)</a:t>
+                      </a:r>
+                    </a:p>
+                  </a:txBody>
+                  <a:tcPr>
+                    <a:solidFill>
+                      <a:srgbClr val="18212F"/>
+                    </a:solidFill>
+                  </a:tcPr>
+                </a:tc>
+                <a:tc>
+                  <a:txBody>
+                    <a:bodyPr/>
+                    <a:lstStyle/>
+                    <a:p>
+                      <a:pPr>
+                        <a:defRPr sz="950">
+                          <a:solidFill>
+                            <a:srgbClr val="FFFFFF"/>
+                          </a:solidFill>
+                        </a:defRPr>
+                      </a:pPr>
+                      <a:r>
+                        <a:t>0.6931</a:t>
+                      </a:r>
+                    </a:p>
+                  </a:txBody>
+                  <a:tcPr>
+                    <a:solidFill>
+                      <a:srgbClr val="18212F"/>
+                    </a:solidFill>
+                  </a:tcPr>
+                </a:tc>
+                <a:tc>
+                  <a:txBody>
+                    <a:bodyPr/>
+                    <a:lstStyle/>
+                    <a:p>
+                      <a:pPr>
+                        <a:defRPr sz="950">
+                          <a:solidFill>
+                            <a:srgbClr val="FFFFFF"/>
+                          </a:solidFill>
+                        </a:defRPr>
+                      </a:pPr>
+                      <a:r>
+                        <a:t>60.26%</a:t>
+                      </a:r>
+                    </a:p>
+                  </a:txBody>
+                  <a:tcPr>
+                    <a:solidFill>
+                      <a:srgbClr val="18212F"/>
+                    </a:solidFill>
+                  </a:tcPr>
+                </a:tc>
+                <a:tc>
+                  <a:txBody>
+                    <a:bodyPr/>
+                    <a:lstStyle/>
+                    <a:p>
+                      <a:pPr>
+                        <a:defRPr sz="950">
+                          <a:solidFill>
+                            <a:srgbClr val="FFFFFF"/>
+                          </a:solidFill>
+                        </a:defRPr>
+                      </a:pPr>
+                      <a:r>
+                        <a:t>229</a:t>
+                      </a:r>
+                    </a:p>
+                  </a:txBody>
+                  <a:tcPr>
+                    <a:solidFill>
+                      <a:srgbClr val="18212F"/>
+                    </a:solidFill>
+                  </a:tcPr>
+                </a:tc>
+                <a:tc>
+                  <a:txBody>
+                    <a:bodyPr/>
+                    <a:lstStyle/>
+                    <a:p>
+                      <a:pPr>
+                        <a:defRPr sz="950">
+                          <a:solidFill>
+                            <a:srgbClr val="FFFFFF"/>
+                          </a:solidFill>
+                        </a:defRPr>
+                      </a:pPr>
+                      <a:r>
+                        <a:t>Demographic baseline: Socioeconomic risk without imaging</a:t>
+                      </a:r>
+                    </a:p>
+                  </a:txBody>
+                  <a:tcPr>
+                    <a:solidFill>
+                      <a:srgbClr val="18212F"/>
+                    </a:solidFill>
+                  </a:tcPr>
+                </a:tc>
+              </a:tr>
+              <a:tr h="339634">
+                <a:tc>
+                  <a:txBody>
+                    <a:bodyPr/>
+                    <a:lstStyle/>
+                    <a:p>
+                      <a:pPr>
+                        <a:defRPr sz="950">
+                          <a:solidFill>
+                            <a:srgbClr val="FFFFFF"/>
+                          </a:solidFill>
+                        </a:defRPr>
+                      </a:pPr>
+                      <a:r>
+                        <a:t>5. Multimodal Late Fusion</a:t>
+                      </a:r>
+                    </a:p>
+                  </a:txBody>
+                  <a:tcPr>
+                    <a:solidFill>
+                      <a:srgbClr val="1E293B"/>
+                    </a:solidFill>
+                  </a:tcPr>
+                </a:tc>
+                <a:tc>
+                  <a:txBody>
+                    <a:bodyPr/>
+                    <a:lstStyle/>
+                    <a:p>
+                      <a:pPr>
+                        <a:defRPr sz="950">
+                          <a:solidFill>
+                            <a:srgbClr val="FFFFFF"/>
+                          </a:solidFill>
+                        </a:defRPr>
+                      </a:pPr>
+                      <a:r>
+                        <a:t>CXR Scalar + Clinical (Grad. Boost)</a:t>
+                      </a:r>
+                    </a:p>
+                  </a:txBody>
+                  <a:tcPr>
+                    <a:solidFill>
+                      <a:srgbClr val="1E293B"/>
+                    </a:solidFill>
+                  </a:tcPr>
+                </a:tc>
+                <a:tc>
+                  <a:txBody>
+                    <a:bodyPr/>
+                    <a:lstStyle/>
+                    <a:p>
+                      <a:pPr>
+                        <a:defRPr sz="950">
+                          <a:solidFill>
+                            <a:srgbClr val="34D399"/>
+                          </a:solidFill>
+                        </a:defRPr>
+                      </a:pPr>
+                      <a:r>
+                        <a:t>0.9068</a:t>
+                      </a:r>
+                    </a:p>
+                  </a:txBody>
+                  <a:tcPr>
+                    <a:solidFill>
+                      <a:srgbClr val="1E293B"/>
+                    </a:solidFill>
+                  </a:tcPr>
+                </a:tc>
+                <a:tc>
+                  <a:txBody>
+                    <a:bodyPr/>
+                    <a:lstStyle/>
+                    <a:p>
+                      <a:pPr>
+                        <a:defRPr sz="950">
+                          <a:solidFill>
+                            <a:srgbClr val="FFFFFF"/>
+                          </a:solidFill>
+                        </a:defRPr>
+                      </a:pPr>
+                      <a:r>
+                        <a:t>69.38%</a:t>
+                      </a:r>
+                    </a:p>
+                  </a:txBody>
+                  <a:tcPr>
+                    <a:solidFill>
+                      <a:srgbClr val="1E293B"/>
+                    </a:solidFill>
+                  </a:tcPr>
+                </a:tc>
+                <a:tc>
+                  <a:txBody>
+                    <a:bodyPr/>
+                    <a:lstStyle/>
+                    <a:p>
+                      <a:pPr>
+                        <a:defRPr sz="950">
+                          <a:solidFill>
+                            <a:srgbClr val="FFFFFF"/>
+                          </a:solidFill>
+                        </a:defRPr>
+                      </a:pPr>
+                      <a:r>
+                        <a:t>65</a:t>
+                      </a:r>
+                    </a:p>
+                  </a:txBody>
+                  <a:tcPr>
+                    <a:solidFill>
+                      <a:srgbClr val="1E293B"/>
+                    </a:solidFill>
+                  </a:tcPr>
+                </a:tc>
+                <a:tc>
+                  <a:txBody>
+                    <a:bodyPr/>
+                    <a:lstStyle/>
+                    <a:p>
+                      <a:pPr>
+                        <a:defRPr sz="950">
+                          <a:solidFill>
+                            <a:srgbClr val="FFFFFF"/>
+                          </a:solidFill>
+                        </a:defRPr>
+                      </a:pPr>
+                      <a:r>
+                        <a:t>+0.2667 AUROC leap! 75% fewer false positives</a:t>
+                      </a:r>
+                    </a:p>
+                  </a:txBody>
+                  <a:tcPr>
+                    <a:solidFill>
+                      <a:srgbClr val="1E293B"/>
+                    </a:solidFill>
+                  </a:tcPr>
+                </a:tc>
+              </a:tr>
+              <a:tr h="339636">
+                <a:tc>
+                  <a:txBody>
+                    <a:bodyPr/>
+                    <a:lstStyle/>
+                    <a:p>
+                      <a:pPr>
+                        <a:defRPr sz="950" b="1">
+                          <a:solidFill>
+                            <a:srgbClr val="34D399"/>
+                          </a:solidFill>
+                        </a:defRPr>
+                      </a:pPr>
+                      <a:r>
+                        <a:t>6. Oct 29 Final Screener</a:t>
+                      </a:r>
+                    </a:p>
+                  </a:txBody>
+                  <a:tcPr>
+                    <a:solidFill>
+                      <a:srgbClr val="25344B"/>
+                    </a:solidFill>
+                  </a:tcPr>
+                </a:tc>
+                <a:tc>
+                  <a:txBody>
+                    <a:bodyPr/>
+                    <a:lstStyle/>
+                    <a:p>
+                      <a:pPr>
+                        <a:defRPr sz="950" b="1">
+                          <a:solidFill>
+                            <a:srgbClr val="FFFFFF"/>
+                          </a:solidFill>
+                        </a:defRPr>
+                      </a:pPr>
+                      <a:r>
+                        <a:t>Multimodal Fusion @ τ = 0.40</a:t>
+                      </a:r>
+                    </a:p>
+                  </a:txBody>
+                  <a:tcPr>
+                    <a:solidFill>
+                      <a:srgbClr val="25344B"/>
+                    </a:solidFill>
+                  </a:tcPr>
+                </a:tc>
+                <a:tc>
+                  <a:txBody>
+                    <a:bodyPr/>
+                    <a:lstStyle/>
+                    <a:p>
+                      <a:pPr>
+                        <a:defRPr sz="950" b="1">
+                          <a:solidFill>
+                            <a:srgbClr val="34D399"/>
+                          </a:solidFill>
+                        </a:defRPr>
+                      </a:pPr>
+                      <a:r>
+                        <a:t>0.9068</a:t>
+                      </a:r>
+                    </a:p>
+                  </a:txBody>
+                  <a:tcPr>
+                    <a:solidFill>
+                      <a:srgbClr val="25344B"/>
+                    </a:solidFill>
+                  </a:tcPr>
+                </a:tc>
+                <a:tc>
+                  <a:txBody>
+                    <a:bodyPr/>
+                    <a:lstStyle/>
+                    <a:p>
+                      <a:pPr>
+                        <a:defRPr sz="950" b="1">
+                          <a:solidFill>
+                            <a:srgbClr val="34D399"/>
+                          </a:solidFill>
+                        </a:defRPr>
+                      </a:pPr>
+                      <a:r>
+                        <a:t>80.78%</a:t>
+                      </a:r>
+                    </a:p>
+                  </a:txBody>
+                  <a:tcPr>
+                    <a:solidFill>
+                      <a:srgbClr val="25344B"/>
+                    </a:solidFill>
+                  </a:tcPr>
+                </a:tc>
+                <a:tc>
+                  <a:txBody>
+                    <a:bodyPr/>
+                    <a:lstStyle/>
+                    <a:p>
+                      <a:pPr>
+                        <a:defRPr sz="950" b="1">
+                          <a:solidFill>
+                            <a:srgbClr val="FB923C"/>
+                          </a:solidFill>
+                        </a:defRPr>
+                      </a:pPr>
+                      <a:r>
+                        <a:t>106</a:t>
+                      </a:r>
+                    </a:p>
+                  </a:txBody>
+                  <a:tcPr>
+                    <a:solidFill>
+                      <a:srgbClr val="25344B"/>
+                    </a:solidFill>
+                  </a:tcPr>
+                </a:tc>
+                <a:tc>
+                  <a:txBody>
+                    <a:bodyPr/>
+                    <a:lstStyle/>
+                    <a:p>
+                      <a:pPr>
+                        <a:defRPr sz="950" b="1">
+                          <a:solidFill>
+                            <a:srgbClr val="FFFFFF"/>
+                          </a:solidFill>
+                        </a:defRPr>
+                      </a:pPr>
+                      <a:r>
+                        <a:t>★ Peak Screener: 80.8% Recall, 83.5% Specificity, only 106 FPs!</a:t>
+                      </a:r>
+                    </a:p>
+                  </a:txBody>
+                  <a:tcPr>
+                    <a:solidFill>
+                      <a:srgbClr val="25344B"/>
+                    </a:solidFill>
+                  </a:tcPr>
+                </a:tc>
+              </a:tr>
+            </a:tbl>
+          </a:graphicData>
+        </a:graphic>
+      </p:graphicFrame>
+      <p:sp>
+        <p:nvSpPr>
+          <p:cNvPr id="10" name="Rounded Rectangle 9"/>
           <p:cNvSpPr/>
           <p:nvPr/>
         </p:nvSpPr>
         <p:spPr>
           <a:xfrm>
-            <a:off x="9436608" y="1371600"/>
-            <a:ext cx="1993392" cy="4846320"/>
+            <a:off x="731520" y="5303520"/>
+            <a:ext cx="10698480" cy="1188720"/>
           </a:xfrm>
           <a:prstGeom prst="roundRect">
             <a:avLst/>
@@ -4935,111 +5649,24 @@
               </a:spcAft>
               <a:defRPr sz="1100" b="1">
                 <a:solidFill>
-                  <a:srgbClr val="34D399"/>
+                  <a:srgbClr val="38BDF8"/>
                 </a:solidFill>
               </a:defRPr>
             </a:pPr>
             <a:r>
-              <a:t>PHASE 5</a:t>
+              <a:t>CORE PROGRESS SUMMARY (WHAT WE ACHIEVED BY OCTOBER 29TH)</a:t>
             </a:r>
           </a:p>
           <a:p>
             <a:pPr>
-              <a:spcAft>
-                <a:spcPts val="800"/>
-              </a:spcAft>
-              <a:defRPr sz="1150" b="1">
+              <a:defRPr sz="1050">
                 <a:solidFill>
                   <a:srgbClr val="FFFFFF"/>
                 </a:solidFill>
               </a:defRPr>
             </a:pPr>
             <a:r>
-              <a:t>Clinical Operating Point (τ = 0.40)</a:t>
-            </a:r>
-          </a:p>
-          <a:p>
-            <a:pPr>
-              <a:spcAft>
-                <a:spcPts val="400"/>
-              </a:spcAft>
-            </a:pPr>
-            <a:r>
-              <a:rPr b="1" sz="950">
-                <a:solidFill>
-                  <a:srgbClr val="34D399"/>
-                </a:solidFill>
-              </a:rPr>
-              <a:t>• Threshold Tuning: </a:t>
-            </a:r>
-            <a:r>
-              <a:rPr sz="900">
-                <a:solidFill>
-                  <a:srgbClr val="FFFFFF"/>
-                </a:solidFill>
-              </a:rPr>
-              <a:t>Optimized decision boundary to address asymmetric healthcare error costs.</a:t>
-            </a:r>
-          </a:p>
-          <a:p>
-            <a:pPr>
-              <a:spcAft>
-                <a:spcPts val="400"/>
-              </a:spcAft>
-            </a:pPr>
-            <a:r>
-              <a:rPr b="1" sz="950">
-                <a:solidFill>
-                  <a:srgbClr val="34D399"/>
-                </a:solidFill>
-              </a:rPr>
-              <a:t>• High Sensitivity: </a:t>
-            </a:r>
-            <a:r>
-              <a:rPr sz="900">
-                <a:solidFill>
-                  <a:srgbClr val="FFFFFF"/>
-                </a:solidFill>
-              </a:rPr>
-              <a:t>Recall jumps to 80.78% (248/307 caught), cutting missed cases by 37.2%.</a:t>
-            </a:r>
-          </a:p>
-          <a:p>
-            <a:pPr>
-              <a:spcAft>
-                <a:spcPts val="400"/>
-              </a:spcAft>
-            </a:pPr>
-            <a:r>
-              <a:rPr b="1" sz="950">
-                <a:solidFill>
-                  <a:srgbClr val="34D399"/>
-                </a:solidFill>
-              </a:rPr>
-              <a:t>• Low False Alarms: </a:t>
-            </a:r>
-            <a:r>
-              <a:rPr sz="900">
-                <a:solidFill>
-                  <a:srgbClr val="FFFFFF"/>
-                </a:solidFill>
-              </a:rPr>
-              <a:t>Only 106 FPs (2.4× fewer than pure CXR's 260 FPs); 83.5% specificity.</a:t>
-            </a:r>
-          </a:p>
-          <a:p>
-            <a:pPr>
-              <a:spcBef>
-                <a:spcPts val="800"/>
-              </a:spcBef>
-              <a:defRPr sz="1000" b="1">
-                <a:solidFill>
-                  <a:srgbClr val="34D399"/>
-                </a:solidFill>
-              </a:defRPr>
-            </a:pPr>
-            <a:r>
-              <a:t>★ DEPLOYED ✓</a:t>
+              <a:t>Across 5 engineering iterations, we advanced from an initial 0.6401 image baseline to a validated 0.9068 AUROC multimodal system. By optimizing our decision threshold to τ = 0.40 for asymmetric healthcare costs, our model now catches 80.78% of undiagnosed diabetics (248/307) while slashing false alarms by 59.2% (from 260 down to 106), fully verified with 0 patient leakage.</a:t>
             </a:r>
           </a:p>
         </p:txBody>

--- a/malek_and_angelo/malek/Malek_T2D_CNN_Presentation.pptx
+++ b/malek_and_angelo/malek/Malek_T2D_CNN_Presentation.pptx
@@ -16,6 +16,7 @@
     <p:sldId id="264" r:id="rId15"/>
     <p:sldId id="265" r:id="rId16"/>
     <p:sldId id="266" r:id="rId17"/>
+    <p:sldId id="267" r:id="rId18"/>
   </p:sldIdLst>
   <p:sldSz cx="12191695" cy="6858000" type="screen4x3"/>
   <p:notesSz cx="6858000" cy="9144000"/>
@@ -3469,6 +3470,1576 @@
               </a:defRPr>
             </a:pPr>
             <a:r>
+              <a:t>CS 396 — ARTIFICIAL INTELLIGENCE IN HEALTHCARE   |   PHASE 5: CLINICAL DEPLOYMENT</a:t>
+            </a:r>
+          </a:p>
+        </p:txBody>
+      </p:sp>
+      <p:sp>
+        <p:nvSpPr>
+          <p:cNvPr id="4" name="TextBox 3"/>
+          <p:cNvSpPr txBox="1"/>
+          <p:nvPr/>
+        </p:nvSpPr>
+        <p:spPr>
+          <a:xfrm>
+            <a:off x="731520" y="621792"/>
+            <a:ext cx="10698480" cy="640080"/>
+          </a:xfrm>
+          <a:prstGeom prst="rect">
+            <a:avLst/>
+          </a:prstGeom>
+          <a:noFill/>
+        </p:spPr>
+        <p:txBody>
+          <a:bodyPr wrap="square">
+            <a:spAutoFit/>
+          </a:bodyPr>
+          <a:lstStyle/>
+          <a:p>
+            <a:pPr>
+              <a:defRPr sz="2500" b="1">
+                <a:solidFill>
+                  <a:srgbClr val="FFFFFF"/>
+                </a:solidFill>
+              </a:defRPr>
+            </a:pPr>
+            <a:r>
+              <a:t>Clinical Operating Point: Threshold Optimization (τ = 0.40)</a:t>
+            </a:r>
+          </a:p>
+        </p:txBody>
+      </p:sp>
+      <p:sp>
+        <p:nvSpPr>
+          <p:cNvPr id="5" name="Rounded Rectangle 4"/>
+          <p:cNvSpPr/>
+          <p:nvPr/>
+        </p:nvSpPr>
+        <p:spPr>
+          <a:xfrm>
+            <a:off x="731520" y="1371600"/>
+            <a:ext cx="2542032" cy="1463040"/>
+          </a:xfrm>
+          <a:prstGeom prst="roundRect">
+            <a:avLst/>
+          </a:prstGeom>
+          <a:solidFill>
+            <a:srgbClr val="1E293B"/>
+          </a:solidFill>
+          <a:ln>
+            <a:solidFill>
+              <a:srgbClr val="334155"/>
+            </a:solidFill>
+          </a:ln>
+        </p:spPr>
+        <p:style>
+          <a:lnRef idx="1">
+            <a:schemeClr val="accent1"/>
+          </a:lnRef>
+          <a:fillRef idx="3">
+            <a:schemeClr val="accent1"/>
+          </a:fillRef>
+          <a:effectRef idx="2">
+            <a:schemeClr val="accent1"/>
+          </a:effectRef>
+          <a:fontRef idx="minor">
+            <a:schemeClr val="lt1"/>
+          </a:fontRef>
+        </p:style>
+        <p:txBody>
+          <a:bodyPr rtlCol="0" anchor="ctr" wrap="square"/>
+          <a:lstStyle/>
+          <a:p>
+            <a:pPr algn="ctr">
+              <a:defRPr sz="1050" b="1">
+                <a:solidFill>
+                  <a:srgbClr val="34D399"/>
+                </a:solidFill>
+              </a:defRPr>
+            </a:pPr>
+            <a:r>
+              <a:t>RECALL (SENSITIVITY)</a:t>
+            </a:r>
+          </a:p>
+          <a:p>
+            <a:pPr>
+              <a:defRPr sz="2600" b="1">
+                <a:solidFill>
+                  <a:srgbClr val="FFFFFF"/>
+                </a:solidFill>
+              </a:defRPr>
+            </a:pPr>
+            <a:r>
+              <a:t>80.78%</a:t>
+            </a:r>
+          </a:p>
+          <a:p>
+            <a:pPr>
+              <a:defRPr sz="950">
+                <a:solidFill>
+                  <a:srgbClr val="94A3B8"/>
+                </a:solidFill>
+              </a:defRPr>
+            </a:pPr>
+            <a:r>
+              <a:t>248 / 307 Diabetics Caught</a:t>
+            </a:r>
+            <a:br/>
+            <a:r>
+              <a:t>(Cuts missed cases by 37.2%)</a:t>
+            </a:r>
+          </a:p>
+        </p:txBody>
+      </p:sp>
+      <p:sp>
+        <p:nvSpPr>
+          <p:cNvPr id="6" name="Rounded Rectangle 5"/>
+          <p:cNvSpPr/>
+          <p:nvPr/>
+        </p:nvSpPr>
+        <p:spPr>
+          <a:xfrm>
+            <a:off x="3456432" y="1371600"/>
+            <a:ext cx="2542032" cy="1463040"/>
+          </a:xfrm>
+          <a:prstGeom prst="roundRect">
+            <a:avLst/>
+          </a:prstGeom>
+          <a:solidFill>
+            <a:srgbClr val="1E293B"/>
+          </a:solidFill>
+          <a:ln>
+            <a:solidFill>
+              <a:srgbClr val="334155"/>
+            </a:solidFill>
+          </a:ln>
+        </p:spPr>
+        <p:style>
+          <a:lnRef idx="1">
+            <a:schemeClr val="accent1"/>
+          </a:lnRef>
+          <a:fillRef idx="3">
+            <a:schemeClr val="accent1"/>
+          </a:fillRef>
+          <a:effectRef idx="2">
+            <a:schemeClr val="accent1"/>
+          </a:effectRef>
+          <a:fontRef idx="minor">
+            <a:schemeClr val="lt1"/>
+          </a:fontRef>
+        </p:style>
+        <p:txBody>
+          <a:bodyPr rtlCol="0" anchor="ctr" wrap="square"/>
+          <a:lstStyle/>
+          <a:p>
+            <a:pPr algn="ctr">
+              <a:defRPr sz="1050" b="1">
+                <a:solidFill>
+                  <a:srgbClr val="38BDF8"/>
+                </a:solidFill>
+              </a:defRPr>
+            </a:pPr>
+            <a:r>
+              <a:t>SPECIFICITY (TNR)</a:t>
+            </a:r>
+          </a:p>
+          <a:p>
+            <a:pPr>
+              <a:defRPr sz="2600" b="1">
+                <a:solidFill>
+                  <a:srgbClr val="FFFFFF"/>
+                </a:solidFill>
+              </a:defRPr>
+            </a:pPr>
+            <a:r>
+              <a:t>83.49%</a:t>
+            </a:r>
+          </a:p>
+          <a:p>
+            <a:pPr>
+              <a:defRPr sz="950">
+                <a:solidFill>
+                  <a:srgbClr val="94A3B8"/>
+                </a:solidFill>
+              </a:defRPr>
+            </a:pPr>
+            <a:r>
+              <a:t>536 / 642 Normals Cleared</a:t>
+            </a:r>
+            <a:br/>
+            <a:r>
+              <a:t>(Prevents over-testing)</a:t>
+            </a:r>
+          </a:p>
+        </p:txBody>
+      </p:sp>
+      <p:sp>
+        <p:nvSpPr>
+          <p:cNvPr id="7" name="Rounded Rectangle 6"/>
+          <p:cNvSpPr/>
+          <p:nvPr/>
+        </p:nvSpPr>
+        <p:spPr>
+          <a:xfrm>
+            <a:off x="6181344" y="1371600"/>
+            <a:ext cx="2542032" cy="1463040"/>
+          </a:xfrm>
+          <a:prstGeom prst="roundRect">
+            <a:avLst/>
+          </a:prstGeom>
+          <a:solidFill>
+            <a:srgbClr val="1E293B"/>
+          </a:solidFill>
+          <a:ln>
+            <a:solidFill>
+              <a:srgbClr val="334155"/>
+            </a:solidFill>
+          </a:ln>
+        </p:spPr>
+        <p:style>
+          <a:lnRef idx="1">
+            <a:schemeClr val="accent1"/>
+          </a:lnRef>
+          <a:fillRef idx="3">
+            <a:schemeClr val="accent1"/>
+          </a:fillRef>
+          <a:effectRef idx="2">
+            <a:schemeClr val="accent1"/>
+          </a:effectRef>
+          <a:fontRef idx="minor">
+            <a:schemeClr val="lt1"/>
+          </a:fontRef>
+        </p:style>
+        <p:txBody>
+          <a:bodyPr rtlCol="0" anchor="ctr" wrap="square"/>
+          <a:lstStyle/>
+          <a:p>
+            <a:pPr algn="ctr">
+              <a:defRPr sz="1050" b="1">
+                <a:solidFill>
+                  <a:srgbClr val="FB923C"/>
+                </a:solidFill>
+              </a:defRPr>
+            </a:pPr>
+            <a:r>
+              <a:t>FALSE POSITIVES</a:t>
+            </a:r>
+          </a:p>
+          <a:p>
+            <a:pPr>
+              <a:defRPr sz="2600" b="1">
+                <a:solidFill>
+                  <a:srgbClr val="FFFFFF"/>
+                </a:solidFill>
+              </a:defRPr>
+            </a:pPr>
+            <a:r>
+              <a:t>106</a:t>
+            </a:r>
+          </a:p>
+          <a:p>
+            <a:pPr>
+              <a:defRPr sz="950">
+                <a:solidFill>
+                  <a:srgbClr val="94A3B8"/>
+                </a:solidFill>
+              </a:defRPr>
+            </a:pPr>
+            <a:r>
+              <a:t>vs. 260 in Pure CXR</a:t>
+            </a:r>
+            <a:br/>
+            <a:r>
+              <a:t>(2.4× fewer false alarms)</a:t>
+            </a:r>
+          </a:p>
+        </p:txBody>
+      </p:sp>
+      <p:sp>
+        <p:nvSpPr>
+          <p:cNvPr id="8" name="Rounded Rectangle 7"/>
+          <p:cNvSpPr/>
+          <p:nvPr/>
+        </p:nvSpPr>
+        <p:spPr>
+          <a:xfrm>
+            <a:off x="8906256" y="1371600"/>
+            <a:ext cx="2542032" cy="1463040"/>
+          </a:xfrm>
+          <a:prstGeom prst="roundRect">
+            <a:avLst/>
+          </a:prstGeom>
+          <a:solidFill>
+            <a:srgbClr val="1E293B"/>
+          </a:solidFill>
+          <a:ln>
+            <a:solidFill>
+              <a:srgbClr val="334155"/>
+            </a:solidFill>
+          </a:ln>
+        </p:spPr>
+        <p:style>
+          <a:lnRef idx="1">
+            <a:schemeClr val="accent1"/>
+          </a:lnRef>
+          <a:fillRef idx="3">
+            <a:schemeClr val="accent1"/>
+          </a:fillRef>
+          <a:effectRef idx="2">
+            <a:schemeClr val="accent1"/>
+          </a:effectRef>
+          <a:fontRef idx="minor">
+            <a:schemeClr val="lt1"/>
+          </a:fontRef>
+        </p:style>
+        <p:txBody>
+          <a:bodyPr rtlCol="0" anchor="ctr" wrap="square"/>
+          <a:lstStyle/>
+          <a:p>
+            <a:pPr algn="ctr">
+              <a:defRPr sz="1050" b="1">
+                <a:solidFill>
+                  <a:srgbClr val="34D399"/>
+                </a:solidFill>
+              </a:defRPr>
+            </a:pPr>
+            <a:r>
+              <a:t>PEAK F1-SCORE</a:t>
+            </a:r>
+          </a:p>
+          <a:p>
+            <a:pPr>
+              <a:defRPr sz="2600" b="1">
+                <a:solidFill>
+                  <a:srgbClr val="FFFFFF"/>
+                </a:solidFill>
+              </a:defRPr>
+            </a:pPr>
+            <a:r>
+              <a:t>0.7504</a:t>
+            </a:r>
+          </a:p>
+          <a:p>
+            <a:pPr>
+              <a:defRPr sz="950">
+                <a:solidFill>
+                  <a:srgbClr val="94A3B8"/>
+                </a:solidFill>
+              </a:defRPr>
+            </a:pPr>
+            <a:r>
+              <a:t>Optimal Precision-Recall</a:t>
+            </a:r>
+            <a:br/>
+            <a:r>
+              <a:t>Harmonic Balance</a:t>
+            </a:r>
+          </a:p>
+        </p:txBody>
+      </p:sp>
+      <p:graphicFrame>
+        <p:nvGraphicFramePr>
+          <p:cNvPr id="9" name="Table 8"/>
+          <p:cNvGraphicFramePr>
+            <a:graphicFrameLocks noGrp="1"/>
+          </p:cNvGraphicFramePr>
+          <p:nvPr/>
+        </p:nvGraphicFramePr>
+        <p:xfrm>
+          <a:off x="731520" y="2971800"/>
+          <a:ext cx="6217920" cy="3474720"/>
+        </p:xfrm>
+        <a:graphic>
+          <a:graphicData uri="http://schemas.openxmlformats.org/drawingml/2006/table">
+            <a:tbl>
+              <a:tblPr firstRow="1" bandRow="1">
+                <a:tableStyleId>{5C22544A-7EE6-4342-B048-85BDC9FD1C3A}</a:tableStyleId>
+              </a:tblPr>
+              <a:tblGrid>
+                <a:gridCol w="914400"/>
+                <a:gridCol w="640080"/>
+                <a:gridCol w="640080"/>
+                <a:gridCol w="640080"/>
+                <a:gridCol w="640080"/>
+                <a:gridCol w="914400"/>
+                <a:gridCol w="914400"/>
+                <a:gridCol w="914400"/>
+              </a:tblGrid>
+              <a:tr h="694944">
+                <a:tc>
+                  <a:txBody>
+                    <a:bodyPr/>
+                    <a:lstStyle/>
+                    <a:p>
+                      <a:pPr>
+                        <a:defRPr sz="1000" b="1">
+                          <a:solidFill>
+                            <a:srgbClr val="38BDF8"/>
+                          </a:solidFill>
+                        </a:defRPr>
+                      </a:pPr>
+                      <a:r>
+                        <a:t>Threshold</a:t>
+                      </a:r>
+                    </a:p>
+                  </a:txBody>
+                  <a:tcPr>
+                    <a:solidFill>
+                      <a:srgbClr val="28354C"/>
+                    </a:solidFill>
+                  </a:tcPr>
+                </a:tc>
+                <a:tc>
+                  <a:txBody>
+                    <a:bodyPr/>
+                    <a:lstStyle/>
+                    <a:p>
+                      <a:pPr>
+                        <a:defRPr sz="1000" b="1">
+                          <a:solidFill>
+                            <a:srgbClr val="38BDF8"/>
+                          </a:solidFill>
+                        </a:defRPr>
+                      </a:pPr>
+                      <a:r>
+                        <a:t>TP</a:t>
+                      </a:r>
+                    </a:p>
+                  </a:txBody>
+                  <a:tcPr>
+                    <a:solidFill>
+                      <a:srgbClr val="28354C"/>
+                    </a:solidFill>
+                  </a:tcPr>
+                </a:tc>
+                <a:tc>
+                  <a:txBody>
+                    <a:bodyPr/>
+                    <a:lstStyle/>
+                    <a:p>
+                      <a:pPr>
+                        <a:defRPr sz="1000" b="1">
+                          <a:solidFill>
+                            <a:srgbClr val="38BDF8"/>
+                          </a:solidFill>
+                        </a:defRPr>
+                      </a:pPr>
+                      <a:r>
+                        <a:t>FP</a:t>
+                      </a:r>
+                    </a:p>
+                  </a:txBody>
+                  <a:tcPr>
+                    <a:solidFill>
+                      <a:srgbClr val="28354C"/>
+                    </a:solidFill>
+                  </a:tcPr>
+                </a:tc>
+                <a:tc>
+                  <a:txBody>
+                    <a:bodyPr/>
+                    <a:lstStyle/>
+                    <a:p>
+                      <a:pPr>
+                        <a:defRPr sz="1000" b="1">
+                          <a:solidFill>
+                            <a:srgbClr val="38BDF8"/>
+                          </a:solidFill>
+                        </a:defRPr>
+                      </a:pPr>
+                      <a:r>
+                        <a:t>TN</a:t>
+                      </a:r>
+                    </a:p>
+                  </a:txBody>
+                  <a:tcPr>
+                    <a:solidFill>
+                      <a:srgbClr val="28354C"/>
+                    </a:solidFill>
+                  </a:tcPr>
+                </a:tc>
+                <a:tc>
+                  <a:txBody>
+                    <a:bodyPr/>
+                    <a:lstStyle/>
+                    <a:p>
+                      <a:pPr>
+                        <a:defRPr sz="1000" b="1">
+                          <a:solidFill>
+                            <a:srgbClr val="38BDF8"/>
+                          </a:solidFill>
+                        </a:defRPr>
+                      </a:pPr>
+                      <a:r>
+                        <a:t>FN</a:t>
+                      </a:r>
+                    </a:p>
+                  </a:txBody>
+                  <a:tcPr>
+                    <a:solidFill>
+                      <a:srgbClr val="28354C"/>
+                    </a:solidFill>
+                  </a:tcPr>
+                </a:tc>
+                <a:tc>
+                  <a:txBody>
+                    <a:bodyPr/>
+                    <a:lstStyle/>
+                    <a:p>
+                      <a:pPr>
+                        <a:defRPr sz="1000" b="1">
+                          <a:solidFill>
+                            <a:srgbClr val="38BDF8"/>
+                          </a:solidFill>
+                        </a:defRPr>
+                      </a:pPr>
+                      <a:r>
+                        <a:t>Recall</a:t>
+                      </a:r>
+                    </a:p>
+                  </a:txBody>
+                  <a:tcPr>
+                    <a:solidFill>
+                      <a:srgbClr val="28354C"/>
+                    </a:solidFill>
+                  </a:tcPr>
+                </a:tc>
+                <a:tc>
+                  <a:txBody>
+                    <a:bodyPr/>
+                    <a:lstStyle/>
+                    <a:p>
+                      <a:pPr>
+                        <a:defRPr sz="1000" b="1">
+                          <a:solidFill>
+                            <a:srgbClr val="38BDF8"/>
+                          </a:solidFill>
+                        </a:defRPr>
+                      </a:pPr>
+                      <a:r>
+                        <a:t>Specificity</a:t>
+                      </a:r>
+                    </a:p>
+                  </a:txBody>
+                  <a:tcPr>
+                    <a:solidFill>
+                      <a:srgbClr val="28354C"/>
+                    </a:solidFill>
+                  </a:tcPr>
+                </a:tc>
+                <a:tc>
+                  <a:txBody>
+                    <a:bodyPr/>
+                    <a:lstStyle/>
+                    <a:p>
+                      <a:pPr>
+                        <a:defRPr sz="1000" b="1">
+                          <a:solidFill>
+                            <a:srgbClr val="38BDF8"/>
+                          </a:solidFill>
+                        </a:defRPr>
+                      </a:pPr>
+                      <a:r>
+                        <a:t>Precision</a:t>
+                      </a:r>
+                    </a:p>
+                  </a:txBody>
+                  <a:tcPr>
+                    <a:solidFill>
+                      <a:srgbClr val="28354C"/>
+                    </a:solidFill>
+                  </a:tcPr>
+                </a:tc>
+              </a:tr>
+              <a:tr h="694944">
+                <a:tc>
+                  <a:txBody>
+                    <a:bodyPr/>
+                    <a:lstStyle/>
+                    <a:p>
+                      <a:pPr>
+                        <a:defRPr sz="950">
+                          <a:solidFill>
+                            <a:srgbClr val="FFFFFF"/>
+                          </a:solidFill>
+                        </a:defRPr>
+                      </a:pPr>
+                      <a:r>
+                        <a:t>0.50 (Default)</a:t>
+                      </a:r>
+                    </a:p>
+                  </a:txBody>
+                  <a:tcPr>
+                    <a:solidFill>
+                      <a:srgbClr val="1E293B"/>
+                    </a:solidFill>
+                  </a:tcPr>
+                </a:tc>
+                <a:tc>
+                  <a:txBody>
+                    <a:bodyPr/>
+                    <a:lstStyle/>
+                    <a:p>
+                      <a:pPr>
+                        <a:defRPr sz="950">
+                          <a:solidFill>
+                            <a:srgbClr val="FFFFFF"/>
+                          </a:solidFill>
+                        </a:defRPr>
+                      </a:pPr>
+                      <a:r>
+                        <a:t>213</a:t>
+                      </a:r>
+                    </a:p>
+                  </a:txBody>
+                  <a:tcPr>
+                    <a:solidFill>
+                      <a:srgbClr val="1E293B"/>
+                    </a:solidFill>
+                  </a:tcPr>
+                </a:tc>
+                <a:tc>
+                  <a:txBody>
+                    <a:bodyPr/>
+                    <a:lstStyle/>
+                    <a:p>
+                      <a:pPr>
+                        <a:defRPr sz="950">
+                          <a:solidFill>
+                            <a:srgbClr val="FFFFFF"/>
+                          </a:solidFill>
+                        </a:defRPr>
+                      </a:pPr>
+                      <a:r>
+                        <a:t>65</a:t>
+                      </a:r>
+                    </a:p>
+                  </a:txBody>
+                  <a:tcPr>
+                    <a:solidFill>
+                      <a:srgbClr val="1E293B"/>
+                    </a:solidFill>
+                  </a:tcPr>
+                </a:tc>
+                <a:tc>
+                  <a:txBody>
+                    <a:bodyPr/>
+                    <a:lstStyle/>
+                    <a:p>
+                      <a:pPr>
+                        <a:defRPr sz="950">
+                          <a:solidFill>
+                            <a:srgbClr val="FFFFFF"/>
+                          </a:solidFill>
+                        </a:defRPr>
+                      </a:pPr>
+                      <a:r>
+                        <a:t>577</a:t>
+                      </a:r>
+                    </a:p>
+                  </a:txBody>
+                  <a:tcPr>
+                    <a:solidFill>
+                      <a:srgbClr val="1E293B"/>
+                    </a:solidFill>
+                  </a:tcPr>
+                </a:tc>
+                <a:tc>
+                  <a:txBody>
+                    <a:bodyPr/>
+                    <a:lstStyle/>
+                    <a:p>
+                      <a:pPr>
+                        <a:defRPr sz="950">
+                          <a:solidFill>
+                            <a:srgbClr val="FFFFFF"/>
+                          </a:solidFill>
+                        </a:defRPr>
+                      </a:pPr>
+                      <a:r>
+                        <a:t>94</a:t>
+                      </a:r>
+                    </a:p>
+                  </a:txBody>
+                  <a:tcPr>
+                    <a:solidFill>
+                      <a:srgbClr val="1E293B"/>
+                    </a:solidFill>
+                  </a:tcPr>
+                </a:tc>
+                <a:tc>
+                  <a:txBody>
+                    <a:bodyPr/>
+                    <a:lstStyle/>
+                    <a:p>
+                      <a:pPr>
+                        <a:defRPr sz="950">
+                          <a:solidFill>
+                            <a:srgbClr val="FFFFFF"/>
+                          </a:solidFill>
+                        </a:defRPr>
+                      </a:pPr>
+                      <a:r>
+                        <a:t>69.38%</a:t>
+                      </a:r>
+                    </a:p>
+                  </a:txBody>
+                  <a:tcPr>
+                    <a:solidFill>
+                      <a:srgbClr val="1E293B"/>
+                    </a:solidFill>
+                  </a:tcPr>
+                </a:tc>
+                <a:tc>
+                  <a:txBody>
+                    <a:bodyPr/>
+                    <a:lstStyle/>
+                    <a:p>
+                      <a:pPr>
+                        <a:defRPr sz="950">
+                          <a:solidFill>
+                            <a:srgbClr val="FFFFFF"/>
+                          </a:solidFill>
+                        </a:defRPr>
+                      </a:pPr>
+                      <a:r>
+                        <a:t>89.88%</a:t>
+                      </a:r>
+                    </a:p>
+                  </a:txBody>
+                  <a:tcPr>
+                    <a:solidFill>
+                      <a:srgbClr val="1E293B"/>
+                    </a:solidFill>
+                  </a:tcPr>
+                </a:tc>
+                <a:tc>
+                  <a:txBody>
+                    <a:bodyPr/>
+                    <a:lstStyle/>
+                    <a:p>
+                      <a:pPr>
+                        <a:defRPr sz="950">
+                          <a:solidFill>
+                            <a:srgbClr val="FFFFFF"/>
+                          </a:solidFill>
+                        </a:defRPr>
+                      </a:pPr>
+                      <a:r>
+                        <a:t>76.62%</a:t>
+                      </a:r>
+                    </a:p>
+                  </a:txBody>
+                  <a:tcPr>
+                    <a:solidFill>
+                      <a:srgbClr val="1E293B"/>
+                    </a:solidFill>
+                  </a:tcPr>
+                </a:tc>
+              </a:tr>
+              <a:tr h="694944">
+                <a:tc>
+                  <a:txBody>
+                    <a:bodyPr/>
+                    <a:lstStyle/>
+                    <a:p>
+                      <a:pPr>
+                        <a:defRPr sz="950" b="1">
+                          <a:solidFill>
+                            <a:srgbClr val="34D399"/>
+                          </a:solidFill>
+                        </a:defRPr>
+                      </a:pPr>
+                      <a:r>
+                        <a:t>0.40 (Optimal)</a:t>
+                      </a:r>
+                    </a:p>
+                  </a:txBody>
+                  <a:tcPr>
+                    <a:solidFill>
+                      <a:srgbClr val="25344B"/>
+                    </a:solidFill>
+                  </a:tcPr>
+                </a:tc>
+                <a:tc>
+                  <a:txBody>
+                    <a:bodyPr/>
+                    <a:lstStyle/>
+                    <a:p>
+                      <a:pPr>
+                        <a:defRPr sz="950" b="1">
+                          <a:solidFill>
+                            <a:srgbClr val="FFFFFF"/>
+                          </a:solidFill>
+                        </a:defRPr>
+                      </a:pPr>
+                      <a:r>
+                        <a:t>248</a:t>
+                      </a:r>
+                    </a:p>
+                  </a:txBody>
+                  <a:tcPr>
+                    <a:solidFill>
+                      <a:srgbClr val="25344B"/>
+                    </a:solidFill>
+                  </a:tcPr>
+                </a:tc>
+                <a:tc>
+                  <a:txBody>
+                    <a:bodyPr/>
+                    <a:lstStyle/>
+                    <a:p>
+                      <a:pPr>
+                        <a:defRPr sz="950" b="1">
+                          <a:solidFill>
+                            <a:srgbClr val="FB923C"/>
+                          </a:solidFill>
+                        </a:defRPr>
+                      </a:pPr>
+                      <a:r>
+                        <a:t>106</a:t>
+                      </a:r>
+                    </a:p>
+                  </a:txBody>
+                  <a:tcPr>
+                    <a:solidFill>
+                      <a:srgbClr val="25344B"/>
+                    </a:solidFill>
+                  </a:tcPr>
+                </a:tc>
+                <a:tc>
+                  <a:txBody>
+                    <a:bodyPr/>
+                    <a:lstStyle/>
+                    <a:p>
+                      <a:pPr>
+                        <a:defRPr sz="950" b="1">
+                          <a:solidFill>
+                            <a:srgbClr val="FFFFFF"/>
+                          </a:solidFill>
+                        </a:defRPr>
+                      </a:pPr>
+                      <a:r>
+                        <a:t>536</a:t>
+                      </a:r>
+                    </a:p>
+                  </a:txBody>
+                  <a:tcPr>
+                    <a:solidFill>
+                      <a:srgbClr val="25344B"/>
+                    </a:solidFill>
+                  </a:tcPr>
+                </a:tc>
+                <a:tc>
+                  <a:txBody>
+                    <a:bodyPr/>
+                    <a:lstStyle/>
+                    <a:p>
+                      <a:pPr>
+                        <a:defRPr sz="950" b="1">
+                          <a:solidFill>
+                            <a:srgbClr val="FFFFFF"/>
+                          </a:solidFill>
+                        </a:defRPr>
+                      </a:pPr>
+                      <a:r>
+                        <a:t>59</a:t>
+                      </a:r>
+                    </a:p>
+                  </a:txBody>
+                  <a:tcPr>
+                    <a:solidFill>
+                      <a:srgbClr val="25344B"/>
+                    </a:solidFill>
+                  </a:tcPr>
+                </a:tc>
+                <a:tc>
+                  <a:txBody>
+                    <a:bodyPr/>
+                    <a:lstStyle/>
+                    <a:p>
+                      <a:pPr>
+                        <a:defRPr sz="950" b="1">
+                          <a:solidFill>
+                            <a:srgbClr val="34D399"/>
+                          </a:solidFill>
+                        </a:defRPr>
+                      </a:pPr>
+                      <a:r>
+                        <a:t>80.78%</a:t>
+                      </a:r>
+                    </a:p>
+                  </a:txBody>
+                  <a:tcPr>
+                    <a:solidFill>
+                      <a:srgbClr val="25344B"/>
+                    </a:solidFill>
+                  </a:tcPr>
+                </a:tc>
+                <a:tc>
+                  <a:txBody>
+                    <a:bodyPr/>
+                    <a:lstStyle/>
+                    <a:p>
+                      <a:pPr>
+                        <a:defRPr sz="950" b="1">
+                          <a:solidFill>
+                            <a:srgbClr val="FFFFFF"/>
+                          </a:solidFill>
+                        </a:defRPr>
+                      </a:pPr>
+                      <a:r>
+                        <a:t>83.49%</a:t>
+                      </a:r>
+                    </a:p>
+                  </a:txBody>
+                  <a:tcPr>
+                    <a:solidFill>
+                      <a:srgbClr val="25344B"/>
+                    </a:solidFill>
+                  </a:tcPr>
+                </a:tc>
+                <a:tc>
+                  <a:txBody>
+                    <a:bodyPr/>
+                    <a:lstStyle/>
+                    <a:p>
+                      <a:pPr>
+                        <a:defRPr sz="950" b="1">
+                          <a:solidFill>
+                            <a:srgbClr val="FFFFFF"/>
+                          </a:solidFill>
+                        </a:defRPr>
+                      </a:pPr>
+                      <a:r>
+                        <a:t>70.06%</a:t>
+                      </a:r>
+                    </a:p>
+                  </a:txBody>
+                  <a:tcPr>
+                    <a:solidFill>
+                      <a:srgbClr val="25344B"/>
+                    </a:solidFill>
+                  </a:tcPr>
+                </a:tc>
+              </a:tr>
+              <a:tr h="694944">
+                <a:tc>
+                  <a:txBody>
+                    <a:bodyPr/>
+                    <a:lstStyle/>
+                    <a:p>
+                      <a:pPr>
+                        <a:defRPr sz="950">
+                          <a:solidFill>
+                            <a:srgbClr val="FFFFFF"/>
+                          </a:solidFill>
+                        </a:defRPr>
+                      </a:pPr>
+                      <a:r>
+                        <a:t>0.35 (Aggressive)</a:t>
+                      </a:r>
+                    </a:p>
+                  </a:txBody>
+                  <a:tcPr>
+                    <a:solidFill>
+                      <a:srgbClr val="1E293B"/>
+                    </a:solidFill>
+                  </a:tcPr>
+                </a:tc>
+                <a:tc>
+                  <a:txBody>
+                    <a:bodyPr/>
+                    <a:lstStyle/>
+                    <a:p>
+                      <a:pPr>
+                        <a:defRPr sz="950">
+                          <a:solidFill>
+                            <a:srgbClr val="FFFFFF"/>
+                          </a:solidFill>
+                        </a:defRPr>
+                      </a:pPr>
+                      <a:r>
+                        <a:t>259</a:t>
+                      </a:r>
+                    </a:p>
+                  </a:txBody>
+                  <a:tcPr>
+                    <a:solidFill>
+                      <a:srgbClr val="1E293B"/>
+                    </a:solidFill>
+                  </a:tcPr>
+                </a:tc>
+                <a:tc>
+                  <a:txBody>
+                    <a:bodyPr/>
+                    <a:lstStyle/>
+                    <a:p>
+                      <a:pPr>
+                        <a:defRPr sz="950">
+                          <a:solidFill>
+                            <a:srgbClr val="FFFFFF"/>
+                          </a:solidFill>
+                        </a:defRPr>
+                      </a:pPr>
+                      <a:r>
+                        <a:t>133</a:t>
+                      </a:r>
+                    </a:p>
+                  </a:txBody>
+                  <a:tcPr>
+                    <a:solidFill>
+                      <a:srgbClr val="1E293B"/>
+                    </a:solidFill>
+                  </a:tcPr>
+                </a:tc>
+                <a:tc>
+                  <a:txBody>
+                    <a:bodyPr/>
+                    <a:lstStyle/>
+                    <a:p>
+                      <a:pPr>
+                        <a:defRPr sz="950">
+                          <a:solidFill>
+                            <a:srgbClr val="FFFFFF"/>
+                          </a:solidFill>
+                        </a:defRPr>
+                      </a:pPr>
+                      <a:r>
+                        <a:t>509</a:t>
+                      </a:r>
+                    </a:p>
+                  </a:txBody>
+                  <a:tcPr>
+                    <a:solidFill>
+                      <a:srgbClr val="1E293B"/>
+                    </a:solidFill>
+                  </a:tcPr>
+                </a:tc>
+                <a:tc>
+                  <a:txBody>
+                    <a:bodyPr/>
+                    <a:lstStyle/>
+                    <a:p>
+                      <a:pPr>
+                        <a:defRPr sz="950">
+                          <a:solidFill>
+                            <a:srgbClr val="FFFFFF"/>
+                          </a:solidFill>
+                        </a:defRPr>
+                      </a:pPr>
+                      <a:r>
+                        <a:t>48</a:t>
+                      </a:r>
+                    </a:p>
+                  </a:txBody>
+                  <a:tcPr>
+                    <a:solidFill>
+                      <a:srgbClr val="1E293B"/>
+                    </a:solidFill>
+                  </a:tcPr>
+                </a:tc>
+                <a:tc>
+                  <a:txBody>
+                    <a:bodyPr/>
+                    <a:lstStyle/>
+                    <a:p>
+                      <a:pPr>
+                        <a:defRPr sz="950">
+                          <a:solidFill>
+                            <a:srgbClr val="FFFFFF"/>
+                          </a:solidFill>
+                        </a:defRPr>
+                      </a:pPr>
+                      <a:r>
+                        <a:t>84.36%</a:t>
+                      </a:r>
+                    </a:p>
+                  </a:txBody>
+                  <a:tcPr>
+                    <a:solidFill>
+                      <a:srgbClr val="1E293B"/>
+                    </a:solidFill>
+                  </a:tcPr>
+                </a:tc>
+                <a:tc>
+                  <a:txBody>
+                    <a:bodyPr/>
+                    <a:lstStyle/>
+                    <a:p>
+                      <a:pPr>
+                        <a:defRPr sz="950">
+                          <a:solidFill>
+                            <a:srgbClr val="FFFFFF"/>
+                          </a:solidFill>
+                        </a:defRPr>
+                      </a:pPr>
+                      <a:r>
+                        <a:t>79.28%</a:t>
+                      </a:r>
+                    </a:p>
+                  </a:txBody>
+                  <a:tcPr>
+                    <a:solidFill>
+                      <a:srgbClr val="1E293B"/>
+                    </a:solidFill>
+                  </a:tcPr>
+                </a:tc>
+                <a:tc>
+                  <a:txBody>
+                    <a:bodyPr/>
+                    <a:lstStyle/>
+                    <a:p>
+                      <a:pPr>
+                        <a:defRPr sz="950">
+                          <a:solidFill>
+                            <a:srgbClr val="FFFFFF"/>
+                          </a:solidFill>
+                        </a:defRPr>
+                      </a:pPr>
+                      <a:r>
+                        <a:t>66.07%</a:t>
+                      </a:r>
+                    </a:p>
+                  </a:txBody>
+                  <a:tcPr>
+                    <a:solidFill>
+                      <a:srgbClr val="1E293B"/>
+                    </a:solidFill>
+                  </a:tcPr>
+                </a:tc>
+              </a:tr>
+              <a:tr h="694944">
+                <a:tc>
+                  <a:txBody>
+                    <a:bodyPr/>
+                    <a:lstStyle/>
+                    <a:p>
+                      <a:pPr>
+                        <a:defRPr sz="950">
+                          <a:solidFill>
+                            <a:srgbClr val="FFFFFF"/>
+                          </a:solidFill>
+                        </a:defRPr>
+                      </a:pPr>
+                      <a:r>
+                        <a:t>0.30 (High Catch)</a:t>
+                      </a:r>
+                    </a:p>
+                  </a:txBody>
+                  <a:tcPr>
+                    <a:solidFill>
+                      <a:srgbClr val="18212F"/>
+                    </a:solidFill>
+                  </a:tcPr>
+                </a:tc>
+                <a:tc>
+                  <a:txBody>
+                    <a:bodyPr/>
+                    <a:lstStyle/>
+                    <a:p>
+                      <a:pPr>
+                        <a:defRPr sz="950">
+                          <a:solidFill>
+                            <a:srgbClr val="FFFFFF"/>
+                          </a:solidFill>
+                        </a:defRPr>
+                      </a:pPr>
+                      <a:r>
+                        <a:t>273</a:t>
+                      </a:r>
+                    </a:p>
+                  </a:txBody>
+                  <a:tcPr>
+                    <a:solidFill>
+                      <a:srgbClr val="18212F"/>
+                    </a:solidFill>
+                  </a:tcPr>
+                </a:tc>
+                <a:tc>
+                  <a:txBody>
+                    <a:bodyPr/>
+                    <a:lstStyle/>
+                    <a:p>
+                      <a:pPr>
+                        <a:defRPr sz="950">
+                          <a:solidFill>
+                            <a:srgbClr val="FFFFFF"/>
+                          </a:solidFill>
+                        </a:defRPr>
+                      </a:pPr>
+                      <a:r>
+                        <a:t>159</a:t>
+                      </a:r>
+                    </a:p>
+                  </a:txBody>
+                  <a:tcPr>
+                    <a:solidFill>
+                      <a:srgbClr val="18212F"/>
+                    </a:solidFill>
+                  </a:tcPr>
+                </a:tc>
+                <a:tc>
+                  <a:txBody>
+                    <a:bodyPr/>
+                    <a:lstStyle/>
+                    <a:p>
+                      <a:pPr>
+                        <a:defRPr sz="950">
+                          <a:solidFill>
+                            <a:srgbClr val="FFFFFF"/>
+                          </a:solidFill>
+                        </a:defRPr>
+                      </a:pPr>
+                      <a:r>
+                        <a:t>483</a:t>
+                      </a:r>
+                    </a:p>
+                  </a:txBody>
+                  <a:tcPr>
+                    <a:solidFill>
+                      <a:srgbClr val="18212F"/>
+                    </a:solidFill>
+                  </a:tcPr>
+                </a:tc>
+                <a:tc>
+                  <a:txBody>
+                    <a:bodyPr/>
+                    <a:lstStyle/>
+                    <a:p>
+                      <a:pPr>
+                        <a:defRPr sz="950">
+                          <a:solidFill>
+                            <a:srgbClr val="FFFFFF"/>
+                          </a:solidFill>
+                        </a:defRPr>
+                      </a:pPr>
+                      <a:r>
+                        <a:t>34</a:t>
+                      </a:r>
+                    </a:p>
+                  </a:txBody>
+                  <a:tcPr>
+                    <a:solidFill>
+                      <a:srgbClr val="18212F"/>
+                    </a:solidFill>
+                  </a:tcPr>
+                </a:tc>
+                <a:tc>
+                  <a:txBody>
+                    <a:bodyPr/>
+                    <a:lstStyle/>
+                    <a:p>
+                      <a:pPr>
+                        <a:defRPr sz="950">
+                          <a:solidFill>
+                            <a:srgbClr val="FFFFFF"/>
+                          </a:solidFill>
+                        </a:defRPr>
+                      </a:pPr>
+                      <a:r>
+                        <a:t>88.93%</a:t>
+                      </a:r>
+                    </a:p>
+                  </a:txBody>
+                  <a:tcPr>
+                    <a:solidFill>
+                      <a:srgbClr val="18212F"/>
+                    </a:solidFill>
+                  </a:tcPr>
+                </a:tc>
+                <a:tc>
+                  <a:txBody>
+                    <a:bodyPr/>
+                    <a:lstStyle/>
+                    <a:p>
+                      <a:pPr>
+                        <a:defRPr sz="950">
+                          <a:solidFill>
+                            <a:srgbClr val="FFFFFF"/>
+                          </a:solidFill>
+                        </a:defRPr>
+                      </a:pPr>
+                      <a:r>
+                        <a:t>75.23%</a:t>
+                      </a:r>
+                    </a:p>
+                  </a:txBody>
+                  <a:tcPr>
+                    <a:solidFill>
+                      <a:srgbClr val="18212F"/>
+                    </a:solidFill>
+                  </a:tcPr>
+                </a:tc>
+                <a:tc>
+                  <a:txBody>
+                    <a:bodyPr/>
+                    <a:lstStyle/>
+                    <a:p>
+                      <a:pPr>
+                        <a:defRPr sz="950">
+                          <a:solidFill>
+                            <a:srgbClr val="FFFFFF"/>
+                          </a:solidFill>
+                        </a:defRPr>
+                      </a:pPr>
+                      <a:r>
+                        <a:t>63.19%</a:t>
+                      </a:r>
+                    </a:p>
+                  </a:txBody>
+                  <a:tcPr>
+                    <a:solidFill>
+                      <a:srgbClr val="18212F"/>
+                    </a:solidFill>
+                  </a:tcPr>
+                </a:tc>
+              </a:tr>
+            </a:tbl>
+          </a:graphicData>
+        </a:graphic>
+      </p:graphicFrame>
+      <p:sp>
+        <p:nvSpPr>
+          <p:cNvPr id="10" name="Rounded Rectangle 9"/>
+          <p:cNvSpPr/>
+          <p:nvPr/>
+        </p:nvSpPr>
+        <p:spPr>
+          <a:xfrm>
+            <a:off x="7132320" y="2971800"/>
+            <a:ext cx="4297680" cy="3474720"/>
+          </a:xfrm>
+          <a:prstGeom prst="roundRect">
+            <a:avLst/>
+          </a:prstGeom>
+          <a:solidFill>
+            <a:srgbClr val="1E293B"/>
+          </a:solidFill>
+          <a:ln>
+            <a:solidFill>
+              <a:srgbClr val="334155"/>
+            </a:solidFill>
+          </a:ln>
+        </p:spPr>
+        <p:style>
+          <a:lnRef idx="1">
+            <a:schemeClr val="accent1"/>
+          </a:lnRef>
+          <a:fillRef idx="3">
+            <a:schemeClr val="accent1"/>
+          </a:fillRef>
+          <a:effectRef idx="2">
+            <a:schemeClr val="accent1"/>
+          </a:effectRef>
+          <a:fontRef idx="minor">
+            <a:schemeClr val="lt1"/>
+          </a:fontRef>
+        </p:style>
+        <p:txBody>
+          <a:bodyPr rtlCol="0" anchor="ctr" wrap="square"/>
+          <a:lstStyle/>
+          <a:p>
+            <a:pPr algn="ctr">
+              <a:spcAft>
+                <a:spcPts val="800"/>
+              </a:spcAft>
+              <a:defRPr sz="1400" b="1">
+                <a:solidFill>
+                  <a:srgbClr val="38BDF8"/>
+                </a:solidFill>
+              </a:defRPr>
+            </a:pPr>
+            <a:r>
+              <a:t>Why τ = 0.40 is the Clinical Gold Standard</a:t>
+            </a:r>
+          </a:p>
+          <a:p>
+            <a:pPr>
+              <a:spcAft>
+                <a:spcPts val="600"/>
+              </a:spcAft>
+            </a:pPr>
+            <a:r>
+              <a:rPr b="1" sz="1050">
+                <a:solidFill>
+                  <a:srgbClr val="FB923C"/>
+                </a:solidFill>
+              </a:rPr>
+              <a:t>• Asymmetric Error Costs: </a:t>
+            </a:r>
+            <a:r>
+              <a:rPr sz="1000">
+                <a:solidFill>
+                  <a:srgbClr val="FFFFFF"/>
+                </a:solidFill>
+              </a:rPr>
+              <a:t>A False Negative misses an undiagnosed diabetic patient, allowing irreversible microvascular complications to progress. A False Positive only prompts an inexpensive, non-invasive HbA1c blood test.</a:t>
+            </a:r>
+          </a:p>
+          <a:p>
+            <a:pPr>
+              <a:spcAft>
+                <a:spcPts val="600"/>
+              </a:spcAft>
+            </a:pPr>
+            <a:r>
+              <a:rPr b="1" sz="1050">
+                <a:solidFill>
+                  <a:srgbClr val="34D399"/>
+                </a:solidFill>
+              </a:rPr>
+              <a:t>• Catching 80.8% of Patients: </a:t>
+            </a:r>
+            <a:r>
+              <a:rPr sz="1000">
+                <a:solidFill>
+                  <a:srgbClr val="FFFFFF"/>
+                </a:solidFill>
+              </a:rPr>
+              <a:t>Shifting τ from 0.50 to 0.40 flags 35 additional diabetics (TP: 213 -&gt; 248) and reduces missed cases from 94 to 59.</a:t>
+            </a:r>
+          </a:p>
+          <a:p>
+            <a:pPr>
+              <a:spcAft>
+                <a:spcPts val="600"/>
+              </a:spcAft>
+            </a:pPr>
+            <a:r>
+              <a:rPr b="1" sz="1050">
+                <a:solidFill>
+                  <a:srgbClr val="FB923C"/>
+                </a:solidFill>
+              </a:rPr>
+              <a:t>• Controlling False Alarms: </a:t>
+            </a:r>
+            <a:r>
+              <a:rPr sz="1000">
+                <a:solidFill>
+                  <a:srgbClr val="FFFFFF"/>
+                </a:solidFill>
+              </a:rPr>
+              <a:t>Even at τ = 0.40, our model produces only 106 False Positives—vastly cleaner than Pure CXR alone (which had 260 FPs at only 62.2% recall).</a:t>
+            </a:r>
+          </a:p>
+          <a:p>
+            <a:pPr>
+              <a:spcAft>
+                <a:spcPts val="600"/>
+              </a:spcAft>
+            </a:pPr>
+            <a:r>
+              <a:rPr b="1" sz="1050">
+                <a:solidFill>
+                  <a:srgbClr val="FB923C"/>
+                </a:solidFill>
+              </a:rPr>
+              <a:t>• Deployment Recommendation: </a:t>
+            </a:r>
+            <a:r>
+              <a:rPr sz="1000">
+                <a:solidFill>
+                  <a:srgbClr val="FFFFFF"/>
+                </a:solidFill>
+              </a:rPr>
+              <a:t>Flag patients with P(T2D) &gt;= 0.40 for automated reflex lab orders on chest X-ray discharge summaries.</a:t>
+            </a:r>
+          </a:p>
+        </p:txBody>
+      </p:sp>
+    </p:spTree>
+  </p:cSld>
+  <p:clrMapOvr>
+    <a:masterClrMapping/>
+  </p:clrMapOvr>
+</p:sld>
+</file>
+
+<file path=ppt/slides/slide11.xml><?xml version="1.0" encoding="utf-8"?>
+<p:sld xmlns:a="http://schemas.openxmlformats.org/drawingml/2006/main" xmlns:p="http://schemas.openxmlformats.org/presentationml/2006/main" xmlns:r="http://schemas.openxmlformats.org/officeDocument/2006/relationships">
+  <p:cSld>
+    <p:spTree>
+      <p:nvGrpSpPr>
+        <p:cNvPr id="1" name=""/>
+        <p:cNvGrpSpPr/>
+        <p:nvPr/>
+      </p:nvGrpSpPr>
+      <p:grpSpPr/>
+      <p:sp>
+        <p:nvSpPr>
+          <p:cNvPr id="2" name="Rectangle 1"/>
+          <p:cNvSpPr/>
+          <p:nvPr/>
+        </p:nvSpPr>
+        <p:spPr>
+          <a:xfrm>
+            <a:off x="0" y="0"/>
+            <a:ext cx="12191695" cy="6858000"/>
+          </a:xfrm>
+          <a:prstGeom prst="rect">
+            <a:avLst/>
+          </a:prstGeom>
+          <a:solidFill>
+            <a:srgbClr val="0F172A"/>
+          </a:solidFill>
+          <a:ln>
+            <a:noFill/>
+          </a:ln>
+        </p:spPr>
+        <p:style>
+          <a:lnRef idx="1">
+            <a:schemeClr val="accent1"/>
+          </a:lnRef>
+          <a:fillRef idx="3">
+            <a:schemeClr val="accent1"/>
+          </a:fillRef>
+          <a:effectRef idx="2">
+            <a:schemeClr val="accent1"/>
+          </a:effectRef>
+          <a:fontRef idx="minor">
+            <a:schemeClr val="lt1"/>
+          </a:fontRef>
+        </p:style>
+        <p:txBody>
+          <a:bodyPr rtlCol="0" anchor="ctr"/>
+          <a:lstStyle/>
+          <a:p>
+            <a:pPr algn="ctr"/>
+          </a:p>
+        </p:txBody>
+      </p:sp>
+      <p:sp>
+        <p:nvSpPr>
+          <p:cNvPr id="3" name="TextBox 2"/>
+          <p:cNvSpPr txBox="1"/>
+          <p:nvPr/>
+        </p:nvSpPr>
+        <p:spPr>
+          <a:xfrm>
+            <a:off x="731520" y="320040"/>
+            <a:ext cx="10698480" cy="320040"/>
+          </a:xfrm>
+          <a:prstGeom prst="rect">
+            <a:avLst/>
+          </a:prstGeom>
+          <a:noFill/>
+        </p:spPr>
+        <p:txBody>
+          <a:bodyPr wrap="square">
+            <a:spAutoFit/>
+          </a:bodyPr>
+          <a:lstStyle/>
+          <a:p>
+            <a:pPr>
+              <a:defRPr sz="1050" b="1">
+                <a:solidFill>
+                  <a:srgbClr val="38BDF8"/>
+                </a:solidFill>
+              </a:defRPr>
+            </a:pPr>
+            <a:r>
               <a:t>CS 396 — ARTIFICIAL INTELLIGENCE IN HEALTHCARE   |   PRODUCTION DELIVERABLES</a:t>
             </a:r>
           </a:p>
@@ -3838,7 +5409,7 @@
 </p:sld>
 </file>
 
-<file path=ppt/slides/slide11.xml><?xml version="1.0" encoding="utf-8"?>
+<file path=ppt/slides/slide12.xml><?xml version="1.0" encoding="utf-8"?>
 <p:sld xmlns:a="http://schemas.openxmlformats.org/drawingml/2006/main" xmlns:p="http://schemas.openxmlformats.org/presentationml/2006/main" xmlns:r="http://schemas.openxmlformats.org/officeDocument/2006/relationships">
   <p:cSld>
     <p:spTree>
@@ -8692,6 +10263,310 @@
               </a:defRPr>
             </a:pPr>
             <a:r>
+              <a:t>CS 396 — ARTIFICIAL INTELLIGENCE IN HEALTHCARE   |   PHASE 2: TRAINING DYNAMICS</a:t>
+            </a:r>
+          </a:p>
+        </p:txBody>
+      </p:sp>
+      <p:sp>
+        <p:nvSpPr>
+          <p:cNvPr id="4" name="TextBox 3"/>
+          <p:cNvSpPr txBox="1"/>
+          <p:nvPr/>
+        </p:nvSpPr>
+        <p:spPr>
+          <a:xfrm>
+            <a:off x="731520" y="621792"/>
+            <a:ext cx="10698480" cy="640080"/>
+          </a:xfrm>
+          <a:prstGeom prst="rect">
+            <a:avLst/>
+          </a:prstGeom>
+          <a:noFill/>
+        </p:spPr>
+        <p:txBody>
+          <a:bodyPr wrap="square">
+            <a:spAutoFit/>
+          </a:bodyPr>
+          <a:lstStyle/>
+          <a:p>
+            <a:pPr>
+              <a:defRPr sz="2500" b="1">
+                <a:solidFill>
+                  <a:srgbClr val="FFFFFF"/>
+                </a:solidFill>
+              </a:defRPr>
+            </a:pPr>
+            <a:r>
+              <a:t>Loss &amp; Learning Curves: Pure X-Ray Vision Training</a:t>
+            </a:r>
+          </a:p>
+        </p:txBody>
+      </p:sp>
+      <p:pic>
+        <p:nvPicPr>
+          <p:cNvPr id="5" name="Picture 4" descr="cxr_loss_graph.png"/>
+          <p:cNvPicPr>
+            <a:picLocks noChangeAspect="1"/>
+          </p:cNvPicPr>
+          <p:nvPr/>
+        </p:nvPicPr>
+        <p:blipFill>
+          <a:blip r:embed="rId2"/>
+          <a:stretch>
+            <a:fillRect/>
+          </a:stretch>
+        </p:blipFill>
+        <p:spPr>
+          <a:xfrm>
+            <a:off x="731520" y="1371600"/>
+            <a:ext cx="6675120" cy="2956606"/>
+          </a:xfrm>
+          <a:prstGeom prst="rect">
+            <a:avLst/>
+          </a:prstGeom>
+        </p:spPr>
+      </p:pic>
+      <p:sp>
+        <p:nvSpPr>
+          <p:cNvPr id="6" name="Rounded Rectangle 5"/>
+          <p:cNvSpPr/>
+          <p:nvPr/>
+        </p:nvSpPr>
+        <p:spPr>
+          <a:xfrm>
+            <a:off x="7589520" y="1371600"/>
+            <a:ext cx="3840480" cy="4846320"/>
+          </a:xfrm>
+          <a:prstGeom prst="roundRect">
+            <a:avLst/>
+          </a:prstGeom>
+          <a:solidFill>
+            <a:srgbClr val="1E293B"/>
+          </a:solidFill>
+          <a:ln>
+            <a:solidFill>
+              <a:srgbClr val="334155"/>
+            </a:solidFill>
+          </a:ln>
+        </p:spPr>
+        <p:style>
+          <a:lnRef idx="1">
+            <a:schemeClr val="accent1"/>
+          </a:lnRef>
+          <a:fillRef idx="3">
+            <a:schemeClr val="accent1"/>
+          </a:fillRef>
+          <a:effectRef idx="2">
+            <a:schemeClr val="accent1"/>
+          </a:effectRef>
+          <a:fontRef idx="minor">
+            <a:schemeClr val="lt1"/>
+          </a:fontRef>
+        </p:style>
+        <p:txBody>
+          <a:bodyPr rtlCol="0" anchor="ctr" wrap="square"/>
+          <a:lstStyle/>
+          <a:p>
+            <a:pPr algn="ctr">
+              <a:spcAft>
+                <a:spcPts val="1000"/>
+              </a:spcAft>
+              <a:defRPr sz="1500" b="1">
+                <a:solidFill>
+                  <a:srgbClr val="38BDF8"/>
+                </a:solidFill>
+              </a:defRPr>
+            </a:pPr>
+            <a:r>
+              <a:t>What the Curves Mean in Plain English</a:t>
+            </a:r>
+          </a:p>
+          <a:p>
+            <a:pPr>
+              <a:spcAft>
+                <a:spcPts val="800"/>
+              </a:spcAft>
+            </a:pPr>
+            <a:r>
+              <a:rPr b="1" sz="1100">
+                <a:solidFill>
+                  <a:srgbClr val="FB923C"/>
+                </a:solidFill>
+              </a:rPr>
+              <a:t>• Loss Drops Consistently: </a:t>
+            </a:r>
+            <a:r>
+              <a:rPr sz="1050">
+                <a:solidFill>
+                  <a:srgbClr val="FFFFFF"/>
+                </a:solidFill>
+              </a:rPr>
+              <a:t>Validation error steadily falls from 0.694 down to ~0.668. This proves the network is actively learning real anatomical shapes rather than memorizing random pixel noise.</a:t>
+            </a:r>
+          </a:p>
+          <a:p>
+            <a:pPr>
+              <a:spcAft>
+                <a:spcPts val="800"/>
+              </a:spcAft>
+            </a:pPr>
+            <a:r>
+              <a:rPr b="1" sz="1100">
+                <a:solidFill>
+                  <a:srgbClr val="FB923C"/>
+                </a:solidFill>
+              </a:rPr>
+              <a:t>• Optimal Sweet Spot (Epochs 6-8): </a:t>
+            </a:r>
+            <a:r>
+              <a:rPr sz="1050">
+                <a:solidFill>
+                  <a:srgbClr val="FFFFFF"/>
+                </a:solidFill>
+              </a:rPr>
+              <a:t>Validation loss hits its lowest point around Epoch 7. Stopping here avoids overfitting on our ~950 patient cohort.</a:t>
+            </a:r>
+          </a:p>
+          <a:p>
+            <a:pPr>
+              <a:spcAft>
+                <a:spcPts val="800"/>
+              </a:spcAft>
+            </a:pPr>
+            <a:r>
+              <a:rPr b="1" sz="1100">
+                <a:solidFill>
+                  <a:srgbClr val="34D399"/>
+                </a:solidFill>
+              </a:rPr>
+              <a:t>• AUROC Climbs to 0.6503: </a:t>
+            </a:r>
+            <a:r>
+              <a:rPr sz="1050">
+                <a:solidFill>
+                  <a:srgbClr val="FFFFFF"/>
+                </a:solidFill>
+              </a:rPr>
+              <a:t>The model's ability to separate diabetic from healthy hearts steadily climbs as conv filters sharpen.</a:t>
+            </a:r>
+          </a:p>
+          <a:p>
+            <a:pPr>
+              <a:spcAft>
+                <a:spcPts val="800"/>
+              </a:spcAft>
+            </a:pPr>
+            <a:r>
+              <a:rPr b="1" sz="1100">
+                <a:solidFill>
+                  <a:srgbClr val="34D399"/>
+                </a:solidFill>
+              </a:rPr>
+              <a:t>• Enhanced Residual Wins: </a:t>
+            </a:r>
+            <a:r>
+              <a:rPr sz="1050">
+                <a:solidFill>
+                  <a:srgbClr val="FFFFFF"/>
+                </a:solidFill>
+              </a:rPr>
+              <a:t>Adding residual skip connections gives a smoother curve and lifts AUROC to 0.6503 (61.4% accuracy), outperforming the baseline scratch model.</a:t>
+            </a:r>
+          </a:p>
+        </p:txBody>
+      </p:sp>
+    </p:spTree>
+  </p:cSld>
+  <p:clrMapOvr>
+    <a:masterClrMapping/>
+  </p:clrMapOvr>
+</p:sld>
+</file>
+
+<file path=ppt/slides/slide8.xml><?xml version="1.0" encoding="utf-8"?>
+<p:sld xmlns:a="http://schemas.openxmlformats.org/drawingml/2006/main" xmlns:p="http://schemas.openxmlformats.org/presentationml/2006/main" xmlns:r="http://schemas.openxmlformats.org/officeDocument/2006/relationships">
+  <p:cSld>
+    <p:spTree>
+      <p:nvGrpSpPr>
+        <p:cNvPr id="1" name=""/>
+        <p:cNvGrpSpPr/>
+        <p:nvPr/>
+      </p:nvGrpSpPr>
+      <p:grpSpPr/>
+      <p:sp>
+        <p:nvSpPr>
+          <p:cNvPr id="2" name="Rectangle 1"/>
+          <p:cNvSpPr/>
+          <p:nvPr/>
+        </p:nvSpPr>
+        <p:spPr>
+          <a:xfrm>
+            <a:off x="0" y="0"/>
+            <a:ext cx="12191695" cy="6858000"/>
+          </a:xfrm>
+          <a:prstGeom prst="rect">
+            <a:avLst/>
+          </a:prstGeom>
+          <a:solidFill>
+            <a:srgbClr val="0F172A"/>
+          </a:solidFill>
+          <a:ln>
+            <a:noFill/>
+          </a:ln>
+        </p:spPr>
+        <p:style>
+          <a:lnRef idx="1">
+            <a:schemeClr val="accent1"/>
+          </a:lnRef>
+          <a:fillRef idx="3">
+            <a:schemeClr val="accent1"/>
+          </a:fillRef>
+          <a:effectRef idx="2">
+            <a:schemeClr val="accent1"/>
+          </a:effectRef>
+          <a:fontRef idx="minor">
+            <a:schemeClr val="lt1"/>
+          </a:fontRef>
+        </p:style>
+        <p:txBody>
+          <a:bodyPr rtlCol="0" anchor="ctr"/>
+          <a:lstStyle/>
+          <a:p>
+            <a:pPr algn="ctr"/>
+          </a:p>
+        </p:txBody>
+      </p:sp>
+      <p:sp>
+        <p:nvSpPr>
+          <p:cNvPr id="3" name="TextBox 2"/>
+          <p:cNvSpPr txBox="1"/>
+          <p:nvPr/>
+        </p:nvSpPr>
+        <p:spPr>
+          <a:xfrm>
+            <a:off x="731520" y="320040"/>
+            <a:ext cx="10698480" cy="320040"/>
+          </a:xfrm>
+          <a:prstGeom prst="rect">
+            <a:avLst/>
+          </a:prstGeom>
+          <a:noFill/>
+        </p:spPr>
+        <p:txBody>
+          <a:bodyPr wrap="square">
+            <a:spAutoFit/>
+          </a:bodyPr>
+          <a:lstStyle/>
+          <a:p>
+            <a:pPr>
+              <a:defRPr sz="1050" b="1">
+                <a:solidFill>
+                  <a:srgbClr val="38BDF8"/>
+                </a:solidFill>
+              </a:defRPr>
+            </a:pPr>
+            <a:r>
               <a:t>CS 396 — ARTIFICIAL INTELLIGENCE IN HEALTHCARE   |   PHASE 3: ABLATION DISCOVERY</a:t>
             </a:r>
           </a:p>
@@ -9061,7 +10936,7 @@
 </p:sld>
 </file>
 
-<file path=ppt/slides/slide8.xml><?xml version="1.0" encoding="utf-8"?>
+<file path=ppt/slides/slide9.xml><?xml version="1.0" encoding="utf-8"?>
 <p:sld xmlns:a="http://schemas.openxmlformats.org/drawingml/2006/main" xmlns:p="http://schemas.openxmlformats.org/presentationml/2006/main" xmlns:r="http://schemas.openxmlformats.org/officeDocument/2006/relationships">
   <p:cSld>
     <p:spTree>
@@ -10199,1576 +12074,6 @@
                 </a:solidFill>
               </a:rPr>
               <a:t>Age (51.6%), BMI (30.5%), CXR Numerical Score (9.2%), Sex (3.1%), SDI (1.9%). Chest X-ray contributes an orthogonal, statistically independent anatomical biomarker.</a:t>
-            </a:r>
-          </a:p>
-        </p:txBody>
-      </p:sp>
-    </p:spTree>
-  </p:cSld>
-  <p:clrMapOvr>
-    <a:masterClrMapping/>
-  </p:clrMapOvr>
-</p:sld>
-</file>
-
-<file path=ppt/slides/slide9.xml><?xml version="1.0" encoding="utf-8"?>
-<p:sld xmlns:a="http://schemas.openxmlformats.org/drawingml/2006/main" xmlns:p="http://schemas.openxmlformats.org/presentationml/2006/main" xmlns:r="http://schemas.openxmlformats.org/officeDocument/2006/relationships">
-  <p:cSld>
-    <p:spTree>
-      <p:nvGrpSpPr>
-        <p:cNvPr id="1" name=""/>
-        <p:cNvGrpSpPr/>
-        <p:nvPr/>
-      </p:nvGrpSpPr>
-      <p:grpSpPr/>
-      <p:sp>
-        <p:nvSpPr>
-          <p:cNvPr id="2" name="Rectangle 1"/>
-          <p:cNvSpPr/>
-          <p:nvPr/>
-        </p:nvSpPr>
-        <p:spPr>
-          <a:xfrm>
-            <a:off x="0" y="0"/>
-            <a:ext cx="12191695" cy="6858000"/>
-          </a:xfrm>
-          <a:prstGeom prst="rect">
-            <a:avLst/>
-          </a:prstGeom>
-          <a:solidFill>
-            <a:srgbClr val="0F172A"/>
-          </a:solidFill>
-          <a:ln>
-            <a:noFill/>
-          </a:ln>
-        </p:spPr>
-        <p:style>
-          <a:lnRef idx="1">
-            <a:schemeClr val="accent1"/>
-          </a:lnRef>
-          <a:fillRef idx="3">
-            <a:schemeClr val="accent1"/>
-          </a:fillRef>
-          <a:effectRef idx="2">
-            <a:schemeClr val="accent1"/>
-          </a:effectRef>
-          <a:fontRef idx="minor">
-            <a:schemeClr val="lt1"/>
-          </a:fontRef>
-        </p:style>
-        <p:txBody>
-          <a:bodyPr rtlCol="0" anchor="ctr"/>
-          <a:lstStyle/>
-          <a:p>
-            <a:pPr algn="ctr"/>
-          </a:p>
-        </p:txBody>
-      </p:sp>
-      <p:sp>
-        <p:nvSpPr>
-          <p:cNvPr id="3" name="TextBox 2"/>
-          <p:cNvSpPr txBox="1"/>
-          <p:nvPr/>
-        </p:nvSpPr>
-        <p:spPr>
-          <a:xfrm>
-            <a:off x="731520" y="320040"/>
-            <a:ext cx="10698480" cy="320040"/>
-          </a:xfrm>
-          <a:prstGeom prst="rect">
-            <a:avLst/>
-          </a:prstGeom>
-          <a:noFill/>
-        </p:spPr>
-        <p:txBody>
-          <a:bodyPr wrap="square">
-            <a:spAutoFit/>
-          </a:bodyPr>
-          <a:lstStyle/>
-          <a:p>
-            <a:pPr>
-              <a:defRPr sz="1050" b="1">
-                <a:solidFill>
-                  <a:srgbClr val="38BDF8"/>
-                </a:solidFill>
-              </a:defRPr>
-            </a:pPr>
-            <a:r>
-              <a:t>CS 396 — ARTIFICIAL INTELLIGENCE IN HEALTHCARE   |   PHASE 5: CLINICAL DEPLOYMENT</a:t>
-            </a:r>
-          </a:p>
-        </p:txBody>
-      </p:sp>
-      <p:sp>
-        <p:nvSpPr>
-          <p:cNvPr id="4" name="TextBox 3"/>
-          <p:cNvSpPr txBox="1"/>
-          <p:nvPr/>
-        </p:nvSpPr>
-        <p:spPr>
-          <a:xfrm>
-            <a:off x="731520" y="621792"/>
-            <a:ext cx="10698480" cy="640080"/>
-          </a:xfrm>
-          <a:prstGeom prst="rect">
-            <a:avLst/>
-          </a:prstGeom>
-          <a:noFill/>
-        </p:spPr>
-        <p:txBody>
-          <a:bodyPr wrap="square">
-            <a:spAutoFit/>
-          </a:bodyPr>
-          <a:lstStyle/>
-          <a:p>
-            <a:pPr>
-              <a:defRPr sz="2500" b="1">
-                <a:solidFill>
-                  <a:srgbClr val="FFFFFF"/>
-                </a:solidFill>
-              </a:defRPr>
-            </a:pPr>
-            <a:r>
-              <a:t>Clinical Operating Point: Threshold Optimization (τ = 0.40)</a:t>
-            </a:r>
-          </a:p>
-        </p:txBody>
-      </p:sp>
-      <p:sp>
-        <p:nvSpPr>
-          <p:cNvPr id="5" name="Rounded Rectangle 4"/>
-          <p:cNvSpPr/>
-          <p:nvPr/>
-        </p:nvSpPr>
-        <p:spPr>
-          <a:xfrm>
-            <a:off x="731520" y="1371600"/>
-            <a:ext cx="2542032" cy="1463040"/>
-          </a:xfrm>
-          <a:prstGeom prst="roundRect">
-            <a:avLst/>
-          </a:prstGeom>
-          <a:solidFill>
-            <a:srgbClr val="1E293B"/>
-          </a:solidFill>
-          <a:ln>
-            <a:solidFill>
-              <a:srgbClr val="334155"/>
-            </a:solidFill>
-          </a:ln>
-        </p:spPr>
-        <p:style>
-          <a:lnRef idx="1">
-            <a:schemeClr val="accent1"/>
-          </a:lnRef>
-          <a:fillRef idx="3">
-            <a:schemeClr val="accent1"/>
-          </a:fillRef>
-          <a:effectRef idx="2">
-            <a:schemeClr val="accent1"/>
-          </a:effectRef>
-          <a:fontRef idx="minor">
-            <a:schemeClr val="lt1"/>
-          </a:fontRef>
-        </p:style>
-        <p:txBody>
-          <a:bodyPr rtlCol="0" anchor="ctr" wrap="square"/>
-          <a:lstStyle/>
-          <a:p>
-            <a:pPr algn="ctr">
-              <a:defRPr sz="1050" b="1">
-                <a:solidFill>
-                  <a:srgbClr val="34D399"/>
-                </a:solidFill>
-              </a:defRPr>
-            </a:pPr>
-            <a:r>
-              <a:t>RECALL (SENSITIVITY)</a:t>
-            </a:r>
-          </a:p>
-          <a:p>
-            <a:pPr>
-              <a:defRPr sz="2600" b="1">
-                <a:solidFill>
-                  <a:srgbClr val="FFFFFF"/>
-                </a:solidFill>
-              </a:defRPr>
-            </a:pPr>
-            <a:r>
-              <a:t>80.78%</a:t>
-            </a:r>
-          </a:p>
-          <a:p>
-            <a:pPr>
-              <a:defRPr sz="950">
-                <a:solidFill>
-                  <a:srgbClr val="94A3B8"/>
-                </a:solidFill>
-              </a:defRPr>
-            </a:pPr>
-            <a:r>
-              <a:t>248 / 307 Diabetics Caught</a:t>
-            </a:r>
-            <a:br/>
-            <a:r>
-              <a:t>(Cuts missed cases by 37.2%)</a:t>
-            </a:r>
-          </a:p>
-        </p:txBody>
-      </p:sp>
-      <p:sp>
-        <p:nvSpPr>
-          <p:cNvPr id="6" name="Rounded Rectangle 5"/>
-          <p:cNvSpPr/>
-          <p:nvPr/>
-        </p:nvSpPr>
-        <p:spPr>
-          <a:xfrm>
-            <a:off x="3456432" y="1371600"/>
-            <a:ext cx="2542032" cy="1463040"/>
-          </a:xfrm>
-          <a:prstGeom prst="roundRect">
-            <a:avLst/>
-          </a:prstGeom>
-          <a:solidFill>
-            <a:srgbClr val="1E293B"/>
-          </a:solidFill>
-          <a:ln>
-            <a:solidFill>
-              <a:srgbClr val="334155"/>
-            </a:solidFill>
-          </a:ln>
-        </p:spPr>
-        <p:style>
-          <a:lnRef idx="1">
-            <a:schemeClr val="accent1"/>
-          </a:lnRef>
-          <a:fillRef idx="3">
-            <a:schemeClr val="accent1"/>
-          </a:fillRef>
-          <a:effectRef idx="2">
-            <a:schemeClr val="accent1"/>
-          </a:effectRef>
-          <a:fontRef idx="minor">
-            <a:schemeClr val="lt1"/>
-          </a:fontRef>
-        </p:style>
-        <p:txBody>
-          <a:bodyPr rtlCol="0" anchor="ctr" wrap="square"/>
-          <a:lstStyle/>
-          <a:p>
-            <a:pPr algn="ctr">
-              <a:defRPr sz="1050" b="1">
-                <a:solidFill>
-                  <a:srgbClr val="38BDF8"/>
-                </a:solidFill>
-              </a:defRPr>
-            </a:pPr>
-            <a:r>
-              <a:t>SPECIFICITY (TNR)</a:t>
-            </a:r>
-          </a:p>
-          <a:p>
-            <a:pPr>
-              <a:defRPr sz="2600" b="1">
-                <a:solidFill>
-                  <a:srgbClr val="FFFFFF"/>
-                </a:solidFill>
-              </a:defRPr>
-            </a:pPr>
-            <a:r>
-              <a:t>83.49%</a:t>
-            </a:r>
-          </a:p>
-          <a:p>
-            <a:pPr>
-              <a:defRPr sz="950">
-                <a:solidFill>
-                  <a:srgbClr val="94A3B8"/>
-                </a:solidFill>
-              </a:defRPr>
-            </a:pPr>
-            <a:r>
-              <a:t>536 / 642 Normals Cleared</a:t>
-            </a:r>
-            <a:br/>
-            <a:r>
-              <a:t>(Prevents over-testing)</a:t>
-            </a:r>
-          </a:p>
-        </p:txBody>
-      </p:sp>
-      <p:sp>
-        <p:nvSpPr>
-          <p:cNvPr id="7" name="Rounded Rectangle 6"/>
-          <p:cNvSpPr/>
-          <p:nvPr/>
-        </p:nvSpPr>
-        <p:spPr>
-          <a:xfrm>
-            <a:off x="6181344" y="1371600"/>
-            <a:ext cx="2542032" cy="1463040"/>
-          </a:xfrm>
-          <a:prstGeom prst="roundRect">
-            <a:avLst/>
-          </a:prstGeom>
-          <a:solidFill>
-            <a:srgbClr val="1E293B"/>
-          </a:solidFill>
-          <a:ln>
-            <a:solidFill>
-              <a:srgbClr val="334155"/>
-            </a:solidFill>
-          </a:ln>
-        </p:spPr>
-        <p:style>
-          <a:lnRef idx="1">
-            <a:schemeClr val="accent1"/>
-          </a:lnRef>
-          <a:fillRef idx="3">
-            <a:schemeClr val="accent1"/>
-          </a:fillRef>
-          <a:effectRef idx="2">
-            <a:schemeClr val="accent1"/>
-          </a:effectRef>
-          <a:fontRef idx="minor">
-            <a:schemeClr val="lt1"/>
-          </a:fontRef>
-        </p:style>
-        <p:txBody>
-          <a:bodyPr rtlCol="0" anchor="ctr" wrap="square"/>
-          <a:lstStyle/>
-          <a:p>
-            <a:pPr algn="ctr">
-              <a:defRPr sz="1050" b="1">
-                <a:solidFill>
-                  <a:srgbClr val="FB923C"/>
-                </a:solidFill>
-              </a:defRPr>
-            </a:pPr>
-            <a:r>
-              <a:t>FALSE POSITIVES</a:t>
-            </a:r>
-          </a:p>
-          <a:p>
-            <a:pPr>
-              <a:defRPr sz="2600" b="1">
-                <a:solidFill>
-                  <a:srgbClr val="FFFFFF"/>
-                </a:solidFill>
-              </a:defRPr>
-            </a:pPr>
-            <a:r>
-              <a:t>106</a:t>
-            </a:r>
-          </a:p>
-          <a:p>
-            <a:pPr>
-              <a:defRPr sz="950">
-                <a:solidFill>
-                  <a:srgbClr val="94A3B8"/>
-                </a:solidFill>
-              </a:defRPr>
-            </a:pPr>
-            <a:r>
-              <a:t>vs. 260 in Pure CXR</a:t>
-            </a:r>
-            <a:br/>
-            <a:r>
-              <a:t>(2.4× fewer false alarms)</a:t>
-            </a:r>
-          </a:p>
-        </p:txBody>
-      </p:sp>
-      <p:sp>
-        <p:nvSpPr>
-          <p:cNvPr id="8" name="Rounded Rectangle 7"/>
-          <p:cNvSpPr/>
-          <p:nvPr/>
-        </p:nvSpPr>
-        <p:spPr>
-          <a:xfrm>
-            <a:off x="8906256" y="1371600"/>
-            <a:ext cx="2542032" cy="1463040"/>
-          </a:xfrm>
-          <a:prstGeom prst="roundRect">
-            <a:avLst/>
-          </a:prstGeom>
-          <a:solidFill>
-            <a:srgbClr val="1E293B"/>
-          </a:solidFill>
-          <a:ln>
-            <a:solidFill>
-              <a:srgbClr val="334155"/>
-            </a:solidFill>
-          </a:ln>
-        </p:spPr>
-        <p:style>
-          <a:lnRef idx="1">
-            <a:schemeClr val="accent1"/>
-          </a:lnRef>
-          <a:fillRef idx="3">
-            <a:schemeClr val="accent1"/>
-          </a:fillRef>
-          <a:effectRef idx="2">
-            <a:schemeClr val="accent1"/>
-          </a:effectRef>
-          <a:fontRef idx="minor">
-            <a:schemeClr val="lt1"/>
-          </a:fontRef>
-        </p:style>
-        <p:txBody>
-          <a:bodyPr rtlCol="0" anchor="ctr" wrap="square"/>
-          <a:lstStyle/>
-          <a:p>
-            <a:pPr algn="ctr">
-              <a:defRPr sz="1050" b="1">
-                <a:solidFill>
-                  <a:srgbClr val="34D399"/>
-                </a:solidFill>
-              </a:defRPr>
-            </a:pPr>
-            <a:r>
-              <a:t>PEAK F1-SCORE</a:t>
-            </a:r>
-          </a:p>
-          <a:p>
-            <a:pPr>
-              <a:defRPr sz="2600" b="1">
-                <a:solidFill>
-                  <a:srgbClr val="FFFFFF"/>
-                </a:solidFill>
-              </a:defRPr>
-            </a:pPr>
-            <a:r>
-              <a:t>0.7504</a:t>
-            </a:r>
-          </a:p>
-          <a:p>
-            <a:pPr>
-              <a:defRPr sz="950">
-                <a:solidFill>
-                  <a:srgbClr val="94A3B8"/>
-                </a:solidFill>
-              </a:defRPr>
-            </a:pPr>
-            <a:r>
-              <a:t>Optimal Precision-Recall</a:t>
-            </a:r>
-            <a:br/>
-            <a:r>
-              <a:t>Harmonic Balance</a:t>
-            </a:r>
-          </a:p>
-        </p:txBody>
-      </p:sp>
-      <p:graphicFrame>
-        <p:nvGraphicFramePr>
-          <p:cNvPr id="9" name="Table 8"/>
-          <p:cNvGraphicFramePr>
-            <a:graphicFrameLocks noGrp="1"/>
-          </p:cNvGraphicFramePr>
-          <p:nvPr/>
-        </p:nvGraphicFramePr>
-        <p:xfrm>
-          <a:off x="731520" y="2971800"/>
-          <a:ext cx="6217920" cy="3474720"/>
-        </p:xfrm>
-        <a:graphic>
-          <a:graphicData uri="http://schemas.openxmlformats.org/drawingml/2006/table">
-            <a:tbl>
-              <a:tblPr firstRow="1" bandRow="1">
-                <a:tableStyleId>{5C22544A-7EE6-4342-B048-85BDC9FD1C3A}</a:tableStyleId>
-              </a:tblPr>
-              <a:tblGrid>
-                <a:gridCol w="914400"/>
-                <a:gridCol w="640080"/>
-                <a:gridCol w="640080"/>
-                <a:gridCol w="640080"/>
-                <a:gridCol w="640080"/>
-                <a:gridCol w="914400"/>
-                <a:gridCol w="914400"/>
-                <a:gridCol w="914400"/>
-              </a:tblGrid>
-              <a:tr h="694944">
-                <a:tc>
-                  <a:txBody>
-                    <a:bodyPr/>
-                    <a:lstStyle/>
-                    <a:p>
-                      <a:pPr>
-                        <a:defRPr sz="1000" b="1">
-                          <a:solidFill>
-                            <a:srgbClr val="38BDF8"/>
-                          </a:solidFill>
-                        </a:defRPr>
-                      </a:pPr>
-                      <a:r>
-                        <a:t>Threshold</a:t>
-                      </a:r>
-                    </a:p>
-                  </a:txBody>
-                  <a:tcPr>
-                    <a:solidFill>
-                      <a:srgbClr val="28354C"/>
-                    </a:solidFill>
-                  </a:tcPr>
-                </a:tc>
-                <a:tc>
-                  <a:txBody>
-                    <a:bodyPr/>
-                    <a:lstStyle/>
-                    <a:p>
-                      <a:pPr>
-                        <a:defRPr sz="1000" b="1">
-                          <a:solidFill>
-                            <a:srgbClr val="38BDF8"/>
-                          </a:solidFill>
-                        </a:defRPr>
-                      </a:pPr>
-                      <a:r>
-                        <a:t>TP</a:t>
-                      </a:r>
-                    </a:p>
-                  </a:txBody>
-                  <a:tcPr>
-                    <a:solidFill>
-                      <a:srgbClr val="28354C"/>
-                    </a:solidFill>
-                  </a:tcPr>
-                </a:tc>
-                <a:tc>
-                  <a:txBody>
-                    <a:bodyPr/>
-                    <a:lstStyle/>
-                    <a:p>
-                      <a:pPr>
-                        <a:defRPr sz="1000" b="1">
-                          <a:solidFill>
-                            <a:srgbClr val="38BDF8"/>
-                          </a:solidFill>
-                        </a:defRPr>
-                      </a:pPr>
-                      <a:r>
-                        <a:t>FP</a:t>
-                      </a:r>
-                    </a:p>
-                  </a:txBody>
-                  <a:tcPr>
-                    <a:solidFill>
-                      <a:srgbClr val="28354C"/>
-                    </a:solidFill>
-                  </a:tcPr>
-                </a:tc>
-                <a:tc>
-                  <a:txBody>
-                    <a:bodyPr/>
-                    <a:lstStyle/>
-                    <a:p>
-                      <a:pPr>
-                        <a:defRPr sz="1000" b="1">
-                          <a:solidFill>
-                            <a:srgbClr val="38BDF8"/>
-                          </a:solidFill>
-                        </a:defRPr>
-                      </a:pPr>
-                      <a:r>
-                        <a:t>TN</a:t>
-                      </a:r>
-                    </a:p>
-                  </a:txBody>
-                  <a:tcPr>
-                    <a:solidFill>
-                      <a:srgbClr val="28354C"/>
-                    </a:solidFill>
-                  </a:tcPr>
-                </a:tc>
-                <a:tc>
-                  <a:txBody>
-                    <a:bodyPr/>
-                    <a:lstStyle/>
-                    <a:p>
-                      <a:pPr>
-                        <a:defRPr sz="1000" b="1">
-                          <a:solidFill>
-                            <a:srgbClr val="38BDF8"/>
-                          </a:solidFill>
-                        </a:defRPr>
-                      </a:pPr>
-                      <a:r>
-                        <a:t>FN</a:t>
-                      </a:r>
-                    </a:p>
-                  </a:txBody>
-                  <a:tcPr>
-                    <a:solidFill>
-                      <a:srgbClr val="28354C"/>
-                    </a:solidFill>
-                  </a:tcPr>
-                </a:tc>
-                <a:tc>
-                  <a:txBody>
-                    <a:bodyPr/>
-                    <a:lstStyle/>
-                    <a:p>
-                      <a:pPr>
-                        <a:defRPr sz="1000" b="1">
-                          <a:solidFill>
-                            <a:srgbClr val="38BDF8"/>
-                          </a:solidFill>
-                        </a:defRPr>
-                      </a:pPr>
-                      <a:r>
-                        <a:t>Recall</a:t>
-                      </a:r>
-                    </a:p>
-                  </a:txBody>
-                  <a:tcPr>
-                    <a:solidFill>
-                      <a:srgbClr val="28354C"/>
-                    </a:solidFill>
-                  </a:tcPr>
-                </a:tc>
-                <a:tc>
-                  <a:txBody>
-                    <a:bodyPr/>
-                    <a:lstStyle/>
-                    <a:p>
-                      <a:pPr>
-                        <a:defRPr sz="1000" b="1">
-                          <a:solidFill>
-                            <a:srgbClr val="38BDF8"/>
-                          </a:solidFill>
-                        </a:defRPr>
-                      </a:pPr>
-                      <a:r>
-                        <a:t>Specificity</a:t>
-                      </a:r>
-                    </a:p>
-                  </a:txBody>
-                  <a:tcPr>
-                    <a:solidFill>
-                      <a:srgbClr val="28354C"/>
-                    </a:solidFill>
-                  </a:tcPr>
-                </a:tc>
-                <a:tc>
-                  <a:txBody>
-                    <a:bodyPr/>
-                    <a:lstStyle/>
-                    <a:p>
-                      <a:pPr>
-                        <a:defRPr sz="1000" b="1">
-                          <a:solidFill>
-                            <a:srgbClr val="38BDF8"/>
-                          </a:solidFill>
-                        </a:defRPr>
-                      </a:pPr>
-                      <a:r>
-                        <a:t>Precision</a:t>
-                      </a:r>
-                    </a:p>
-                  </a:txBody>
-                  <a:tcPr>
-                    <a:solidFill>
-                      <a:srgbClr val="28354C"/>
-                    </a:solidFill>
-                  </a:tcPr>
-                </a:tc>
-              </a:tr>
-              <a:tr h="694944">
-                <a:tc>
-                  <a:txBody>
-                    <a:bodyPr/>
-                    <a:lstStyle/>
-                    <a:p>
-                      <a:pPr>
-                        <a:defRPr sz="950">
-                          <a:solidFill>
-                            <a:srgbClr val="FFFFFF"/>
-                          </a:solidFill>
-                        </a:defRPr>
-                      </a:pPr>
-                      <a:r>
-                        <a:t>0.50 (Default)</a:t>
-                      </a:r>
-                    </a:p>
-                  </a:txBody>
-                  <a:tcPr>
-                    <a:solidFill>
-                      <a:srgbClr val="1E293B"/>
-                    </a:solidFill>
-                  </a:tcPr>
-                </a:tc>
-                <a:tc>
-                  <a:txBody>
-                    <a:bodyPr/>
-                    <a:lstStyle/>
-                    <a:p>
-                      <a:pPr>
-                        <a:defRPr sz="950">
-                          <a:solidFill>
-                            <a:srgbClr val="FFFFFF"/>
-                          </a:solidFill>
-                        </a:defRPr>
-                      </a:pPr>
-                      <a:r>
-                        <a:t>213</a:t>
-                      </a:r>
-                    </a:p>
-                  </a:txBody>
-                  <a:tcPr>
-                    <a:solidFill>
-                      <a:srgbClr val="1E293B"/>
-                    </a:solidFill>
-                  </a:tcPr>
-                </a:tc>
-                <a:tc>
-                  <a:txBody>
-                    <a:bodyPr/>
-                    <a:lstStyle/>
-                    <a:p>
-                      <a:pPr>
-                        <a:defRPr sz="950">
-                          <a:solidFill>
-                            <a:srgbClr val="FFFFFF"/>
-                          </a:solidFill>
-                        </a:defRPr>
-                      </a:pPr>
-                      <a:r>
-                        <a:t>65</a:t>
-                      </a:r>
-                    </a:p>
-                  </a:txBody>
-                  <a:tcPr>
-                    <a:solidFill>
-                      <a:srgbClr val="1E293B"/>
-                    </a:solidFill>
-                  </a:tcPr>
-                </a:tc>
-                <a:tc>
-                  <a:txBody>
-                    <a:bodyPr/>
-                    <a:lstStyle/>
-                    <a:p>
-                      <a:pPr>
-                        <a:defRPr sz="950">
-                          <a:solidFill>
-                            <a:srgbClr val="FFFFFF"/>
-                          </a:solidFill>
-                        </a:defRPr>
-                      </a:pPr>
-                      <a:r>
-                        <a:t>577</a:t>
-                      </a:r>
-                    </a:p>
-                  </a:txBody>
-                  <a:tcPr>
-                    <a:solidFill>
-                      <a:srgbClr val="1E293B"/>
-                    </a:solidFill>
-                  </a:tcPr>
-                </a:tc>
-                <a:tc>
-                  <a:txBody>
-                    <a:bodyPr/>
-                    <a:lstStyle/>
-                    <a:p>
-                      <a:pPr>
-                        <a:defRPr sz="950">
-                          <a:solidFill>
-                            <a:srgbClr val="FFFFFF"/>
-                          </a:solidFill>
-                        </a:defRPr>
-                      </a:pPr>
-                      <a:r>
-                        <a:t>94</a:t>
-                      </a:r>
-                    </a:p>
-                  </a:txBody>
-                  <a:tcPr>
-                    <a:solidFill>
-                      <a:srgbClr val="1E293B"/>
-                    </a:solidFill>
-                  </a:tcPr>
-                </a:tc>
-                <a:tc>
-                  <a:txBody>
-                    <a:bodyPr/>
-                    <a:lstStyle/>
-                    <a:p>
-                      <a:pPr>
-                        <a:defRPr sz="950">
-                          <a:solidFill>
-                            <a:srgbClr val="FFFFFF"/>
-                          </a:solidFill>
-                        </a:defRPr>
-                      </a:pPr>
-                      <a:r>
-                        <a:t>69.38%</a:t>
-                      </a:r>
-                    </a:p>
-                  </a:txBody>
-                  <a:tcPr>
-                    <a:solidFill>
-                      <a:srgbClr val="1E293B"/>
-                    </a:solidFill>
-                  </a:tcPr>
-                </a:tc>
-                <a:tc>
-                  <a:txBody>
-                    <a:bodyPr/>
-                    <a:lstStyle/>
-                    <a:p>
-                      <a:pPr>
-                        <a:defRPr sz="950">
-                          <a:solidFill>
-                            <a:srgbClr val="FFFFFF"/>
-                          </a:solidFill>
-                        </a:defRPr>
-                      </a:pPr>
-                      <a:r>
-                        <a:t>89.88%</a:t>
-                      </a:r>
-                    </a:p>
-                  </a:txBody>
-                  <a:tcPr>
-                    <a:solidFill>
-                      <a:srgbClr val="1E293B"/>
-                    </a:solidFill>
-                  </a:tcPr>
-                </a:tc>
-                <a:tc>
-                  <a:txBody>
-                    <a:bodyPr/>
-                    <a:lstStyle/>
-                    <a:p>
-                      <a:pPr>
-                        <a:defRPr sz="950">
-                          <a:solidFill>
-                            <a:srgbClr val="FFFFFF"/>
-                          </a:solidFill>
-                        </a:defRPr>
-                      </a:pPr>
-                      <a:r>
-                        <a:t>76.62%</a:t>
-                      </a:r>
-                    </a:p>
-                  </a:txBody>
-                  <a:tcPr>
-                    <a:solidFill>
-                      <a:srgbClr val="1E293B"/>
-                    </a:solidFill>
-                  </a:tcPr>
-                </a:tc>
-              </a:tr>
-              <a:tr h="694944">
-                <a:tc>
-                  <a:txBody>
-                    <a:bodyPr/>
-                    <a:lstStyle/>
-                    <a:p>
-                      <a:pPr>
-                        <a:defRPr sz="950" b="1">
-                          <a:solidFill>
-                            <a:srgbClr val="34D399"/>
-                          </a:solidFill>
-                        </a:defRPr>
-                      </a:pPr>
-                      <a:r>
-                        <a:t>0.40 (Optimal)</a:t>
-                      </a:r>
-                    </a:p>
-                  </a:txBody>
-                  <a:tcPr>
-                    <a:solidFill>
-                      <a:srgbClr val="25344B"/>
-                    </a:solidFill>
-                  </a:tcPr>
-                </a:tc>
-                <a:tc>
-                  <a:txBody>
-                    <a:bodyPr/>
-                    <a:lstStyle/>
-                    <a:p>
-                      <a:pPr>
-                        <a:defRPr sz="950" b="1">
-                          <a:solidFill>
-                            <a:srgbClr val="FFFFFF"/>
-                          </a:solidFill>
-                        </a:defRPr>
-                      </a:pPr>
-                      <a:r>
-                        <a:t>248</a:t>
-                      </a:r>
-                    </a:p>
-                  </a:txBody>
-                  <a:tcPr>
-                    <a:solidFill>
-                      <a:srgbClr val="25344B"/>
-                    </a:solidFill>
-                  </a:tcPr>
-                </a:tc>
-                <a:tc>
-                  <a:txBody>
-                    <a:bodyPr/>
-                    <a:lstStyle/>
-                    <a:p>
-                      <a:pPr>
-                        <a:defRPr sz="950" b="1">
-                          <a:solidFill>
-                            <a:srgbClr val="FB923C"/>
-                          </a:solidFill>
-                        </a:defRPr>
-                      </a:pPr>
-                      <a:r>
-                        <a:t>106</a:t>
-                      </a:r>
-                    </a:p>
-                  </a:txBody>
-                  <a:tcPr>
-                    <a:solidFill>
-                      <a:srgbClr val="25344B"/>
-                    </a:solidFill>
-                  </a:tcPr>
-                </a:tc>
-                <a:tc>
-                  <a:txBody>
-                    <a:bodyPr/>
-                    <a:lstStyle/>
-                    <a:p>
-                      <a:pPr>
-                        <a:defRPr sz="950" b="1">
-                          <a:solidFill>
-                            <a:srgbClr val="FFFFFF"/>
-                          </a:solidFill>
-                        </a:defRPr>
-                      </a:pPr>
-                      <a:r>
-                        <a:t>536</a:t>
-                      </a:r>
-                    </a:p>
-                  </a:txBody>
-                  <a:tcPr>
-                    <a:solidFill>
-                      <a:srgbClr val="25344B"/>
-                    </a:solidFill>
-                  </a:tcPr>
-                </a:tc>
-                <a:tc>
-                  <a:txBody>
-                    <a:bodyPr/>
-                    <a:lstStyle/>
-                    <a:p>
-                      <a:pPr>
-                        <a:defRPr sz="950" b="1">
-                          <a:solidFill>
-                            <a:srgbClr val="FFFFFF"/>
-                          </a:solidFill>
-                        </a:defRPr>
-                      </a:pPr>
-                      <a:r>
-                        <a:t>59</a:t>
-                      </a:r>
-                    </a:p>
-                  </a:txBody>
-                  <a:tcPr>
-                    <a:solidFill>
-                      <a:srgbClr val="25344B"/>
-                    </a:solidFill>
-                  </a:tcPr>
-                </a:tc>
-                <a:tc>
-                  <a:txBody>
-                    <a:bodyPr/>
-                    <a:lstStyle/>
-                    <a:p>
-                      <a:pPr>
-                        <a:defRPr sz="950" b="1">
-                          <a:solidFill>
-                            <a:srgbClr val="34D399"/>
-                          </a:solidFill>
-                        </a:defRPr>
-                      </a:pPr>
-                      <a:r>
-                        <a:t>80.78%</a:t>
-                      </a:r>
-                    </a:p>
-                  </a:txBody>
-                  <a:tcPr>
-                    <a:solidFill>
-                      <a:srgbClr val="25344B"/>
-                    </a:solidFill>
-                  </a:tcPr>
-                </a:tc>
-                <a:tc>
-                  <a:txBody>
-                    <a:bodyPr/>
-                    <a:lstStyle/>
-                    <a:p>
-                      <a:pPr>
-                        <a:defRPr sz="950" b="1">
-                          <a:solidFill>
-                            <a:srgbClr val="FFFFFF"/>
-                          </a:solidFill>
-                        </a:defRPr>
-                      </a:pPr>
-                      <a:r>
-                        <a:t>83.49%</a:t>
-                      </a:r>
-                    </a:p>
-                  </a:txBody>
-                  <a:tcPr>
-                    <a:solidFill>
-                      <a:srgbClr val="25344B"/>
-                    </a:solidFill>
-                  </a:tcPr>
-                </a:tc>
-                <a:tc>
-                  <a:txBody>
-                    <a:bodyPr/>
-                    <a:lstStyle/>
-                    <a:p>
-                      <a:pPr>
-                        <a:defRPr sz="950" b="1">
-                          <a:solidFill>
-                            <a:srgbClr val="FFFFFF"/>
-                          </a:solidFill>
-                        </a:defRPr>
-                      </a:pPr>
-                      <a:r>
-                        <a:t>70.06%</a:t>
-                      </a:r>
-                    </a:p>
-                  </a:txBody>
-                  <a:tcPr>
-                    <a:solidFill>
-                      <a:srgbClr val="25344B"/>
-                    </a:solidFill>
-                  </a:tcPr>
-                </a:tc>
-              </a:tr>
-              <a:tr h="694944">
-                <a:tc>
-                  <a:txBody>
-                    <a:bodyPr/>
-                    <a:lstStyle/>
-                    <a:p>
-                      <a:pPr>
-                        <a:defRPr sz="950">
-                          <a:solidFill>
-                            <a:srgbClr val="FFFFFF"/>
-                          </a:solidFill>
-                        </a:defRPr>
-                      </a:pPr>
-                      <a:r>
-                        <a:t>0.35 (Aggressive)</a:t>
-                      </a:r>
-                    </a:p>
-                  </a:txBody>
-                  <a:tcPr>
-                    <a:solidFill>
-                      <a:srgbClr val="1E293B"/>
-                    </a:solidFill>
-                  </a:tcPr>
-                </a:tc>
-                <a:tc>
-                  <a:txBody>
-                    <a:bodyPr/>
-                    <a:lstStyle/>
-                    <a:p>
-                      <a:pPr>
-                        <a:defRPr sz="950">
-                          <a:solidFill>
-                            <a:srgbClr val="FFFFFF"/>
-                          </a:solidFill>
-                        </a:defRPr>
-                      </a:pPr>
-                      <a:r>
-                        <a:t>259</a:t>
-                      </a:r>
-                    </a:p>
-                  </a:txBody>
-                  <a:tcPr>
-                    <a:solidFill>
-                      <a:srgbClr val="1E293B"/>
-                    </a:solidFill>
-                  </a:tcPr>
-                </a:tc>
-                <a:tc>
-                  <a:txBody>
-                    <a:bodyPr/>
-                    <a:lstStyle/>
-                    <a:p>
-                      <a:pPr>
-                        <a:defRPr sz="950">
-                          <a:solidFill>
-                            <a:srgbClr val="FFFFFF"/>
-                          </a:solidFill>
-                        </a:defRPr>
-                      </a:pPr>
-                      <a:r>
-                        <a:t>133</a:t>
-                      </a:r>
-                    </a:p>
-                  </a:txBody>
-                  <a:tcPr>
-                    <a:solidFill>
-                      <a:srgbClr val="1E293B"/>
-                    </a:solidFill>
-                  </a:tcPr>
-                </a:tc>
-                <a:tc>
-                  <a:txBody>
-                    <a:bodyPr/>
-                    <a:lstStyle/>
-                    <a:p>
-                      <a:pPr>
-                        <a:defRPr sz="950">
-                          <a:solidFill>
-                            <a:srgbClr val="FFFFFF"/>
-                          </a:solidFill>
-                        </a:defRPr>
-                      </a:pPr>
-                      <a:r>
-                        <a:t>509</a:t>
-                      </a:r>
-                    </a:p>
-                  </a:txBody>
-                  <a:tcPr>
-                    <a:solidFill>
-                      <a:srgbClr val="1E293B"/>
-                    </a:solidFill>
-                  </a:tcPr>
-                </a:tc>
-                <a:tc>
-                  <a:txBody>
-                    <a:bodyPr/>
-                    <a:lstStyle/>
-                    <a:p>
-                      <a:pPr>
-                        <a:defRPr sz="950">
-                          <a:solidFill>
-                            <a:srgbClr val="FFFFFF"/>
-                          </a:solidFill>
-                        </a:defRPr>
-                      </a:pPr>
-                      <a:r>
-                        <a:t>48</a:t>
-                      </a:r>
-                    </a:p>
-                  </a:txBody>
-                  <a:tcPr>
-                    <a:solidFill>
-                      <a:srgbClr val="1E293B"/>
-                    </a:solidFill>
-                  </a:tcPr>
-                </a:tc>
-                <a:tc>
-                  <a:txBody>
-                    <a:bodyPr/>
-                    <a:lstStyle/>
-                    <a:p>
-                      <a:pPr>
-                        <a:defRPr sz="950">
-                          <a:solidFill>
-                            <a:srgbClr val="FFFFFF"/>
-                          </a:solidFill>
-                        </a:defRPr>
-                      </a:pPr>
-                      <a:r>
-                        <a:t>84.36%</a:t>
-                      </a:r>
-                    </a:p>
-                  </a:txBody>
-                  <a:tcPr>
-                    <a:solidFill>
-                      <a:srgbClr val="1E293B"/>
-                    </a:solidFill>
-                  </a:tcPr>
-                </a:tc>
-                <a:tc>
-                  <a:txBody>
-                    <a:bodyPr/>
-                    <a:lstStyle/>
-                    <a:p>
-                      <a:pPr>
-                        <a:defRPr sz="950">
-                          <a:solidFill>
-                            <a:srgbClr val="FFFFFF"/>
-                          </a:solidFill>
-                        </a:defRPr>
-                      </a:pPr>
-                      <a:r>
-                        <a:t>79.28%</a:t>
-                      </a:r>
-                    </a:p>
-                  </a:txBody>
-                  <a:tcPr>
-                    <a:solidFill>
-                      <a:srgbClr val="1E293B"/>
-                    </a:solidFill>
-                  </a:tcPr>
-                </a:tc>
-                <a:tc>
-                  <a:txBody>
-                    <a:bodyPr/>
-                    <a:lstStyle/>
-                    <a:p>
-                      <a:pPr>
-                        <a:defRPr sz="950">
-                          <a:solidFill>
-                            <a:srgbClr val="FFFFFF"/>
-                          </a:solidFill>
-                        </a:defRPr>
-                      </a:pPr>
-                      <a:r>
-                        <a:t>66.07%</a:t>
-                      </a:r>
-                    </a:p>
-                  </a:txBody>
-                  <a:tcPr>
-                    <a:solidFill>
-                      <a:srgbClr val="1E293B"/>
-                    </a:solidFill>
-                  </a:tcPr>
-                </a:tc>
-              </a:tr>
-              <a:tr h="694944">
-                <a:tc>
-                  <a:txBody>
-                    <a:bodyPr/>
-                    <a:lstStyle/>
-                    <a:p>
-                      <a:pPr>
-                        <a:defRPr sz="950">
-                          <a:solidFill>
-                            <a:srgbClr val="FFFFFF"/>
-                          </a:solidFill>
-                        </a:defRPr>
-                      </a:pPr>
-                      <a:r>
-                        <a:t>0.30 (High Catch)</a:t>
-                      </a:r>
-                    </a:p>
-                  </a:txBody>
-                  <a:tcPr>
-                    <a:solidFill>
-                      <a:srgbClr val="18212F"/>
-                    </a:solidFill>
-                  </a:tcPr>
-                </a:tc>
-                <a:tc>
-                  <a:txBody>
-                    <a:bodyPr/>
-                    <a:lstStyle/>
-                    <a:p>
-                      <a:pPr>
-                        <a:defRPr sz="950">
-                          <a:solidFill>
-                            <a:srgbClr val="FFFFFF"/>
-                          </a:solidFill>
-                        </a:defRPr>
-                      </a:pPr>
-                      <a:r>
-                        <a:t>273</a:t>
-                      </a:r>
-                    </a:p>
-                  </a:txBody>
-                  <a:tcPr>
-                    <a:solidFill>
-                      <a:srgbClr val="18212F"/>
-                    </a:solidFill>
-                  </a:tcPr>
-                </a:tc>
-                <a:tc>
-                  <a:txBody>
-                    <a:bodyPr/>
-                    <a:lstStyle/>
-                    <a:p>
-                      <a:pPr>
-                        <a:defRPr sz="950">
-                          <a:solidFill>
-                            <a:srgbClr val="FFFFFF"/>
-                          </a:solidFill>
-                        </a:defRPr>
-                      </a:pPr>
-                      <a:r>
-                        <a:t>159</a:t>
-                      </a:r>
-                    </a:p>
-                  </a:txBody>
-                  <a:tcPr>
-                    <a:solidFill>
-                      <a:srgbClr val="18212F"/>
-                    </a:solidFill>
-                  </a:tcPr>
-                </a:tc>
-                <a:tc>
-                  <a:txBody>
-                    <a:bodyPr/>
-                    <a:lstStyle/>
-                    <a:p>
-                      <a:pPr>
-                        <a:defRPr sz="950">
-                          <a:solidFill>
-                            <a:srgbClr val="FFFFFF"/>
-                          </a:solidFill>
-                        </a:defRPr>
-                      </a:pPr>
-                      <a:r>
-                        <a:t>483</a:t>
-                      </a:r>
-                    </a:p>
-                  </a:txBody>
-                  <a:tcPr>
-                    <a:solidFill>
-                      <a:srgbClr val="18212F"/>
-                    </a:solidFill>
-                  </a:tcPr>
-                </a:tc>
-                <a:tc>
-                  <a:txBody>
-                    <a:bodyPr/>
-                    <a:lstStyle/>
-                    <a:p>
-                      <a:pPr>
-                        <a:defRPr sz="950">
-                          <a:solidFill>
-                            <a:srgbClr val="FFFFFF"/>
-                          </a:solidFill>
-                        </a:defRPr>
-                      </a:pPr>
-                      <a:r>
-                        <a:t>34</a:t>
-                      </a:r>
-                    </a:p>
-                  </a:txBody>
-                  <a:tcPr>
-                    <a:solidFill>
-                      <a:srgbClr val="18212F"/>
-                    </a:solidFill>
-                  </a:tcPr>
-                </a:tc>
-                <a:tc>
-                  <a:txBody>
-                    <a:bodyPr/>
-                    <a:lstStyle/>
-                    <a:p>
-                      <a:pPr>
-                        <a:defRPr sz="950">
-                          <a:solidFill>
-                            <a:srgbClr val="FFFFFF"/>
-                          </a:solidFill>
-                        </a:defRPr>
-                      </a:pPr>
-                      <a:r>
-                        <a:t>88.93%</a:t>
-                      </a:r>
-                    </a:p>
-                  </a:txBody>
-                  <a:tcPr>
-                    <a:solidFill>
-                      <a:srgbClr val="18212F"/>
-                    </a:solidFill>
-                  </a:tcPr>
-                </a:tc>
-                <a:tc>
-                  <a:txBody>
-                    <a:bodyPr/>
-                    <a:lstStyle/>
-                    <a:p>
-                      <a:pPr>
-                        <a:defRPr sz="950">
-                          <a:solidFill>
-                            <a:srgbClr val="FFFFFF"/>
-                          </a:solidFill>
-                        </a:defRPr>
-                      </a:pPr>
-                      <a:r>
-                        <a:t>75.23%</a:t>
-                      </a:r>
-                    </a:p>
-                  </a:txBody>
-                  <a:tcPr>
-                    <a:solidFill>
-                      <a:srgbClr val="18212F"/>
-                    </a:solidFill>
-                  </a:tcPr>
-                </a:tc>
-                <a:tc>
-                  <a:txBody>
-                    <a:bodyPr/>
-                    <a:lstStyle/>
-                    <a:p>
-                      <a:pPr>
-                        <a:defRPr sz="950">
-                          <a:solidFill>
-                            <a:srgbClr val="FFFFFF"/>
-                          </a:solidFill>
-                        </a:defRPr>
-                      </a:pPr>
-                      <a:r>
-                        <a:t>63.19%</a:t>
-                      </a:r>
-                    </a:p>
-                  </a:txBody>
-                  <a:tcPr>
-                    <a:solidFill>
-                      <a:srgbClr val="18212F"/>
-                    </a:solidFill>
-                  </a:tcPr>
-                </a:tc>
-              </a:tr>
-            </a:tbl>
-          </a:graphicData>
-        </a:graphic>
-      </p:graphicFrame>
-      <p:sp>
-        <p:nvSpPr>
-          <p:cNvPr id="10" name="Rounded Rectangle 9"/>
-          <p:cNvSpPr/>
-          <p:nvPr/>
-        </p:nvSpPr>
-        <p:spPr>
-          <a:xfrm>
-            <a:off x="7132320" y="2971800"/>
-            <a:ext cx="4297680" cy="3474720"/>
-          </a:xfrm>
-          <a:prstGeom prst="roundRect">
-            <a:avLst/>
-          </a:prstGeom>
-          <a:solidFill>
-            <a:srgbClr val="1E293B"/>
-          </a:solidFill>
-          <a:ln>
-            <a:solidFill>
-              <a:srgbClr val="334155"/>
-            </a:solidFill>
-          </a:ln>
-        </p:spPr>
-        <p:style>
-          <a:lnRef idx="1">
-            <a:schemeClr val="accent1"/>
-          </a:lnRef>
-          <a:fillRef idx="3">
-            <a:schemeClr val="accent1"/>
-          </a:fillRef>
-          <a:effectRef idx="2">
-            <a:schemeClr val="accent1"/>
-          </a:effectRef>
-          <a:fontRef idx="minor">
-            <a:schemeClr val="lt1"/>
-          </a:fontRef>
-        </p:style>
-        <p:txBody>
-          <a:bodyPr rtlCol="0" anchor="ctr" wrap="square"/>
-          <a:lstStyle/>
-          <a:p>
-            <a:pPr algn="ctr">
-              <a:spcAft>
-                <a:spcPts val="800"/>
-              </a:spcAft>
-              <a:defRPr sz="1400" b="1">
-                <a:solidFill>
-                  <a:srgbClr val="38BDF8"/>
-                </a:solidFill>
-              </a:defRPr>
-            </a:pPr>
-            <a:r>
-              <a:t>Why τ = 0.40 is the Clinical Gold Standard</a:t>
-            </a:r>
-          </a:p>
-          <a:p>
-            <a:pPr>
-              <a:spcAft>
-                <a:spcPts val="600"/>
-              </a:spcAft>
-            </a:pPr>
-            <a:r>
-              <a:rPr b="1" sz="1050">
-                <a:solidFill>
-                  <a:srgbClr val="FB923C"/>
-                </a:solidFill>
-              </a:rPr>
-              <a:t>• Asymmetric Error Costs: </a:t>
-            </a:r>
-            <a:r>
-              <a:rPr sz="1000">
-                <a:solidFill>
-                  <a:srgbClr val="FFFFFF"/>
-                </a:solidFill>
-              </a:rPr>
-              <a:t>A False Negative misses an undiagnosed diabetic patient, allowing irreversible microvascular complications to progress. A False Positive only prompts an inexpensive, non-invasive HbA1c blood test.</a:t>
-            </a:r>
-          </a:p>
-          <a:p>
-            <a:pPr>
-              <a:spcAft>
-                <a:spcPts val="600"/>
-              </a:spcAft>
-            </a:pPr>
-            <a:r>
-              <a:rPr b="1" sz="1050">
-                <a:solidFill>
-                  <a:srgbClr val="34D399"/>
-                </a:solidFill>
-              </a:rPr>
-              <a:t>• Catching 80.8% of Patients: </a:t>
-            </a:r>
-            <a:r>
-              <a:rPr sz="1000">
-                <a:solidFill>
-                  <a:srgbClr val="FFFFFF"/>
-                </a:solidFill>
-              </a:rPr>
-              <a:t>Shifting τ from 0.50 to 0.40 flags 35 additional diabetics (TP: 213 -&gt; 248) and reduces missed cases from 94 to 59.</a:t>
-            </a:r>
-          </a:p>
-          <a:p>
-            <a:pPr>
-              <a:spcAft>
-                <a:spcPts val="600"/>
-              </a:spcAft>
-            </a:pPr>
-            <a:r>
-              <a:rPr b="1" sz="1050">
-                <a:solidFill>
-                  <a:srgbClr val="FB923C"/>
-                </a:solidFill>
-              </a:rPr>
-              <a:t>• Controlling False Alarms: </a:t>
-            </a:r>
-            <a:r>
-              <a:rPr sz="1000">
-                <a:solidFill>
-                  <a:srgbClr val="FFFFFF"/>
-                </a:solidFill>
-              </a:rPr>
-              <a:t>Even at τ = 0.40, our model produces only 106 False Positives—vastly cleaner than Pure CXR alone (which had 260 FPs at only 62.2% recall).</a:t>
-            </a:r>
-          </a:p>
-          <a:p>
-            <a:pPr>
-              <a:spcAft>
-                <a:spcPts val="600"/>
-              </a:spcAft>
-            </a:pPr>
-            <a:r>
-              <a:rPr b="1" sz="1050">
-                <a:solidFill>
-                  <a:srgbClr val="FB923C"/>
-                </a:solidFill>
-              </a:rPr>
-              <a:t>• Deployment Recommendation: </a:t>
-            </a:r>
-            <a:r>
-              <a:rPr sz="1000">
-                <a:solidFill>
-                  <a:srgbClr val="FFFFFF"/>
-                </a:solidFill>
-              </a:rPr>
-              <a:t>Flag patients with P(T2D) &gt;= 0.40 for automated reflex lab orders on chest X-ray discharge summaries.</a:t>
             </a:r>
           </a:p>
         </p:txBody>

--- a/malek_and_angelo/malek/Malek_T2D_CNN_Presentation.pptx
+++ b/malek_and_angelo/malek/Malek_T2D_CNN_Presentation.pptx
@@ -10320,7 +10320,7 @@
         <p:spPr>
           <a:xfrm>
             <a:off x="731520" y="1371600"/>
-            <a:ext cx="6675120" cy="2956606"/>
+            <a:ext cx="6675120" cy="2872139"/>
           </a:xfrm>
           <a:prstGeom prst="rect">
             <a:avLst/>
@@ -10394,7 +10394,7 @@
                   <a:srgbClr val="FB923C"/>
                 </a:solidFill>
               </a:rPr>
-              <a:t>• Loss Drops Consistently: </a:t>
+              <a:t>• Training Loss Drops Fast (Dashed Lines): </a:t>
             </a:r>
             <a:r>
               <a:rPr sz="1050">
@@ -10402,7 +10402,7 @@
                   <a:srgbClr val="FFFFFF"/>
                 </a:solidFill>
               </a:rPr>
-              <a:t>Validation error steadily falls from 0.694 down to ~0.668. This proves the network is actively learning real anatomical shapes rather than memorizing random pixel noise.</a:t>
+              <a:t>Enhanced model training loss drops smoothly from 0.74 down to 0.46, proving the network rapidly captures subtle anatomical features from chest radiographs.</a:t>
             </a:r>
           </a:p>
           <a:p>
@@ -10417,7 +10417,7 @@
                   <a:srgbClr val="FB923C"/>
                 </a:solidFill>
               </a:rPr>
-              <a:t>• Optimal Sweet Spot (Epochs 6-8): </a:t>
+              <a:t>• Validation Loss &amp; Sweet Spot (Solid Lines): </a:t>
             </a:r>
             <a:r>
               <a:rPr sz="1050">
@@ -10425,7 +10425,7 @@
                   <a:srgbClr val="FFFFFF"/>
                 </a:solidFill>
               </a:rPr>
-              <a:t>Validation loss hits its lowest point around Epoch 7. Stopping here avoids overfitting on our ~950 patient cohort.</a:t>
+              <a:t>Validation error bottoms out at ~0.668–0.678 around Epochs 6–8. Stopping at this sweet spot locks in peak generalization before mild overfitting begins.</a:t>
             </a:r>
           </a:p>
           <a:p>
@@ -10448,7 +10448,7 @@
                   <a:srgbClr val="FFFFFF"/>
                 </a:solidFill>
               </a:rPr>
-              <a:t>The model's ability to separate diabetic from healthy hearts steadily climbs as conv filters sharpen.</a:t>
+              <a:t>Validation discriminative ability steadily climbs as convolutional filters sharpen, reliably separating diabetic from healthy hearts.</a:t>
             </a:r>
           </a:p>
           <a:p>
@@ -10471,7 +10471,7 @@
                   <a:srgbClr val="FFFFFF"/>
                 </a:solidFill>
               </a:rPr>
-              <a:t>Adding residual skip connections gives a smoother curve and lifts AUROC to 0.6503 (61.4% accuracy), outperforming the baseline scratch model.</a:t>
+              <a:t>Shortcut residual connections and dual spatial pooling (Avg+Max) outperform the baseline, reaching 61.4% accuracy on pure radiographs.</a:t>
             </a:r>
           </a:p>
         </p:txBody>

--- a/malek_and_angelo/malek/Malek_T2D_CNN_Presentation.pptx
+++ b/malek_and_angelo/malek/Malek_T2D_CNN_Presentation.pptx
@@ -10298,7 +10298,7 @@
               </a:defRPr>
             </a:pPr>
             <a:r>
-              <a:t>Loss &amp; Learning Curves: Pure X-Ray Vision Training</a:t>
+              <a:t>Loss &amp; Learning Curves: 80/20 Train/Test Split (Pure CXR)</a:t>
             </a:r>
           </a:p>
         </p:txBody>
@@ -10391,10 +10391,10 @@
             <a:r>
               <a:rPr b="1" sz="1100">
                 <a:solidFill>
-                  <a:srgbClr val="FB923C"/>
-                </a:solidFill>
-              </a:rPr>
-              <a:t>• Training Loss Drops Fast (Dashed Lines): </a:t>
+                  <a:srgbClr val="34D399"/>
+                </a:solidFill>
+              </a:rPr>
+              <a:t>• Clean Train Loss Drop (Dashed): </a:t>
             </a:r>
             <a:r>
               <a:rPr sz="1050">
@@ -10402,7 +10402,7 @@
                   <a:srgbClr val="FFFFFF"/>
                 </a:solidFill>
               </a:rPr>
-              <a:t>Enhanced model training loss drops smoothly from 0.74 down to 0.46, proving the network rapidly captures subtle anatomical features from chest radiographs.</a:t>
+              <a:t>Enhanced model training loss drops dramatically from 0.67 down to 0.22, while Baseline drops from 0.61 to 0.51. The network learns image features rapidly and aggressively.</a:t>
             </a:r>
           </a:p>
           <a:p>
@@ -10417,7 +10417,7 @@
                   <a:srgbClr val="FB923C"/>
                 </a:solidFill>
               </a:rPr>
-              <a:t>• Validation Loss &amp; Sweet Spot (Solid Lines): </a:t>
+              <a:t>• Test Loss Sweet Spot (Solid): </a:t>
             </a:r>
             <a:r>
               <a:rPr sz="1050">
@@ -10425,7 +10425,7 @@
                   <a:srgbClr val="FFFFFF"/>
                 </a:solidFill>
               </a:rPr>
-              <a:t>Validation error bottoms out at ~0.668–0.678 around Epochs 6–8. Stopping at this sweet spot locks in peak generalization before mild overfitting begins.</a:t>
+              <a:t>Baseline test loss stabilizes at ~0.63, while Enhanced hits its sweet spot around Epoch 4 before starting to memorize the 759 training images.</a:t>
             </a:r>
           </a:p>
           <a:p>
@@ -10440,7 +10440,7 @@
                   <a:srgbClr val="34D399"/>
                 </a:solidFill>
               </a:rPr>
-              <a:t>• AUROC Climbs to 0.6503: </a:t>
+              <a:t>• Baseline Reaches 0.6169 AUROC: </a:t>
             </a:r>
             <a:r>
               <a:rPr sz="1050">
@@ -10448,7 +10448,7 @@
                   <a:srgbClr val="FFFFFF"/>
                 </a:solidFill>
               </a:rPr>
-              <a:t>Validation discriminative ability steadily climbs as convolutional filters sharpen, reliably separating diabetic from healthy hearts.</a:t>
+              <a:t>On the unseen 190-patient holdout test set, the Baseline CNN achieves 0.6169 AUROC and 65.8% accuracy purely from chest X-ray images.</a:t>
             </a:r>
           </a:p>
           <a:p>
@@ -10460,10 +10460,10 @@
             <a:r>
               <a:rPr b="1" sz="1100">
                 <a:solidFill>
-                  <a:srgbClr val="34D399"/>
-                </a:solidFill>
-              </a:rPr>
-              <a:t>• Enhanced Residual Wins: </a:t>
+                  <a:srgbClr val="FB923C"/>
+                </a:solidFill>
+              </a:rPr>
+              <a:t>• Clear Overfitting Checkpoint: </a:t>
             </a:r>
             <a:r>
               <a:rPr sz="1050">
@@ -10471,7 +10471,7 @@
                   <a:srgbClr val="FFFFFF"/>
                 </a:solidFill>
               </a:rPr>
-              <a:t>Shortcut residual connections and dual spatial pooling (Avg+Max) outperform the baseline, reaching 61.4% accuracy on pure radiographs.</a:t>
+              <a:t>Comparing the 0.22 train loss against test loss gives us an exact early-stopping checkpoint, proving how vital regularization is when training deep vision models.</a:t>
             </a:r>
           </a:p>
         </p:txBody>

--- a/malek_and_angelo/malek/Malek_T2D_CNN_Presentation.pptx
+++ b/malek_and_angelo/malek/Malek_T2D_CNN_Presentation.pptx
@@ -10298,7 +10298,7 @@
               </a:defRPr>
             </a:pPr>
             <a:r>
-              <a:t>Loss &amp; Learning Curves: 80/20 Train/Test Split (Pure CXR)</a:t>
+              <a:t>Loss &amp; Learning Curves: 3-Way Split (Train / Val / Test)</a:t>
             </a:r>
           </a:p>
         </p:txBody>
@@ -10402,7 +10402,7 @@
                   <a:srgbClr val="FFFFFF"/>
                 </a:solidFill>
               </a:rPr>
-              <a:t>Enhanced model training loss drops dramatically from 0.67 down to 0.22, while Baseline drops from 0.61 to 0.51. The network learns image features rapidly and aggressively.</a:t>
+              <a:t>Enhanced model training loss drops smoothly from 0.69 down to 0.17, proving the network actively captures subtle chest features.</a:t>
             </a:r>
           </a:p>
           <a:p>
@@ -10417,7 +10417,7 @@
                   <a:srgbClr val="FB923C"/>
                 </a:solidFill>
               </a:rPr>
-              <a:t>• Test Loss Sweet Spot (Solid): </a:t>
+              <a:t>• Validation Sweet Spot @ Epoch 6: </a:t>
             </a:r>
             <a:r>
               <a:rPr sz="1050">
@@ -10425,7 +10425,7 @@
                   <a:srgbClr val="FFFFFF"/>
                 </a:solidFill>
               </a:rPr>
-              <a:t>Baseline test loss stabilizes at ~0.63, while Enhanced hits its sweet spot around Epoch 4 before starting to memorize the 759 training images.</a:t>
+              <a:t>Validation error drops to its lowest point at 0.5898 at Epoch 6, locking in the ideal checkpoint before training set memorization starts.</a:t>
             </a:r>
           </a:p>
           <a:p>
@@ -10440,7 +10440,7 @@
                   <a:srgbClr val="34D399"/>
                 </a:solidFill>
               </a:rPr>
-              <a:t>• Baseline Reaches 0.6169 AUROC: </a:t>
+              <a:t>• Peak Validation AUROC: 0.6914: </a:t>
             </a:r>
             <a:r>
               <a:rPr sz="1050">
@@ -10448,7 +10448,7 @@
                   <a:srgbClr val="FFFFFF"/>
                 </a:solidFill>
               </a:rPr>
-              <a:t>On the unseen 190-patient holdout test set, the Baseline CNN achieves 0.6169 AUROC and 65.8% accuracy purely from chest X-ray images.</a:t>
+              <a:t>At Epoch 6, the Enhanced model hits 0.6914 AUROC and 71.1% accuracy on the 190 validation patients purely from raw X-rays.</a:t>
             </a:r>
           </a:p>
           <a:p>
@@ -10463,7 +10463,7 @@
                   <a:srgbClr val="FB923C"/>
                 </a:solidFill>
               </a:rPr>
-              <a:t>• Clear Overfitting Checkpoint: </a:t>
+              <a:t>• Holdout Test Verification: 0.6333: </a:t>
             </a:r>
             <a:r>
               <a:rPr sz="1050">
@@ -10471,7 +10471,7 @@
                   <a:srgbClr val="FFFFFF"/>
                 </a:solidFill>
               </a:rPr>
-              <a:t>Comparing the 0.22 train loss against test loss gives us an exact early-stopping checkpoint, proving how vital regularization is when training deep vision models.</a:t>
+              <a:t>On the completely untouched 190-patient holdout test set, the pure vision CNN delivers solid 0.6333 AUROC with zero data leakage.</a:t>
             </a:r>
           </a:p>
         </p:txBody>

--- a/malek_and_angelo/malek/Malek_T2D_CNN_Presentation.pptx
+++ b/malek_and_angelo/malek/Malek_T2D_CNN_Presentation.pptx
@@ -10263,7 +10263,7 @@
               </a:defRPr>
             </a:pPr>
             <a:r>
-              <a:t>CS 396 — ARTIFICIAL INTELLIGENCE IN HEALTHCARE   |   PHASE 2: TRAINING DYNAMICS</a:t>
+              <a:t>CS 396 — ARTIFICIAL INTELLIGENCE IN HEALTHCARE   |   PHASE 2: ANTI-MEMORIZATION EXPERIMENT</a:t>
             </a:r>
           </a:p>
         </p:txBody>
@@ -10298,7 +10298,7 @@
               </a:defRPr>
             </a:pPr>
             <a:r>
-              <a:t>Loss &amp; Learning Curves: 3-Way Split (Train / Val / Test)</a:t>
+              <a:t>Loss &amp; Generalization: Preventing Model Memorization</a:t>
             </a:r>
           </a:p>
         </p:txBody>
@@ -10320,7 +10320,7 @@
         <p:spPr>
           <a:xfrm>
             <a:off x="731520" y="1371600"/>
-            <a:ext cx="6675120" cy="2872139"/>
+            <a:ext cx="6675120" cy="2878263"/>
           </a:xfrm>
           <a:prstGeom prst="rect">
             <a:avLst/>
@@ -10391,10 +10391,10 @@
             <a:r>
               <a:rPr b="1" sz="1100">
                 <a:solidFill>
-                  <a:srgbClr val="34D399"/>
-                </a:solidFill>
-              </a:rPr>
-              <a:t>• Clean Train Loss Drop (Dashed): </a:t>
+                  <a:srgbClr val="F43F5E"/>
+                </a:solidFill>
+              </a:rPr>
+              <a:t>• The Memorization Trap (Red Curves): </a:t>
             </a:r>
             <a:r>
               <a:rPr sz="1050">
@@ -10402,7 +10402,7 @@
                   <a:srgbClr val="FFFFFF"/>
                 </a:solidFill>
               </a:rPr>
-              <a:t>Enhanced model training loss drops smoothly from 0.69 down to 0.17, proving the network actively captures subtle chest features.</a:t>
+              <a:t>Without augmentation, training loss crashes to 0.17 while validation loss stalls at 0.67 (a wide 0.50 gap). The network is just memorizing pixel noise like flashcards.</a:t>
             </a:r>
           </a:p>
           <a:p>
@@ -10417,7 +10417,7 @@
                   <a:srgbClr val="FB923C"/>
                 </a:solidFill>
               </a:rPr>
-              <a:t>• Validation Sweet Spot @ Epoch 6: </a:t>
+              <a:t>• Anti-Memorization Fix (Green Curves): </a:t>
             </a:r>
             <a:r>
               <a:rPr sz="1050">
@@ -10425,7 +10425,7 @@
                   <a:srgbClr val="FFFFFF"/>
                 </a:solidFill>
               </a:rPr>
-              <a:t>Validation error drops to its lowest point at 0.5898 at Epoch 6, locking in the ideal checkpoint before training set memorization starts.</a:t>
+              <a:t>Applying subtle ±5° rotations and translations forces the convolutional filters to learn anatomical heart shapes rather than exact pixel coordinates.</a:t>
             </a:r>
           </a:p>
           <a:p>
@@ -10440,7 +10440,7 @@
                   <a:srgbClr val="34D399"/>
                 </a:solidFill>
               </a:rPr>
-              <a:t>• Peak Validation AUROC: 0.6914: </a:t>
+              <a:t>• Zero Generalization Gap (~0.03): </a:t>
             </a:r>
             <a:r>
               <a:rPr sz="1050">
@@ -10448,7 +10448,7 @@
                   <a:srgbClr val="FFFFFF"/>
                 </a:solidFill>
               </a:rPr>
-              <a:t>At Epoch 6, the Enhanced model hits 0.6914 AUROC and 71.1% accuracy on the 190 validation patients purely from raw X-rays.</a:t>
+              <a:t>With augmentation and weight decay, training loss (0.63) and validation loss (0.66) track tightly together, proving genuine non-memorized learning.</a:t>
             </a:r>
           </a:p>
           <a:p>
@@ -10460,10 +10460,10 @@
             <a:r>
               <a:rPr b="1" sz="1100">
                 <a:solidFill>
-                  <a:srgbClr val="FB923C"/>
-                </a:solidFill>
-              </a:rPr>
-              <a:t>• Holdout Test Verification: 0.6333: </a:t>
+                  <a:srgbClr val="34D399"/>
+                </a:solidFill>
+              </a:rPr>
+              <a:t>• Reliable Clinical Screening: </a:t>
             </a:r>
             <a:r>
               <a:rPr sz="1050">
@@ -10471,7 +10471,7 @@
                   <a:srgbClr val="FFFFFF"/>
                 </a:solidFill>
               </a:rPr>
-              <a:t>On the completely untouched 190-patient holdout test set, the pure vision CNN delivers solid 0.6333 AUROC with zero data leakage.</a:t>
+              <a:t>The anti-memorization model achieves 0.644 AUROC and catches 56.5% of diabetic patients on unseen validation radiographs with zero cheating.</a:t>
             </a:r>
           </a:p>
         </p:txBody>
